--- a/docs/plots/carbo/jx_carbo_linsubhr_dosedisc_anemia3.pptx
+++ b/docs/plots/carbo/jx_carbo_linsubhr_dosedisc_anemia3.pptx
@@ -3132,551 +3132,590 @@
           <p:spPr>
             <a:xfrm>
               <a:off x="1172049" y="1896563"/>
-              <a:ext cx="7090630" cy="3502283"/>
+              <a:ext cx="7090630" cy="3435851"/>
             </a:xfrm>
             <a:custGeom>
               <a:avLst/>
               <a:pathLst>
-                <a:path w="7090630" h="3502283">
+                <a:path w="7090630" h="3435851">
                   <a:moveTo>
-                    <a:pt x="0" y="1869736"/>
+                    <a:pt x="0" y="1170717"/>
                   </a:moveTo>
                   <a:lnTo>
-                    <a:pt x="71622" y="1899539"/>
-                  </a:lnTo>
-                  <a:lnTo>
-                    <a:pt x="143245" y="1928844"/>
-                  </a:lnTo>
-                  <a:lnTo>
-                    <a:pt x="214867" y="1957659"/>
-                  </a:lnTo>
-                  <a:lnTo>
-                    <a:pt x="286490" y="1985992"/>
-                  </a:lnTo>
-                  <a:lnTo>
-                    <a:pt x="358112" y="2013851"/>
-                  </a:lnTo>
-                  <a:lnTo>
-                    <a:pt x="429735" y="2041245"/>
-                  </a:lnTo>
-                  <a:lnTo>
-                    <a:pt x="501357" y="2068181"/>
-                  </a:lnTo>
-                  <a:lnTo>
-                    <a:pt x="572980" y="2094667"/>
-                  </a:lnTo>
-                  <a:lnTo>
-                    <a:pt x="644602" y="2120710"/>
-                  </a:lnTo>
-                  <a:lnTo>
-                    <a:pt x="716225" y="2146317"/>
-                  </a:lnTo>
-                  <a:lnTo>
-                    <a:pt x="787847" y="2171497"/>
-                  </a:lnTo>
-                  <a:lnTo>
-                    <a:pt x="859470" y="2196256"/>
-                  </a:lnTo>
-                  <a:lnTo>
-                    <a:pt x="931092" y="2220600"/>
-                  </a:lnTo>
-                  <a:lnTo>
-                    <a:pt x="1002715" y="2244538"/>
-                  </a:lnTo>
-                  <a:lnTo>
-                    <a:pt x="1074337" y="2268076"/>
-                  </a:lnTo>
-                  <a:lnTo>
-                    <a:pt x="1145960" y="2291220"/>
-                  </a:lnTo>
-                  <a:lnTo>
-                    <a:pt x="1217582" y="2313977"/>
-                  </a:lnTo>
-                  <a:lnTo>
-                    <a:pt x="1289205" y="2336354"/>
-                  </a:lnTo>
-                  <a:lnTo>
-                    <a:pt x="1360827" y="2358357"/>
-                  </a:lnTo>
-                  <a:lnTo>
-                    <a:pt x="1432450" y="2379993"/>
-                  </a:lnTo>
-                  <a:lnTo>
-                    <a:pt x="1504073" y="2401266"/>
-                  </a:lnTo>
-                  <a:lnTo>
-                    <a:pt x="1575695" y="2422184"/>
-                  </a:lnTo>
-                  <a:lnTo>
-                    <a:pt x="1647318" y="2442752"/>
-                  </a:lnTo>
-                  <a:lnTo>
-                    <a:pt x="1718940" y="2462976"/>
-                  </a:lnTo>
-                  <a:lnTo>
-                    <a:pt x="1790563" y="2482863"/>
-                  </a:lnTo>
-                  <a:lnTo>
-                    <a:pt x="1862185" y="2502417"/>
-                  </a:lnTo>
-                  <a:lnTo>
-                    <a:pt x="1933808" y="2521644"/>
-                  </a:lnTo>
-                  <a:lnTo>
-                    <a:pt x="2005430" y="2540549"/>
-                  </a:lnTo>
-                  <a:lnTo>
-                    <a:pt x="2077053" y="2559139"/>
-                  </a:lnTo>
-                  <a:lnTo>
-                    <a:pt x="2148675" y="2577418"/>
-                  </a:lnTo>
-                  <a:lnTo>
-                    <a:pt x="2220298" y="2595391"/>
-                  </a:lnTo>
-                  <a:lnTo>
-                    <a:pt x="2291920" y="2613064"/>
-                  </a:lnTo>
-                  <a:lnTo>
-                    <a:pt x="2363543" y="2630442"/>
-                  </a:lnTo>
-                  <a:lnTo>
-                    <a:pt x="2435165" y="2647529"/>
-                  </a:lnTo>
-                  <a:lnTo>
-                    <a:pt x="2506788" y="2664330"/>
-                  </a:lnTo>
-                  <a:lnTo>
-                    <a:pt x="2578410" y="2680850"/>
-                  </a:lnTo>
-                  <a:lnTo>
-                    <a:pt x="2650033" y="2697095"/>
-                  </a:lnTo>
-                  <a:lnTo>
-                    <a:pt x="2721655" y="2713068"/>
-                  </a:lnTo>
-                  <a:lnTo>
-                    <a:pt x="2793278" y="2728773"/>
-                  </a:lnTo>
-                  <a:lnTo>
-                    <a:pt x="2864901" y="2744217"/>
-                  </a:lnTo>
-                  <a:lnTo>
-                    <a:pt x="2936523" y="2759402"/>
-                  </a:lnTo>
-                  <a:lnTo>
-                    <a:pt x="3008146" y="2774333"/>
-                  </a:lnTo>
-                  <a:lnTo>
-                    <a:pt x="3079768" y="2767999"/>
-                  </a:lnTo>
-                  <a:lnTo>
-                    <a:pt x="3151391" y="2730779"/>
-                  </a:lnTo>
-                  <a:lnTo>
-                    <a:pt x="3223013" y="2691992"/>
-                  </a:lnTo>
-                  <a:lnTo>
-                    <a:pt x="3294636" y="2651574"/>
-                  </a:lnTo>
-                  <a:lnTo>
-                    <a:pt x="3366258" y="2609455"/>
-                  </a:lnTo>
-                  <a:lnTo>
-                    <a:pt x="3437881" y="2565564"/>
-                  </a:lnTo>
-                  <a:lnTo>
-                    <a:pt x="3509503" y="2519826"/>
-                  </a:lnTo>
-                  <a:lnTo>
-                    <a:pt x="3581126" y="2472164"/>
-                  </a:lnTo>
-                  <a:lnTo>
-                    <a:pt x="3652748" y="2422497"/>
-                  </a:lnTo>
-                  <a:lnTo>
-                    <a:pt x="3724371" y="2370740"/>
-                  </a:lnTo>
-                  <a:lnTo>
-                    <a:pt x="3795993" y="2316805"/>
-                  </a:lnTo>
-                  <a:lnTo>
-                    <a:pt x="3867616" y="2260601"/>
-                  </a:lnTo>
-                  <a:lnTo>
-                    <a:pt x="3939238" y="2202032"/>
-                  </a:lnTo>
-                  <a:lnTo>
-                    <a:pt x="4010861" y="2140999"/>
-                  </a:lnTo>
-                  <a:lnTo>
-                    <a:pt x="4082483" y="2077399"/>
-                  </a:lnTo>
-                  <a:lnTo>
-                    <a:pt x="4154106" y="2011122"/>
-                  </a:lnTo>
-                  <a:lnTo>
-                    <a:pt x="4225729" y="1942057"/>
-                  </a:lnTo>
-                  <a:lnTo>
-                    <a:pt x="4297351" y="1870086"/>
-                  </a:lnTo>
-                  <a:lnTo>
-                    <a:pt x="4368974" y="1795086"/>
-                  </a:lnTo>
-                  <a:lnTo>
-                    <a:pt x="4440596" y="1716932"/>
-                  </a:lnTo>
-                  <a:lnTo>
-                    <a:pt x="4512219" y="1635489"/>
-                  </a:lnTo>
-                  <a:lnTo>
-                    <a:pt x="4583841" y="1550619"/>
-                  </a:lnTo>
-                  <a:lnTo>
-                    <a:pt x="4655464" y="1462179"/>
-                  </a:lnTo>
-                  <a:lnTo>
-                    <a:pt x="4727086" y="1370017"/>
-                  </a:lnTo>
-                  <a:lnTo>
-                    <a:pt x="4798709" y="1273978"/>
-                  </a:lnTo>
-                  <a:lnTo>
-                    <a:pt x="4870331" y="1173899"/>
-                  </a:lnTo>
-                  <a:lnTo>
-                    <a:pt x="4941954" y="1069608"/>
-                  </a:lnTo>
-                  <a:lnTo>
-                    <a:pt x="5013576" y="960930"/>
-                  </a:lnTo>
-                  <a:lnTo>
-                    <a:pt x="5085199" y="847679"/>
-                  </a:lnTo>
-                  <a:lnTo>
-                    <a:pt x="5156821" y="729663"/>
-                  </a:lnTo>
-                  <a:lnTo>
-                    <a:pt x="5228444" y="606682"/>
-                  </a:lnTo>
-                  <a:lnTo>
-                    <a:pt x="5300066" y="478526"/>
-                  </a:lnTo>
-                  <a:lnTo>
-                    <a:pt x="5371689" y="344979"/>
-                  </a:lnTo>
-                  <a:lnTo>
-                    <a:pt x="5443311" y="205812"/>
-                  </a:lnTo>
-                  <a:lnTo>
-                    <a:pt x="5514934" y="60790"/>
-                  </a:lnTo>
-                  <a:lnTo>
-                    <a:pt x="5543745" y="0"/>
+                    <a:pt x="71622" y="1231088"/>
+                  </a:lnTo>
+                  <a:lnTo>
+                    <a:pt x="143245" y="1289989"/>
+                  </a:lnTo>
+                  <a:lnTo>
+                    <a:pt x="214867" y="1347459"/>
+                  </a:lnTo>
+                  <a:lnTo>
+                    <a:pt x="286490" y="1403530"/>
+                  </a:lnTo>
+                  <a:lnTo>
+                    <a:pt x="358112" y="1458238"/>
+                  </a:lnTo>
+                  <a:lnTo>
+                    <a:pt x="429735" y="1511614"/>
+                  </a:lnTo>
+                  <a:lnTo>
+                    <a:pt x="501357" y="1563693"/>
+                  </a:lnTo>
+                  <a:lnTo>
+                    <a:pt x="572980" y="1614504"/>
+                  </a:lnTo>
+                  <a:lnTo>
+                    <a:pt x="644602" y="1664080"/>
+                  </a:lnTo>
+                  <a:lnTo>
+                    <a:pt x="716225" y="1712450"/>
+                  </a:lnTo>
+                  <a:lnTo>
+                    <a:pt x="787847" y="1759643"/>
+                  </a:lnTo>
+                  <a:lnTo>
+                    <a:pt x="859470" y="1805689"/>
+                  </a:lnTo>
+                  <a:lnTo>
+                    <a:pt x="931092" y="1850614"/>
+                  </a:lnTo>
+                  <a:lnTo>
+                    <a:pt x="1002715" y="1894447"/>
+                  </a:lnTo>
+                  <a:lnTo>
+                    <a:pt x="1074337" y="1937213"/>
+                  </a:lnTo>
+                  <a:lnTo>
+                    <a:pt x="1145960" y="1978939"/>
+                  </a:lnTo>
+                  <a:lnTo>
+                    <a:pt x="1217582" y="2019650"/>
+                  </a:lnTo>
+                  <a:lnTo>
+                    <a:pt x="1289205" y="2059371"/>
+                  </a:lnTo>
+                  <a:lnTo>
+                    <a:pt x="1360827" y="2098126"/>
+                  </a:lnTo>
+                  <a:lnTo>
+                    <a:pt x="1432450" y="2135938"/>
+                  </a:lnTo>
+                  <a:lnTo>
+                    <a:pt x="1504073" y="2172831"/>
+                  </a:lnTo>
+                  <a:lnTo>
+                    <a:pt x="1575695" y="2208826"/>
+                  </a:lnTo>
+                  <a:lnTo>
+                    <a:pt x="1647318" y="2243945"/>
+                  </a:lnTo>
+                  <a:lnTo>
+                    <a:pt x="1718940" y="2278210"/>
+                  </a:lnTo>
+                  <a:lnTo>
+                    <a:pt x="1790563" y="2311642"/>
+                  </a:lnTo>
+                  <a:lnTo>
+                    <a:pt x="1862185" y="2344261"/>
+                  </a:lnTo>
+                  <a:lnTo>
+                    <a:pt x="1933808" y="2376086"/>
+                  </a:lnTo>
+                  <a:lnTo>
+                    <a:pt x="2005430" y="2407137"/>
+                  </a:lnTo>
+                  <a:lnTo>
+                    <a:pt x="2077053" y="2437433"/>
+                  </a:lnTo>
+                  <a:lnTo>
+                    <a:pt x="2148675" y="2466991"/>
+                  </a:lnTo>
+                  <a:lnTo>
+                    <a:pt x="2220298" y="2495831"/>
+                  </a:lnTo>
+                  <a:lnTo>
+                    <a:pt x="2291920" y="2523969"/>
+                  </a:lnTo>
+                  <a:lnTo>
+                    <a:pt x="2363543" y="2551423"/>
+                  </a:lnTo>
+                  <a:lnTo>
+                    <a:pt x="2435165" y="2578209"/>
+                  </a:lnTo>
+                  <a:lnTo>
+                    <a:pt x="2506788" y="2604344"/>
+                  </a:lnTo>
+                  <a:lnTo>
+                    <a:pt x="2578410" y="2629843"/>
+                  </a:lnTo>
+                  <a:lnTo>
+                    <a:pt x="2650033" y="2654721"/>
+                  </a:lnTo>
+                  <a:lnTo>
+                    <a:pt x="2721655" y="2678995"/>
+                  </a:lnTo>
+                  <a:lnTo>
+                    <a:pt x="2793278" y="2702678"/>
+                  </a:lnTo>
+                  <a:lnTo>
+                    <a:pt x="2864901" y="2725785"/>
+                  </a:lnTo>
+                  <a:lnTo>
+                    <a:pt x="2936523" y="2748330"/>
+                  </a:lnTo>
+                  <a:lnTo>
+                    <a:pt x="3008146" y="2770326"/>
+                  </a:lnTo>
+                  <a:lnTo>
+                    <a:pt x="3079768" y="2772069"/>
+                  </a:lnTo>
+                  <a:lnTo>
+                    <a:pt x="3151391" y="2745182"/>
+                  </a:lnTo>
+                  <a:lnTo>
+                    <a:pt x="3223013" y="2717474"/>
+                  </a:lnTo>
+                  <a:lnTo>
+                    <a:pt x="3294636" y="2688920"/>
+                  </a:lnTo>
+                  <a:lnTo>
+                    <a:pt x="3366258" y="2659494"/>
+                  </a:lnTo>
+                  <a:lnTo>
+                    <a:pt x="3437881" y="2629170"/>
+                  </a:lnTo>
+                  <a:lnTo>
+                    <a:pt x="3509503" y="2597919"/>
+                  </a:lnTo>
+                  <a:lnTo>
+                    <a:pt x="3581126" y="2565715"/>
+                  </a:lnTo>
+                  <a:lnTo>
+                    <a:pt x="3652748" y="2532527"/>
+                  </a:lnTo>
+                  <a:lnTo>
+                    <a:pt x="3724371" y="2498326"/>
+                  </a:lnTo>
+                  <a:lnTo>
+                    <a:pt x="3795993" y="2463081"/>
+                  </a:lnTo>
+                  <a:lnTo>
+                    <a:pt x="3867616" y="2426759"/>
+                  </a:lnTo>
+                  <a:lnTo>
+                    <a:pt x="3939238" y="2389329"/>
+                  </a:lnTo>
+                  <a:lnTo>
+                    <a:pt x="4010861" y="2350756"/>
+                  </a:lnTo>
+                  <a:lnTo>
+                    <a:pt x="4082483" y="2311004"/>
+                  </a:lnTo>
+                  <a:lnTo>
+                    <a:pt x="4154106" y="2270039"/>
+                  </a:lnTo>
+                  <a:lnTo>
+                    <a:pt x="4225729" y="2227824"/>
+                  </a:lnTo>
+                  <a:lnTo>
+                    <a:pt x="4297351" y="2184319"/>
+                  </a:lnTo>
+                  <a:lnTo>
+                    <a:pt x="4368974" y="2139486"/>
+                  </a:lnTo>
+                  <a:lnTo>
+                    <a:pt x="4440596" y="2093284"/>
+                  </a:lnTo>
+                  <a:lnTo>
+                    <a:pt x="4512219" y="2045671"/>
+                  </a:lnTo>
+                  <a:lnTo>
+                    <a:pt x="4583841" y="1996605"/>
+                  </a:lnTo>
+                  <a:lnTo>
+                    <a:pt x="4655464" y="1946040"/>
+                  </a:lnTo>
+                  <a:lnTo>
+                    <a:pt x="4727086" y="1893932"/>
+                  </a:lnTo>
+                  <a:lnTo>
+                    <a:pt x="4798709" y="1840232"/>
+                  </a:lnTo>
+                  <a:lnTo>
+                    <a:pt x="4870331" y="1784893"/>
+                  </a:lnTo>
+                  <a:lnTo>
+                    <a:pt x="4941954" y="1727864"/>
+                  </a:lnTo>
+                  <a:lnTo>
+                    <a:pt x="5013576" y="1669094"/>
+                  </a:lnTo>
+                  <a:lnTo>
+                    <a:pt x="5085199" y="1608529"/>
+                  </a:lnTo>
+                  <a:lnTo>
+                    <a:pt x="5156821" y="1546115"/>
+                  </a:lnTo>
+                  <a:lnTo>
+                    <a:pt x="5228444" y="1481796"/>
+                  </a:lnTo>
+                  <a:lnTo>
+                    <a:pt x="5300066" y="1415512"/>
+                  </a:lnTo>
+                  <a:lnTo>
+                    <a:pt x="5371689" y="1347205"/>
+                  </a:lnTo>
+                  <a:lnTo>
+                    <a:pt x="5443311" y="1276812"/>
+                  </a:lnTo>
+                  <a:lnTo>
+                    <a:pt x="5514934" y="1204270"/>
+                  </a:lnTo>
+                  <a:lnTo>
+                    <a:pt x="5586557" y="1129512"/>
+                  </a:lnTo>
+                  <a:lnTo>
+                    <a:pt x="5658179" y="1052472"/>
+                  </a:lnTo>
+                  <a:lnTo>
+                    <a:pt x="5729802" y="973080"/>
+                  </a:lnTo>
+                  <a:lnTo>
+                    <a:pt x="5801424" y="891264"/>
+                  </a:lnTo>
+                  <a:lnTo>
+                    <a:pt x="5873047" y="806949"/>
+                  </a:lnTo>
+                  <a:lnTo>
+                    <a:pt x="5944669" y="720060"/>
+                  </a:lnTo>
+                  <a:lnTo>
+                    <a:pt x="6016292" y="630518"/>
+                  </a:lnTo>
+                  <a:lnTo>
+                    <a:pt x="6087914" y="538242"/>
+                  </a:lnTo>
+                  <a:lnTo>
+                    <a:pt x="6159537" y="443149"/>
+                  </a:lnTo>
+                  <a:lnTo>
+                    <a:pt x="6231159" y="345152"/>
+                  </a:lnTo>
+                  <a:lnTo>
+                    <a:pt x="6302782" y="244162"/>
+                  </a:lnTo>
+                  <a:lnTo>
+                    <a:pt x="6374404" y="140090"/>
+                  </a:lnTo>
+                  <a:lnTo>
+                    <a:pt x="6446027" y="32839"/>
+                  </a:lnTo>
+                  <a:lnTo>
+                    <a:pt x="6467308" y="0"/>
                   </a:lnTo>
                   <a:lnTo>
                     <a:pt x="7090630" y="0"/>
                   </a:lnTo>
                   <a:lnTo>
-                    <a:pt x="7090630" y="3316633"/>
-                  </a:lnTo>
-                  <a:lnTo>
-                    <a:pt x="7019007" y="3310921"/>
-                  </a:lnTo>
-                  <a:lnTo>
-                    <a:pt x="6947385" y="3305112"/>
-                  </a:lnTo>
-                  <a:lnTo>
-                    <a:pt x="6875762" y="3299204"/>
-                  </a:lnTo>
-                  <a:lnTo>
-                    <a:pt x="6804139" y="3293195"/>
-                  </a:lnTo>
-                  <a:lnTo>
-                    <a:pt x="6732517" y="3287084"/>
-                  </a:lnTo>
-                  <a:lnTo>
-                    <a:pt x="6660894" y="3280870"/>
-                  </a:lnTo>
-                  <a:lnTo>
-                    <a:pt x="6589272" y="3274550"/>
-                  </a:lnTo>
-                  <a:lnTo>
-                    <a:pt x="6517649" y="3268122"/>
-                  </a:lnTo>
-                  <a:lnTo>
-                    <a:pt x="6446027" y="3261585"/>
-                  </a:lnTo>
-                  <a:lnTo>
-                    <a:pt x="6374404" y="3254937"/>
-                  </a:lnTo>
-                  <a:lnTo>
-                    <a:pt x="6302782" y="3248176"/>
-                  </a:lnTo>
-                  <a:lnTo>
-                    <a:pt x="6231159" y="3241300"/>
-                  </a:lnTo>
-                  <a:lnTo>
-                    <a:pt x="6159537" y="3234307"/>
-                  </a:lnTo>
-                  <a:lnTo>
-                    <a:pt x="6087914" y="3227196"/>
-                  </a:lnTo>
-                  <a:lnTo>
-                    <a:pt x="6016292" y="3219963"/>
-                  </a:lnTo>
-                  <a:lnTo>
-                    <a:pt x="5944669" y="3212608"/>
-                  </a:lnTo>
-                  <a:lnTo>
-                    <a:pt x="5873047" y="3205127"/>
-                  </a:lnTo>
-                  <a:lnTo>
-                    <a:pt x="5801424" y="3197519"/>
-                  </a:lnTo>
-                  <a:lnTo>
-                    <a:pt x="5729802" y="3189782"/>
-                  </a:lnTo>
-                  <a:lnTo>
-                    <a:pt x="5658179" y="3181913"/>
-                  </a:lnTo>
-                  <a:lnTo>
-                    <a:pt x="5586557" y="3173911"/>
-                  </a:lnTo>
-                  <a:lnTo>
-                    <a:pt x="5514934" y="3165772"/>
-                  </a:lnTo>
-                  <a:lnTo>
-                    <a:pt x="5443311" y="3157496"/>
-                  </a:lnTo>
-                  <a:lnTo>
-                    <a:pt x="5371689" y="3149078"/>
-                  </a:lnTo>
-                  <a:lnTo>
-                    <a:pt x="5300066" y="3140517"/>
-                  </a:lnTo>
-                  <a:lnTo>
-                    <a:pt x="5228444" y="3131811"/>
-                  </a:lnTo>
-                  <a:lnTo>
-                    <a:pt x="5156821" y="3122957"/>
-                  </a:lnTo>
-                  <a:lnTo>
-                    <a:pt x="5085199" y="3113952"/>
-                  </a:lnTo>
-                  <a:lnTo>
-                    <a:pt x="5013576" y="3104795"/>
-                  </a:lnTo>
-                  <a:lnTo>
-                    <a:pt x="4941954" y="3095481"/>
-                  </a:lnTo>
-                  <a:lnTo>
-                    <a:pt x="4870331" y="3086009"/>
-                  </a:lnTo>
-                  <a:lnTo>
-                    <a:pt x="4798709" y="3076377"/>
-                  </a:lnTo>
-                  <a:lnTo>
-                    <a:pt x="4727086" y="3066580"/>
-                  </a:lnTo>
-                  <a:lnTo>
-                    <a:pt x="4655464" y="3056617"/>
-                  </a:lnTo>
-                  <a:lnTo>
-                    <a:pt x="4583841" y="3046484"/>
-                  </a:lnTo>
-                  <a:lnTo>
-                    <a:pt x="4512219" y="3036180"/>
-                  </a:lnTo>
-                  <a:lnTo>
-                    <a:pt x="4440596" y="3025700"/>
-                  </a:lnTo>
-                  <a:lnTo>
-                    <a:pt x="4368974" y="3015042"/>
-                  </a:lnTo>
-                  <a:lnTo>
-                    <a:pt x="4297351" y="3004202"/>
-                  </a:lnTo>
-                  <a:lnTo>
-                    <a:pt x="4225729" y="2993179"/>
-                  </a:lnTo>
-                  <a:lnTo>
-                    <a:pt x="4154106" y="2981968"/>
-                  </a:lnTo>
-                  <a:lnTo>
-                    <a:pt x="4082483" y="2970566"/>
-                  </a:lnTo>
-                  <a:lnTo>
-                    <a:pt x="4010861" y="2958971"/>
-                  </a:lnTo>
-                  <a:lnTo>
-                    <a:pt x="3939238" y="2947179"/>
-                  </a:lnTo>
-                  <a:lnTo>
-                    <a:pt x="3867616" y="2935186"/>
-                  </a:lnTo>
-                  <a:lnTo>
-                    <a:pt x="3795993" y="2922989"/>
-                  </a:lnTo>
-                  <a:lnTo>
-                    <a:pt x="3724371" y="2910585"/>
-                  </a:lnTo>
-                  <a:lnTo>
-                    <a:pt x="3652748" y="2897970"/>
-                  </a:lnTo>
-                  <a:lnTo>
-                    <a:pt x="3581126" y="2885140"/>
-                  </a:lnTo>
-                  <a:lnTo>
-                    <a:pt x="3509503" y="2872093"/>
-                  </a:lnTo>
-                  <a:lnTo>
-                    <a:pt x="3437881" y="2858823"/>
-                  </a:lnTo>
-                  <a:lnTo>
-                    <a:pt x="3366258" y="2845328"/>
-                  </a:lnTo>
-                  <a:lnTo>
-                    <a:pt x="3294636" y="2831604"/>
-                  </a:lnTo>
-                  <a:lnTo>
-                    <a:pt x="3223013" y="2817646"/>
-                  </a:lnTo>
-                  <a:lnTo>
-                    <a:pt x="3151391" y="2803451"/>
-                  </a:lnTo>
-                  <a:lnTo>
-                    <a:pt x="3079768" y="2789015"/>
-                  </a:lnTo>
-                  <a:lnTo>
-                    <a:pt x="3008146" y="2803717"/>
-                  </a:lnTo>
-                  <a:lnTo>
-                    <a:pt x="2936523" y="2837992"/>
-                  </a:lnTo>
-                  <a:lnTo>
-                    <a:pt x="2864901" y="2870884"/>
-                  </a:lnTo>
-                  <a:lnTo>
-                    <a:pt x="2793278" y="2902448"/>
-                  </a:lnTo>
-                  <a:lnTo>
-                    <a:pt x="2721655" y="2932737"/>
-                  </a:lnTo>
-                  <a:lnTo>
-                    <a:pt x="2650033" y="2961803"/>
-                  </a:lnTo>
-                  <a:lnTo>
-                    <a:pt x="2578410" y="2989696"/>
-                  </a:lnTo>
-                  <a:lnTo>
-                    <a:pt x="2506788" y="3016463"/>
-                  </a:lnTo>
-                  <a:lnTo>
-                    <a:pt x="2435165" y="3042149"/>
-                  </a:lnTo>
-                  <a:lnTo>
-                    <a:pt x="2363543" y="3066797"/>
-                  </a:lnTo>
-                  <a:lnTo>
-                    <a:pt x="2291920" y="3090451"/>
-                  </a:lnTo>
-                  <a:lnTo>
-                    <a:pt x="2220298" y="3113150"/>
-                  </a:lnTo>
-                  <a:lnTo>
-                    <a:pt x="2148675" y="3134932"/>
-                  </a:lnTo>
-                  <a:lnTo>
-                    <a:pt x="2077053" y="3155834"/>
-                  </a:lnTo>
-                  <a:lnTo>
-                    <a:pt x="2005430" y="3175893"/>
-                  </a:lnTo>
-                  <a:lnTo>
-                    <a:pt x="1933808" y="3195142"/>
-                  </a:lnTo>
-                  <a:lnTo>
-                    <a:pt x="1862185" y="3213614"/>
-                  </a:lnTo>
-                  <a:lnTo>
-                    <a:pt x="1790563" y="3231340"/>
-                  </a:lnTo>
-                  <a:lnTo>
-                    <a:pt x="1718940" y="3248350"/>
-                  </a:lnTo>
-                  <a:lnTo>
-                    <a:pt x="1647318" y="3264673"/>
-                  </a:lnTo>
-                  <a:lnTo>
-                    <a:pt x="1575695" y="3280338"/>
-                  </a:lnTo>
-                  <a:lnTo>
-                    <a:pt x="1504073" y="3295370"/>
-                  </a:lnTo>
-                  <a:lnTo>
-                    <a:pt x="1432450" y="3309795"/>
-                  </a:lnTo>
-                  <a:lnTo>
-                    <a:pt x="1360827" y="3323637"/>
-                  </a:lnTo>
-                  <a:lnTo>
-                    <a:pt x="1289205" y="3336921"/>
-                  </a:lnTo>
-                  <a:lnTo>
-                    <a:pt x="1217582" y="3349668"/>
-                  </a:lnTo>
-                  <a:lnTo>
-                    <a:pt x="1145960" y="3361901"/>
-                  </a:lnTo>
-                  <a:lnTo>
-                    <a:pt x="1074337" y="3373640"/>
-                  </a:lnTo>
-                  <a:lnTo>
-                    <a:pt x="1002715" y="3384904"/>
-                  </a:lnTo>
-                  <a:lnTo>
-                    <a:pt x="931092" y="3395714"/>
-                  </a:lnTo>
-                  <a:lnTo>
-                    <a:pt x="859470" y="3406088"/>
-                  </a:lnTo>
-                  <a:lnTo>
-                    <a:pt x="787847" y="3416043"/>
-                  </a:lnTo>
-                  <a:lnTo>
-                    <a:pt x="716225" y="3425596"/>
-                  </a:lnTo>
-                  <a:lnTo>
-                    <a:pt x="644602" y="3434763"/>
-                  </a:lnTo>
-                  <a:lnTo>
-                    <a:pt x="572980" y="3443560"/>
-                  </a:lnTo>
-                  <a:lnTo>
-                    <a:pt x="501357" y="3452001"/>
-                  </a:lnTo>
-                  <a:lnTo>
-                    <a:pt x="429735" y="3460102"/>
-                  </a:lnTo>
-                  <a:lnTo>
-                    <a:pt x="358112" y="3467876"/>
-                  </a:lnTo>
-                  <a:lnTo>
-                    <a:pt x="286490" y="3475336"/>
-                  </a:lnTo>
-                  <a:lnTo>
-                    <a:pt x="214867" y="3482495"/>
-                  </a:lnTo>
-                  <a:lnTo>
-                    <a:pt x="143245" y="3489365"/>
-                  </a:lnTo>
-                  <a:lnTo>
-                    <a:pt x="71622" y="3495957"/>
-                  </a:lnTo>
-                  <a:lnTo>
-                    <a:pt x="0" y="3502283"/>
+                    <a:pt x="7090630" y="3435851"/>
+                  </a:lnTo>
+                  <a:lnTo>
+                    <a:pt x="7019007" y="3430446"/>
+                  </a:lnTo>
+                  <a:lnTo>
+                    <a:pt x="6947385" y="3424906"/>
+                  </a:lnTo>
+                  <a:lnTo>
+                    <a:pt x="6875762" y="3419229"/>
+                  </a:lnTo>
+                  <a:lnTo>
+                    <a:pt x="6804139" y="3413410"/>
+                  </a:lnTo>
+                  <a:lnTo>
+                    <a:pt x="6732517" y="3407446"/>
+                  </a:lnTo>
+                  <a:lnTo>
+                    <a:pt x="6660894" y="3401333"/>
+                  </a:lnTo>
+                  <a:lnTo>
+                    <a:pt x="6589272" y="3395067"/>
+                  </a:lnTo>
+                  <a:lnTo>
+                    <a:pt x="6517649" y="3388646"/>
+                  </a:lnTo>
+                  <a:lnTo>
+                    <a:pt x="6446027" y="3382064"/>
+                  </a:lnTo>
+                  <a:lnTo>
+                    <a:pt x="6374404" y="3375319"/>
+                  </a:lnTo>
+                  <a:lnTo>
+                    <a:pt x="6302782" y="3368405"/>
+                  </a:lnTo>
+                  <a:lnTo>
+                    <a:pt x="6231159" y="3361319"/>
+                  </a:lnTo>
+                  <a:lnTo>
+                    <a:pt x="6159537" y="3354056"/>
+                  </a:lnTo>
+                  <a:lnTo>
+                    <a:pt x="6087914" y="3346612"/>
+                  </a:lnTo>
+                  <a:lnTo>
+                    <a:pt x="6016292" y="3338982"/>
+                  </a:lnTo>
+                  <a:lnTo>
+                    <a:pt x="5944669" y="3331163"/>
+                  </a:lnTo>
+                  <a:lnTo>
+                    <a:pt x="5873047" y="3323148"/>
+                  </a:lnTo>
+                  <a:lnTo>
+                    <a:pt x="5801424" y="3314934"/>
+                  </a:lnTo>
+                  <a:lnTo>
+                    <a:pt x="5729802" y="3306514"/>
+                  </a:lnTo>
+                  <a:lnTo>
+                    <a:pt x="5658179" y="3297885"/>
+                  </a:lnTo>
+                  <a:lnTo>
+                    <a:pt x="5586557" y="3289041"/>
+                  </a:lnTo>
+                  <a:lnTo>
+                    <a:pt x="5514934" y="3279976"/>
+                  </a:lnTo>
+                  <a:lnTo>
+                    <a:pt x="5443311" y="3270686"/>
+                  </a:lnTo>
+                  <a:lnTo>
+                    <a:pt x="5371689" y="3261163"/>
+                  </a:lnTo>
+                  <a:lnTo>
+                    <a:pt x="5300066" y="3251403"/>
+                  </a:lnTo>
+                  <a:lnTo>
+                    <a:pt x="5228444" y="3241400"/>
+                  </a:lnTo>
+                  <a:lnTo>
+                    <a:pt x="5156821" y="3231148"/>
+                  </a:lnTo>
+                  <a:lnTo>
+                    <a:pt x="5085199" y="3220640"/>
+                  </a:lnTo>
+                  <a:lnTo>
+                    <a:pt x="5013576" y="3209870"/>
+                  </a:lnTo>
+                  <a:lnTo>
+                    <a:pt x="4941954" y="3198831"/>
+                  </a:lnTo>
+                  <a:lnTo>
+                    <a:pt x="4870331" y="3187517"/>
+                  </a:lnTo>
+                  <a:lnTo>
+                    <a:pt x="4798709" y="3175922"/>
+                  </a:lnTo>
+                  <a:lnTo>
+                    <a:pt x="4727086" y="3164037"/>
+                  </a:lnTo>
+                  <a:lnTo>
+                    <a:pt x="4655464" y="3151856"/>
+                  </a:lnTo>
+                  <a:lnTo>
+                    <a:pt x="4583841" y="3139371"/>
+                  </a:lnTo>
+                  <a:lnTo>
+                    <a:pt x="4512219" y="3126575"/>
+                  </a:lnTo>
+                  <a:lnTo>
+                    <a:pt x="4440596" y="3113460"/>
+                  </a:lnTo>
+                  <a:lnTo>
+                    <a:pt x="4368974" y="3100017"/>
+                  </a:lnTo>
+                  <a:lnTo>
+                    <a:pt x="4297351" y="3086240"/>
+                  </a:lnTo>
+                  <a:lnTo>
+                    <a:pt x="4225729" y="3072120"/>
+                  </a:lnTo>
+                  <a:lnTo>
+                    <a:pt x="4154106" y="3057647"/>
+                  </a:lnTo>
+                  <a:lnTo>
+                    <a:pt x="4082483" y="3042813"/>
+                  </a:lnTo>
+                  <a:lnTo>
+                    <a:pt x="4010861" y="3027610"/>
+                  </a:lnTo>
+                  <a:lnTo>
+                    <a:pt x="3939238" y="3012028"/>
+                  </a:lnTo>
+                  <a:lnTo>
+                    <a:pt x="3867616" y="2996057"/>
+                  </a:lnTo>
+                  <a:lnTo>
+                    <a:pt x="3795993" y="2979688"/>
+                  </a:lnTo>
+                  <a:lnTo>
+                    <a:pt x="3724371" y="2962911"/>
+                  </a:lnTo>
+                  <a:lnTo>
+                    <a:pt x="3652748" y="2945715"/>
+                  </a:lnTo>
+                  <a:lnTo>
+                    <a:pt x="3581126" y="2928091"/>
+                  </a:lnTo>
+                  <a:lnTo>
+                    <a:pt x="3509503" y="2910028"/>
+                  </a:lnTo>
+                  <a:lnTo>
+                    <a:pt x="3437881" y="2891514"/>
+                  </a:lnTo>
+                  <a:lnTo>
+                    <a:pt x="3366258" y="2872539"/>
+                  </a:lnTo>
+                  <a:lnTo>
+                    <a:pt x="3294636" y="2853091"/>
+                  </a:lnTo>
+                  <a:lnTo>
+                    <a:pt x="3223013" y="2833158"/>
+                  </a:lnTo>
+                  <a:lnTo>
+                    <a:pt x="3151391" y="2812727"/>
+                  </a:lnTo>
+                  <a:lnTo>
+                    <a:pt x="3079768" y="2791788"/>
+                  </a:lnTo>
+                  <a:lnTo>
+                    <a:pt x="3008146" y="2798159"/>
+                  </a:lnTo>
+                  <a:lnTo>
+                    <a:pt x="2936523" y="2823476"/>
+                  </a:lnTo>
+                  <a:lnTo>
+                    <a:pt x="2864901" y="2848044"/>
+                  </a:lnTo>
+                  <a:lnTo>
+                    <a:pt x="2793278" y="2871883"/>
+                  </a:lnTo>
+                  <a:lnTo>
+                    <a:pt x="2721655" y="2895016"/>
+                  </a:lnTo>
+                  <a:lnTo>
+                    <a:pt x="2650033" y="2917463"/>
+                  </a:lnTo>
+                  <a:lnTo>
+                    <a:pt x="2578410" y="2939246"/>
+                  </a:lnTo>
+                  <a:lnTo>
+                    <a:pt x="2506788" y="2960383"/>
+                  </a:lnTo>
+                  <a:lnTo>
+                    <a:pt x="2435165" y="2980894"/>
+                  </a:lnTo>
+                  <a:lnTo>
+                    <a:pt x="2363543" y="3000797"/>
+                  </a:lnTo>
+                  <a:lnTo>
+                    <a:pt x="2291920" y="3020110"/>
+                  </a:lnTo>
+                  <a:lnTo>
+                    <a:pt x="2220298" y="3038852"/>
+                  </a:lnTo>
+                  <a:lnTo>
+                    <a:pt x="2148675" y="3057038"/>
+                  </a:lnTo>
+                  <a:lnTo>
+                    <a:pt x="2077053" y="3074685"/>
+                  </a:lnTo>
+                  <a:lnTo>
+                    <a:pt x="2005430" y="3091809"/>
+                  </a:lnTo>
+                  <a:lnTo>
+                    <a:pt x="1933808" y="3108426"/>
+                  </a:lnTo>
+                  <a:lnTo>
+                    <a:pt x="1862185" y="3124550"/>
+                  </a:lnTo>
+                  <a:lnTo>
+                    <a:pt x="1790563" y="3140197"/>
+                  </a:lnTo>
+                  <a:lnTo>
+                    <a:pt x="1718940" y="3155380"/>
+                  </a:lnTo>
+                  <a:lnTo>
+                    <a:pt x="1647318" y="3170114"/>
+                  </a:lnTo>
+                  <a:lnTo>
+                    <a:pt x="1575695" y="3184410"/>
+                  </a:lnTo>
+                  <a:lnTo>
+                    <a:pt x="1504073" y="3198283"/>
+                  </a:lnTo>
+                  <a:lnTo>
+                    <a:pt x="1432450" y="3211746"/>
+                  </a:lnTo>
+                  <a:lnTo>
+                    <a:pt x="1360827" y="3224809"/>
+                  </a:lnTo>
+                  <a:lnTo>
+                    <a:pt x="1289205" y="3237485"/>
+                  </a:lnTo>
+                  <a:lnTo>
+                    <a:pt x="1217582" y="3249786"/>
+                  </a:lnTo>
+                  <a:lnTo>
+                    <a:pt x="1145960" y="3261722"/>
+                  </a:lnTo>
+                  <a:lnTo>
+                    <a:pt x="1074337" y="3273304"/>
+                  </a:lnTo>
+                  <a:lnTo>
+                    <a:pt x="1002715" y="3284544"/>
+                  </a:lnTo>
+                  <a:lnTo>
+                    <a:pt x="931092" y="3295450"/>
+                  </a:lnTo>
+                  <a:lnTo>
+                    <a:pt x="859470" y="3306033"/>
+                  </a:lnTo>
+                  <a:lnTo>
+                    <a:pt x="787847" y="3316303"/>
+                  </a:lnTo>
+                  <a:lnTo>
+                    <a:pt x="716225" y="3326268"/>
+                  </a:lnTo>
+                  <a:lnTo>
+                    <a:pt x="644602" y="3335938"/>
+                  </a:lnTo>
+                  <a:lnTo>
+                    <a:pt x="572980" y="3345322"/>
+                  </a:lnTo>
+                  <a:lnTo>
+                    <a:pt x="501357" y="3354428"/>
+                  </a:lnTo>
+                  <a:lnTo>
+                    <a:pt x="429735" y="3363263"/>
+                  </a:lnTo>
+                  <a:lnTo>
+                    <a:pt x="358112" y="3371837"/>
+                  </a:lnTo>
+                  <a:lnTo>
+                    <a:pt x="286490" y="3380157"/>
+                  </a:lnTo>
+                  <a:lnTo>
+                    <a:pt x="214867" y="3388231"/>
+                  </a:lnTo>
+                  <a:lnTo>
+                    <a:pt x="143245" y="3396065"/>
+                  </a:lnTo>
+                  <a:lnTo>
+                    <a:pt x="71622" y="3403667"/>
+                  </a:lnTo>
+                  <a:lnTo>
+                    <a:pt x="0" y="3411044"/>
                   </a:lnTo>
                   <a:close/>
                 </a:path>
@@ -3703,248 +3742,287 @@
           <p:spPr>
             <a:xfrm>
               <a:off x="1172049" y="1896563"/>
-              <a:ext cx="5543745" cy="2774333"/>
+              <a:ext cx="6467308" cy="2772069"/>
             </a:xfrm>
             <a:custGeom>
               <a:avLst/>
               <a:pathLst>
-                <a:path w="5543745" h="2774333">
+                <a:path w="6467308" h="2772069">
                   <a:moveTo>
-                    <a:pt x="0" y="1869736"/>
+                    <a:pt x="0" y="1170717"/>
                   </a:moveTo>
                   <a:lnTo>
-                    <a:pt x="71622" y="1899539"/>
-                  </a:lnTo>
-                  <a:lnTo>
-                    <a:pt x="143245" y="1928844"/>
-                  </a:lnTo>
-                  <a:lnTo>
-                    <a:pt x="214867" y="1957659"/>
-                  </a:lnTo>
-                  <a:lnTo>
-                    <a:pt x="286490" y="1985992"/>
-                  </a:lnTo>
-                  <a:lnTo>
-                    <a:pt x="358112" y="2013851"/>
-                  </a:lnTo>
-                  <a:lnTo>
-                    <a:pt x="429735" y="2041245"/>
-                  </a:lnTo>
-                  <a:lnTo>
-                    <a:pt x="501357" y="2068181"/>
-                  </a:lnTo>
-                  <a:lnTo>
-                    <a:pt x="572980" y="2094667"/>
-                  </a:lnTo>
-                  <a:lnTo>
-                    <a:pt x="644602" y="2120710"/>
-                  </a:lnTo>
-                  <a:lnTo>
-                    <a:pt x="716225" y="2146317"/>
-                  </a:lnTo>
-                  <a:lnTo>
-                    <a:pt x="787847" y="2171497"/>
-                  </a:lnTo>
-                  <a:lnTo>
-                    <a:pt x="859470" y="2196256"/>
-                  </a:lnTo>
-                  <a:lnTo>
-                    <a:pt x="931092" y="2220600"/>
-                  </a:lnTo>
-                  <a:lnTo>
-                    <a:pt x="1002715" y="2244538"/>
-                  </a:lnTo>
-                  <a:lnTo>
-                    <a:pt x="1074337" y="2268076"/>
-                  </a:lnTo>
-                  <a:lnTo>
-                    <a:pt x="1145960" y="2291220"/>
-                  </a:lnTo>
-                  <a:lnTo>
-                    <a:pt x="1217582" y="2313977"/>
-                  </a:lnTo>
-                  <a:lnTo>
-                    <a:pt x="1289205" y="2336354"/>
-                  </a:lnTo>
-                  <a:lnTo>
-                    <a:pt x="1360827" y="2358357"/>
-                  </a:lnTo>
-                  <a:lnTo>
-                    <a:pt x="1432450" y="2379993"/>
-                  </a:lnTo>
-                  <a:lnTo>
-                    <a:pt x="1504073" y="2401266"/>
-                  </a:lnTo>
-                  <a:lnTo>
-                    <a:pt x="1575695" y="2422184"/>
-                  </a:lnTo>
-                  <a:lnTo>
-                    <a:pt x="1647318" y="2442752"/>
-                  </a:lnTo>
-                  <a:lnTo>
-                    <a:pt x="1718940" y="2462976"/>
-                  </a:lnTo>
-                  <a:lnTo>
-                    <a:pt x="1790563" y="2482863"/>
-                  </a:lnTo>
-                  <a:lnTo>
-                    <a:pt x="1862185" y="2502417"/>
-                  </a:lnTo>
-                  <a:lnTo>
-                    <a:pt x="1933808" y="2521644"/>
-                  </a:lnTo>
-                  <a:lnTo>
-                    <a:pt x="2005430" y="2540549"/>
-                  </a:lnTo>
-                  <a:lnTo>
-                    <a:pt x="2077053" y="2559139"/>
-                  </a:lnTo>
-                  <a:lnTo>
-                    <a:pt x="2148675" y="2577418"/>
-                  </a:lnTo>
-                  <a:lnTo>
-                    <a:pt x="2220298" y="2595391"/>
-                  </a:lnTo>
-                  <a:lnTo>
-                    <a:pt x="2291920" y="2613064"/>
-                  </a:lnTo>
-                  <a:lnTo>
-                    <a:pt x="2363543" y="2630442"/>
-                  </a:lnTo>
-                  <a:lnTo>
-                    <a:pt x="2435165" y="2647529"/>
-                  </a:lnTo>
-                  <a:lnTo>
-                    <a:pt x="2506788" y="2664330"/>
-                  </a:lnTo>
-                  <a:lnTo>
-                    <a:pt x="2578410" y="2680850"/>
-                  </a:lnTo>
-                  <a:lnTo>
-                    <a:pt x="2650033" y="2697095"/>
-                  </a:lnTo>
-                  <a:lnTo>
-                    <a:pt x="2721655" y="2713068"/>
-                  </a:lnTo>
-                  <a:lnTo>
-                    <a:pt x="2793278" y="2728773"/>
-                  </a:lnTo>
-                  <a:lnTo>
-                    <a:pt x="2864901" y="2744217"/>
-                  </a:lnTo>
-                  <a:lnTo>
-                    <a:pt x="2936523" y="2759402"/>
-                  </a:lnTo>
-                  <a:lnTo>
-                    <a:pt x="3008146" y="2774333"/>
-                  </a:lnTo>
-                  <a:lnTo>
-                    <a:pt x="3079768" y="2767999"/>
-                  </a:lnTo>
-                  <a:lnTo>
-                    <a:pt x="3151391" y="2730779"/>
-                  </a:lnTo>
-                  <a:lnTo>
-                    <a:pt x="3223013" y="2691992"/>
-                  </a:lnTo>
-                  <a:lnTo>
-                    <a:pt x="3294636" y="2651574"/>
-                  </a:lnTo>
-                  <a:lnTo>
-                    <a:pt x="3366258" y="2609455"/>
-                  </a:lnTo>
-                  <a:lnTo>
-                    <a:pt x="3437881" y="2565564"/>
-                  </a:lnTo>
-                  <a:lnTo>
-                    <a:pt x="3509503" y="2519826"/>
-                  </a:lnTo>
-                  <a:lnTo>
-                    <a:pt x="3581126" y="2472164"/>
-                  </a:lnTo>
-                  <a:lnTo>
-                    <a:pt x="3652748" y="2422497"/>
-                  </a:lnTo>
-                  <a:lnTo>
-                    <a:pt x="3724371" y="2370740"/>
-                  </a:lnTo>
-                  <a:lnTo>
-                    <a:pt x="3795993" y="2316805"/>
-                  </a:lnTo>
-                  <a:lnTo>
-                    <a:pt x="3867616" y="2260601"/>
-                  </a:lnTo>
-                  <a:lnTo>
-                    <a:pt x="3939238" y="2202032"/>
-                  </a:lnTo>
-                  <a:lnTo>
-                    <a:pt x="4010861" y="2140999"/>
-                  </a:lnTo>
-                  <a:lnTo>
-                    <a:pt x="4082483" y="2077399"/>
-                  </a:lnTo>
-                  <a:lnTo>
-                    <a:pt x="4154106" y="2011122"/>
-                  </a:lnTo>
-                  <a:lnTo>
-                    <a:pt x="4225729" y="1942057"/>
-                  </a:lnTo>
-                  <a:lnTo>
-                    <a:pt x="4297351" y="1870086"/>
-                  </a:lnTo>
-                  <a:lnTo>
-                    <a:pt x="4368974" y="1795086"/>
-                  </a:lnTo>
-                  <a:lnTo>
-                    <a:pt x="4440596" y="1716932"/>
-                  </a:lnTo>
-                  <a:lnTo>
-                    <a:pt x="4512219" y="1635489"/>
-                  </a:lnTo>
-                  <a:lnTo>
-                    <a:pt x="4583841" y="1550619"/>
-                  </a:lnTo>
-                  <a:lnTo>
-                    <a:pt x="4655464" y="1462179"/>
-                  </a:lnTo>
-                  <a:lnTo>
-                    <a:pt x="4727086" y="1370017"/>
-                  </a:lnTo>
-                  <a:lnTo>
-                    <a:pt x="4798709" y="1273978"/>
-                  </a:lnTo>
-                  <a:lnTo>
-                    <a:pt x="4870331" y="1173899"/>
-                  </a:lnTo>
-                  <a:lnTo>
-                    <a:pt x="4941954" y="1069608"/>
-                  </a:lnTo>
-                  <a:lnTo>
-                    <a:pt x="5013576" y="960930"/>
-                  </a:lnTo>
-                  <a:lnTo>
-                    <a:pt x="5085199" y="847679"/>
-                  </a:lnTo>
-                  <a:lnTo>
-                    <a:pt x="5156821" y="729663"/>
-                  </a:lnTo>
-                  <a:lnTo>
-                    <a:pt x="5228444" y="606682"/>
-                  </a:lnTo>
-                  <a:lnTo>
-                    <a:pt x="5300066" y="478526"/>
-                  </a:lnTo>
-                  <a:lnTo>
-                    <a:pt x="5371689" y="344979"/>
-                  </a:lnTo>
-                  <a:lnTo>
-                    <a:pt x="5443311" y="205812"/>
-                  </a:lnTo>
-                  <a:lnTo>
-                    <a:pt x="5514934" y="60790"/>
-                  </a:lnTo>
-                  <a:lnTo>
-                    <a:pt x="5543745" y="0"/>
+                    <a:pt x="71622" y="1231088"/>
+                  </a:lnTo>
+                  <a:lnTo>
+                    <a:pt x="143245" y="1289989"/>
+                  </a:lnTo>
+                  <a:lnTo>
+                    <a:pt x="214867" y="1347459"/>
+                  </a:lnTo>
+                  <a:lnTo>
+                    <a:pt x="286490" y="1403530"/>
+                  </a:lnTo>
+                  <a:lnTo>
+                    <a:pt x="358112" y="1458238"/>
+                  </a:lnTo>
+                  <a:lnTo>
+                    <a:pt x="429735" y="1511614"/>
+                  </a:lnTo>
+                  <a:lnTo>
+                    <a:pt x="501357" y="1563693"/>
+                  </a:lnTo>
+                  <a:lnTo>
+                    <a:pt x="572980" y="1614504"/>
+                  </a:lnTo>
+                  <a:lnTo>
+                    <a:pt x="644602" y="1664080"/>
+                  </a:lnTo>
+                  <a:lnTo>
+                    <a:pt x="716225" y="1712450"/>
+                  </a:lnTo>
+                  <a:lnTo>
+                    <a:pt x="787847" y="1759643"/>
+                  </a:lnTo>
+                  <a:lnTo>
+                    <a:pt x="859470" y="1805689"/>
+                  </a:lnTo>
+                  <a:lnTo>
+                    <a:pt x="931092" y="1850614"/>
+                  </a:lnTo>
+                  <a:lnTo>
+                    <a:pt x="1002715" y="1894447"/>
+                  </a:lnTo>
+                  <a:lnTo>
+                    <a:pt x="1074337" y="1937213"/>
+                  </a:lnTo>
+                  <a:lnTo>
+                    <a:pt x="1145960" y="1978939"/>
+                  </a:lnTo>
+                  <a:lnTo>
+                    <a:pt x="1217582" y="2019650"/>
+                  </a:lnTo>
+                  <a:lnTo>
+                    <a:pt x="1289205" y="2059371"/>
+                  </a:lnTo>
+                  <a:lnTo>
+                    <a:pt x="1360827" y="2098126"/>
+                  </a:lnTo>
+                  <a:lnTo>
+                    <a:pt x="1432450" y="2135938"/>
+                  </a:lnTo>
+                  <a:lnTo>
+                    <a:pt x="1504073" y="2172831"/>
+                  </a:lnTo>
+                  <a:lnTo>
+                    <a:pt x="1575695" y="2208826"/>
+                  </a:lnTo>
+                  <a:lnTo>
+                    <a:pt x="1647318" y="2243945"/>
+                  </a:lnTo>
+                  <a:lnTo>
+                    <a:pt x="1718940" y="2278210"/>
+                  </a:lnTo>
+                  <a:lnTo>
+                    <a:pt x="1790563" y="2311642"/>
+                  </a:lnTo>
+                  <a:lnTo>
+                    <a:pt x="1862185" y="2344261"/>
+                  </a:lnTo>
+                  <a:lnTo>
+                    <a:pt x="1933808" y="2376086"/>
+                  </a:lnTo>
+                  <a:lnTo>
+                    <a:pt x="2005430" y="2407137"/>
+                  </a:lnTo>
+                  <a:lnTo>
+                    <a:pt x="2077053" y="2437433"/>
+                  </a:lnTo>
+                  <a:lnTo>
+                    <a:pt x="2148675" y="2466991"/>
+                  </a:lnTo>
+                  <a:lnTo>
+                    <a:pt x="2220298" y="2495831"/>
+                  </a:lnTo>
+                  <a:lnTo>
+                    <a:pt x="2291920" y="2523969"/>
+                  </a:lnTo>
+                  <a:lnTo>
+                    <a:pt x="2363543" y="2551423"/>
+                  </a:lnTo>
+                  <a:lnTo>
+                    <a:pt x="2435165" y="2578209"/>
+                  </a:lnTo>
+                  <a:lnTo>
+                    <a:pt x="2506788" y="2604344"/>
+                  </a:lnTo>
+                  <a:lnTo>
+                    <a:pt x="2578410" y="2629843"/>
+                  </a:lnTo>
+                  <a:lnTo>
+                    <a:pt x="2650033" y="2654721"/>
+                  </a:lnTo>
+                  <a:lnTo>
+                    <a:pt x="2721655" y="2678995"/>
+                  </a:lnTo>
+                  <a:lnTo>
+                    <a:pt x="2793278" y="2702678"/>
+                  </a:lnTo>
+                  <a:lnTo>
+                    <a:pt x="2864901" y="2725785"/>
+                  </a:lnTo>
+                  <a:lnTo>
+                    <a:pt x="2936523" y="2748330"/>
+                  </a:lnTo>
+                  <a:lnTo>
+                    <a:pt x="3008146" y="2770326"/>
+                  </a:lnTo>
+                  <a:lnTo>
+                    <a:pt x="3079768" y="2772069"/>
+                  </a:lnTo>
+                  <a:lnTo>
+                    <a:pt x="3151391" y="2745182"/>
+                  </a:lnTo>
+                  <a:lnTo>
+                    <a:pt x="3223013" y="2717474"/>
+                  </a:lnTo>
+                  <a:lnTo>
+                    <a:pt x="3294636" y="2688920"/>
+                  </a:lnTo>
+                  <a:lnTo>
+                    <a:pt x="3366258" y="2659494"/>
+                  </a:lnTo>
+                  <a:lnTo>
+                    <a:pt x="3437881" y="2629170"/>
+                  </a:lnTo>
+                  <a:lnTo>
+                    <a:pt x="3509503" y="2597919"/>
+                  </a:lnTo>
+                  <a:lnTo>
+                    <a:pt x="3581126" y="2565715"/>
+                  </a:lnTo>
+                  <a:lnTo>
+                    <a:pt x="3652748" y="2532527"/>
+                  </a:lnTo>
+                  <a:lnTo>
+                    <a:pt x="3724371" y="2498326"/>
+                  </a:lnTo>
+                  <a:lnTo>
+                    <a:pt x="3795993" y="2463081"/>
+                  </a:lnTo>
+                  <a:lnTo>
+                    <a:pt x="3867616" y="2426759"/>
+                  </a:lnTo>
+                  <a:lnTo>
+                    <a:pt x="3939238" y="2389329"/>
+                  </a:lnTo>
+                  <a:lnTo>
+                    <a:pt x="4010861" y="2350756"/>
+                  </a:lnTo>
+                  <a:lnTo>
+                    <a:pt x="4082483" y="2311004"/>
+                  </a:lnTo>
+                  <a:lnTo>
+                    <a:pt x="4154106" y="2270039"/>
+                  </a:lnTo>
+                  <a:lnTo>
+                    <a:pt x="4225729" y="2227824"/>
+                  </a:lnTo>
+                  <a:lnTo>
+                    <a:pt x="4297351" y="2184319"/>
+                  </a:lnTo>
+                  <a:lnTo>
+                    <a:pt x="4368974" y="2139486"/>
+                  </a:lnTo>
+                  <a:lnTo>
+                    <a:pt x="4440596" y="2093284"/>
+                  </a:lnTo>
+                  <a:lnTo>
+                    <a:pt x="4512219" y="2045671"/>
+                  </a:lnTo>
+                  <a:lnTo>
+                    <a:pt x="4583841" y="1996605"/>
+                  </a:lnTo>
+                  <a:lnTo>
+                    <a:pt x="4655464" y="1946040"/>
+                  </a:lnTo>
+                  <a:lnTo>
+                    <a:pt x="4727086" y="1893932"/>
+                  </a:lnTo>
+                  <a:lnTo>
+                    <a:pt x="4798709" y="1840232"/>
+                  </a:lnTo>
+                  <a:lnTo>
+                    <a:pt x="4870331" y="1784893"/>
+                  </a:lnTo>
+                  <a:lnTo>
+                    <a:pt x="4941954" y="1727864"/>
+                  </a:lnTo>
+                  <a:lnTo>
+                    <a:pt x="5013576" y="1669094"/>
+                  </a:lnTo>
+                  <a:lnTo>
+                    <a:pt x="5085199" y="1608529"/>
+                  </a:lnTo>
+                  <a:lnTo>
+                    <a:pt x="5156821" y="1546115"/>
+                  </a:lnTo>
+                  <a:lnTo>
+                    <a:pt x="5228444" y="1481796"/>
+                  </a:lnTo>
+                  <a:lnTo>
+                    <a:pt x="5300066" y="1415512"/>
+                  </a:lnTo>
+                  <a:lnTo>
+                    <a:pt x="5371689" y="1347205"/>
+                  </a:lnTo>
+                  <a:lnTo>
+                    <a:pt x="5443311" y="1276812"/>
+                  </a:lnTo>
+                  <a:lnTo>
+                    <a:pt x="5514934" y="1204270"/>
+                  </a:lnTo>
+                  <a:lnTo>
+                    <a:pt x="5586557" y="1129512"/>
+                  </a:lnTo>
+                  <a:lnTo>
+                    <a:pt x="5658179" y="1052472"/>
+                  </a:lnTo>
+                  <a:lnTo>
+                    <a:pt x="5729802" y="973080"/>
+                  </a:lnTo>
+                  <a:lnTo>
+                    <a:pt x="5801424" y="891264"/>
+                  </a:lnTo>
+                  <a:lnTo>
+                    <a:pt x="5873047" y="806949"/>
+                  </a:lnTo>
+                  <a:lnTo>
+                    <a:pt x="5944669" y="720060"/>
+                  </a:lnTo>
+                  <a:lnTo>
+                    <a:pt x="6016292" y="630518"/>
+                  </a:lnTo>
+                  <a:lnTo>
+                    <a:pt x="6087914" y="538242"/>
+                  </a:lnTo>
+                  <a:lnTo>
+                    <a:pt x="6159537" y="443149"/>
+                  </a:lnTo>
+                  <a:lnTo>
+                    <a:pt x="6231159" y="345152"/>
+                  </a:lnTo>
+                  <a:lnTo>
+                    <a:pt x="6302782" y="244162"/>
+                  </a:lnTo>
+                  <a:lnTo>
+                    <a:pt x="6374404" y="140090"/>
+                  </a:lnTo>
+                  <a:lnTo>
+                    <a:pt x="6446027" y="32839"/>
+                  </a:lnTo>
+                  <a:lnTo>
+                    <a:pt x="6467308" y="0"/>
                   </a:lnTo>
                 </a:path>
               </a:pathLst>
@@ -3964,312 +4042,312 @@
           </p:nvSpPr>
           <p:spPr>
             <a:xfrm>
-              <a:off x="1172049" y="4685578"/>
-              <a:ext cx="7090630" cy="713268"/>
+              <a:off x="1172049" y="4688351"/>
+              <a:ext cx="7090630" cy="644062"/>
             </a:xfrm>
             <a:custGeom>
               <a:avLst/>
               <a:pathLst>
-                <a:path w="7090630" h="713268">
+                <a:path w="7090630" h="644062">
                   <a:moveTo>
-                    <a:pt x="7090630" y="527618"/>
+                    <a:pt x="7090630" y="644062"/>
                   </a:moveTo>
                   <a:lnTo>
-                    <a:pt x="7019007" y="521905"/>
-                  </a:lnTo>
-                  <a:lnTo>
-                    <a:pt x="6947385" y="516096"/>
-                  </a:lnTo>
-                  <a:lnTo>
-                    <a:pt x="6875762" y="510188"/>
-                  </a:lnTo>
-                  <a:lnTo>
-                    <a:pt x="6804139" y="504180"/>
-                  </a:lnTo>
-                  <a:lnTo>
-                    <a:pt x="6732517" y="498069"/>
-                  </a:lnTo>
-                  <a:lnTo>
-                    <a:pt x="6660894" y="491854"/>
-                  </a:lnTo>
-                  <a:lnTo>
-                    <a:pt x="6589272" y="485534"/>
-                  </a:lnTo>
-                  <a:lnTo>
-                    <a:pt x="6517649" y="479107"/>
-                  </a:lnTo>
-                  <a:lnTo>
-                    <a:pt x="6446027" y="472570"/>
-                  </a:lnTo>
-                  <a:lnTo>
-                    <a:pt x="6374404" y="465922"/>
-                  </a:lnTo>
-                  <a:lnTo>
-                    <a:pt x="6302782" y="459161"/>
-                  </a:lnTo>
-                  <a:lnTo>
-                    <a:pt x="6231159" y="452285"/>
-                  </a:lnTo>
-                  <a:lnTo>
-                    <a:pt x="6159537" y="445292"/>
-                  </a:lnTo>
-                  <a:lnTo>
-                    <a:pt x="6087914" y="438180"/>
-                  </a:lnTo>
-                  <a:lnTo>
-                    <a:pt x="6016292" y="430948"/>
-                  </a:lnTo>
-                  <a:lnTo>
-                    <a:pt x="5944669" y="423592"/>
-                  </a:lnTo>
-                  <a:lnTo>
-                    <a:pt x="5873047" y="416111"/>
-                  </a:lnTo>
-                  <a:lnTo>
-                    <a:pt x="5801424" y="408504"/>
-                  </a:lnTo>
-                  <a:lnTo>
-                    <a:pt x="5729802" y="400766"/>
-                  </a:lnTo>
-                  <a:lnTo>
-                    <a:pt x="5658179" y="392898"/>
-                  </a:lnTo>
-                  <a:lnTo>
-                    <a:pt x="5586557" y="384895"/>
-                  </a:lnTo>
-                  <a:lnTo>
-                    <a:pt x="5514934" y="376757"/>
-                  </a:lnTo>
-                  <a:lnTo>
-                    <a:pt x="5443311" y="368480"/>
-                  </a:lnTo>
-                  <a:lnTo>
-                    <a:pt x="5371689" y="360063"/>
-                  </a:lnTo>
-                  <a:lnTo>
-                    <a:pt x="5300066" y="351502"/>
-                  </a:lnTo>
-                  <a:lnTo>
-                    <a:pt x="5228444" y="342796"/>
-                  </a:lnTo>
-                  <a:lnTo>
-                    <a:pt x="5156821" y="333942"/>
-                  </a:lnTo>
-                  <a:lnTo>
-                    <a:pt x="5085199" y="324937"/>
-                  </a:lnTo>
-                  <a:lnTo>
-                    <a:pt x="5013576" y="315779"/>
-                  </a:lnTo>
-                  <a:lnTo>
-                    <a:pt x="4941954" y="306466"/>
-                  </a:lnTo>
-                  <a:lnTo>
-                    <a:pt x="4870331" y="296994"/>
-                  </a:lnTo>
-                  <a:lnTo>
-                    <a:pt x="4798709" y="287361"/>
-                  </a:lnTo>
-                  <a:lnTo>
-                    <a:pt x="4727086" y="277565"/>
-                  </a:lnTo>
-                  <a:lnTo>
-                    <a:pt x="4655464" y="267601"/>
-                  </a:lnTo>
-                  <a:lnTo>
-                    <a:pt x="4583841" y="257469"/>
-                  </a:lnTo>
-                  <a:lnTo>
-                    <a:pt x="4512219" y="247164"/>
-                  </a:lnTo>
-                  <a:lnTo>
-                    <a:pt x="4440596" y="236684"/>
-                  </a:lnTo>
-                  <a:lnTo>
-                    <a:pt x="4368974" y="226026"/>
-                  </a:lnTo>
-                  <a:lnTo>
-                    <a:pt x="4297351" y="215187"/>
-                  </a:lnTo>
-                  <a:lnTo>
-                    <a:pt x="4225729" y="204163"/>
-                  </a:lnTo>
-                  <a:lnTo>
-                    <a:pt x="4154106" y="192953"/>
-                  </a:lnTo>
-                  <a:lnTo>
-                    <a:pt x="4082483" y="181551"/>
-                  </a:lnTo>
-                  <a:lnTo>
-                    <a:pt x="4010861" y="169956"/>
-                  </a:lnTo>
-                  <a:lnTo>
-                    <a:pt x="3939238" y="158163"/>
-                  </a:lnTo>
-                  <a:lnTo>
-                    <a:pt x="3867616" y="146170"/>
-                  </a:lnTo>
-                  <a:lnTo>
-                    <a:pt x="3795993" y="133974"/>
-                  </a:lnTo>
-                  <a:lnTo>
-                    <a:pt x="3724371" y="121569"/>
-                  </a:lnTo>
-                  <a:lnTo>
-                    <a:pt x="3652748" y="108954"/>
-                  </a:lnTo>
-                  <a:lnTo>
-                    <a:pt x="3581126" y="96125"/>
-                  </a:lnTo>
-                  <a:lnTo>
-                    <a:pt x="3509503" y="83077"/>
-                  </a:lnTo>
-                  <a:lnTo>
-                    <a:pt x="3437881" y="69808"/>
-                  </a:lnTo>
-                  <a:lnTo>
-                    <a:pt x="3366258" y="56313"/>
-                  </a:lnTo>
-                  <a:lnTo>
-                    <a:pt x="3294636" y="42588"/>
-                  </a:lnTo>
-                  <a:lnTo>
-                    <a:pt x="3223013" y="28631"/>
-                  </a:lnTo>
-                  <a:lnTo>
-                    <a:pt x="3151391" y="14436"/>
+                    <a:pt x="7019007" y="638658"/>
+                  </a:lnTo>
+                  <a:lnTo>
+                    <a:pt x="6947385" y="633118"/>
+                  </a:lnTo>
+                  <a:lnTo>
+                    <a:pt x="6875762" y="627440"/>
+                  </a:lnTo>
+                  <a:lnTo>
+                    <a:pt x="6804139" y="621621"/>
+                  </a:lnTo>
+                  <a:lnTo>
+                    <a:pt x="6732517" y="615657"/>
+                  </a:lnTo>
+                  <a:lnTo>
+                    <a:pt x="6660894" y="609544"/>
+                  </a:lnTo>
+                  <a:lnTo>
+                    <a:pt x="6589272" y="603279"/>
+                  </a:lnTo>
+                  <a:lnTo>
+                    <a:pt x="6517649" y="596858"/>
+                  </a:lnTo>
+                  <a:lnTo>
+                    <a:pt x="6446027" y="590276"/>
+                  </a:lnTo>
+                  <a:lnTo>
+                    <a:pt x="6374404" y="583530"/>
+                  </a:lnTo>
+                  <a:lnTo>
+                    <a:pt x="6302782" y="576616"/>
+                  </a:lnTo>
+                  <a:lnTo>
+                    <a:pt x="6231159" y="569530"/>
+                  </a:lnTo>
+                  <a:lnTo>
+                    <a:pt x="6159537" y="562267"/>
+                  </a:lnTo>
+                  <a:lnTo>
+                    <a:pt x="6087914" y="554824"/>
+                  </a:lnTo>
+                  <a:lnTo>
+                    <a:pt x="6016292" y="547194"/>
+                  </a:lnTo>
+                  <a:lnTo>
+                    <a:pt x="5944669" y="539374"/>
+                  </a:lnTo>
+                  <a:lnTo>
+                    <a:pt x="5873047" y="531360"/>
+                  </a:lnTo>
+                  <a:lnTo>
+                    <a:pt x="5801424" y="523145"/>
+                  </a:lnTo>
+                  <a:lnTo>
+                    <a:pt x="5729802" y="514726"/>
+                  </a:lnTo>
+                  <a:lnTo>
+                    <a:pt x="5658179" y="506097"/>
+                  </a:lnTo>
+                  <a:lnTo>
+                    <a:pt x="5586557" y="497253"/>
+                  </a:lnTo>
+                  <a:lnTo>
+                    <a:pt x="5514934" y="488188"/>
+                  </a:lnTo>
+                  <a:lnTo>
+                    <a:pt x="5443311" y="478897"/>
+                  </a:lnTo>
+                  <a:lnTo>
+                    <a:pt x="5371689" y="469375"/>
+                  </a:lnTo>
+                  <a:lnTo>
+                    <a:pt x="5300066" y="459615"/>
+                  </a:lnTo>
+                  <a:lnTo>
+                    <a:pt x="5228444" y="449612"/>
+                  </a:lnTo>
+                  <a:lnTo>
+                    <a:pt x="5156821" y="439359"/>
+                  </a:lnTo>
+                  <a:lnTo>
+                    <a:pt x="5085199" y="428851"/>
+                  </a:lnTo>
+                  <a:lnTo>
+                    <a:pt x="5013576" y="418081"/>
+                  </a:lnTo>
+                  <a:lnTo>
+                    <a:pt x="4941954" y="407043"/>
+                  </a:lnTo>
+                  <a:lnTo>
+                    <a:pt x="4870331" y="395729"/>
+                  </a:lnTo>
+                  <a:lnTo>
+                    <a:pt x="4798709" y="384133"/>
+                  </a:lnTo>
+                  <a:lnTo>
+                    <a:pt x="4727086" y="372248"/>
+                  </a:lnTo>
+                  <a:lnTo>
+                    <a:pt x="4655464" y="360067"/>
+                  </a:lnTo>
+                  <a:lnTo>
+                    <a:pt x="4583841" y="347582"/>
+                  </a:lnTo>
+                  <a:lnTo>
+                    <a:pt x="4512219" y="334786"/>
+                  </a:lnTo>
+                  <a:lnTo>
+                    <a:pt x="4440596" y="321671"/>
+                  </a:lnTo>
+                  <a:lnTo>
+                    <a:pt x="4368974" y="308229"/>
+                  </a:lnTo>
+                  <a:lnTo>
+                    <a:pt x="4297351" y="294452"/>
+                  </a:lnTo>
+                  <a:lnTo>
+                    <a:pt x="4225729" y="280331"/>
+                  </a:lnTo>
+                  <a:lnTo>
+                    <a:pt x="4154106" y="265858"/>
+                  </a:lnTo>
+                  <a:lnTo>
+                    <a:pt x="4082483" y="251025"/>
+                  </a:lnTo>
+                  <a:lnTo>
+                    <a:pt x="4010861" y="235822"/>
+                  </a:lnTo>
+                  <a:lnTo>
+                    <a:pt x="3939238" y="220239"/>
+                  </a:lnTo>
+                  <a:lnTo>
+                    <a:pt x="3867616" y="204268"/>
+                  </a:lnTo>
+                  <a:lnTo>
+                    <a:pt x="3795993" y="187899"/>
+                  </a:lnTo>
+                  <a:lnTo>
+                    <a:pt x="3724371" y="171122"/>
+                  </a:lnTo>
+                  <a:lnTo>
+                    <a:pt x="3652748" y="153927"/>
+                  </a:lnTo>
+                  <a:lnTo>
+                    <a:pt x="3581126" y="136303"/>
+                  </a:lnTo>
+                  <a:lnTo>
+                    <a:pt x="3509503" y="118240"/>
+                  </a:lnTo>
+                  <a:lnTo>
+                    <a:pt x="3437881" y="99726"/>
+                  </a:lnTo>
+                  <a:lnTo>
+                    <a:pt x="3366258" y="80751"/>
+                  </a:lnTo>
+                  <a:lnTo>
+                    <a:pt x="3294636" y="61302"/>
+                  </a:lnTo>
+                  <a:lnTo>
+                    <a:pt x="3223013" y="41369"/>
+                  </a:lnTo>
+                  <a:lnTo>
+                    <a:pt x="3151391" y="20939"/>
                   </a:lnTo>
                   <a:lnTo>
                     <a:pt x="3079768" y="0"/>
                   </a:lnTo>
                   <a:lnTo>
-                    <a:pt x="3008146" y="14701"/>
-                  </a:lnTo>
-                  <a:lnTo>
-                    <a:pt x="2936523" y="48977"/>
-                  </a:lnTo>
-                  <a:lnTo>
-                    <a:pt x="2864901" y="81869"/>
-                  </a:lnTo>
-                  <a:lnTo>
-                    <a:pt x="2793278" y="113432"/>
-                  </a:lnTo>
-                  <a:lnTo>
-                    <a:pt x="2721655" y="143721"/>
-                  </a:lnTo>
-                  <a:lnTo>
-                    <a:pt x="2650033" y="172788"/>
-                  </a:lnTo>
-                  <a:lnTo>
-                    <a:pt x="2578410" y="200681"/>
-                  </a:lnTo>
-                  <a:lnTo>
-                    <a:pt x="2506788" y="227447"/>
-                  </a:lnTo>
-                  <a:lnTo>
-                    <a:pt x="2435165" y="253133"/>
-                  </a:lnTo>
-                  <a:lnTo>
-                    <a:pt x="2363543" y="277782"/>
-                  </a:lnTo>
-                  <a:lnTo>
-                    <a:pt x="2291920" y="301436"/>
-                  </a:lnTo>
-                  <a:lnTo>
-                    <a:pt x="2220298" y="324134"/>
-                  </a:lnTo>
-                  <a:lnTo>
-                    <a:pt x="2148675" y="345916"/>
-                  </a:lnTo>
-                  <a:lnTo>
-                    <a:pt x="2077053" y="366819"/>
-                  </a:lnTo>
-                  <a:lnTo>
-                    <a:pt x="2005430" y="386878"/>
-                  </a:lnTo>
-                  <a:lnTo>
-                    <a:pt x="1933808" y="406127"/>
-                  </a:lnTo>
-                  <a:lnTo>
-                    <a:pt x="1862185" y="424598"/>
-                  </a:lnTo>
-                  <a:lnTo>
-                    <a:pt x="1790563" y="442324"/>
-                  </a:lnTo>
-                  <a:lnTo>
-                    <a:pt x="1718940" y="459334"/>
-                  </a:lnTo>
-                  <a:lnTo>
-                    <a:pt x="1647318" y="475658"/>
-                  </a:lnTo>
-                  <a:lnTo>
-                    <a:pt x="1575695" y="491322"/>
-                  </a:lnTo>
-                  <a:lnTo>
-                    <a:pt x="1504073" y="506354"/>
-                  </a:lnTo>
-                  <a:lnTo>
-                    <a:pt x="1432450" y="520779"/>
-                  </a:lnTo>
-                  <a:lnTo>
-                    <a:pt x="1360827" y="534622"/>
-                  </a:lnTo>
-                  <a:lnTo>
-                    <a:pt x="1289205" y="547905"/>
-                  </a:lnTo>
-                  <a:lnTo>
-                    <a:pt x="1217582" y="560653"/>
-                  </a:lnTo>
-                  <a:lnTo>
-                    <a:pt x="1145960" y="572885"/>
-                  </a:lnTo>
-                  <a:lnTo>
-                    <a:pt x="1074337" y="584624"/>
-                  </a:lnTo>
-                  <a:lnTo>
-                    <a:pt x="1002715" y="595889"/>
-                  </a:lnTo>
-                  <a:lnTo>
-                    <a:pt x="931092" y="606699"/>
-                  </a:lnTo>
-                  <a:lnTo>
-                    <a:pt x="859470" y="617073"/>
-                  </a:lnTo>
-                  <a:lnTo>
-                    <a:pt x="787847" y="627027"/>
-                  </a:lnTo>
-                  <a:lnTo>
-                    <a:pt x="716225" y="636580"/>
-                  </a:lnTo>
-                  <a:lnTo>
-                    <a:pt x="644602" y="645747"/>
-                  </a:lnTo>
-                  <a:lnTo>
-                    <a:pt x="572980" y="654544"/>
-                  </a:lnTo>
-                  <a:lnTo>
-                    <a:pt x="501357" y="662986"/>
-                  </a:lnTo>
-                  <a:lnTo>
-                    <a:pt x="429735" y="671087"/>
-                  </a:lnTo>
-                  <a:lnTo>
-                    <a:pt x="358112" y="678861"/>
-                  </a:lnTo>
-                  <a:lnTo>
-                    <a:pt x="286490" y="686321"/>
-                  </a:lnTo>
-                  <a:lnTo>
-                    <a:pt x="214867" y="693480"/>
-                  </a:lnTo>
-                  <a:lnTo>
-                    <a:pt x="143245" y="700349"/>
-                  </a:lnTo>
-                  <a:lnTo>
-                    <a:pt x="71622" y="706942"/>
-                  </a:lnTo>
-                  <a:lnTo>
-                    <a:pt x="0" y="713268"/>
+                    <a:pt x="3008146" y="6371"/>
+                  </a:lnTo>
+                  <a:lnTo>
+                    <a:pt x="2936523" y="31688"/>
+                  </a:lnTo>
+                  <a:lnTo>
+                    <a:pt x="2864901" y="56255"/>
+                  </a:lnTo>
+                  <a:lnTo>
+                    <a:pt x="2793278" y="80094"/>
+                  </a:lnTo>
+                  <a:lnTo>
+                    <a:pt x="2721655" y="103227"/>
+                  </a:lnTo>
+                  <a:lnTo>
+                    <a:pt x="2650033" y="125675"/>
+                  </a:lnTo>
+                  <a:lnTo>
+                    <a:pt x="2578410" y="147458"/>
+                  </a:lnTo>
+                  <a:lnTo>
+                    <a:pt x="2506788" y="168595"/>
+                  </a:lnTo>
+                  <a:lnTo>
+                    <a:pt x="2435165" y="189105"/>
+                  </a:lnTo>
+                  <a:lnTo>
+                    <a:pt x="2363543" y="209009"/>
+                  </a:lnTo>
+                  <a:lnTo>
+                    <a:pt x="2291920" y="228322"/>
+                  </a:lnTo>
+                  <a:lnTo>
+                    <a:pt x="2220298" y="247063"/>
+                  </a:lnTo>
+                  <a:lnTo>
+                    <a:pt x="2148675" y="265249"/>
+                  </a:lnTo>
+                  <a:lnTo>
+                    <a:pt x="2077053" y="282896"/>
+                  </a:lnTo>
+                  <a:lnTo>
+                    <a:pt x="2005430" y="300020"/>
+                  </a:lnTo>
+                  <a:lnTo>
+                    <a:pt x="1933808" y="316637"/>
+                  </a:lnTo>
+                  <a:lnTo>
+                    <a:pt x="1862185" y="332762"/>
+                  </a:lnTo>
+                  <a:lnTo>
+                    <a:pt x="1790563" y="348409"/>
+                  </a:lnTo>
+                  <a:lnTo>
+                    <a:pt x="1718940" y="363592"/>
+                  </a:lnTo>
+                  <a:lnTo>
+                    <a:pt x="1647318" y="378325"/>
+                  </a:lnTo>
+                  <a:lnTo>
+                    <a:pt x="1575695" y="392622"/>
+                  </a:lnTo>
+                  <a:lnTo>
+                    <a:pt x="1504073" y="406495"/>
+                  </a:lnTo>
+                  <a:lnTo>
+                    <a:pt x="1432450" y="419957"/>
+                  </a:lnTo>
+                  <a:lnTo>
+                    <a:pt x="1360827" y="433020"/>
+                  </a:lnTo>
+                  <a:lnTo>
+                    <a:pt x="1289205" y="445697"/>
+                  </a:lnTo>
+                  <a:lnTo>
+                    <a:pt x="1217582" y="457997"/>
+                  </a:lnTo>
+                  <a:lnTo>
+                    <a:pt x="1145960" y="469933"/>
+                  </a:lnTo>
+                  <a:lnTo>
+                    <a:pt x="1074337" y="481516"/>
+                  </a:lnTo>
+                  <a:lnTo>
+                    <a:pt x="1002715" y="492755"/>
+                  </a:lnTo>
+                  <a:lnTo>
+                    <a:pt x="931092" y="503662"/>
+                  </a:lnTo>
+                  <a:lnTo>
+                    <a:pt x="859470" y="514245"/>
+                  </a:lnTo>
+                  <a:lnTo>
+                    <a:pt x="787847" y="524515"/>
+                  </a:lnTo>
+                  <a:lnTo>
+                    <a:pt x="716225" y="534480"/>
+                  </a:lnTo>
+                  <a:lnTo>
+                    <a:pt x="644602" y="544150"/>
+                  </a:lnTo>
+                  <a:lnTo>
+                    <a:pt x="572980" y="553534"/>
+                  </a:lnTo>
+                  <a:lnTo>
+                    <a:pt x="501357" y="562639"/>
+                  </a:lnTo>
+                  <a:lnTo>
+                    <a:pt x="429735" y="571475"/>
+                  </a:lnTo>
+                  <a:lnTo>
+                    <a:pt x="358112" y="580049"/>
+                  </a:lnTo>
+                  <a:lnTo>
+                    <a:pt x="286490" y="588369"/>
+                  </a:lnTo>
+                  <a:lnTo>
+                    <a:pt x="214867" y="596442"/>
+                  </a:lnTo>
+                  <a:lnTo>
+                    <a:pt x="143245" y="604277"/>
+                  </a:lnTo>
+                  <a:lnTo>
+                    <a:pt x="71622" y="611879"/>
+                  </a:lnTo>
+                  <a:lnTo>
+                    <a:pt x="0" y="619256"/>
                   </a:lnTo>
                 </a:path>
               </a:pathLst>
@@ -4289,309 +4367,309 @@
           </p:nvSpPr>
           <p:spPr>
             <a:xfrm>
-              <a:off x="1172049" y="3820508"/>
-              <a:ext cx="7090630" cy="1210936"/>
+              <a:off x="1172049" y="4534959"/>
+              <a:ext cx="7090630" cy="239889"/>
             </a:xfrm>
             <a:custGeom>
               <a:avLst/>
               <a:pathLst>
-                <a:path w="7090630" h="1210936">
+                <a:path w="7090630" h="239889">
                   <a:moveTo>
-                    <a:pt x="0" y="1210936"/>
+                    <a:pt x="0" y="239889"/>
                   </a:moveTo>
                   <a:lnTo>
-                    <a:pt x="71622" y="1204592"/>
-                  </a:lnTo>
-                  <a:lnTo>
-                    <a:pt x="143245" y="1198171"/>
-                  </a:lnTo>
-                  <a:lnTo>
-                    <a:pt x="214867" y="1191670"/>
-                  </a:lnTo>
-                  <a:lnTo>
-                    <a:pt x="286490" y="1185091"/>
-                  </a:lnTo>
-                  <a:lnTo>
-                    <a:pt x="358112" y="1178430"/>
-                  </a:lnTo>
-                  <a:lnTo>
-                    <a:pt x="429735" y="1171688"/>
-                  </a:lnTo>
-                  <a:lnTo>
-                    <a:pt x="501357" y="1164863"/>
-                  </a:lnTo>
-                  <a:lnTo>
-                    <a:pt x="572980" y="1157955"/>
-                  </a:lnTo>
-                  <a:lnTo>
-                    <a:pt x="644602" y="1150962"/>
-                  </a:lnTo>
-                  <a:lnTo>
-                    <a:pt x="716225" y="1143884"/>
-                  </a:lnTo>
-                  <a:lnTo>
-                    <a:pt x="787847" y="1136718"/>
-                  </a:lnTo>
-                  <a:lnTo>
-                    <a:pt x="859470" y="1129465"/>
-                  </a:lnTo>
-                  <a:lnTo>
-                    <a:pt x="931092" y="1122123"/>
-                  </a:lnTo>
-                  <a:lnTo>
-                    <a:pt x="1002715" y="1114691"/>
-                  </a:lnTo>
-                  <a:lnTo>
-                    <a:pt x="1074337" y="1107168"/>
-                  </a:lnTo>
-                  <a:lnTo>
-                    <a:pt x="1145960" y="1099553"/>
-                  </a:lnTo>
-                  <a:lnTo>
-                    <a:pt x="1217582" y="1091845"/>
-                  </a:lnTo>
-                  <a:lnTo>
-                    <a:pt x="1289205" y="1084042"/>
-                  </a:lnTo>
-                  <a:lnTo>
-                    <a:pt x="1360827" y="1076143"/>
-                  </a:lnTo>
-                  <a:lnTo>
-                    <a:pt x="1432450" y="1068148"/>
-                  </a:lnTo>
-                  <a:lnTo>
-                    <a:pt x="1504073" y="1060055"/>
-                  </a:lnTo>
-                  <a:lnTo>
-                    <a:pt x="1575695" y="1051862"/>
-                  </a:lnTo>
-                  <a:lnTo>
-                    <a:pt x="1647318" y="1043569"/>
-                  </a:lnTo>
-                  <a:lnTo>
-                    <a:pt x="1718940" y="1035175"/>
-                  </a:lnTo>
-                  <a:lnTo>
-                    <a:pt x="1790563" y="1026678"/>
-                  </a:lnTo>
-                  <a:lnTo>
-                    <a:pt x="1862185" y="1018076"/>
-                  </a:lnTo>
-                  <a:lnTo>
-                    <a:pt x="1933808" y="1009369"/>
-                  </a:lnTo>
-                  <a:lnTo>
-                    <a:pt x="2005430" y="1000556"/>
-                  </a:lnTo>
-                  <a:lnTo>
-                    <a:pt x="2077053" y="991635"/>
-                  </a:lnTo>
-                  <a:lnTo>
-                    <a:pt x="2148675" y="982604"/>
-                  </a:lnTo>
-                  <a:lnTo>
-                    <a:pt x="2220298" y="973463"/>
-                  </a:lnTo>
-                  <a:lnTo>
-                    <a:pt x="2291920" y="964209"/>
-                  </a:lnTo>
-                  <a:lnTo>
-                    <a:pt x="2363543" y="954842"/>
-                  </a:lnTo>
-                  <a:lnTo>
-                    <a:pt x="2435165" y="945361"/>
-                  </a:lnTo>
-                  <a:lnTo>
-                    <a:pt x="2506788" y="935763"/>
-                  </a:lnTo>
-                  <a:lnTo>
-                    <a:pt x="2578410" y="926048"/>
-                  </a:lnTo>
-                  <a:lnTo>
-                    <a:pt x="2650033" y="916214"/>
-                  </a:lnTo>
-                  <a:lnTo>
-                    <a:pt x="2721655" y="906259"/>
-                  </a:lnTo>
-                  <a:lnTo>
-                    <a:pt x="2793278" y="896182"/>
-                  </a:lnTo>
-                  <a:lnTo>
-                    <a:pt x="2864901" y="885982"/>
-                  </a:lnTo>
-                  <a:lnTo>
-                    <a:pt x="2936523" y="875656"/>
-                  </a:lnTo>
-                  <a:lnTo>
-                    <a:pt x="3008146" y="865205"/>
-                  </a:lnTo>
-                  <a:lnTo>
-                    <a:pt x="3079768" y="854625"/>
-                  </a:lnTo>
-                  <a:lnTo>
-                    <a:pt x="3151391" y="843916"/>
-                  </a:lnTo>
-                  <a:lnTo>
-                    <a:pt x="3223013" y="833075"/>
-                  </a:lnTo>
-                  <a:lnTo>
-                    <a:pt x="3294636" y="822101"/>
-                  </a:lnTo>
-                  <a:lnTo>
-                    <a:pt x="3366258" y="810994"/>
-                  </a:lnTo>
-                  <a:lnTo>
-                    <a:pt x="3437881" y="799750"/>
-                  </a:lnTo>
-                  <a:lnTo>
-                    <a:pt x="3509503" y="788368"/>
-                  </a:lnTo>
-                  <a:lnTo>
-                    <a:pt x="3581126" y="776847"/>
-                  </a:lnTo>
-                  <a:lnTo>
-                    <a:pt x="3652748" y="765184"/>
-                  </a:lnTo>
-                  <a:lnTo>
-                    <a:pt x="3724371" y="753379"/>
-                  </a:lnTo>
-                  <a:lnTo>
-                    <a:pt x="3795993" y="741429"/>
-                  </a:lnTo>
-                  <a:lnTo>
-                    <a:pt x="3867616" y="729333"/>
-                  </a:lnTo>
-                  <a:lnTo>
-                    <a:pt x="3939238" y="717088"/>
-                  </a:lnTo>
-                  <a:lnTo>
-                    <a:pt x="4010861" y="704694"/>
-                  </a:lnTo>
-                  <a:lnTo>
-                    <a:pt x="4082483" y="692147"/>
-                  </a:lnTo>
-                  <a:lnTo>
-                    <a:pt x="4154106" y="679447"/>
-                  </a:lnTo>
-                  <a:lnTo>
-                    <a:pt x="4225729" y="666591"/>
-                  </a:lnTo>
-                  <a:lnTo>
-                    <a:pt x="4297351" y="653578"/>
-                  </a:lnTo>
-                  <a:lnTo>
-                    <a:pt x="4368974" y="640405"/>
-                  </a:lnTo>
-                  <a:lnTo>
-                    <a:pt x="4440596" y="627071"/>
-                  </a:lnTo>
-                  <a:lnTo>
-                    <a:pt x="4512219" y="613574"/>
-                  </a:lnTo>
-                  <a:lnTo>
-                    <a:pt x="4583841" y="599911"/>
-                  </a:lnTo>
-                  <a:lnTo>
-                    <a:pt x="4655464" y="586081"/>
-                  </a:lnTo>
-                  <a:lnTo>
-                    <a:pt x="4727086" y="572081"/>
-                  </a:lnTo>
-                  <a:lnTo>
-                    <a:pt x="4798709" y="557910"/>
-                  </a:lnTo>
-                  <a:lnTo>
-                    <a:pt x="4870331" y="543565"/>
-                  </a:lnTo>
-                  <a:lnTo>
-                    <a:pt x="4941954" y="529044"/>
-                  </a:lnTo>
-                  <a:lnTo>
-                    <a:pt x="5013576" y="514346"/>
-                  </a:lnTo>
-                  <a:lnTo>
-                    <a:pt x="5085199" y="499467"/>
-                  </a:lnTo>
-                  <a:lnTo>
-                    <a:pt x="5156821" y="484406"/>
-                  </a:lnTo>
-                  <a:lnTo>
-                    <a:pt x="5228444" y="469161"/>
-                  </a:lnTo>
-                  <a:lnTo>
-                    <a:pt x="5300066" y="453728"/>
-                  </a:lnTo>
-                  <a:lnTo>
-                    <a:pt x="5371689" y="438107"/>
-                  </a:lnTo>
-                  <a:lnTo>
-                    <a:pt x="5443311" y="422294"/>
-                  </a:lnTo>
-                  <a:lnTo>
-                    <a:pt x="5514934" y="406288"/>
-                  </a:lnTo>
-                  <a:lnTo>
-                    <a:pt x="5586557" y="390085"/>
-                  </a:lnTo>
-                  <a:lnTo>
-                    <a:pt x="5658179" y="373684"/>
-                  </a:lnTo>
-                  <a:lnTo>
-                    <a:pt x="5729802" y="357082"/>
-                  </a:lnTo>
-                  <a:lnTo>
-                    <a:pt x="5801424" y="340277"/>
-                  </a:lnTo>
-                  <a:lnTo>
-                    <a:pt x="5873047" y="323265"/>
-                  </a:lnTo>
-                  <a:lnTo>
-                    <a:pt x="5944669" y="306046"/>
-                  </a:lnTo>
-                  <a:lnTo>
-                    <a:pt x="6016292" y="288615"/>
-                  </a:lnTo>
-                  <a:lnTo>
-                    <a:pt x="6087914" y="270970"/>
-                  </a:lnTo>
-                  <a:lnTo>
-                    <a:pt x="6159537" y="253110"/>
-                  </a:lnTo>
-                  <a:lnTo>
-                    <a:pt x="6231159" y="235031"/>
-                  </a:lnTo>
-                  <a:lnTo>
-                    <a:pt x="6302782" y="216730"/>
-                  </a:lnTo>
-                  <a:lnTo>
-                    <a:pt x="6374404" y="198205"/>
-                  </a:lnTo>
-                  <a:lnTo>
-                    <a:pt x="6446027" y="179452"/>
-                  </a:lnTo>
-                  <a:lnTo>
-                    <a:pt x="6517649" y="160471"/>
-                  </a:lnTo>
-                  <a:lnTo>
-                    <a:pt x="6589272" y="141256"/>
-                  </a:lnTo>
-                  <a:lnTo>
-                    <a:pt x="6660894" y="121806"/>
-                  </a:lnTo>
-                  <a:lnTo>
-                    <a:pt x="6732517" y="102118"/>
-                  </a:lnTo>
-                  <a:lnTo>
-                    <a:pt x="6804139" y="82189"/>
-                  </a:lnTo>
-                  <a:lnTo>
-                    <a:pt x="6875762" y="62015"/>
-                  </a:lnTo>
-                  <a:lnTo>
-                    <a:pt x="6947385" y="41595"/>
-                  </a:lnTo>
-                  <a:lnTo>
-                    <a:pt x="7019007" y="20924"/>
+                    <a:pt x="71622" y="237775"/>
+                  </a:lnTo>
+                  <a:lnTo>
+                    <a:pt x="143245" y="235655"/>
+                  </a:lnTo>
+                  <a:lnTo>
+                    <a:pt x="214867" y="233530"/>
+                  </a:lnTo>
+                  <a:lnTo>
+                    <a:pt x="286490" y="231399"/>
+                  </a:lnTo>
+                  <a:lnTo>
+                    <a:pt x="358112" y="229262"/>
+                  </a:lnTo>
+                  <a:lnTo>
+                    <a:pt x="429735" y="227119"/>
+                  </a:lnTo>
+                  <a:lnTo>
+                    <a:pt x="501357" y="224971"/>
+                  </a:lnTo>
+                  <a:lnTo>
+                    <a:pt x="572980" y="222816"/>
+                  </a:lnTo>
+                  <a:lnTo>
+                    <a:pt x="644602" y="220656"/>
+                  </a:lnTo>
+                  <a:lnTo>
+                    <a:pt x="716225" y="218490"/>
+                  </a:lnTo>
+                  <a:lnTo>
+                    <a:pt x="787847" y="216318"/>
+                  </a:lnTo>
+                  <a:lnTo>
+                    <a:pt x="859470" y="214140"/>
+                  </a:lnTo>
+                  <a:lnTo>
+                    <a:pt x="931092" y="211956"/>
+                  </a:lnTo>
+                  <a:lnTo>
+                    <a:pt x="1002715" y="209766"/>
+                  </a:lnTo>
+                  <a:lnTo>
+                    <a:pt x="1074337" y="207570"/>
+                  </a:lnTo>
+                  <a:lnTo>
+                    <a:pt x="1145960" y="205368"/>
+                  </a:lnTo>
+                  <a:lnTo>
+                    <a:pt x="1217582" y="203160"/>
+                  </a:lnTo>
+                  <a:lnTo>
+                    <a:pt x="1289205" y="200946"/>
+                  </a:lnTo>
+                  <a:lnTo>
+                    <a:pt x="1360827" y="198726"/>
+                  </a:lnTo>
+                  <a:lnTo>
+                    <a:pt x="1432450" y="196500"/>
+                  </a:lnTo>
+                  <a:lnTo>
+                    <a:pt x="1504073" y="194268"/>
+                  </a:lnTo>
+                  <a:lnTo>
+                    <a:pt x="1575695" y="192029"/>
+                  </a:lnTo>
+                  <a:lnTo>
+                    <a:pt x="1647318" y="189785"/>
+                  </a:lnTo>
+                  <a:lnTo>
+                    <a:pt x="1718940" y="187534"/>
+                  </a:lnTo>
+                  <a:lnTo>
+                    <a:pt x="1790563" y="185278"/>
+                  </a:lnTo>
+                  <a:lnTo>
+                    <a:pt x="1862185" y="183015"/>
+                  </a:lnTo>
+                  <a:lnTo>
+                    <a:pt x="1933808" y="180746"/>
+                  </a:lnTo>
+                  <a:lnTo>
+                    <a:pt x="2005430" y="178471"/>
+                  </a:lnTo>
+                  <a:lnTo>
+                    <a:pt x="2077053" y="176189"/>
+                  </a:lnTo>
+                  <a:lnTo>
+                    <a:pt x="2148675" y="173902"/>
+                  </a:lnTo>
+                  <a:lnTo>
+                    <a:pt x="2220298" y="171608"/>
+                  </a:lnTo>
+                  <a:lnTo>
+                    <a:pt x="2291920" y="169308"/>
+                  </a:lnTo>
+                  <a:lnTo>
+                    <a:pt x="2363543" y="167001"/>
+                  </a:lnTo>
+                  <a:lnTo>
+                    <a:pt x="2435165" y="164689"/>
+                  </a:lnTo>
+                  <a:lnTo>
+                    <a:pt x="2506788" y="162370"/>
+                  </a:lnTo>
+                  <a:lnTo>
+                    <a:pt x="2578410" y="160044"/>
+                  </a:lnTo>
+                  <a:lnTo>
+                    <a:pt x="2650033" y="157713"/>
+                  </a:lnTo>
+                  <a:lnTo>
+                    <a:pt x="2721655" y="155375"/>
+                  </a:lnTo>
+                  <a:lnTo>
+                    <a:pt x="2793278" y="153030"/>
+                  </a:lnTo>
+                  <a:lnTo>
+                    <a:pt x="2864901" y="150679"/>
+                  </a:lnTo>
+                  <a:lnTo>
+                    <a:pt x="2936523" y="148322"/>
+                  </a:lnTo>
+                  <a:lnTo>
+                    <a:pt x="3008146" y="145959"/>
+                  </a:lnTo>
+                  <a:lnTo>
+                    <a:pt x="3079768" y="143588"/>
+                  </a:lnTo>
+                  <a:lnTo>
+                    <a:pt x="3151391" y="141212"/>
+                  </a:lnTo>
+                  <a:lnTo>
+                    <a:pt x="3223013" y="138829"/>
+                  </a:lnTo>
+                  <a:lnTo>
+                    <a:pt x="3294636" y="136439"/>
+                  </a:lnTo>
+                  <a:lnTo>
+                    <a:pt x="3366258" y="134043"/>
+                  </a:lnTo>
+                  <a:lnTo>
+                    <a:pt x="3437881" y="131640"/>
+                  </a:lnTo>
+                  <a:lnTo>
+                    <a:pt x="3509503" y="129231"/>
+                  </a:lnTo>
+                  <a:lnTo>
+                    <a:pt x="3581126" y="126815"/>
+                  </a:lnTo>
+                  <a:lnTo>
+                    <a:pt x="3652748" y="124393"/>
+                  </a:lnTo>
+                  <a:lnTo>
+                    <a:pt x="3724371" y="121964"/>
+                  </a:lnTo>
+                  <a:lnTo>
+                    <a:pt x="3795993" y="119528"/>
+                  </a:lnTo>
+                  <a:lnTo>
+                    <a:pt x="3867616" y="117086"/>
+                  </a:lnTo>
+                  <a:lnTo>
+                    <a:pt x="3939238" y="114637"/>
+                  </a:lnTo>
+                  <a:lnTo>
+                    <a:pt x="4010861" y="112182"/>
+                  </a:lnTo>
+                  <a:lnTo>
+                    <a:pt x="4082483" y="109719"/>
+                  </a:lnTo>
+                  <a:lnTo>
+                    <a:pt x="4154106" y="107250"/>
+                  </a:lnTo>
+                  <a:lnTo>
+                    <a:pt x="4225729" y="104774"/>
+                  </a:lnTo>
+                  <a:lnTo>
+                    <a:pt x="4297351" y="102292"/>
+                  </a:lnTo>
+                  <a:lnTo>
+                    <a:pt x="4368974" y="99803"/>
+                  </a:lnTo>
+                  <a:lnTo>
+                    <a:pt x="4440596" y="97306"/>
+                  </a:lnTo>
+                  <a:lnTo>
+                    <a:pt x="4512219" y="94804"/>
+                  </a:lnTo>
+                  <a:lnTo>
+                    <a:pt x="4583841" y="92294"/>
+                  </a:lnTo>
+                  <a:lnTo>
+                    <a:pt x="4655464" y="89777"/>
+                  </a:lnTo>
+                  <a:lnTo>
+                    <a:pt x="4727086" y="87254"/>
+                  </a:lnTo>
+                  <a:lnTo>
+                    <a:pt x="4798709" y="84723"/>
+                  </a:lnTo>
+                  <a:lnTo>
+                    <a:pt x="4870331" y="82186"/>
+                  </a:lnTo>
+                  <a:lnTo>
+                    <a:pt x="4941954" y="79642"/>
+                  </a:lnTo>
+                  <a:lnTo>
+                    <a:pt x="5013576" y="77091"/>
+                  </a:lnTo>
+                  <a:lnTo>
+                    <a:pt x="5085199" y="74533"/>
+                  </a:lnTo>
+                  <a:lnTo>
+                    <a:pt x="5156821" y="71967"/>
+                  </a:lnTo>
+                  <a:lnTo>
+                    <a:pt x="5228444" y="69395"/>
+                  </a:lnTo>
+                  <a:lnTo>
+                    <a:pt x="5300066" y="66816"/>
+                  </a:lnTo>
+                  <a:lnTo>
+                    <a:pt x="5371689" y="64230"/>
+                  </a:lnTo>
+                  <a:lnTo>
+                    <a:pt x="5443311" y="61637"/>
+                  </a:lnTo>
+                  <a:lnTo>
+                    <a:pt x="5514934" y="59037"/>
+                  </a:lnTo>
+                  <a:lnTo>
+                    <a:pt x="5586557" y="56429"/>
+                  </a:lnTo>
+                  <a:lnTo>
+                    <a:pt x="5658179" y="53815"/>
+                  </a:lnTo>
+                  <a:lnTo>
+                    <a:pt x="5729802" y="51193"/>
+                  </a:lnTo>
+                  <a:lnTo>
+                    <a:pt x="5801424" y="48564"/>
+                  </a:lnTo>
+                  <a:lnTo>
+                    <a:pt x="5873047" y="45928"/>
+                  </a:lnTo>
+                  <a:lnTo>
+                    <a:pt x="5944669" y="43285"/>
+                  </a:lnTo>
+                  <a:lnTo>
+                    <a:pt x="6016292" y="40635"/>
+                  </a:lnTo>
+                  <a:lnTo>
+                    <a:pt x="6087914" y="37977"/>
+                  </a:lnTo>
+                  <a:lnTo>
+                    <a:pt x="6159537" y="35312"/>
+                  </a:lnTo>
+                  <a:lnTo>
+                    <a:pt x="6231159" y="32640"/>
+                  </a:lnTo>
+                  <a:lnTo>
+                    <a:pt x="6302782" y="29961"/>
+                  </a:lnTo>
+                  <a:lnTo>
+                    <a:pt x="6374404" y="27274"/>
+                  </a:lnTo>
+                  <a:lnTo>
+                    <a:pt x="6446027" y="24580"/>
+                  </a:lnTo>
+                  <a:lnTo>
+                    <a:pt x="6517649" y="21878"/>
+                  </a:lnTo>
+                  <a:lnTo>
+                    <a:pt x="6589272" y="19169"/>
+                  </a:lnTo>
+                  <a:lnTo>
+                    <a:pt x="6660894" y="16453"/>
+                  </a:lnTo>
+                  <a:lnTo>
+                    <a:pt x="6732517" y="13730"/>
+                  </a:lnTo>
+                  <a:lnTo>
+                    <a:pt x="6804139" y="10999"/>
+                  </a:lnTo>
+                  <a:lnTo>
+                    <a:pt x="6875762" y="8260"/>
+                  </a:lnTo>
+                  <a:lnTo>
+                    <a:pt x="6947385" y="5514"/>
+                  </a:lnTo>
+                  <a:lnTo>
+                    <a:pt x="7019007" y="2761"/>
                   </a:lnTo>
                   <a:lnTo>
                     <a:pt x="7090630" y="0"/>

--- a/docs/plots/carbo/jx_carbo_linsubhr_dosedisc_anemia3.pptx
+++ b/docs/plots/carbo/jx_carbo_linsubhr_dosedisc_anemia3.pptx
@@ -3132,590 +3132,569 @@
           <p:spPr>
             <a:xfrm>
               <a:off x="1172049" y="1896563"/>
-              <a:ext cx="7090630" cy="3435851"/>
+              <a:ext cx="7090630" cy="3459547"/>
             </a:xfrm>
             <a:custGeom>
               <a:avLst/>
               <a:pathLst>
-                <a:path w="7090630" h="3435851">
+                <a:path w="7090630" h="3459547">
                   <a:moveTo>
-                    <a:pt x="0" y="1170717"/>
+                    <a:pt x="0" y="2075172"/>
                   </a:moveTo>
                   <a:lnTo>
-                    <a:pt x="71622" y="1231088"/>
-                  </a:lnTo>
-                  <a:lnTo>
-                    <a:pt x="143245" y="1289989"/>
-                  </a:lnTo>
-                  <a:lnTo>
-                    <a:pt x="214867" y="1347459"/>
-                  </a:lnTo>
-                  <a:lnTo>
-                    <a:pt x="286490" y="1403530"/>
-                  </a:lnTo>
-                  <a:lnTo>
-                    <a:pt x="358112" y="1458238"/>
-                  </a:lnTo>
-                  <a:lnTo>
-                    <a:pt x="429735" y="1511614"/>
-                  </a:lnTo>
-                  <a:lnTo>
-                    <a:pt x="501357" y="1563693"/>
-                  </a:lnTo>
-                  <a:lnTo>
-                    <a:pt x="572980" y="1614504"/>
-                  </a:lnTo>
-                  <a:lnTo>
-                    <a:pt x="644602" y="1664080"/>
-                  </a:lnTo>
-                  <a:lnTo>
-                    <a:pt x="716225" y="1712450"/>
-                  </a:lnTo>
-                  <a:lnTo>
-                    <a:pt x="787847" y="1759643"/>
-                  </a:lnTo>
-                  <a:lnTo>
-                    <a:pt x="859470" y="1805689"/>
-                  </a:lnTo>
-                  <a:lnTo>
-                    <a:pt x="931092" y="1850614"/>
-                  </a:lnTo>
-                  <a:lnTo>
-                    <a:pt x="1002715" y="1894447"/>
-                  </a:lnTo>
-                  <a:lnTo>
-                    <a:pt x="1074337" y="1937213"/>
-                  </a:lnTo>
-                  <a:lnTo>
-                    <a:pt x="1145960" y="1978939"/>
-                  </a:lnTo>
-                  <a:lnTo>
-                    <a:pt x="1217582" y="2019650"/>
-                  </a:lnTo>
-                  <a:lnTo>
-                    <a:pt x="1289205" y="2059371"/>
-                  </a:lnTo>
-                  <a:lnTo>
-                    <a:pt x="1360827" y="2098126"/>
-                  </a:lnTo>
-                  <a:lnTo>
-                    <a:pt x="1432450" y="2135938"/>
-                  </a:lnTo>
-                  <a:lnTo>
-                    <a:pt x="1504073" y="2172831"/>
-                  </a:lnTo>
-                  <a:lnTo>
-                    <a:pt x="1575695" y="2208826"/>
-                  </a:lnTo>
-                  <a:lnTo>
-                    <a:pt x="1647318" y="2243945"/>
-                  </a:lnTo>
-                  <a:lnTo>
-                    <a:pt x="1718940" y="2278210"/>
-                  </a:lnTo>
-                  <a:lnTo>
-                    <a:pt x="1790563" y="2311642"/>
-                  </a:lnTo>
-                  <a:lnTo>
-                    <a:pt x="1862185" y="2344261"/>
-                  </a:lnTo>
-                  <a:lnTo>
-                    <a:pt x="1933808" y="2376086"/>
-                  </a:lnTo>
-                  <a:lnTo>
-                    <a:pt x="2005430" y="2407137"/>
-                  </a:lnTo>
-                  <a:lnTo>
-                    <a:pt x="2077053" y="2437433"/>
-                  </a:lnTo>
-                  <a:lnTo>
-                    <a:pt x="2148675" y="2466991"/>
-                  </a:lnTo>
-                  <a:lnTo>
-                    <a:pt x="2220298" y="2495831"/>
-                  </a:lnTo>
-                  <a:lnTo>
-                    <a:pt x="2291920" y="2523969"/>
-                  </a:lnTo>
-                  <a:lnTo>
-                    <a:pt x="2363543" y="2551423"/>
-                  </a:lnTo>
-                  <a:lnTo>
-                    <a:pt x="2435165" y="2578209"/>
-                  </a:lnTo>
-                  <a:lnTo>
-                    <a:pt x="2506788" y="2604344"/>
-                  </a:lnTo>
-                  <a:lnTo>
-                    <a:pt x="2578410" y="2629843"/>
-                  </a:lnTo>
-                  <a:lnTo>
-                    <a:pt x="2650033" y="2654721"/>
-                  </a:lnTo>
-                  <a:lnTo>
-                    <a:pt x="2721655" y="2678995"/>
-                  </a:lnTo>
-                  <a:lnTo>
-                    <a:pt x="2793278" y="2702678"/>
-                  </a:lnTo>
-                  <a:lnTo>
-                    <a:pt x="2864901" y="2725785"/>
-                  </a:lnTo>
-                  <a:lnTo>
-                    <a:pt x="2936523" y="2748330"/>
-                  </a:lnTo>
-                  <a:lnTo>
-                    <a:pt x="3008146" y="2770326"/>
-                  </a:lnTo>
-                  <a:lnTo>
-                    <a:pt x="3079768" y="2772069"/>
-                  </a:lnTo>
-                  <a:lnTo>
-                    <a:pt x="3151391" y="2745182"/>
-                  </a:lnTo>
-                  <a:lnTo>
-                    <a:pt x="3223013" y="2717474"/>
-                  </a:lnTo>
-                  <a:lnTo>
-                    <a:pt x="3294636" y="2688920"/>
-                  </a:lnTo>
-                  <a:lnTo>
-                    <a:pt x="3366258" y="2659494"/>
-                  </a:lnTo>
-                  <a:lnTo>
-                    <a:pt x="3437881" y="2629170"/>
-                  </a:lnTo>
-                  <a:lnTo>
-                    <a:pt x="3509503" y="2597919"/>
-                  </a:lnTo>
-                  <a:lnTo>
-                    <a:pt x="3581126" y="2565715"/>
-                  </a:lnTo>
-                  <a:lnTo>
-                    <a:pt x="3652748" y="2532527"/>
-                  </a:lnTo>
-                  <a:lnTo>
-                    <a:pt x="3724371" y="2498326"/>
-                  </a:lnTo>
-                  <a:lnTo>
-                    <a:pt x="3795993" y="2463081"/>
-                  </a:lnTo>
-                  <a:lnTo>
-                    <a:pt x="3867616" y="2426759"/>
-                  </a:lnTo>
-                  <a:lnTo>
-                    <a:pt x="3939238" y="2389329"/>
-                  </a:lnTo>
-                  <a:lnTo>
-                    <a:pt x="4010861" y="2350756"/>
-                  </a:lnTo>
-                  <a:lnTo>
-                    <a:pt x="4082483" y="2311004"/>
-                  </a:lnTo>
-                  <a:lnTo>
-                    <a:pt x="4154106" y="2270039"/>
-                  </a:lnTo>
-                  <a:lnTo>
-                    <a:pt x="4225729" y="2227824"/>
-                  </a:lnTo>
-                  <a:lnTo>
-                    <a:pt x="4297351" y="2184319"/>
-                  </a:lnTo>
-                  <a:lnTo>
-                    <a:pt x="4368974" y="2139486"/>
-                  </a:lnTo>
-                  <a:lnTo>
-                    <a:pt x="4440596" y="2093284"/>
-                  </a:lnTo>
-                  <a:lnTo>
-                    <a:pt x="4512219" y="2045671"/>
-                  </a:lnTo>
-                  <a:lnTo>
-                    <a:pt x="4583841" y="1996605"/>
-                  </a:lnTo>
-                  <a:lnTo>
-                    <a:pt x="4655464" y="1946040"/>
-                  </a:lnTo>
-                  <a:lnTo>
-                    <a:pt x="4727086" y="1893932"/>
-                  </a:lnTo>
-                  <a:lnTo>
-                    <a:pt x="4798709" y="1840232"/>
-                  </a:lnTo>
-                  <a:lnTo>
-                    <a:pt x="4870331" y="1784893"/>
-                  </a:lnTo>
-                  <a:lnTo>
-                    <a:pt x="4941954" y="1727864"/>
-                  </a:lnTo>
-                  <a:lnTo>
-                    <a:pt x="5013576" y="1669094"/>
-                  </a:lnTo>
-                  <a:lnTo>
-                    <a:pt x="5085199" y="1608529"/>
-                  </a:lnTo>
-                  <a:lnTo>
-                    <a:pt x="5156821" y="1546115"/>
-                  </a:lnTo>
-                  <a:lnTo>
-                    <a:pt x="5228444" y="1481796"/>
-                  </a:lnTo>
-                  <a:lnTo>
-                    <a:pt x="5300066" y="1415512"/>
-                  </a:lnTo>
-                  <a:lnTo>
-                    <a:pt x="5371689" y="1347205"/>
-                  </a:lnTo>
-                  <a:lnTo>
-                    <a:pt x="5443311" y="1276812"/>
-                  </a:lnTo>
-                  <a:lnTo>
-                    <a:pt x="5514934" y="1204270"/>
-                  </a:lnTo>
-                  <a:lnTo>
-                    <a:pt x="5586557" y="1129512"/>
-                  </a:lnTo>
-                  <a:lnTo>
-                    <a:pt x="5658179" y="1052472"/>
-                  </a:lnTo>
-                  <a:lnTo>
-                    <a:pt x="5729802" y="973080"/>
-                  </a:lnTo>
-                  <a:lnTo>
-                    <a:pt x="5801424" y="891264"/>
-                  </a:lnTo>
-                  <a:lnTo>
-                    <a:pt x="5873047" y="806949"/>
-                  </a:lnTo>
-                  <a:lnTo>
-                    <a:pt x="5944669" y="720060"/>
-                  </a:lnTo>
-                  <a:lnTo>
-                    <a:pt x="6016292" y="630518"/>
-                  </a:lnTo>
-                  <a:lnTo>
-                    <a:pt x="6087914" y="538242"/>
-                  </a:lnTo>
-                  <a:lnTo>
-                    <a:pt x="6159537" y="443149"/>
-                  </a:lnTo>
-                  <a:lnTo>
-                    <a:pt x="6231159" y="345152"/>
-                  </a:lnTo>
-                  <a:lnTo>
-                    <a:pt x="6302782" y="244162"/>
-                  </a:lnTo>
-                  <a:lnTo>
-                    <a:pt x="6374404" y="140090"/>
-                  </a:lnTo>
-                  <a:lnTo>
-                    <a:pt x="6446027" y="32839"/>
-                  </a:lnTo>
-                  <a:lnTo>
-                    <a:pt x="6467308" y="0"/>
+                    <a:pt x="71622" y="2097076"/>
+                  </a:lnTo>
+                  <a:lnTo>
+                    <a:pt x="143245" y="2118675"/>
+                  </a:lnTo>
+                  <a:lnTo>
+                    <a:pt x="214867" y="2139974"/>
+                  </a:lnTo>
+                  <a:lnTo>
+                    <a:pt x="286490" y="2160978"/>
+                  </a:lnTo>
+                  <a:lnTo>
+                    <a:pt x="358112" y="2181690"/>
+                  </a:lnTo>
+                  <a:lnTo>
+                    <a:pt x="429735" y="2202114"/>
+                  </a:lnTo>
+                  <a:lnTo>
+                    <a:pt x="501357" y="2222255"/>
+                  </a:lnTo>
+                  <a:lnTo>
+                    <a:pt x="572980" y="2242116"/>
+                  </a:lnTo>
+                  <a:lnTo>
+                    <a:pt x="644602" y="2261702"/>
+                  </a:lnTo>
+                  <a:lnTo>
+                    <a:pt x="716225" y="2281015"/>
+                  </a:lnTo>
+                  <a:lnTo>
+                    <a:pt x="787847" y="2300060"/>
+                  </a:lnTo>
+                  <a:lnTo>
+                    <a:pt x="859470" y="2318841"/>
+                  </a:lnTo>
+                  <a:lnTo>
+                    <a:pt x="931092" y="2337361"/>
+                  </a:lnTo>
+                  <a:lnTo>
+                    <a:pt x="1002715" y="2355624"/>
+                  </a:lnTo>
+                  <a:lnTo>
+                    <a:pt x="1074337" y="2373634"/>
+                  </a:lnTo>
+                  <a:lnTo>
+                    <a:pt x="1145960" y="2391393"/>
+                  </a:lnTo>
+                  <a:lnTo>
+                    <a:pt x="1217582" y="2408905"/>
+                  </a:lnTo>
+                  <a:lnTo>
+                    <a:pt x="1289205" y="2426175"/>
+                  </a:lnTo>
+                  <a:lnTo>
+                    <a:pt x="1360827" y="2443205"/>
+                  </a:lnTo>
+                  <a:lnTo>
+                    <a:pt x="1432450" y="2459998"/>
+                  </a:lnTo>
+                  <a:lnTo>
+                    <a:pt x="1504073" y="2476558"/>
+                  </a:lnTo>
+                  <a:lnTo>
+                    <a:pt x="1575695" y="2492888"/>
+                  </a:lnTo>
+                  <a:lnTo>
+                    <a:pt x="1647318" y="2508991"/>
+                  </a:lnTo>
+                  <a:lnTo>
+                    <a:pt x="1718940" y="2524871"/>
+                  </a:lnTo>
+                  <a:lnTo>
+                    <a:pt x="1790563" y="2540530"/>
+                  </a:lnTo>
+                  <a:lnTo>
+                    <a:pt x="1862185" y="2555972"/>
+                  </a:lnTo>
+                  <a:lnTo>
+                    <a:pt x="1933808" y="2571200"/>
+                  </a:lnTo>
+                  <a:lnTo>
+                    <a:pt x="2005430" y="2586216"/>
+                  </a:lnTo>
+                  <a:lnTo>
+                    <a:pt x="2077053" y="2601023"/>
+                  </a:lnTo>
+                  <a:lnTo>
+                    <a:pt x="2148675" y="2615625"/>
+                  </a:lnTo>
+                  <a:lnTo>
+                    <a:pt x="2220298" y="2630024"/>
+                  </a:lnTo>
+                  <a:lnTo>
+                    <a:pt x="2291920" y="2644224"/>
+                  </a:lnTo>
+                  <a:lnTo>
+                    <a:pt x="2363543" y="2658226"/>
+                  </a:lnTo>
+                  <a:lnTo>
+                    <a:pt x="2435165" y="2672033"/>
+                  </a:lnTo>
+                  <a:lnTo>
+                    <a:pt x="2506788" y="2685649"/>
+                  </a:lnTo>
+                  <a:lnTo>
+                    <a:pt x="2578410" y="2699076"/>
+                  </a:lnTo>
+                  <a:lnTo>
+                    <a:pt x="2650033" y="2712316"/>
+                  </a:lnTo>
+                  <a:lnTo>
+                    <a:pt x="2721655" y="2725373"/>
+                  </a:lnTo>
+                  <a:lnTo>
+                    <a:pt x="2793278" y="2738248"/>
+                  </a:lnTo>
+                  <a:lnTo>
+                    <a:pt x="2864901" y="2750945"/>
+                  </a:lnTo>
+                  <a:lnTo>
+                    <a:pt x="2936523" y="2763465"/>
+                  </a:lnTo>
+                  <a:lnTo>
+                    <a:pt x="3008146" y="2775811"/>
+                  </a:lnTo>
+                  <a:lnTo>
+                    <a:pt x="3079768" y="2770148"/>
+                  </a:lnTo>
+                  <a:lnTo>
+                    <a:pt x="3151391" y="2738404"/>
+                  </a:lnTo>
+                  <a:lnTo>
+                    <a:pt x="3223013" y="2705518"/>
+                  </a:lnTo>
+                  <a:lnTo>
+                    <a:pt x="3294636" y="2671450"/>
+                  </a:lnTo>
+                  <a:lnTo>
+                    <a:pt x="3366258" y="2636156"/>
+                  </a:lnTo>
+                  <a:lnTo>
+                    <a:pt x="3437881" y="2599592"/>
+                  </a:lnTo>
+                  <a:lnTo>
+                    <a:pt x="3509503" y="2561713"/>
+                  </a:lnTo>
+                  <a:lnTo>
+                    <a:pt x="3581126" y="2522472"/>
+                  </a:lnTo>
+                  <a:lnTo>
+                    <a:pt x="3652748" y="2481819"/>
+                  </a:lnTo>
+                  <a:lnTo>
+                    <a:pt x="3724371" y="2439703"/>
+                  </a:lnTo>
+                  <a:lnTo>
+                    <a:pt x="3795993" y="2396073"/>
+                  </a:lnTo>
+                  <a:lnTo>
+                    <a:pt x="3867616" y="2350874"/>
+                  </a:lnTo>
+                  <a:lnTo>
+                    <a:pt x="3939238" y="2304048"/>
+                  </a:lnTo>
+                  <a:lnTo>
+                    <a:pt x="4010861" y="2255539"/>
+                  </a:lnTo>
+                  <a:lnTo>
+                    <a:pt x="4082483" y="2205284"/>
+                  </a:lnTo>
+                  <a:lnTo>
+                    <a:pt x="4154106" y="2153221"/>
+                  </a:lnTo>
+                  <a:lnTo>
+                    <a:pt x="4225729" y="2099286"/>
+                  </a:lnTo>
+                  <a:lnTo>
+                    <a:pt x="4297351" y="2043411"/>
+                  </a:lnTo>
+                  <a:lnTo>
+                    <a:pt x="4368974" y="1985526"/>
+                  </a:lnTo>
+                  <a:lnTo>
+                    <a:pt x="4440596" y="1925559"/>
+                  </a:lnTo>
+                  <a:lnTo>
+                    <a:pt x="4512219" y="1863435"/>
+                  </a:lnTo>
+                  <a:lnTo>
+                    <a:pt x="4583841" y="1799076"/>
+                  </a:lnTo>
+                  <a:lnTo>
+                    <a:pt x="4655464" y="1732402"/>
+                  </a:lnTo>
+                  <a:lnTo>
+                    <a:pt x="4727086" y="1663330"/>
+                  </a:lnTo>
+                  <a:lnTo>
+                    <a:pt x="4798709" y="1591773"/>
+                  </a:lnTo>
+                  <a:lnTo>
+                    <a:pt x="4870331" y="1517642"/>
+                  </a:lnTo>
+                  <a:lnTo>
+                    <a:pt x="4941954" y="1440845"/>
+                  </a:lnTo>
+                  <a:lnTo>
+                    <a:pt x="5013576" y="1361285"/>
+                  </a:lnTo>
+                  <a:lnTo>
+                    <a:pt x="5085199" y="1278864"/>
+                  </a:lnTo>
+                  <a:lnTo>
+                    <a:pt x="5156821" y="1193477"/>
+                  </a:lnTo>
+                  <a:lnTo>
+                    <a:pt x="5228444" y="1105020"/>
+                  </a:lnTo>
+                  <a:lnTo>
+                    <a:pt x="5300066" y="1013380"/>
+                  </a:lnTo>
+                  <a:lnTo>
+                    <a:pt x="5371689" y="918444"/>
+                  </a:lnTo>
+                  <a:lnTo>
+                    <a:pt x="5443311" y="820094"/>
+                  </a:lnTo>
+                  <a:lnTo>
+                    <a:pt x="5514934" y="718205"/>
+                  </a:lnTo>
+                  <a:lnTo>
+                    <a:pt x="5586557" y="612652"/>
+                  </a:lnTo>
+                  <a:lnTo>
+                    <a:pt x="5658179" y="503301"/>
+                  </a:lnTo>
+                  <a:lnTo>
+                    <a:pt x="5729802" y="390018"/>
+                  </a:lnTo>
+                  <a:lnTo>
+                    <a:pt x="5801424" y="272659"/>
+                  </a:lnTo>
+                  <a:lnTo>
+                    <a:pt x="5873047" y="151079"/>
+                  </a:lnTo>
+                  <a:lnTo>
+                    <a:pt x="5944669" y="25126"/>
+                  </a:lnTo>
+                  <a:lnTo>
+                    <a:pt x="5958461" y="0"/>
                   </a:lnTo>
                   <a:lnTo>
                     <a:pt x="7090630" y="0"/>
                   </a:lnTo>
                   <a:lnTo>
-                    <a:pt x="7090630" y="3435851"/>
-                  </a:lnTo>
-                  <a:lnTo>
-                    <a:pt x="7019007" y="3430446"/>
-                  </a:lnTo>
-                  <a:lnTo>
-                    <a:pt x="6947385" y="3424906"/>
-                  </a:lnTo>
-                  <a:lnTo>
-                    <a:pt x="6875762" y="3419229"/>
-                  </a:lnTo>
-                  <a:lnTo>
-                    <a:pt x="6804139" y="3413410"/>
-                  </a:lnTo>
-                  <a:lnTo>
-                    <a:pt x="6732517" y="3407446"/>
-                  </a:lnTo>
-                  <a:lnTo>
-                    <a:pt x="6660894" y="3401333"/>
-                  </a:lnTo>
-                  <a:lnTo>
-                    <a:pt x="6589272" y="3395067"/>
-                  </a:lnTo>
-                  <a:lnTo>
-                    <a:pt x="6517649" y="3388646"/>
-                  </a:lnTo>
-                  <a:lnTo>
-                    <a:pt x="6446027" y="3382064"/>
-                  </a:lnTo>
-                  <a:lnTo>
-                    <a:pt x="6374404" y="3375319"/>
-                  </a:lnTo>
-                  <a:lnTo>
-                    <a:pt x="6302782" y="3368405"/>
-                  </a:lnTo>
-                  <a:lnTo>
-                    <a:pt x="6231159" y="3361319"/>
-                  </a:lnTo>
-                  <a:lnTo>
-                    <a:pt x="6159537" y="3354056"/>
-                  </a:lnTo>
-                  <a:lnTo>
-                    <a:pt x="6087914" y="3346612"/>
-                  </a:lnTo>
-                  <a:lnTo>
-                    <a:pt x="6016292" y="3338982"/>
-                  </a:lnTo>
-                  <a:lnTo>
-                    <a:pt x="5944669" y="3331163"/>
-                  </a:lnTo>
-                  <a:lnTo>
-                    <a:pt x="5873047" y="3323148"/>
-                  </a:lnTo>
-                  <a:lnTo>
-                    <a:pt x="5801424" y="3314934"/>
-                  </a:lnTo>
-                  <a:lnTo>
-                    <a:pt x="5729802" y="3306514"/>
-                  </a:lnTo>
-                  <a:lnTo>
-                    <a:pt x="5658179" y="3297885"/>
-                  </a:lnTo>
-                  <a:lnTo>
-                    <a:pt x="5586557" y="3289041"/>
-                  </a:lnTo>
-                  <a:lnTo>
-                    <a:pt x="5514934" y="3279976"/>
-                  </a:lnTo>
-                  <a:lnTo>
-                    <a:pt x="5443311" y="3270686"/>
-                  </a:lnTo>
-                  <a:lnTo>
-                    <a:pt x="5371689" y="3261163"/>
-                  </a:lnTo>
-                  <a:lnTo>
-                    <a:pt x="5300066" y="3251403"/>
-                  </a:lnTo>
-                  <a:lnTo>
-                    <a:pt x="5228444" y="3241400"/>
-                  </a:lnTo>
-                  <a:lnTo>
-                    <a:pt x="5156821" y="3231148"/>
-                  </a:lnTo>
-                  <a:lnTo>
-                    <a:pt x="5085199" y="3220640"/>
-                  </a:lnTo>
-                  <a:lnTo>
-                    <a:pt x="5013576" y="3209870"/>
-                  </a:lnTo>
-                  <a:lnTo>
-                    <a:pt x="4941954" y="3198831"/>
-                  </a:lnTo>
-                  <a:lnTo>
-                    <a:pt x="4870331" y="3187517"/>
-                  </a:lnTo>
-                  <a:lnTo>
-                    <a:pt x="4798709" y="3175922"/>
-                  </a:lnTo>
-                  <a:lnTo>
-                    <a:pt x="4727086" y="3164037"/>
-                  </a:lnTo>
-                  <a:lnTo>
-                    <a:pt x="4655464" y="3151856"/>
-                  </a:lnTo>
-                  <a:lnTo>
-                    <a:pt x="4583841" y="3139371"/>
-                  </a:lnTo>
-                  <a:lnTo>
-                    <a:pt x="4512219" y="3126575"/>
-                  </a:lnTo>
-                  <a:lnTo>
-                    <a:pt x="4440596" y="3113460"/>
-                  </a:lnTo>
-                  <a:lnTo>
-                    <a:pt x="4368974" y="3100017"/>
-                  </a:lnTo>
-                  <a:lnTo>
-                    <a:pt x="4297351" y="3086240"/>
-                  </a:lnTo>
-                  <a:lnTo>
-                    <a:pt x="4225729" y="3072120"/>
-                  </a:lnTo>
-                  <a:lnTo>
-                    <a:pt x="4154106" y="3057647"/>
-                  </a:lnTo>
-                  <a:lnTo>
-                    <a:pt x="4082483" y="3042813"/>
-                  </a:lnTo>
-                  <a:lnTo>
-                    <a:pt x="4010861" y="3027610"/>
-                  </a:lnTo>
-                  <a:lnTo>
-                    <a:pt x="3939238" y="3012028"/>
-                  </a:lnTo>
-                  <a:lnTo>
-                    <a:pt x="3867616" y="2996057"/>
-                  </a:lnTo>
-                  <a:lnTo>
-                    <a:pt x="3795993" y="2979688"/>
-                  </a:lnTo>
-                  <a:lnTo>
-                    <a:pt x="3724371" y="2962911"/>
-                  </a:lnTo>
-                  <a:lnTo>
-                    <a:pt x="3652748" y="2945715"/>
-                  </a:lnTo>
-                  <a:lnTo>
-                    <a:pt x="3581126" y="2928091"/>
-                  </a:lnTo>
-                  <a:lnTo>
-                    <a:pt x="3509503" y="2910028"/>
-                  </a:lnTo>
-                  <a:lnTo>
-                    <a:pt x="3437881" y="2891514"/>
-                  </a:lnTo>
-                  <a:lnTo>
-                    <a:pt x="3366258" y="2872539"/>
-                  </a:lnTo>
-                  <a:lnTo>
-                    <a:pt x="3294636" y="2853091"/>
-                  </a:lnTo>
-                  <a:lnTo>
-                    <a:pt x="3223013" y="2833158"/>
-                  </a:lnTo>
-                  <a:lnTo>
-                    <a:pt x="3151391" y="2812727"/>
-                  </a:lnTo>
-                  <a:lnTo>
-                    <a:pt x="3079768" y="2791788"/>
-                  </a:lnTo>
-                  <a:lnTo>
-                    <a:pt x="3008146" y="2798159"/>
-                  </a:lnTo>
-                  <a:lnTo>
-                    <a:pt x="2936523" y="2823476"/>
-                  </a:lnTo>
-                  <a:lnTo>
-                    <a:pt x="2864901" y="2848044"/>
-                  </a:lnTo>
-                  <a:lnTo>
-                    <a:pt x="2793278" y="2871883"/>
-                  </a:lnTo>
-                  <a:lnTo>
-                    <a:pt x="2721655" y="2895016"/>
-                  </a:lnTo>
-                  <a:lnTo>
-                    <a:pt x="2650033" y="2917463"/>
-                  </a:lnTo>
-                  <a:lnTo>
-                    <a:pt x="2578410" y="2939246"/>
-                  </a:lnTo>
-                  <a:lnTo>
-                    <a:pt x="2506788" y="2960383"/>
-                  </a:lnTo>
-                  <a:lnTo>
-                    <a:pt x="2435165" y="2980894"/>
-                  </a:lnTo>
-                  <a:lnTo>
-                    <a:pt x="2363543" y="3000797"/>
-                  </a:lnTo>
-                  <a:lnTo>
-                    <a:pt x="2291920" y="3020110"/>
-                  </a:lnTo>
-                  <a:lnTo>
-                    <a:pt x="2220298" y="3038852"/>
-                  </a:lnTo>
-                  <a:lnTo>
-                    <a:pt x="2148675" y="3057038"/>
-                  </a:lnTo>
-                  <a:lnTo>
-                    <a:pt x="2077053" y="3074685"/>
-                  </a:lnTo>
-                  <a:lnTo>
-                    <a:pt x="2005430" y="3091809"/>
-                  </a:lnTo>
-                  <a:lnTo>
-                    <a:pt x="1933808" y="3108426"/>
-                  </a:lnTo>
-                  <a:lnTo>
-                    <a:pt x="1862185" y="3124550"/>
-                  </a:lnTo>
-                  <a:lnTo>
-                    <a:pt x="1790563" y="3140197"/>
-                  </a:lnTo>
-                  <a:lnTo>
-                    <a:pt x="1718940" y="3155380"/>
-                  </a:lnTo>
-                  <a:lnTo>
-                    <a:pt x="1647318" y="3170114"/>
-                  </a:lnTo>
-                  <a:lnTo>
-                    <a:pt x="1575695" y="3184410"/>
-                  </a:lnTo>
-                  <a:lnTo>
-                    <a:pt x="1504073" y="3198283"/>
-                  </a:lnTo>
-                  <a:lnTo>
-                    <a:pt x="1432450" y="3211746"/>
-                  </a:lnTo>
-                  <a:lnTo>
-                    <a:pt x="1360827" y="3224809"/>
-                  </a:lnTo>
-                  <a:lnTo>
-                    <a:pt x="1289205" y="3237485"/>
-                  </a:lnTo>
-                  <a:lnTo>
-                    <a:pt x="1217582" y="3249786"/>
-                  </a:lnTo>
-                  <a:lnTo>
-                    <a:pt x="1145960" y="3261722"/>
-                  </a:lnTo>
-                  <a:lnTo>
-                    <a:pt x="1074337" y="3273304"/>
-                  </a:lnTo>
-                  <a:lnTo>
-                    <a:pt x="1002715" y="3284544"/>
-                  </a:lnTo>
-                  <a:lnTo>
-                    <a:pt x="931092" y="3295450"/>
-                  </a:lnTo>
-                  <a:lnTo>
-                    <a:pt x="859470" y="3306033"/>
-                  </a:lnTo>
-                  <a:lnTo>
-                    <a:pt x="787847" y="3316303"/>
-                  </a:lnTo>
-                  <a:lnTo>
-                    <a:pt x="716225" y="3326268"/>
-                  </a:lnTo>
-                  <a:lnTo>
-                    <a:pt x="644602" y="3335938"/>
-                  </a:lnTo>
-                  <a:lnTo>
-                    <a:pt x="572980" y="3345322"/>
-                  </a:lnTo>
-                  <a:lnTo>
-                    <a:pt x="501357" y="3354428"/>
-                  </a:lnTo>
-                  <a:lnTo>
-                    <a:pt x="429735" y="3363263"/>
-                  </a:lnTo>
-                  <a:lnTo>
-                    <a:pt x="358112" y="3371837"/>
-                  </a:lnTo>
-                  <a:lnTo>
-                    <a:pt x="286490" y="3380157"/>
-                  </a:lnTo>
-                  <a:lnTo>
-                    <a:pt x="214867" y="3388231"/>
-                  </a:lnTo>
-                  <a:lnTo>
-                    <a:pt x="143245" y="3396065"/>
-                  </a:lnTo>
-                  <a:lnTo>
-                    <a:pt x="71622" y="3403667"/>
-                  </a:lnTo>
-                  <a:lnTo>
-                    <a:pt x="0" y="3411044"/>
+                    <a:pt x="7090630" y="3257474"/>
+                  </a:lnTo>
+                  <a:lnTo>
+                    <a:pt x="7019007" y="3251909"/>
+                  </a:lnTo>
+                  <a:lnTo>
+                    <a:pt x="6947385" y="3246267"/>
+                  </a:lnTo>
+                  <a:lnTo>
+                    <a:pt x="6875762" y="3240545"/>
+                  </a:lnTo>
+                  <a:lnTo>
+                    <a:pt x="6804139" y="3234742"/>
+                  </a:lnTo>
+                  <a:lnTo>
+                    <a:pt x="6732517" y="3228858"/>
+                  </a:lnTo>
+                  <a:lnTo>
+                    <a:pt x="6660894" y="3222891"/>
+                  </a:lnTo>
+                  <a:lnTo>
+                    <a:pt x="6589272" y="3216839"/>
+                  </a:lnTo>
+                  <a:lnTo>
+                    <a:pt x="6517649" y="3210703"/>
+                  </a:lnTo>
+                  <a:lnTo>
+                    <a:pt x="6446027" y="3204480"/>
+                  </a:lnTo>
+                  <a:lnTo>
+                    <a:pt x="6374404" y="3198170"/>
+                  </a:lnTo>
+                  <a:lnTo>
+                    <a:pt x="6302782" y="3191770"/>
+                  </a:lnTo>
+                  <a:lnTo>
+                    <a:pt x="6231159" y="3185281"/>
+                  </a:lnTo>
+                  <a:lnTo>
+                    <a:pt x="6159537" y="3178700"/>
+                  </a:lnTo>
+                  <a:lnTo>
+                    <a:pt x="6087914" y="3172027"/>
+                  </a:lnTo>
+                  <a:lnTo>
+                    <a:pt x="6016292" y="3165259"/>
+                  </a:lnTo>
+                  <a:lnTo>
+                    <a:pt x="5944669" y="3158397"/>
+                  </a:lnTo>
+                  <a:lnTo>
+                    <a:pt x="5873047" y="3151437"/>
+                  </a:lnTo>
+                  <a:lnTo>
+                    <a:pt x="5801424" y="3144380"/>
+                  </a:lnTo>
+                  <a:lnTo>
+                    <a:pt x="5729802" y="3137223"/>
+                  </a:lnTo>
+                  <a:lnTo>
+                    <a:pt x="5658179" y="3129966"/>
+                  </a:lnTo>
+                  <a:lnTo>
+                    <a:pt x="5586557" y="3122606"/>
+                  </a:lnTo>
+                  <a:lnTo>
+                    <a:pt x="5514934" y="3115143"/>
+                  </a:lnTo>
+                  <a:lnTo>
+                    <a:pt x="5443311" y="3107575"/>
+                  </a:lnTo>
+                  <a:lnTo>
+                    <a:pt x="5371689" y="3099900"/>
+                  </a:lnTo>
+                  <a:lnTo>
+                    <a:pt x="5300066" y="3092117"/>
+                  </a:lnTo>
+                  <a:lnTo>
+                    <a:pt x="5228444" y="3084224"/>
+                  </a:lnTo>
+                  <a:lnTo>
+                    <a:pt x="5156821" y="3076220"/>
+                  </a:lnTo>
+                  <a:lnTo>
+                    <a:pt x="5085199" y="3068104"/>
+                  </a:lnTo>
+                  <a:lnTo>
+                    <a:pt x="5013576" y="3059873"/>
+                  </a:lnTo>
+                  <a:lnTo>
+                    <a:pt x="4941954" y="3051527"/>
+                  </a:lnTo>
+                  <a:lnTo>
+                    <a:pt x="4870331" y="3043063"/>
+                  </a:lnTo>
+                  <a:lnTo>
+                    <a:pt x="4798709" y="3034479"/>
+                  </a:lnTo>
+                  <a:lnTo>
+                    <a:pt x="4727086" y="3025775"/>
+                  </a:lnTo>
+                  <a:lnTo>
+                    <a:pt x="4655464" y="3016948"/>
+                  </a:lnTo>
+                  <a:lnTo>
+                    <a:pt x="4583841" y="3007997"/>
+                  </a:lnTo>
+                  <a:lnTo>
+                    <a:pt x="4512219" y="2998920"/>
+                  </a:lnTo>
+                  <a:lnTo>
+                    <a:pt x="4440596" y="2989715"/>
+                  </a:lnTo>
+                  <a:lnTo>
+                    <a:pt x="4368974" y="2980381"/>
+                  </a:lnTo>
+                  <a:lnTo>
+                    <a:pt x="4297351" y="2970915"/>
+                  </a:lnTo>
+                  <a:lnTo>
+                    <a:pt x="4225729" y="2961316"/>
+                  </a:lnTo>
+                  <a:lnTo>
+                    <a:pt x="4154106" y="2951582"/>
+                  </a:lnTo>
+                  <a:lnTo>
+                    <a:pt x="4082483" y="2941710"/>
+                  </a:lnTo>
+                  <a:lnTo>
+                    <a:pt x="4010861" y="2931700"/>
+                  </a:lnTo>
+                  <a:lnTo>
+                    <a:pt x="3939238" y="2921548"/>
+                  </a:lnTo>
+                  <a:lnTo>
+                    <a:pt x="3867616" y="2911254"/>
+                  </a:lnTo>
+                  <a:lnTo>
+                    <a:pt x="3795993" y="2900815"/>
+                  </a:lnTo>
+                  <a:lnTo>
+                    <a:pt x="3724371" y="2890229"/>
+                  </a:lnTo>
+                  <a:lnTo>
+                    <a:pt x="3652748" y="2879493"/>
+                  </a:lnTo>
+                  <a:lnTo>
+                    <a:pt x="3581126" y="2868607"/>
+                  </a:lnTo>
+                  <a:lnTo>
+                    <a:pt x="3509503" y="2857567"/>
+                  </a:lnTo>
+                  <a:lnTo>
+                    <a:pt x="3437881" y="2846372"/>
+                  </a:lnTo>
+                  <a:lnTo>
+                    <a:pt x="3366258" y="2835019"/>
+                  </a:lnTo>
+                  <a:lnTo>
+                    <a:pt x="3294636" y="2823506"/>
+                  </a:lnTo>
+                  <a:lnTo>
+                    <a:pt x="3223013" y="2811831"/>
+                  </a:lnTo>
+                  <a:lnTo>
+                    <a:pt x="3151391" y="2799992"/>
+                  </a:lnTo>
+                  <a:lnTo>
+                    <a:pt x="3079768" y="2787986"/>
+                  </a:lnTo>
+                  <a:lnTo>
+                    <a:pt x="3008146" y="2800790"/>
+                  </a:lnTo>
+                  <a:lnTo>
+                    <a:pt x="2936523" y="2830367"/>
+                  </a:lnTo>
+                  <a:lnTo>
+                    <a:pt x="2864901" y="2858918"/>
+                  </a:lnTo>
+                  <a:lnTo>
+                    <a:pt x="2793278" y="2886478"/>
+                  </a:lnTo>
+                  <a:lnTo>
+                    <a:pt x="2721655" y="2913080"/>
+                  </a:lnTo>
+                  <a:lnTo>
+                    <a:pt x="2650033" y="2938759"/>
+                  </a:lnTo>
+                  <a:lnTo>
+                    <a:pt x="2578410" y="2963546"/>
+                  </a:lnTo>
+                  <a:lnTo>
+                    <a:pt x="2506788" y="2987473"/>
+                  </a:lnTo>
+                  <a:lnTo>
+                    <a:pt x="2435165" y="3010569"/>
+                  </a:lnTo>
+                  <a:lnTo>
+                    <a:pt x="2363543" y="3032862"/>
+                  </a:lnTo>
+                  <a:lnTo>
+                    <a:pt x="2291920" y="3054382"/>
+                  </a:lnTo>
+                  <a:lnTo>
+                    <a:pt x="2220298" y="3075155"/>
+                  </a:lnTo>
+                  <a:lnTo>
+                    <a:pt x="2148675" y="3095206"/>
+                  </a:lnTo>
+                  <a:lnTo>
+                    <a:pt x="2077053" y="3114561"/>
+                  </a:lnTo>
+                  <a:lnTo>
+                    <a:pt x="2005430" y="3133244"/>
+                  </a:lnTo>
+                  <a:lnTo>
+                    <a:pt x="1933808" y="3151279"/>
+                  </a:lnTo>
+                  <a:lnTo>
+                    <a:pt x="1862185" y="3168687"/>
+                  </a:lnTo>
+                  <a:lnTo>
+                    <a:pt x="1790563" y="3185491"/>
+                  </a:lnTo>
+                  <a:lnTo>
+                    <a:pt x="1718940" y="3201711"/>
+                  </a:lnTo>
+                  <a:lnTo>
+                    <a:pt x="1647318" y="3217368"/>
+                  </a:lnTo>
+                  <a:lnTo>
+                    <a:pt x="1575695" y="3232482"/>
+                  </a:lnTo>
+                  <a:lnTo>
+                    <a:pt x="1504073" y="3247070"/>
+                  </a:lnTo>
+                  <a:lnTo>
+                    <a:pt x="1432450" y="3261153"/>
+                  </a:lnTo>
+                  <a:lnTo>
+                    <a:pt x="1360827" y="3274746"/>
+                  </a:lnTo>
+                  <a:lnTo>
+                    <a:pt x="1289205" y="3287867"/>
+                  </a:lnTo>
+                  <a:lnTo>
+                    <a:pt x="1217582" y="3300533"/>
+                  </a:lnTo>
+                  <a:lnTo>
+                    <a:pt x="1145960" y="3312758"/>
+                  </a:lnTo>
+                  <a:lnTo>
+                    <a:pt x="1074337" y="3324560"/>
+                  </a:lnTo>
+                  <a:lnTo>
+                    <a:pt x="1002715" y="3335951"/>
+                  </a:lnTo>
+                  <a:lnTo>
+                    <a:pt x="931092" y="3346947"/>
+                  </a:lnTo>
+                  <a:lnTo>
+                    <a:pt x="859470" y="3357562"/>
+                  </a:lnTo>
+                  <a:lnTo>
+                    <a:pt x="787847" y="3367807"/>
+                  </a:lnTo>
+                  <a:lnTo>
+                    <a:pt x="716225" y="3377697"/>
+                  </a:lnTo>
+                  <a:lnTo>
+                    <a:pt x="644602" y="3387244"/>
+                  </a:lnTo>
+                  <a:lnTo>
+                    <a:pt x="572980" y="3396459"/>
+                  </a:lnTo>
+                  <a:lnTo>
+                    <a:pt x="501357" y="3405354"/>
+                  </a:lnTo>
+                  <a:lnTo>
+                    <a:pt x="429735" y="3413940"/>
+                  </a:lnTo>
+                  <a:lnTo>
+                    <a:pt x="358112" y="3422229"/>
+                  </a:lnTo>
+                  <a:lnTo>
+                    <a:pt x="286490" y="3430229"/>
+                  </a:lnTo>
+                  <a:lnTo>
+                    <a:pt x="214867" y="3437952"/>
+                  </a:lnTo>
+                  <a:lnTo>
+                    <a:pt x="143245" y="3445406"/>
+                  </a:lnTo>
+                  <a:lnTo>
+                    <a:pt x="71622" y="3452602"/>
+                  </a:lnTo>
+                  <a:lnTo>
+                    <a:pt x="0" y="3459547"/>
                   </a:lnTo>
                   <a:close/>
                 </a:path>
@@ -3742,287 +3721,266 @@
           <p:spPr>
             <a:xfrm>
               <a:off x="1172049" y="1896563"/>
-              <a:ext cx="6467308" cy="2772069"/>
+              <a:ext cx="5958461" cy="2775811"/>
             </a:xfrm>
             <a:custGeom>
               <a:avLst/>
               <a:pathLst>
-                <a:path w="6467308" h="2772069">
+                <a:path w="5958461" h="2775811">
                   <a:moveTo>
-                    <a:pt x="0" y="1170717"/>
+                    <a:pt x="0" y="2075172"/>
                   </a:moveTo>
                   <a:lnTo>
-                    <a:pt x="71622" y="1231088"/>
-                  </a:lnTo>
-                  <a:lnTo>
-                    <a:pt x="143245" y="1289989"/>
-                  </a:lnTo>
-                  <a:lnTo>
-                    <a:pt x="214867" y="1347459"/>
-                  </a:lnTo>
-                  <a:lnTo>
-                    <a:pt x="286490" y="1403530"/>
-                  </a:lnTo>
-                  <a:lnTo>
-                    <a:pt x="358112" y="1458238"/>
-                  </a:lnTo>
-                  <a:lnTo>
-                    <a:pt x="429735" y="1511614"/>
-                  </a:lnTo>
-                  <a:lnTo>
-                    <a:pt x="501357" y="1563693"/>
-                  </a:lnTo>
-                  <a:lnTo>
-                    <a:pt x="572980" y="1614504"/>
-                  </a:lnTo>
-                  <a:lnTo>
-                    <a:pt x="644602" y="1664080"/>
-                  </a:lnTo>
-                  <a:lnTo>
-                    <a:pt x="716225" y="1712450"/>
-                  </a:lnTo>
-                  <a:lnTo>
-                    <a:pt x="787847" y="1759643"/>
-                  </a:lnTo>
-                  <a:lnTo>
-                    <a:pt x="859470" y="1805689"/>
-                  </a:lnTo>
-                  <a:lnTo>
-                    <a:pt x="931092" y="1850614"/>
-                  </a:lnTo>
-                  <a:lnTo>
-                    <a:pt x="1002715" y="1894447"/>
-                  </a:lnTo>
-                  <a:lnTo>
-                    <a:pt x="1074337" y="1937213"/>
-                  </a:lnTo>
-                  <a:lnTo>
-                    <a:pt x="1145960" y="1978939"/>
-                  </a:lnTo>
-                  <a:lnTo>
-                    <a:pt x="1217582" y="2019650"/>
-                  </a:lnTo>
-                  <a:lnTo>
-                    <a:pt x="1289205" y="2059371"/>
-                  </a:lnTo>
-                  <a:lnTo>
-                    <a:pt x="1360827" y="2098126"/>
-                  </a:lnTo>
-                  <a:lnTo>
-                    <a:pt x="1432450" y="2135938"/>
-                  </a:lnTo>
-                  <a:lnTo>
-                    <a:pt x="1504073" y="2172831"/>
-                  </a:lnTo>
-                  <a:lnTo>
-                    <a:pt x="1575695" y="2208826"/>
-                  </a:lnTo>
-                  <a:lnTo>
-                    <a:pt x="1647318" y="2243945"/>
-                  </a:lnTo>
-                  <a:lnTo>
-                    <a:pt x="1718940" y="2278210"/>
-                  </a:lnTo>
-                  <a:lnTo>
-                    <a:pt x="1790563" y="2311642"/>
-                  </a:lnTo>
-                  <a:lnTo>
-                    <a:pt x="1862185" y="2344261"/>
-                  </a:lnTo>
-                  <a:lnTo>
-                    <a:pt x="1933808" y="2376086"/>
-                  </a:lnTo>
-                  <a:lnTo>
-                    <a:pt x="2005430" y="2407137"/>
-                  </a:lnTo>
-                  <a:lnTo>
-                    <a:pt x="2077053" y="2437433"/>
-                  </a:lnTo>
-                  <a:lnTo>
-                    <a:pt x="2148675" y="2466991"/>
-                  </a:lnTo>
-                  <a:lnTo>
-                    <a:pt x="2220298" y="2495831"/>
-                  </a:lnTo>
-                  <a:lnTo>
-                    <a:pt x="2291920" y="2523969"/>
-                  </a:lnTo>
-                  <a:lnTo>
-                    <a:pt x="2363543" y="2551423"/>
-                  </a:lnTo>
-                  <a:lnTo>
-                    <a:pt x="2435165" y="2578209"/>
-                  </a:lnTo>
-                  <a:lnTo>
-                    <a:pt x="2506788" y="2604344"/>
-                  </a:lnTo>
-                  <a:lnTo>
-                    <a:pt x="2578410" y="2629843"/>
-                  </a:lnTo>
-                  <a:lnTo>
-                    <a:pt x="2650033" y="2654721"/>
-                  </a:lnTo>
-                  <a:lnTo>
-                    <a:pt x="2721655" y="2678995"/>
-                  </a:lnTo>
-                  <a:lnTo>
-                    <a:pt x="2793278" y="2702678"/>
-                  </a:lnTo>
-                  <a:lnTo>
-                    <a:pt x="2864901" y="2725785"/>
-                  </a:lnTo>
-                  <a:lnTo>
-                    <a:pt x="2936523" y="2748330"/>
-                  </a:lnTo>
-                  <a:lnTo>
-                    <a:pt x="3008146" y="2770326"/>
-                  </a:lnTo>
-                  <a:lnTo>
-                    <a:pt x="3079768" y="2772069"/>
-                  </a:lnTo>
-                  <a:lnTo>
-                    <a:pt x="3151391" y="2745182"/>
-                  </a:lnTo>
-                  <a:lnTo>
-                    <a:pt x="3223013" y="2717474"/>
-                  </a:lnTo>
-                  <a:lnTo>
-                    <a:pt x="3294636" y="2688920"/>
-                  </a:lnTo>
-                  <a:lnTo>
-                    <a:pt x="3366258" y="2659494"/>
-                  </a:lnTo>
-                  <a:lnTo>
-                    <a:pt x="3437881" y="2629170"/>
-                  </a:lnTo>
-                  <a:lnTo>
-                    <a:pt x="3509503" y="2597919"/>
-                  </a:lnTo>
-                  <a:lnTo>
-                    <a:pt x="3581126" y="2565715"/>
-                  </a:lnTo>
-                  <a:lnTo>
-                    <a:pt x="3652748" y="2532527"/>
-                  </a:lnTo>
-                  <a:lnTo>
-                    <a:pt x="3724371" y="2498326"/>
-                  </a:lnTo>
-                  <a:lnTo>
-                    <a:pt x="3795993" y="2463081"/>
-                  </a:lnTo>
-                  <a:lnTo>
-                    <a:pt x="3867616" y="2426759"/>
-                  </a:lnTo>
-                  <a:lnTo>
-                    <a:pt x="3939238" y="2389329"/>
-                  </a:lnTo>
-                  <a:lnTo>
-                    <a:pt x="4010861" y="2350756"/>
-                  </a:lnTo>
-                  <a:lnTo>
-                    <a:pt x="4082483" y="2311004"/>
-                  </a:lnTo>
-                  <a:lnTo>
-                    <a:pt x="4154106" y="2270039"/>
-                  </a:lnTo>
-                  <a:lnTo>
-                    <a:pt x="4225729" y="2227824"/>
-                  </a:lnTo>
-                  <a:lnTo>
-                    <a:pt x="4297351" y="2184319"/>
-                  </a:lnTo>
-                  <a:lnTo>
-                    <a:pt x="4368974" y="2139486"/>
-                  </a:lnTo>
-                  <a:lnTo>
-                    <a:pt x="4440596" y="2093284"/>
-                  </a:lnTo>
-                  <a:lnTo>
-                    <a:pt x="4512219" y="2045671"/>
-                  </a:lnTo>
-                  <a:lnTo>
-                    <a:pt x="4583841" y="1996605"/>
-                  </a:lnTo>
-                  <a:lnTo>
-                    <a:pt x="4655464" y="1946040"/>
-                  </a:lnTo>
-                  <a:lnTo>
-                    <a:pt x="4727086" y="1893932"/>
-                  </a:lnTo>
-                  <a:lnTo>
-                    <a:pt x="4798709" y="1840232"/>
-                  </a:lnTo>
-                  <a:lnTo>
-                    <a:pt x="4870331" y="1784893"/>
-                  </a:lnTo>
-                  <a:lnTo>
-                    <a:pt x="4941954" y="1727864"/>
-                  </a:lnTo>
-                  <a:lnTo>
-                    <a:pt x="5013576" y="1669094"/>
-                  </a:lnTo>
-                  <a:lnTo>
-                    <a:pt x="5085199" y="1608529"/>
-                  </a:lnTo>
-                  <a:lnTo>
-                    <a:pt x="5156821" y="1546115"/>
-                  </a:lnTo>
-                  <a:lnTo>
-                    <a:pt x="5228444" y="1481796"/>
-                  </a:lnTo>
-                  <a:lnTo>
-                    <a:pt x="5300066" y="1415512"/>
-                  </a:lnTo>
-                  <a:lnTo>
-                    <a:pt x="5371689" y="1347205"/>
-                  </a:lnTo>
-                  <a:lnTo>
-                    <a:pt x="5443311" y="1276812"/>
-                  </a:lnTo>
-                  <a:lnTo>
-                    <a:pt x="5514934" y="1204270"/>
-                  </a:lnTo>
-                  <a:lnTo>
-                    <a:pt x="5586557" y="1129512"/>
-                  </a:lnTo>
-                  <a:lnTo>
-                    <a:pt x="5658179" y="1052472"/>
-                  </a:lnTo>
-                  <a:lnTo>
-                    <a:pt x="5729802" y="973080"/>
-                  </a:lnTo>
-                  <a:lnTo>
-                    <a:pt x="5801424" y="891264"/>
-                  </a:lnTo>
-                  <a:lnTo>
-                    <a:pt x="5873047" y="806949"/>
-                  </a:lnTo>
-                  <a:lnTo>
-                    <a:pt x="5944669" y="720060"/>
-                  </a:lnTo>
-                  <a:lnTo>
-                    <a:pt x="6016292" y="630518"/>
-                  </a:lnTo>
-                  <a:lnTo>
-                    <a:pt x="6087914" y="538242"/>
-                  </a:lnTo>
-                  <a:lnTo>
-                    <a:pt x="6159537" y="443149"/>
-                  </a:lnTo>
-                  <a:lnTo>
-                    <a:pt x="6231159" y="345152"/>
-                  </a:lnTo>
-                  <a:lnTo>
-                    <a:pt x="6302782" y="244162"/>
-                  </a:lnTo>
-                  <a:lnTo>
-                    <a:pt x="6374404" y="140090"/>
-                  </a:lnTo>
-                  <a:lnTo>
-                    <a:pt x="6446027" y="32839"/>
-                  </a:lnTo>
-                  <a:lnTo>
-                    <a:pt x="6467308" y="0"/>
+                    <a:pt x="71622" y="2097076"/>
+                  </a:lnTo>
+                  <a:lnTo>
+                    <a:pt x="143245" y="2118675"/>
+                  </a:lnTo>
+                  <a:lnTo>
+                    <a:pt x="214867" y="2139974"/>
+                  </a:lnTo>
+                  <a:lnTo>
+                    <a:pt x="286490" y="2160978"/>
+                  </a:lnTo>
+                  <a:lnTo>
+                    <a:pt x="358112" y="2181690"/>
+                  </a:lnTo>
+                  <a:lnTo>
+                    <a:pt x="429735" y="2202114"/>
+                  </a:lnTo>
+                  <a:lnTo>
+                    <a:pt x="501357" y="2222255"/>
+                  </a:lnTo>
+                  <a:lnTo>
+                    <a:pt x="572980" y="2242116"/>
+                  </a:lnTo>
+                  <a:lnTo>
+                    <a:pt x="644602" y="2261702"/>
+                  </a:lnTo>
+                  <a:lnTo>
+                    <a:pt x="716225" y="2281015"/>
+                  </a:lnTo>
+                  <a:lnTo>
+                    <a:pt x="787847" y="2300060"/>
+                  </a:lnTo>
+                  <a:lnTo>
+                    <a:pt x="859470" y="2318841"/>
+                  </a:lnTo>
+                  <a:lnTo>
+                    <a:pt x="931092" y="2337361"/>
+                  </a:lnTo>
+                  <a:lnTo>
+                    <a:pt x="1002715" y="2355624"/>
+                  </a:lnTo>
+                  <a:lnTo>
+                    <a:pt x="1074337" y="2373634"/>
+                  </a:lnTo>
+                  <a:lnTo>
+                    <a:pt x="1145960" y="2391393"/>
+                  </a:lnTo>
+                  <a:lnTo>
+                    <a:pt x="1217582" y="2408905"/>
+                  </a:lnTo>
+                  <a:lnTo>
+                    <a:pt x="1289205" y="2426175"/>
+                  </a:lnTo>
+                  <a:lnTo>
+                    <a:pt x="1360827" y="2443205"/>
+                  </a:lnTo>
+                  <a:lnTo>
+                    <a:pt x="1432450" y="2459998"/>
+                  </a:lnTo>
+                  <a:lnTo>
+                    <a:pt x="1504073" y="2476558"/>
+                  </a:lnTo>
+                  <a:lnTo>
+                    <a:pt x="1575695" y="2492888"/>
+                  </a:lnTo>
+                  <a:lnTo>
+                    <a:pt x="1647318" y="2508991"/>
+                  </a:lnTo>
+                  <a:lnTo>
+                    <a:pt x="1718940" y="2524871"/>
+                  </a:lnTo>
+                  <a:lnTo>
+                    <a:pt x="1790563" y="2540530"/>
+                  </a:lnTo>
+                  <a:lnTo>
+                    <a:pt x="1862185" y="2555972"/>
+                  </a:lnTo>
+                  <a:lnTo>
+                    <a:pt x="1933808" y="2571200"/>
+                  </a:lnTo>
+                  <a:lnTo>
+                    <a:pt x="2005430" y="2586216"/>
+                  </a:lnTo>
+                  <a:lnTo>
+                    <a:pt x="2077053" y="2601023"/>
+                  </a:lnTo>
+                  <a:lnTo>
+                    <a:pt x="2148675" y="2615625"/>
+                  </a:lnTo>
+                  <a:lnTo>
+                    <a:pt x="2220298" y="2630024"/>
+                  </a:lnTo>
+                  <a:lnTo>
+                    <a:pt x="2291920" y="2644224"/>
+                  </a:lnTo>
+                  <a:lnTo>
+                    <a:pt x="2363543" y="2658226"/>
+                  </a:lnTo>
+                  <a:lnTo>
+                    <a:pt x="2435165" y="2672033"/>
+                  </a:lnTo>
+                  <a:lnTo>
+                    <a:pt x="2506788" y="2685649"/>
+                  </a:lnTo>
+                  <a:lnTo>
+                    <a:pt x="2578410" y="2699076"/>
+                  </a:lnTo>
+                  <a:lnTo>
+                    <a:pt x="2650033" y="2712316"/>
+                  </a:lnTo>
+                  <a:lnTo>
+                    <a:pt x="2721655" y="2725373"/>
+                  </a:lnTo>
+                  <a:lnTo>
+                    <a:pt x="2793278" y="2738248"/>
+                  </a:lnTo>
+                  <a:lnTo>
+                    <a:pt x="2864901" y="2750945"/>
+                  </a:lnTo>
+                  <a:lnTo>
+                    <a:pt x="2936523" y="2763465"/>
+                  </a:lnTo>
+                  <a:lnTo>
+                    <a:pt x="3008146" y="2775811"/>
+                  </a:lnTo>
+                  <a:lnTo>
+                    <a:pt x="3079768" y="2770148"/>
+                  </a:lnTo>
+                  <a:lnTo>
+                    <a:pt x="3151391" y="2738404"/>
+                  </a:lnTo>
+                  <a:lnTo>
+                    <a:pt x="3223013" y="2705518"/>
+                  </a:lnTo>
+                  <a:lnTo>
+                    <a:pt x="3294636" y="2671450"/>
+                  </a:lnTo>
+                  <a:lnTo>
+                    <a:pt x="3366258" y="2636156"/>
+                  </a:lnTo>
+                  <a:lnTo>
+                    <a:pt x="3437881" y="2599592"/>
+                  </a:lnTo>
+                  <a:lnTo>
+                    <a:pt x="3509503" y="2561713"/>
+                  </a:lnTo>
+                  <a:lnTo>
+                    <a:pt x="3581126" y="2522472"/>
+                  </a:lnTo>
+                  <a:lnTo>
+                    <a:pt x="3652748" y="2481819"/>
+                  </a:lnTo>
+                  <a:lnTo>
+                    <a:pt x="3724371" y="2439703"/>
+                  </a:lnTo>
+                  <a:lnTo>
+                    <a:pt x="3795993" y="2396073"/>
+                  </a:lnTo>
+                  <a:lnTo>
+                    <a:pt x="3867616" y="2350874"/>
+                  </a:lnTo>
+                  <a:lnTo>
+                    <a:pt x="3939238" y="2304048"/>
+                  </a:lnTo>
+                  <a:lnTo>
+                    <a:pt x="4010861" y="2255539"/>
+                  </a:lnTo>
+                  <a:lnTo>
+                    <a:pt x="4082483" y="2205284"/>
+                  </a:lnTo>
+                  <a:lnTo>
+                    <a:pt x="4154106" y="2153221"/>
+                  </a:lnTo>
+                  <a:lnTo>
+                    <a:pt x="4225729" y="2099286"/>
+                  </a:lnTo>
+                  <a:lnTo>
+                    <a:pt x="4297351" y="2043411"/>
+                  </a:lnTo>
+                  <a:lnTo>
+                    <a:pt x="4368974" y="1985526"/>
+                  </a:lnTo>
+                  <a:lnTo>
+                    <a:pt x="4440596" y="1925559"/>
+                  </a:lnTo>
+                  <a:lnTo>
+                    <a:pt x="4512219" y="1863435"/>
+                  </a:lnTo>
+                  <a:lnTo>
+                    <a:pt x="4583841" y="1799076"/>
+                  </a:lnTo>
+                  <a:lnTo>
+                    <a:pt x="4655464" y="1732402"/>
+                  </a:lnTo>
+                  <a:lnTo>
+                    <a:pt x="4727086" y="1663330"/>
+                  </a:lnTo>
+                  <a:lnTo>
+                    <a:pt x="4798709" y="1591773"/>
+                  </a:lnTo>
+                  <a:lnTo>
+                    <a:pt x="4870331" y="1517642"/>
+                  </a:lnTo>
+                  <a:lnTo>
+                    <a:pt x="4941954" y="1440845"/>
+                  </a:lnTo>
+                  <a:lnTo>
+                    <a:pt x="5013576" y="1361285"/>
+                  </a:lnTo>
+                  <a:lnTo>
+                    <a:pt x="5085199" y="1278864"/>
+                  </a:lnTo>
+                  <a:lnTo>
+                    <a:pt x="5156821" y="1193477"/>
+                  </a:lnTo>
+                  <a:lnTo>
+                    <a:pt x="5228444" y="1105020"/>
+                  </a:lnTo>
+                  <a:lnTo>
+                    <a:pt x="5300066" y="1013380"/>
+                  </a:lnTo>
+                  <a:lnTo>
+                    <a:pt x="5371689" y="918444"/>
+                  </a:lnTo>
+                  <a:lnTo>
+                    <a:pt x="5443311" y="820094"/>
+                  </a:lnTo>
+                  <a:lnTo>
+                    <a:pt x="5514934" y="718205"/>
+                  </a:lnTo>
+                  <a:lnTo>
+                    <a:pt x="5586557" y="612652"/>
+                  </a:lnTo>
+                  <a:lnTo>
+                    <a:pt x="5658179" y="503301"/>
+                  </a:lnTo>
+                  <a:lnTo>
+                    <a:pt x="5729802" y="390018"/>
+                  </a:lnTo>
+                  <a:lnTo>
+                    <a:pt x="5801424" y="272659"/>
+                  </a:lnTo>
+                  <a:lnTo>
+                    <a:pt x="5873047" y="151079"/>
+                  </a:lnTo>
+                  <a:lnTo>
+                    <a:pt x="5944669" y="25126"/>
+                  </a:lnTo>
+                  <a:lnTo>
+                    <a:pt x="5958461" y="0"/>
                   </a:lnTo>
                 </a:path>
               </a:pathLst>
@@ -4042,312 +4000,312 @@
           </p:nvSpPr>
           <p:spPr>
             <a:xfrm>
-              <a:off x="1172049" y="4688351"/>
-              <a:ext cx="7090630" cy="644062"/>
+              <a:off x="1172049" y="4684550"/>
+              <a:ext cx="7090630" cy="671561"/>
             </a:xfrm>
             <a:custGeom>
               <a:avLst/>
               <a:pathLst>
-                <a:path w="7090630" h="644062">
+                <a:path w="7090630" h="671561">
                   <a:moveTo>
-                    <a:pt x="7090630" y="644062"/>
+                    <a:pt x="7090630" y="469487"/>
                   </a:moveTo>
                   <a:lnTo>
-                    <a:pt x="7019007" y="638658"/>
-                  </a:lnTo>
-                  <a:lnTo>
-                    <a:pt x="6947385" y="633118"/>
-                  </a:lnTo>
-                  <a:lnTo>
-                    <a:pt x="6875762" y="627440"/>
-                  </a:lnTo>
-                  <a:lnTo>
-                    <a:pt x="6804139" y="621621"/>
-                  </a:lnTo>
-                  <a:lnTo>
-                    <a:pt x="6732517" y="615657"/>
-                  </a:lnTo>
-                  <a:lnTo>
-                    <a:pt x="6660894" y="609544"/>
-                  </a:lnTo>
-                  <a:lnTo>
-                    <a:pt x="6589272" y="603279"/>
-                  </a:lnTo>
-                  <a:lnTo>
-                    <a:pt x="6517649" y="596858"/>
-                  </a:lnTo>
-                  <a:lnTo>
-                    <a:pt x="6446027" y="590276"/>
-                  </a:lnTo>
-                  <a:lnTo>
-                    <a:pt x="6374404" y="583530"/>
-                  </a:lnTo>
-                  <a:lnTo>
-                    <a:pt x="6302782" y="576616"/>
-                  </a:lnTo>
-                  <a:lnTo>
-                    <a:pt x="6231159" y="569530"/>
-                  </a:lnTo>
-                  <a:lnTo>
-                    <a:pt x="6159537" y="562267"/>
-                  </a:lnTo>
-                  <a:lnTo>
-                    <a:pt x="6087914" y="554824"/>
-                  </a:lnTo>
-                  <a:lnTo>
-                    <a:pt x="6016292" y="547194"/>
-                  </a:lnTo>
-                  <a:lnTo>
-                    <a:pt x="5944669" y="539374"/>
-                  </a:lnTo>
-                  <a:lnTo>
-                    <a:pt x="5873047" y="531360"/>
-                  </a:lnTo>
-                  <a:lnTo>
-                    <a:pt x="5801424" y="523145"/>
-                  </a:lnTo>
-                  <a:lnTo>
-                    <a:pt x="5729802" y="514726"/>
-                  </a:lnTo>
-                  <a:lnTo>
-                    <a:pt x="5658179" y="506097"/>
-                  </a:lnTo>
-                  <a:lnTo>
-                    <a:pt x="5586557" y="497253"/>
-                  </a:lnTo>
-                  <a:lnTo>
-                    <a:pt x="5514934" y="488188"/>
-                  </a:lnTo>
-                  <a:lnTo>
-                    <a:pt x="5443311" y="478897"/>
-                  </a:lnTo>
-                  <a:lnTo>
-                    <a:pt x="5371689" y="469375"/>
-                  </a:lnTo>
-                  <a:lnTo>
-                    <a:pt x="5300066" y="459615"/>
-                  </a:lnTo>
-                  <a:lnTo>
-                    <a:pt x="5228444" y="449612"/>
-                  </a:lnTo>
-                  <a:lnTo>
-                    <a:pt x="5156821" y="439359"/>
-                  </a:lnTo>
-                  <a:lnTo>
-                    <a:pt x="5085199" y="428851"/>
-                  </a:lnTo>
-                  <a:lnTo>
-                    <a:pt x="5013576" y="418081"/>
-                  </a:lnTo>
-                  <a:lnTo>
-                    <a:pt x="4941954" y="407043"/>
-                  </a:lnTo>
-                  <a:lnTo>
-                    <a:pt x="4870331" y="395729"/>
-                  </a:lnTo>
-                  <a:lnTo>
-                    <a:pt x="4798709" y="384133"/>
-                  </a:lnTo>
-                  <a:lnTo>
-                    <a:pt x="4727086" y="372248"/>
-                  </a:lnTo>
-                  <a:lnTo>
-                    <a:pt x="4655464" y="360067"/>
-                  </a:lnTo>
-                  <a:lnTo>
-                    <a:pt x="4583841" y="347582"/>
-                  </a:lnTo>
-                  <a:lnTo>
-                    <a:pt x="4512219" y="334786"/>
-                  </a:lnTo>
-                  <a:lnTo>
-                    <a:pt x="4440596" y="321671"/>
-                  </a:lnTo>
-                  <a:lnTo>
-                    <a:pt x="4368974" y="308229"/>
-                  </a:lnTo>
-                  <a:lnTo>
-                    <a:pt x="4297351" y="294452"/>
-                  </a:lnTo>
-                  <a:lnTo>
-                    <a:pt x="4225729" y="280331"/>
-                  </a:lnTo>
-                  <a:lnTo>
-                    <a:pt x="4154106" y="265858"/>
-                  </a:lnTo>
-                  <a:lnTo>
-                    <a:pt x="4082483" y="251025"/>
-                  </a:lnTo>
-                  <a:lnTo>
-                    <a:pt x="4010861" y="235822"/>
-                  </a:lnTo>
-                  <a:lnTo>
-                    <a:pt x="3939238" y="220239"/>
-                  </a:lnTo>
-                  <a:lnTo>
-                    <a:pt x="3867616" y="204268"/>
-                  </a:lnTo>
-                  <a:lnTo>
-                    <a:pt x="3795993" y="187899"/>
-                  </a:lnTo>
-                  <a:lnTo>
-                    <a:pt x="3724371" y="171122"/>
-                  </a:lnTo>
-                  <a:lnTo>
-                    <a:pt x="3652748" y="153927"/>
-                  </a:lnTo>
-                  <a:lnTo>
-                    <a:pt x="3581126" y="136303"/>
-                  </a:lnTo>
-                  <a:lnTo>
-                    <a:pt x="3509503" y="118240"/>
-                  </a:lnTo>
-                  <a:lnTo>
-                    <a:pt x="3437881" y="99726"/>
-                  </a:lnTo>
-                  <a:lnTo>
-                    <a:pt x="3366258" y="80751"/>
-                  </a:lnTo>
-                  <a:lnTo>
-                    <a:pt x="3294636" y="61302"/>
-                  </a:lnTo>
-                  <a:lnTo>
-                    <a:pt x="3223013" y="41369"/>
-                  </a:lnTo>
-                  <a:lnTo>
-                    <a:pt x="3151391" y="20939"/>
+                    <a:pt x="7019007" y="463922"/>
+                  </a:lnTo>
+                  <a:lnTo>
+                    <a:pt x="6947385" y="458280"/>
+                  </a:lnTo>
+                  <a:lnTo>
+                    <a:pt x="6875762" y="452558"/>
+                  </a:lnTo>
+                  <a:lnTo>
+                    <a:pt x="6804139" y="446755"/>
+                  </a:lnTo>
+                  <a:lnTo>
+                    <a:pt x="6732517" y="440871"/>
+                  </a:lnTo>
+                  <a:lnTo>
+                    <a:pt x="6660894" y="434904"/>
+                  </a:lnTo>
+                  <a:lnTo>
+                    <a:pt x="6589272" y="428852"/>
+                  </a:lnTo>
+                  <a:lnTo>
+                    <a:pt x="6517649" y="422716"/>
+                  </a:lnTo>
+                  <a:lnTo>
+                    <a:pt x="6446027" y="416493"/>
+                  </a:lnTo>
+                  <a:lnTo>
+                    <a:pt x="6374404" y="410183"/>
+                  </a:lnTo>
+                  <a:lnTo>
+                    <a:pt x="6302782" y="403783"/>
+                  </a:lnTo>
+                  <a:lnTo>
+                    <a:pt x="6231159" y="397294"/>
+                  </a:lnTo>
+                  <a:lnTo>
+                    <a:pt x="6159537" y="390713"/>
+                  </a:lnTo>
+                  <a:lnTo>
+                    <a:pt x="6087914" y="384040"/>
+                  </a:lnTo>
+                  <a:lnTo>
+                    <a:pt x="6016292" y="377272"/>
+                  </a:lnTo>
+                  <a:lnTo>
+                    <a:pt x="5944669" y="370410"/>
+                  </a:lnTo>
+                  <a:lnTo>
+                    <a:pt x="5873047" y="363450"/>
+                  </a:lnTo>
+                  <a:lnTo>
+                    <a:pt x="5801424" y="356393"/>
+                  </a:lnTo>
+                  <a:lnTo>
+                    <a:pt x="5729802" y="349236"/>
+                  </a:lnTo>
+                  <a:lnTo>
+                    <a:pt x="5658179" y="341979"/>
+                  </a:lnTo>
+                  <a:lnTo>
+                    <a:pt x="5586557" y="334619"/>
+                  </a:lnTo>
+                  <a:lnTo>
+                    <a:pt x="5514934" y="327156"/>
+                  </a:lnTo>
+                  <a:lnTo>
+                    <a:pt x="5443311" y="319588"/>
+                  </a:lnTo>
+                  <a:lnTo>
+                    <a:pt x="5371689" y="311913"/>
+                  </a:lnTo>
+                  <a:lnTo>
+                    <a:pt x="5300066" y="304130"/>
+                  </a:lnTo>
+                  <a:lnTo>
+                    <a:pt x="5228444" y="296237"/>
+                  </a:lnTo>
+                  <a:lnTo>
+                    <a:pt x="5156821" y="288233"/>
+                  </a:lnTo>
+                  <a:lnTo>
+                    <a:pt x="5085199" y="280117"/>
+                  </a:lnTo>
+                  <a:lnTo>
+                    <a:pt x="5013576" y="271886"/>
+                  </a:lnTo>
+                  <a:lnTo>
+                    <a:pt x="4941954" y="263540"/>
+                  </a:lnTo>
+                  <a:lnTo>
+                    <a:pt x="4870331" y="255076"/>
+                  </a:lnTo>
+                  <a:lnTo>
+                    <a:pt x="4798709" y="246492"/>
+                  </a:lnTo>
+                  <a:lnTo>
+                    <a:pt x="4727086" y="237788"/>
+                  </a:lnTo>
+                  <a:lnTo>
+                    <a:pt x="4655464" y="228961"/>
+                  </a:lnTo>
+                  <a:lnTo>
+                    <a:pt x="4583841" y="220010"/>
+                  </a:lnTo>
+                  <a:lnTo>
+                    <a:pt x="4512219" y="210933"/>
+                  </a:lnTo>
+                  <a:lnTo>
+                    <a:pt x="4440596" y="201729"/>
+                  </a:lnTo>
+                  <a:lnTo>
+                    <a:pt x="4368974" y="192394"/>
+                  </a:lnTo>
+                  <a:lnTo>
+                    <a:pt x="4297351" y="182928"/>
+                  </a:lnTo>
+                  <a:lnTo>
+                    <a:pt x="4225729" y="173329"/>
+                  </a:lnTo>
+                  <a:lnTo>
+                    <a:pt x="4154106" y="163595"/>
+                  </a:lnTo>
+                  <a:lnTo>
+                    <a:pt x="4082483" y="153723"/>
+                  </a:lnTo>
+                  <a:lnTo>
+                    <a:pt x="4010861" y="143713"/>
+                  </a:lnTo>
+                  <a:lnTo>
+                    <a:pt x="3939238" y="133561"/>
+                  </a:lnTo>
+                  <a:lnTo>
+                    <a:pt x="3867616" y="123267"/>
+                  </a:lnTo>
+                  <a:lnTo>
+                    <a:pt x="3795993" y="112828"/>
+                  </a:lnTo>
+                  <a:lnTo>
+                    <a:pt x="3724371" y="102242"/>
+                  </a:lnTo>
+                  <a:lnTo>
+                    <a:pt x="3652748" y="91506"/>
+                  </a:lnTo>
+                  <a:lnTo>
+                    <a:pt x="3581126" y="80620"/>
+                  </a:lnTo>
+                  <a:lnTo>
+                    <a:pt x="3509503" y="69580"/>
+                  </a:lnTo>
+                  <a:lnTo>
+                    <a:pt x="3437881" y="58385"/>
+                  </a:lnTo>
+                  <a:lnTo>
+                    <a:pt x="3366258" y="47032"/>
+                  </a:lnTo>
+                  <a:lnTo>
+                    <a:pt x="3294636" y="35519"/>
+                  </a:lnTo>
+                  <a:lnTo>
+                    <a:pt x="3223013" y="23845"/>
+                  </a:lnTo>
+                  <a:lnTo>
+                    <a:pt x="3151391" y="12005"/>
                   </a:lnTo>
                   <a:lnTo>
                     <a:pt x="3079768" y="0"/>
                   </a:lnTo>
                   <a:lnTo>
-                    <a:pt x="3008146" y="6371"/>
-                  </a:lnTo>
-                  <a:lnTo>
-                    <a:pt x="2936523" y="31688"/>
-                  </a:lnTo>
-                  <a:lnTo>
-                    <a:pt x="2864901" y="56255"/>
-                  </a:lnTo>
-                  <a:lnTo>
-                    <a:pt x="2793278" y="80094"/>
-                  </a:lnTo>
-                  <a:lnTo>
-                    <a:pt x="2721655" y="103227"/>
-                  </a:lnTo>
-                  <a:lnTo>
-                    <a:pt x="2650033" y="125675"/>
-                  </a:lnTo>
-                  <a:lnTo>
-                    <a:pt x="2578410" y="147458"/>
-                  </a:lnTo>
-                  <a:lnTo>
-                    <a:pt x="2506788" y="168595"/>
-                  </a:lnTo>
-                  <a:lnTo>
-                    <a:pt x="2435165" y="189105"/>
-                  </a:lnTo>
-                  <a:lnTo>
-                    <a:pt x="2363543" y="209009"/>
-                  </a:lnTo>
-                  <a:lnTo>
-                    <a:pt x="2291920" y="228322"/>
-                  </a:lnTo>
-                  <a:lnTo>
-                    <a:pt x="2220298" y="247063"/>
-                  </a:lnTo>
-                  <a:lnTo>
-                    <a:pt x="2148675" y="265249"/>
-                  </a:lnTo>
-                  <a:lnTo>
-                    <a:pt x="2077053" y="282896"/>
-                  </a:lnTo>
-                  <a:lnTo>
-                    <a:pt x="2005430" y="300020"/>
-                  </a:lnTo>
-                  <a:lnTo>
-                    <a:pt x="1933808" y="316637"/>
-                  </a:lnTo>
-                  <a:lnTo>
-                    <a:pt x="1862185" y="332762"/>
-                  </a:lnTo>
-                  <a:lnTo>
-                    <a:pt x="1790563" y="348409"/>
-                  </a:lnTo>
-                  <a:lnTo>
-                    <a:pt x="1718940" y="363592"/>
-                  </a:lnTo>
-                  <a:lnTo>
-                    <a:pt x="1647318" y="378325"/>
-                  </a:lnTo>
-                  <a:lnTo>
-                    <a:pt x="1575695" y="392622"/>
-                  </a:lnTo>
-                  <a:lnTo>
-                    <a:pt x="1504073" y="406495"/>
-                  </a:lnTo>
-                  <a:lnTo>
-                    <a:pt x="1432450" y="419957"/>
-                  </a:lnTo>
-                  <a:lnTo>
-                    <a:pt x="1360827" y="433020"/>
-                  </a:lnTo>
-                  <a:lnTo>
-                    <a:pt x="1289205" y="445697"/>
-                  </a:lnTo>
-                  <a:lnTo>
-                    <a:pt x="1217582" y="457997"/>
-                  </a:lnTo>
-                  <a:lnTo>
-                    <a:pt x="1145960" y="469933"/>
-                  </a:lnTo>
-                  <a:lnTo>
-                    <a:pt x="1074337" y="481516"/>
-                  </a:lnTo>
-                  <a:lnTo>
-                    <a:pt x="1002715" y="492755"/>
-                  </a:lnTo>
-                  <a:lnTo>
-                    <a:pt x="931092" y="503662"/>
-                  </a:lnTo>
-                  <a:lnTo>
-                    <a:pt x="859470" y="514245"/>
-                  </a:lnTo>
-                  <a:lnTo>
-                    <a:pt x="787847" y="524515"/>
-                  </a:lnTo>
-                  <a:lnTo>
-                    <a:pt x="716225" y="534480"/>
-                  </a:lnTo>
-                  <a:lnTo>
-                    <a:pt x="644602" y="544150"/>
-                  </a:lnTo>
-                  <a:lnTo>
-                    <a:pt x="572980" y="553534"/>
-                  </a:lnTo>
-                  <a:lnTo>
-                    <a:pt x="501357" y="562639"/>
-                  </a:lnTo>
-                  <a:lnTo>
-                    <a:pt x="429735" y="571475"/>
-                  </a:lnTo>
-                  <a:lnTo>
-                    <a:pt x="358112" y="580049"/>
-                  </a:lnTo>
-                  <a:lnTo>
-                    <a:pt x="286490" y="588369"/>
-                  </a:lnTo>
-                  <a:lnTo>
-                    <a:pt x="214867" y="596442"/>
-                  </a:lnTo>
-                  <a:lnTo>
-                    <a:pt x="143245" y="604277"/>
-                  </a:lnTo>
-                  <a:lnTo>
-                    <a:pt x="71622" y="611879"/>
-                  </a:lnTo>
-                  <a:lnTo>
-                    <a:pt x="0" y="619256"/>
+                    <a:pt x="3008146" y="12803"/>
+                  </a:lnTo>
+                  <a:lnTo>
+                    <a:pt x="2936523" y="42381"/>
+                  </a:lnTo>
+                  <a:lnTo>
+                    <a:pt x="2864901" y="70931"/>
+                  </a:lnTo>
+                  <a:lnTo>
+                    <a:pt x="2793278" y="98491"/>
+                  </a:lnTo>
+                  <a:lnTo>
+                    <a:pt x="2721655" y="125093"/>
+                  </a:lnTo>
+                  <a:lnTo>
+                    <a:pt x="2650033" y="150772"/>
+                  </a:lnTo>
+                  <a:lnTo>
+                    <a:pt x="2578410" y="175559"/>
+                  </a:lnTo>
+                  <a:lnTo>
+                    <a:pt x="2506788" y="199486"/>
+                  </a:lnTo>
+                  <a:lnTo>
+                    <a:pt x="2435165" y="222582"/>
+                  </a:lnTo>
+                  <a:lnTo>
+                    <a:pt x="2363543" y="244876"/>
+                  </a:lnTo>
+                  <a:lnTo>
+                    <a:pt x="2291920" y="266395"/>
+                  </a:lnTo>
+                  <a:lnTo>
+                    <a:pt x="2220298" y="287168"/>
+                  </a:lnTo>
+                  <a:lnTo>
+                    <a:pt x="2148675" y="307219"/>
+                  </a:lnTo>
+                  <a:lnTo>
+                    <a:pt x="2077053" y="326574"/>
+                  </a:lnTo>
+                  <a:lnTo>
+                    <a:pt x="2005430" y="345258"/>
+                  </a:lnTo>
+                  <a:lnTo>
+                    <a:pt x="1933808" y="363292"/>
+                  </a:lnTo>
+                  <a:lnTo>
+                    <a:pt x="1862185" y="380700"/>
+                  </a:lnTo>
+                  <a:lnTo>
+                    <a:pt x="1790563" y="397504"/>
+                  </a:lnTo>
+                  <a:lnTo>
+                    <a:pt x="1718940" y="413724"/>
+                  </a:lnTo>
+                  <a:lnTo>
+                    <a:pt x="1647318" y="429381"/>
+                  </a:lnTo>
+                  <a:lnTo>
+                    <a:pt x="1575695" y="444495"/>
+                  </a:lnTo>
+                  <a:lnTo>
+                    <a:pt x="1504073" y="459083"/>
+                  </a:lnTo>
+                  <a:lnTo>
+                    <a:pt x="1432450" y="473166"/>
+                  </a:lnTo>
+                  <a:lnTo>
+                    <a:pt x="1360827" y="486759"/>
+                  </a:lnTo>
+                  <a:lnTo>
+                    <a:pt x="1289205" y="499880"/>
+                  </a:lnTo>
+                  <a:lnTo>
+                    <a:pt x="1217582" y="512546"/>
+                  </a:lnTo>
+                  <a:lnTo>
+                    <a:pt x="1145960" y="524772"/>
+                  </a:lnTo>
+                  <a:lnTo>
+                    <a:pt x="1074337" y="536573"/>
+                  </a:lnTo>
+                  <a:lnTo>
+                    <a:pt x="1002715" y="547964"/>
+                  </a:lnTo>
+                  <a:lnTo>
+                    <a:pt x="931092" y="558961"/>
+                  </a:lnTo>
+                  <a:lnTo>
+                    <a:pt x="859470" y="569575"/>
+                  </a:lnTo>
+                  <a:lnTo>
+                    <a:pt x="787847" y="579821"/>
+                  </a:lnTo>
+                  <a:lnTo>
+                    <a:pt x="716225" y="589710"/>
+                  </a:lnTo>
+                  <a:lnTo>
+                    <a:pt x="644602" y="599257"/>
+                  </a:lnTo>
+                  <a:lnTo>
+                    <a:pt x="572980" y="608472"/>
+                  </a:lnTo>
+                  <a:lnTo>
+                    <a:pt x="501357" y="617367"/>
+                  </a:lnTo>
+                  <a:lnTo>
+                    <a:pt x="429735" y="625954"/>
+                  </a:lnTo>
+                  <a:lnTo>
+                    <a:pt x="358112" y="634242"/>
+                  </a:lnTo>
+                  <a:lnTo>
+                    <a:pt x="286490" y="642242"/>
+                  </a:lnTo>
+                  <a:lnTo>
+                    <a:pt x="214867" y="649965"/>
+                  </a:lnTo>
+                  <a:lnTo>
+                    <a:pt x="143245" y="657419"/>
+                  </a:lnTo>
+                  <a:lnTo>
+                    <a:pt x="71622" y="664615"/>
+                  </a:lnTo>
+                  <a:lnTo>
+                    <a:pt x="0" y="671561"/>
                   </a:lnTo>
                 </a:path>
               </a:pathLst>
@@ -4367,309 +4325,309 @@
           </p:nvSpPr>
           <p:spPr>
             <a:xfrm>
-              <a:off x="1172049" y="4534959"/>
-              <a:ext cx="7090630" cy="239889"/>
+              <a:off x="1172049" y="3960748"/>
+              <a:ext cx="7090630" cy="1036550"/>
             </a:xfrm>
             <a:custGeom>
               <a:avLst/>
               <a:pathLst>
-                <a:path w="7090630" h="239889">
+                <a:path w="7090630" h="1036550">
                   <a:moveTo>
-                    <a:pt x="0" y="239889"/>
+                    <a:pt x="0" y="1036550"/>
                   </a:moveTo>
                   <a:lnTo>
-                    <a:pt x="71622" y="237775"/>
-                  </a:lnTo>
-                  <a:lnTo>
-                    <a:pt x="143245" y="235655"/>
-                  </a:lnTo>
-                  <a:lnTo>
-                    <a:pt x="214867" y="233530"/>
-                  </a:lnTo>
-                  <a:lnTo>
-                    <a:pt x="286490" y="231399"/>
-                  </a:lnTo>
-                  <a:lnTo>
-                    <a:pt x="358112" y="229262"/>
-                  </a:lnTo>
-                  <a:lnTo>
-                    <a:pt x="429735" y="227119"/>
-                  </a:lnTo>
-                  <a:lnTo>
-                    <a:pt x="501357" y="224971"/>
-                  </a:lnTo>
-                  <a:lnTo>
-                    <a:pt x="572980" y="222816"/>
-                  </a:lnTo>
-                  <a:lnTo>
-                    <a:pt x="644602" y="220656"/>
-                  </a:lnTo>
-                  <a:lnTo>
-                    <a:pt x="716225" y="218490"/>
-                  </a:lnTo>
-                  <a:lnTo>
-                    <a:pt x="787847" y="216318"/>
-                  </a:lnTo>
-                  <a:lnTo>
-                    <a:pt x="859470" y="214140"/>
-                  </a:lnTo>
-                  <a:lnTo>
-                    <a:pt x="931092" y="211956"/>
-                  </a:lnTo>
-                  <a:lnTo>
-                    <a:pt x="1002715" y="209766"/>
-                  </a:lnTo>
-                  <a:lnTo>
-                    <a:pt x="1074337" y="207570"/>
-                  </a:lnTo>
-                  <a:lnTo>
-                    <a:pt x="1145960" y="205368"/>
-                  </a:lnTo>
-                  <a:lnTo>
-                    <a:pt x="1217582" y="203160"/>
-                  </a:lnTo>
-                  <a:lnTo>
-                    <a:pt x="1289205" y="200946"/>
-                  </a:lnTo>
-                  <a:lnTo>
-                    <a:pt x="1360827" y="198726"/>
-                  </a:lnTo>
-                  <a:lnTo>
-                    <a:pt x="1432450" y="196500"/>
-                  </a:lnTo>
-                  <a:lnTo>
-                    <a:pt x="1504073" y="194268"/>
-                  </a:lnTo>
-                  <a:lnTo>
-                    <a:pt x="1575695" y="192029"/>
-                  </a:lnTo>
-                  <a:lnTo>
-                    <a:pt x="1647318" y="189785"/>
-                  </a:lnTo>
-                  <a:lnTo>
-                    <a:pt x="1718940" y="187534"/>
-                  </a:lnTo>
-                  <a:lnTo>
-                    <a:pt x="1790563" y="185278"/>
-                  </a:lnTo>
-                  <a:lnTo>
-                    <a:pt x="1862185" y="183015"/>
-                  </a:lnTo>
-                  <a:lnTo>
-                    <a:pt x="1933808" y="180746"/>
-                  </a:lnTo>
-                  <a:lnTo>
-                    <a:pt x="2005430" y="178471"/>
-                  </a:lnTo>
-                  <a:lnTo>
-                    <a:pt x="2077053" y="176189"/>
-                  </a:lnTo>
-                  <a:lnTo>
-                    <a:pt x="2148675" y="173902"/>
-                  </a:lnTo>
-                  <a:lnTo>
-                    <a:pt x="2220298" y="171608"/>
-                  </a:lnTo>
-                  <a:lnTo>
-                    <a:pt x="2291920" y="169308"/>
-                  </a:lnTo>
-                  <a:lnTo>
-                    <a:pt x="2363543" y="167001"/>
-                  </a:lnTo>
-                  <a:lnTo>
-                    <a:pt x="2435165" y="164689"/>
-                  </a:lnTo>
-                  <a:lnTo>
-                    <a:pt x="2506788" y="162370"/>
-                  </a:lnTo>
-                  <a:lnTo>
-                    <a:pt x="2578410" y="160044"/>
-                  </a:lnTo>
-                  <a:lnTo>
-                    <a:pt x="2650033" y="157713"/>
-                  </a:lnTo>
-                  <a:lnTo>
-                    <a:pt x="2721655" y="155375"/>
-                  </a:lnTo>
-                  <a:lnTo>
-                    <a:pt x="2793278" y="153030"/>
-                  </a:lnTo>
-                  <a:lnTo>
-                    <a:pt x="2864901" y="150679"/>
-                  </a:lnTo>
-                  <a:lnTo>
-                    <a:pt x="2936523" y="148322"/>
-                  </a:lnTo>
-                  <a:lnTo>
-                    <a:pt x="3008146" y="145959"/>
-                  </a:lnTo>
-                  <a:lnTo>
-                    <a:pt x="3079768" y="143588"/>
-                  </a:lnTo>
-                  <a:lnTo>
-                    <a:pt x="3151391" y="141212"/>
-                  </a:lnTo>
-                  <a:lnTo>
-                    <a:pt x="3223013" y="138829"/>
-                  </a:lnTo>
-                  <a:lnTo>
-                    <a:pt x="3294636" y="136439"/>
-                  </a:lnTo>
-                  <a:lnTo>
-                    <a:pt x="3366258" y="134043"/>
-                  </a:lnTo>
-                  <a:lnTo>
-                    <a:pt x="3437881" y="131640"/>
-                  </a:lnTo>
-                  <a:lnTo>
-                    <a:pt x="3509503" y="129231"/>
-                  </a:lnTo>
-                  <a:lnTo>
-                    <a:pt x="3581126" y="126815"/>
-                  </a:lnTo>
-                  <a:lnTo>
-                    <a:pt x="3652748" y="124393"/>
-                  </a:lnTo>
-                  <a:lnTo>
-                    <a:pt x="3724371" y="121964"/>
-                  </a:lnTo>
-                  <a:lnTo>
-                    <a:pt x="3795993" y="119528"/>
-                  </a:lnTo>
-                  <a:lnTo>
-                    <a:pt x="3867616" y="117086"/>
-                  </a:lnTo>
-                  <a:lnTo>
-                    <a:pt x="3939238" y="114637"/>
-                  </a:lnTo>
-                  <a:lnTo>
-                    <a:pt x="4010861" y="112182"/>
-                  </a:lnTo>
-                  <a:lnTo>
-                    <a:pt x="4082483" y="109719"/>
-                  </a:lnTo>
-                  <a:lnTo>
-                    <a:pt x="4154106" y="107250"/>
-                  </a:lnTo>
-                  <a:lnTo>
-                    <a:pt x="4225729" y="104774"/>
-                  </a:lnTo>
-                  <a:lnTo>
-                    <a:pt x="4297351" y="102292"/>
-                  </a:lnTo>
-                  <a:lnTo>
-                    <a:pt x="4368974" y="99803"/>
-                  </a:lnTo>
-                  <a:lnTo>
-                    <a:pt x="4440596" y="97306"/>
-                  </a:lnTo>
-                  <a:lnTo>
-                    <a:pt x="4512219" y="94804"/>
-                  </a:lnTo>
-                  <a:lnTo>
-                    <a:pt x="4583841" y="92294"/>
-                  </a:lnTo>
-                  <a:lnTo>
-                    <a:pt x="4655464" y="89777"/>
-                  </a:lnTo>
-                  <a:lnTo>
-                    <a:pt x="4727086" y="87254"/>
-                  </a:lnTo>
-                  <a:lnTo>
-                    <a:pt x="4798709" y="84723"/>
-                  </a:lnTo>
-                  <a:lnTo>
-                    <a:pt x="4870331" y="82186"/>
-                  </a:lnTo>
-                  <a:lnTo>
-                    <a:pt x="4941954" y="79642"/>
-                  </a:lnTo>
-                  <a:lnTo>
-                    <a:pt x="5013576" y="77091"/>
-                  </a:lnTo>
-                  <a:lnTo>
-                    <a:pt x="5085199" y="74533"/>
-                  </a:lnTo>
-                  <a:lnTo>
-                    <a:pt x="5156821" y="71967"/>
-                  </a:lnTo>
-                  <a:lnTo>
-                    <a:pt x="5228444" y="69395"/>
-                  </a:lnTo>
-                  <a:lnTo>
-                    <a:pt x="5300066" y="66816"/>
-                  </a:lnTo>
-                  <a:lnTo>
-                    <a:pt x="5371689" y="64230"/>
-                  </a:lnTo>
-                  <a:lnTo>
-                    <a:pt x="5443311" y="61637"/>
-                  </a:lnTo>
-                  <a:lnTo>
-                    <a:pt x="5514934" y="59037"/>
-                  </a:lnTo>
-                  <a:lnTo>
-                    <a:pt x="5586557" y="56429"/>
-                  </a:lnTo>
-                  <a:lnTo>
-                    <a:pt x="5658179" y="53815"/>
-                  </a:lnTo>
-                  <a:lnTo>
-                    <a:pt x="5729802" y="51193"/>
-                  </a:lnTo>
-                  <a:lnTo>
-                    <a:pt x="5801424" y="48564"/>
-                  </a:lnTo>
-                  <a:lnTo>
-                    <a:pt x="5873047" y="45928"/>
-                  </a:lnTo>
-                  <a:lnTo>
-                    <a:pt x="5944669" y="43285"/>
-                  </a:lnTo>
-                  <a:lnTo>
-                    <a:pt x="6016292" y="40635"/>
-                  </a:lnTo>
-                  <a:lnTo>
-                    <a:pt x="6087914" y="37977"/>
-                  </a:lnTo>
-                  <a:lnTo>
-                    <a:pt x="6159537" y="35312"/>
-                  </a:lnTo>
-                  <a:lnTo>
-                    <a:pt x="6231159" y="32640"/>
-                  </a:lnTo>
-                  <a:lnTo>
-                    <a:pt x="6302782" y="29961"/>
-                  </a:lnTo>
-                  <a:lnTo>
-                    <a:pt x="6374404" y="27274"/>
-                  </a:lnTo>
-                  <a:lnTo>
-                    <a:pt x="6446027" y="24580"/>
-                  </a:lnTo>
-                  <a:lnTo>
-                    <a:pt x="6517649" y="21878"/>
-                  </a:lnTo>
-                  <a:lnTo>
-                    <a:pt x="6589272" y="19169"/>
-                  </a:lnTo>
-                  <a:lnTo>
-                    <a:pt x="6660894" y="16453"/>
-                  </a:lnTo>
-                  <a:lnTo>
-                    <a:pt x="6732517" y="13730"/>
-                  </a:lnTo>
-                  <a:lnTo>
-                    <a:pt x="6804139" y="10999"/>
-                  </a:lnTo>
-                  <a:lnTo>
-                    <a:pt x="6875762" y="8260"/>
-                  </a:lnTo>
-                  <a:lnTo>
-                    <a:pt x="6947385" y="5514"/>
-                  </a:lnTo>
-                  <a:lnTo>
-                    <a:pt x="7019007" y="2761"/>
+                    <a:pt x="71622" y="1030625"/>
+                  </a:lnTo>
+                  <a:lnTo>
+                    <a:pt x="143245" y="1024636"/>
+                  </a:lnTo>
+                  <a:lnTo>
+                    <a:pt x="214867" y="1018584"/>
+                  </a:lnTo>
+                  <a:lnTo>
+                    <a:pt x="286490" y="1012466"/>
+                  </a:lnTo>
+                  <a:lnTo>
+                    <a:pt x="358112" y="1006282"/>
+                  </a:lnTo>
+                  <a:lnTo>
+                    <a:pt x="429735" y="1000032"/>
+                  </a:lnTo>
+                  <a:lnTo>
+                    <a:pt x="501357" y="993715"/>
+                  </a:lnTo>
+                  <a:lnTo>
+                    <a:pt x="572980" y="987331"/>
+                  </a:lnTo>
+                  <a:lnTo>
+                    <a:pt x="644602" y="980877"/>
+                  </a:lnTo>
+                  <a:lnTo>
+                    <a:pt x="716225" y="974355"/>
+                  </a:lnTo>
+                  <a:lnTo>
+                    <a:pt x="787847" y="967762"/>
+                  </a:lnTo>
+                  <a:lnTo>
+                    <a:pt x="859470" y="961099"/>
+                  </a:lnTo>
+                  <a:lnTo>
+                    <a:pt x="931092" y="954364"/>
+                  </a:lnTo>
+                  <a:lnTo>
+                    <a:pt x="1002715" y="947557"/>
+                  </a:lnTo>
+                  <a:lnTo>
+                    <a:pt x="1074337" y="940676"/>
+                  </a:lnTo>
+                  <a:lnTo>
+                    <a:pt x="1145960" y="933722"/>
+                  </a:lnTo>
+                  <a:lnTo>
+                    <a:pt x="1217582" y="926693"/>
+                  </a:lnTo>
+                  <a:lnTo>
+                    <a:pt x="1289205" y="919589"/>
+                  </a:lnTo>
+                  <a:lnTo>
+                    <a:pt x="1360827" y="912408"/>
+                  </a:lnTo>
+                  <a:lnTo>
+                    <a:pt x="1432450" y="905151"/>
+                  </a:lnTo>
+                  <a:lnTo>
+                    <a:pt x="1504073" y="897815"/>
+                  </a:lnTo>
+                  <a:lnTo>
+                    <a:pt x="1575695" y="890401"/>
+                  </a:lnTo>
+                  <a:lnTo>
+                    <a:pt x="1647318" y="882907"/>
+                  </a:lnTo>
+                  <a:lnTo>
+                    <a:pt x="1718940" y="875333"/>
+                  </a:lnTo>
+                  <a:lnTo>
+                    <a:pt x="1790563" y="867677"/>
+                  </a:lnTo>
+                  <a:lnTo>
+                    <a:pt x="1862185" y="859939"/>
+                  </a:lnTo>
+                  <a:lnTo>
+                    <a:pt x="1933808" y="852118"/>
+                  </a:lnTo>
+                  <a:lnTo>
+                    <a:pt x="2005430" y="844213"/>
+                  </a:lnTo>
+                  <a:lnTo>
+                    <a:pt x="2077053" y="836223"/>
+                  </a:lnTo>
+                  <a:lnTo>
+                    <a:pt x="2148675" y="828148"/>
+                  </a:lnTo>
+                  <a:lnTo>
+                    <a:pt x="2220298" y="819986"/>
+                  </a:lnTo>
+                  <a:lnTo>
+                    <a:pt x="2291920" y="811736"/>
+                  </a:lnTo>
+                  <a:lnTo>
+                    <a:pt x="2363543" y="803397"/>
+                  </a:lnTo>
+                  <a:lnTo>
+                    <a:pt x="2435165" y="794970"/>
+                  </a:lnTo>
+                  <a:lnTo>
+                    <a:pt x="2506788" y="786451"/>
+                  </a:lnTo>
+                  <a:lnTo>
+                    <a:pt x="2578410" y="777841"/>
+                  </a:lnTo>
+                  <a:lnTo>
+                    <a:pt x="2650033" y="769139"/>
+                  </a:lnTo>
+                  <a:lnTo>
+                    <a:pt x="2721655" y="760343"/>
+                  </a:lnTo>
+                  <a:lnTo>
+                    <a:pt x="2793278" y="751453"/>
+                  </a:lnTo>
+                  <a:lnTo>
+                    <a:pt x="2864901" y="742468"/>
+                  </a:lnTo>
+                  <a:lnTo>
+                    <a:pt x="2936523" y="733386"/>
+                  </a:lnTo>
+                  <a:lnTo>
+                    <a:pt x="3008146" y="724206"/>
+                  </a:lnTo>
+                  <a:lnTo>
+                    <a:pt x="3079768" y="714928"/>
+                  </a:lnTo>
+                  <a:lnTo>
+                    <a:pt x="3151391" y="705550"/>
+                  </a:lnTo>
+                  <a:lnTo>
+                    <a:pt x="3223013" y="696072"/>
+                  </a:lnTo>
+                  <a:lnTo>
+                    <a:pt x="3294636" y="686492"/>
+                  </a:lnTo>
+                  <a:lnTo>
+                    <a:pt x="3366258" y="676809"/>
+                  </a:lnTo>
+                  <a:lnTo>
+                    <a:pt x="3437881" y="667022"/>
+                  </a:lnTo>
+                  <a:lnTo>
+                    <a:pt x="3509503" y="657130"/>
+                  </a:lnTo>
+                  <a:lnTo>
+                    <a:pt x="3581126" y="647132"/>
+                  </a:lnTo>
+                  <a:lnTo>
+                    <a:pt x="3652748" y="637026"/>
+                  </a:lnTo>
+                  <a:lnTo>
+                    <a:pt x="3724371" y="626813"/>
+                  </a:lnTo>
+                  <a:lnTo>
+                    <a:pt x="3795993" y="616489"/>
+                  </a:lnTo>
+                  <a:lnTo>
+                    <a:pt x="3867616" y="606054"/>
+                  </a:lnTo>
+                  <a:lnTo>
+                    <a:pt x="3939238" y="595508"/>
+                  </a:lnTo>
+                  <a:lnTo>
+                    <a:pt x="4010861" y="584848"/>
+                  </a:lnTo>
+                  <a:lnTo>
+                    <a:pt x="4082483" y="574074"/>
+                  </a:lnTo>
+                  <a:lnTo>
+                    <a:pt x="4154106" y="563184"/>
+                  </a:lnTo>
+                  <a:lnTo>
+                    <a:pt x="4225729" y="552178"/>
+                  </a:lnTo>
+                  <a:lnTo>
+                    <a:pt x="4297351" y="541053"/>
+                  </a:lnTo>
+                  <a:lnTo>
+                    <a:pt x="4368974" y="529809"/>
+                  </a:lnTo>
+                  <a:lnTo>
+                    <a:pt x="4440596" y="518444"/>
+                  </a:lnTo>
+                  <a:lnTo>
+                    <a:pt x="4512219" y="506957"/>
+                  </a:lnTo>
+                  <a:lnTo>
+                    <a:pt x="4583841" y="495346"/>
+                  </a:lnTo>
+                  <a:lnTo>
+                    <a:pt x="4655464" y="483611"/>
+                  </a:lnTo>
+                  <a:lnTo>
+                    <a:pt x="4727086" y="471750"/>
+                  </a:lnTo>
+                  <a:lnTo>
+                    <a:pt x="4798709" y="459762"/>
+                  </a:lnTo>
+                  <a:lnTo>
+                    <a:pt x="4870331" y="447645"/>
+                  </a:lnTo>
+                  <a:lnTo>
+                    <a:pt x="4941954" y="435398"/>
+                  </a:lnTo>
+                  <a:lnTo>
+                    <a:pt x="5013576" y="423019"/>
+                  </a:lnTo>
+                  <a:lnTo>
+                    <a:pt x="5085199" y="410508"/>
+                  </a:lnTo>
+                  <a:lnTo>
+                    <a:pt x="5156821" y="397862"/>
+                  </a:lnTo>
+                  <a:lnTo>
+                    <a:pt x="5228444" y="385081"/>
+                  </a:lnTo>
+                  <a:lnTo>
+                    <a:pt x="5300066" y="372162"/>
+                  </a:lnTo>
+                  <a:lnTo>
+                    <a:pt x="5371689" y="359105"/>
+                  </a:lnTo>
+                  <a:lnTo>
+                    <a:pt x="5443311" y="345907"/>
+                  </a:lnTo>
+                  <a:lnTo>
+                    <a:pt x="5514934" y="332568"/>
+                  </a:lnTo>
+                  <a:lnTo>
+                    <a:pt x="5586557" y="319085"/>
+                  </a:lnTo>
+                  <a:lnTo>
+                    <a:pt x="5658179" y="305458"/>
+                  </a:lnTo>
+                  <a:lnTo>
+                    <a:pt x="5729802" y="291685"/>
+                  </a:lnTo>
+                  <a:lnTo>
+                    <a:pt x="5801424" y="277763"/>
+                  </a:lnTo>
+                  <a:lnTo>
+                    <a:pt x="5873047" y="263693"/>
+                  </a:lnTo>
+                  <a:lnTo>
+                    <a:pt x="5944669" y="249471"/>
+                  </a:lnTo>
+                  <a:lnTo>
+                    <a:pt x="6016292" y="235096"/>
+                  </a:lnTo>
+                  <a:lnTo>
+                    <a:pt x="6087914" y="220567"/>
+                  </a:lnTo>
+                  <a:lnTo>
+                    <a:pt x="6159537" y="205883"/>
+                  </a:lnTo>
+                  <a:lnTo>
+                    <a:pt x="6231159" y="191040"/>
+                  </a:lnTo>
+                  <a:lnTo>
+                    <a:pt x="6302782" y="176038"/>
+                  </a:lnTo>
+                  <a:lnTo>
+                    <a:pt x="6374404" y="160875"/>
+                  </a:lnTo>
+                  <a:lnTo>
+                    <a:pt x="6446027" y="145550"/>
+                  </a:lnTo>
+                  <a:lnTo>
+                    <a:pt x="6517649" y="130060"/>
+                  </a:lnTo>
+                  <a:lnTo>
+                    <a:pt x="6589272" y="114403"/>
+                  </a:lnTo>
+                  <a:lnTo>
+                    <a:pt x="6660894" y="98579"/>
+                  </a:lnTo>
+                  <a:lnTo>
+                    <a:pt x="6732517" y="82584"/>
+                  </a:lnTo>
+                  <a:lnTo>
+                    <a:pt x="6804139" y="66418"/>
+                  </a:lnTo>
+                  <a:lnTo>
+                    <a:pt x="6875762" y="50079"/>
+                  </a:lnTo>
+                  <a:lnTo>
+                    <a:pt x="6947385" y="33563"/>
+                  </a:lnTo>
+                  <a:lnTo>
+                    <a:pt x="7019007" y="16871"/>
                   </a:lnTo>
                   <a:lnTo>
                     <a:pt x="7090630" y="0"/>

--- a/docs/plots/carbo/jx_carbo_linsubhr_dosedisc_anemia3.pptx
+++ b/docs/plots/carbo/jx_carbo_linsubhr_dosedisc_anemia3.pptx
@@ -3132,569 +3132,590 @@
           <p:spPr>
             <a:xfrm>
               <a:off x="1172049" y="1896563"/>
-              <a:ext cx="7090630" cy="3459547"/>
+              <a:ext cx="7090630" cy="3435851"/>
             </a:xfrm>
             <a:custGeom>
               <a:avLst/>
               <a:pathLst>
-                <a:path w="7090630" h="3459547">
+                <a:path w="7090630" h="3435851">
                   <a:moveTo>
-                    <a:pt x="0" y="2075172"/>
+                    <a:pt x="0" y="1170717"/>
                   </a:moveTo>
                   <a:lnTo>
-                    <a:pt x="71622" y="2097076"/>
-                  </a:lnTo>
-                  <a:lnTo>
-                    <a:pt x="143245" y="2118675"/>
-                  </a:lnTo>
-                  <a:lnTo>
-                    <a:pt x="214867" y="2139974"/>
-                  </a:lnTo>
-                  <a:lnTo>
-                    <a:pt x="286490" y="2160978"/>
-                  </a:lnTo>
-                  <a:lnTo>
-                    <a:pt x="358112" y="2181690"/>
-                  </a:lnTo>
-                  <a:lnTo>
-                    <a:pt x="429735" y="2202114"/>
-                  </a:lnTo>
-                  <a:lnTo>
-                    <a:pt x="501357" y="2222255"/>
-                  </a:lnTo>
-                  <a:lnTo>
-                    <a:pt x="572980" y="2242116"/>
-                  </a:lnTo>
-                  <a:lnTo>
-                    <a:pt x="644602" y="2261702"/>
-                  </a:lnTo>
-                  <a:lnTo>
-                    <a:pt x="716225" y="2281015"/>
-                  </a:lnTo>
-                  <a:lnTo>
-                    <a:pt x="787847" y="2300060"/>
-                  </a:lnTo>
-                  <a:lnTo>
-                    <a:pt x="859470" y="2318841"/>
-                  </a:lnTo>
-                  <a:lnTo>
-                    <a:pt x="931092" y="2337361"/>
-                  </a:lnTo>
-                  <a:lnTo>
-                    <a:pt x="1002715" y="2355624"/>
-                  </a:lnTo>
-                  <a:lnTo>
-                    <a:pt x="1074337" y="2373634"/>
-                  </a:lnTo>
-                  <a:lnTo>
-                    <a:pt x="1145960" y="2391393"/>
-                  </a:lnTo>
-                  <a:lnTo>
-                    <a:pt x="1217582" y="2408905"/>
-                  </a:lnTo>
-                  <a:lnTo>
-                    <a:pt x="1289205" y="2426175"/>
-                  </a:lnTo>
-                  <a:lnTo>
-                    <a:pt x="1360827" y="2443205"/>
-                  </a:lnTo>
-                  <a:lnTo>
-                    <a:pt x="1432450" y="2459998"/>
-                  </a:lnTo>
-                  <a:lnTo>
-                    <a:pt x="1504073" y="2476558"/>
-                  </a:lnTo>
-                  <a:lnTo>
-                    <a:pt x="1575695" y="2492888"/>
-                  </a:lnTo>
-                  <a:lnTo>
-                    <a:pt x="1647318" y="2508991"/>
-                  </a:lnTo>
-                  <a:lnTo>
-                    <a:pt x="1718940" y="2524871"/>
-                  </a:lnTo>
-                  <a:lnTo>
-                    <a:pt x="1790563" y="2540530"/>
-                  </a:lnTo>
-                  <a:lnTo>
-                    <a:pt x="1862185" y="2555972"/>
-                  </a:lnTo>
-                  <a:lnTo>
-                    <a:pt x="1933808" y="2571200"/>
-                  </a:lnTo>
-                  <a:lnTo>
-                    <a:pt x="2005430" y="2586216"/>
-                  </a:lnTo>
-                  <a:lnTo>
-                    <a:pt x="2077053" y="2601023"/>
-                  </a:lnTo>
-                  <a:lnTo>
-                    <a:pt x="2148675" y="2615625"/>
-                  </a:lnTo>
-                  <a:lnTo>
-                    <a:pt x="2220298" y="2630024"/>
-                  </a:lnTo>
-                  <a:lnTo>
-                    <a:pt x="2291920" y="2644224"/>
-                  </a:lnTo>
-                  <a:lnTo>
-                    <a:pt x="2363543" y="2658226"/>
-                  </a:lnTo>
-                  <a:lnTo>
-                    <a:pt x="2435165" y="2672033"/>
-                  </a:lnTo>
-                  <a:lnTo>
-                    <a:pt x="2506788" y="2685649"/>
-                  </a:lnTo>
-                  <a:lnTo>
-                    <a:pt x="2578410" y="2699076"/>
-                  </a:lnTo>
-                  <a:lnTo>
-                    <a:pt x="2650033" y="2712316"/>
-                  </a:lnTo>
-                  <a:lnTo>
-                    <a:pt x="2721655" y="2725373"/>
-                  </a:lnTo>
-                  <a:lnTo>
-                    <a:pt x="2793278" y="2738248"/>
-                  </a:lnTo>
-                  <a:lnTo>
-                    <a:pt x="2864901" y="2750945"/>
-                  </a:lnTo>
-                  <a:lnTo>
-                    <a:pt x="2936523" y="2763465"/>
-                  </a:lnTo>
-                  <a:lnTo>
-                    <a:pt x="3008146" y="2775811"/>
-                  </a:lnTo>
-                  <a:lnTo>
-                    <a:pt x="3079768" y="2770148"/>
-                  </a:lnTo>
-                  <a:lnTo>
-                    <a:pt x="3151391" y="2738404"/>
-                  </a:lnTo>
-                  <a:lnTo>
-                    <a:pt x="3223013" y="2705518"/>
-                  </a:lnTo>
-                  <a:lnTo>
-                    <a:pt x="3294636" y="2671450"/>
-                  </a:lnTo>
-                  <a:lnTo>
-                    <a:pt x="3366258" y="2636156"/>
-                  </a:lnTo>
-                  <a:lnTo>
-                    <a:pt x="3437881" y="2599592"/>
-                  </a:lnTo>
-                  <a:lnTo>
-                    <a:pt x="3509503" y="2561713"/>
-                  </a:lnTo>
-                  <a:lnTo>
-                    <a:pt x="3581126" y="2522472"/>
-                  </a:lnTo>
-                  <a:lnTo>
-                    <a:pt x="3652748" y="2481819"/>
-                  </a:lnTo>
-                  <a:lnTo>
-                    <a:pt x="3724371" y="2439703"/>
-                  </a:lnTo>
-                  <a:lnTo>
-                    <a:pt x="3795993" y="2396073"/>
-                  </a:lnTo>
-                  <a:lnTo>
-                    <a:pt x="3867616" y="2350874"/>
-                  </a:lnTo>
-                  <a:lnTo>
-                    <a:pt x="3939238" y="2304048"/>
-                  </a:lnTo>
-                  <a:lnTo>
-                    <a:pt x="4010861" y="2255539"/>
-                  </a:lnTo>
-                  <a:lnTo>
-                    <a:pt x="4082483" y="2205284"/>
-                  </a:lnTo>
-                  <a:lnTo>
-                    <a:pt x="4154106" y="2153221"/>
-                  </a:lnTo>
-                  <a:lnTo>
-                    <a:pt x="4225729" y="2099286"/>
-                  </a:lnTo>
-                  <a:lnTo>
-                    <a:pt x="4297351" y="2043411"/>
-                  </a:lnTo>
-                  <a:lnTo>
-                    <a:pt x="4368974" y="1985526"/>
-                  </a:lnTo>
-                  <a:lnTo>
-                    <a:pt x="4440596" y="1925559"/>
-                  </a:lnTo>
-                  <a:lnTo>
-                    <a:pt x="4512219" y="1863435"/>
-                  </a:lnTo>
-                  <a:lnTo>
-                    <a:pt x="4583841" y="1799076"/>
-                  </a:lnTo>
-                  <a:lnTo>
-                    <a:pt x="4655464" y="1732402"/>
-                  </a:lnTo>
-                  <a:lnTo>
-                    <a:pt x="4727086" y="1663330"/>
-                  </a:lnTo>
-                  <a:lnTo>
-                    <a:pt x="4798709" y="1591773"/>
-                  </a:lnTo>
-                  <a:lnTo>
-                    <a:pt x="4870331" y="1517642"/>
-                  </a:lnTo>
-                  <a:lnTo>
-                    <a:pt x="4941954" y="1440845"/>
-                  </a:lnTo>
-                  <a:lnTo>
-                    <a:pt x="5013576" y="1361285"/>
-                  </a:lnTo>
-                  <a:lnTo>
-                    <a:pt x="5085199" y="1278864"/>
-                  </a:lnTo>
-                  <a:lnTo>
-                    <a:pt x="5156821" y="1193477"/>
-                  </a:lnTo>
-                  <a:lnTo>
-                    <a:pt x="5228444" y="1105020"/>
-                  </a:lnTo>
-                  <a:lnTo>
-                    <a:pt x="5300066" y="1013380"/>
-                  </a:lnTo>
-                  <a:lnTo>
-                    <a:pt x="5371689" y="918444"/>
-                  </a:lnTo>
-                  <a:lnTo>
-                    <a:pt x="5443311" y="820094"/>
-                  </a:lnTo>
-                  <a:lnTo>
-                    <a:pt x="5514934" y="718205"/>
-                  </a:lnTo>
-                  <a:lnTo>
-                    <a:pt x="5586557" y="612652"/>
-                  </a:lnTo>
-                  <a:lnTo>
-                    <a:pt x="5658179" y="503301"/>
-                  </a:lnTo>
-                  <a:lnTo>
-                    <a:pt x="5729802" y="390018"/>
-                  </a:lnTo>
-                  <a:lnTo>
-                    <a:pt x="5801424" y="272659"/>
-                  </a:lnTo>
-                  <a:lnTo>
-                    <a:pt x="5873047" y="151079"/>
-                  </a:lnTo>
-                  <a:lnTo>
-                    <a:pt x="5944669" y="25126"/>
-                  </a:lnTo>
-                  <a:lnTo>
-                    <a:pt x="5958461" y="0"/>
+                    <a:pt x="71622" y="1231088"/>
+                  </a:lnTo>
+                  <a:lnTo>
+                    <a:pt x="143245" y="1289989"/>
+                  </a:lnTo>
+                  <a:lnTo>
+                    <a:pt x="214867" y="1347459"/>
+                  </a:lnTo>
+                  <a:lnTo>
+                    <a:pt x="286490" y="1403530"/>
+                  </a:lnTo>
+                  <a:lnTo>
+                    <a:pt x="358112" y="1458238"/>
+                  </a:lnTo>
+                  <a:lnTo>
+                    <a:pt x="429735" y="1511614"/>
+                  </a:lnTo>
+                  <a:lnTo>
+                    <a:pt x="501357" y="1563693"/>
+                  </a:lnTo>
+                  <a:lnTo>
+                    <a:pt x="572980" y="1614504"/>
+                  </a:lnTo>
+                  <a:lnTo>
+                    <a:pt x="644602" y="1664080"/>
+                  </a:lnTo>
+                  <a:lnTo>
+                    <a:pt x="716225" y="1712450"/>
+                  </a:lnTo>
+                  <a:lnTo>
+                    <a:pt x="787847" y="1759643"/>
+                  </a:lnTo>
+                  <a:lnTo>
+                    <a:pt x="859470" y="1805689"/>
+                  </a:lnTo>
+                  <a:lnTo>
+                    <a:pt x="931092" y="1850614"/>
+                  </a:lnTo>
+                  <a:lnTo>
+                    <a:pt x="1002715" y="1894447"/>
+                  </a:lnTo>
+                  <a:lnTo>
+                    <a:pt x="1074337" y="1937213"/>
+                  </a:lnTo>
+                  <a:lnTo>
+                    <a:pt x="1145960" y="1978939"/>
+                  </a:lnTo>
+                  <a:lnTo>
+                    <a:pt x="1217582" y="2019650"/>
+                  </a:lnTo>
+                  <a:lnTo>
+                    <a:pt x="1289205" y="2059371"/>
+                  </a:lnTo>
+                  <a:lnTo>
+                    <a:pt x="1360827" y="2098126"/>
+                  </a:lnTo>
+                  <a:lnTo>
+                    <a:pt x="1432450" y="2135938"/>
+                  </a:lnTo>
+                  <a:lnTo>
+                    <a:pt x="1504073" y="2172831"/>
+                  </a:lnTo>
+                  <a:lnTo>
+                    <a:pt x="1575695" y="2208826"/>
+                  </a:lnTo>
+                  <a:lnTo>
+                    <a:pt x="1647318" y="2243945"/>
+                  </a:lnTo>
+                  <a:lnTo>
+                    <a:pt x="1718940" y="2278210"/>
+                  </a:lnTo>
+                  <a:lnTo>
+                    <a:pt x="1790563" y="2311642"/>
+                  </a:lnTo>
+                  <a:lnTo>
+                    <a:pt x="1862185" y="2344261"/>
+                  </a:lnTo>
+                  <a:lnTo>
+                    <a:pt x="1933808" y="2376086"/>
+                  </a:lnTo>
+                  <a:lnTo>
+                    <a:pt x="2005430" y="2407137"/>
+                  </a:lnTo>
+                  <a:lnTo>
+                    <a:pt x="2077053" y="2437433"/>
+                  </a:lnTo>
+                  <a:lnTo>
+                    <a:pt x="2148675" y="2466991"/>
+                  </a:lnTo>
+                  <a:lnTo>
+                    <a:pt x="2220298" y="2495831"/>
+                  </a:lnTo>
+                  <a:lnTo>
+                    <a:pt x="2291920" y="2523969"/>
+                  </a:lnTo>
+                  <a:lnTo>
+                    <a:pt x="2363543" y="2551423"/>
+                  </a:lnTo>
+                  <a:lnTo>
+                    <a:pt x="2435165" y="2578209"/>
+                  </a:lnTo>
+                  <a:lnTo>
+                    <a:pt x="2506788" y="2604344"/>
+                  </a:lnTo>
+                  <a:lnTo>
+                    <a:pt x="2578410" y="2629843"/>
+                  </a:lnTo>
+                  <a:lnTo>
+                    <a:pt x="2650033" y="2654721"/>
+                  </a:lnTo>
+                  <a:lnTo>
+                    <a:pt x="2721655" y="2678995"/>
+                  </a:lnTo>
+                  <a:lnTo>
+                    <a:pt x="2793278" y="2702678"/>
+                  </a:lnTo>
+                  <a:lnTo>
+                    <a:pt x="2864901" y="2725785"/>
+                  </a:lnTo>
+                  <a:lnTo>
+                    <a:pt x="2936523" y="2748330"/>
+                  </a:lnTo>
+                  <a:lnTo>
+                    <a:pt x="3008146" y="2770326"/>
+                  </a:lnTo>
+                  <a:lnTo>
+                    <a:pt x="3079768" y="2772069"/>
+                  </a:lnTo>
+                  <a:lnTo>
+                    <a:pt x="3151391" y="2745182"/>
+                  </a:lnTo>
+                  <a:lnTo>
+                    <a:pt x="3223013" y="2717474"/>
+                  </a:lnTo>
+                  <a:lnTo>
+                    <a:pt x="3294636" y="2688920"/>
+                  </a:lnTo>
+                  <a:lnTo>
+                    <a:pt x="3366258" y="2659494"/>
+                  </a:lnTo>
+                  <a:lnTo>
+                    <a:pt x="3437881" y="2629170"/>
+                  </a:lnTo>
+                  <a:lnTo>
+                    <a:pt x="3509503" y="2597919"/>
+                  </a:lnTo>
+                  <a:lnTo>
+                    <a:pt x="3581126" y="2565715"/>
+                  </a:lnTo>
+                  <a:lnTo>
+                    <a:pt x="3652748" y="2532527"/>
+                  </a:lnTo>
+                  <a:lnTo>
+                    <a:pt x="3724371" y="2498326"/>
+                  </a:lnTo>
+                  <a:lnTo>
+                    <a:pt x="3795993" y="2463081"/>
+                  </a:lnTo>
+                  <a:lnTo>
+                    <a:pt x="3867616" y="2426759"/>
+                  </a:lnTo>
+                  <a:lnTo>
+                    <a:pt x="3939238" y="2389329"/>
+                  </a:lnTo>
+                  <a:lnTo>
+                    <a:pt x="4010861" y="2350756"/>
+                  </a:lnTo>
+                  <a:lnTo>
+                    <a:pt x="4082483" y="2311004"/>
+                  </a:lnTo>
+                  <a:lnTo>
+                    <a:pt x="4154106" y="2270039"/>
+                  </a:lnTo>
+                  <a:lnTo>
+                    <a:pt x="4225729" y="2227824"/>
+                  </a:lnTo>
+                  <a:lnTo>
+                    <a:pt x="4297351" y="2184319"/>
+                  </a:lnTo>
+                  <a:lnTo>
+                    <a:pt x="4368974" y="2139486"/>
+                  </a:lnTo>
+                  <a:lnTo>
+                    <a:pt x="4440596" y="2093284"/>
+                  </a:lnTo>
+                  <a:lnTo>
+                    <a:pt x="4512219" y="2045671"/>
+                  </a:lnTo>
+                  <a:lnTo>
+                    <a:pt x="4583841" y="1996605"/>
+                  </a:lnTo>
+                  <a:lnTo>
+                    <a:pt x="4655464" y="1946040"/>
+                  </a:lnTo>
+                  <a:lnTo>
+                    <a:pt x="4727086" y="1893932"/>
+                  </a:lnTo>
+                  <a:lnTo>
+                    <a:pt x="4798709" y="1840232"/>
+                  </a:lnTo>
+                  <a:lnTo>
+                    <a:pt x="4870331" y="1784893"/>
+                  </a:lnTo>
+                  <a:lnTo>
+                    <a:pt x="4941954" y="1727864"/>
+                  </a:lnTo>
+                  <a:lnTo>
+                    <a:pt x="5013576" y="1669094"/>
+                  </a:lnTo>
+                  <a:lnTo>
+                    <a:pt x="5085199" y="1608529"/>
+                  </a:lnTo>
+                  <a:lnTo>
+                    <a:pt x="5156821" y="1546115"/>
+                  </a:lnTo>
+                  <a:lnTo>
+                    <a:pt x="5228444" y="1481796"/>
+                  </a:lnTo>
+                  <a:lnTo>
+                    <a:pt x="5300066" y="1415512"/>
+                  </a:lnTo>
+                  <a:lnTo>
+                    <a:pt x="5371689" y="1347205"/>
+                  </a:lnTo>
+                  <a:lnTo>
+                    <a:pt x="5443311" y="1276812"/>
+                  </a:lnTo>
+                  <a:lnTo>
+                    <a:pt x="5514934" y="1204270"/>
+                  </a:lnTo>
+                  <a:lnTo>
+                    <a:pt x="5586557" y="1129512"/>
+                  </a:lnTo>
+                  <a:lnTo>
+                    <a:pt x="5658179" y="1052472"/>
+                  </a:lnTo>
+                  <a:lnTo>
+                    <a:pt x="5729802" y="973080"/>
+                  </a:lnTo>
+                  <a:lnTo>
+                    <a:pt x="5801424" y="891264"/>
+                  </a:lnTo>
+                  <a:lnTo>
+                    <a:pt x="5873047" y="806949"/>
+                  </a:lnTo>
+                  <a:lnTo>
+                    <a:pt x="5944669" y="720060"/>
+                  </a:lnTo>
+                  <a:lnTo>
+                    <a:pt x="6016292" y="630518"/>
+                  </a:lnTo>
+                  <a:lnTo>
+                    <a:pt x="6087914" y="538242"/>
+                  </a:lnTo>
+                  <a:lnTo>
+                    <a:pt x="6159537" y="443149"/>
+                  </a:lnTo>
+                  <a:lnTo>
+                    <a:pt x="6231159" y="345152"/>
+                  </a:lnTo>
+                  <a:lnTo>
+                    <a:pt x="6302782" y="244162"/>
+                  </a:lnTo>
+                  <a:lnTo>
+                    <a:pt x="6374404" y="140090"/>
+                  </a:lnTo>
+                  <a:lnTo>
+                    <a:pt x="6446027" y="32839"/>
+                  </a:lnTo>
+                  <a:lnTo>
+                    <a:pt x="6467308" y="0"/>
                   </a:lnTo>
                   <a:lnTo>
                     <a:pt x="7090630" y="0"/>
                   </a:lnTo>
                   <a:lnTo>
-                    <a:pt x="7090630" y="3257474"/>
-                  </a:lnTo>
-                  <a:lnTo>
-                    <a:pt x="7019007" y="3251909"/>
-                  </a:lnTo>
-                  <a:lnTo>
-                    <a:pt x="6947385" y="3246267"/>
-                  </a:lnTo>
-                  <a:lnTo>
-                    <a:pt x="6875762" y="3240545"/>
-                  </a:lnTo>
-                  <a:lnTo>
-                    <a:pt x="6804139" y="3234742"/>
-                  </a:lnTo>
-                  <a:lnTo>
-                    <a:pt x="6732517" y="3228858"/>
-                  </a:lnTo>
-                  <a:lnTo>
-                    <a:pt x="6660894" y="3222891"/>
-                  </a:lnTo>
-                  <a:lnTo>
-                    <a:pt x="6589272" y="3216839"/>
-                  </a:lnTo>
-                  <a:lnTo>
-                    <a:pt x="6517649" y="3210703"/>
-                  </a:lnTo>
-                  <a:lnTo>
-                    <a:pt x="6446027" y="3204480"/>
-                  </a:lnTo>
-                  <a:lnTo>
-                    <a:pt x="6374404" y="3198170"/>
-                  </a:lnTo>
-                  <a:lnTo>
-                    <a:pt x="6302782" y="3191770"/>
-                  </a:lnTo>
-                  <a:lnTo>
-                    <a:pt x="6231159" y="3185281"/>
-                  </a:lnTo>
-                  <a:lnTo>
-                    <a:pt x="6159537" y="3178700"/>
-                  </a:lnTo>
-                  <a:lnTo>
-                    <a:pt x="6087914" y="3172027"/>
-                  </a:lnTo>
-                  <a:lnTo>
-                    <a:pt x="6016292" y="3165259"/>
-                  </a:lnTo>
-                  <a:lnTo>
-                    <a:pt x="5944669" y="3158397"/>
-                  </a:lnTo>
-                  <a:lnTo>
-                    <a:pt x="5873047" y="3151437"/>
-                  </a:lnTo>
-                  <a:lnTo>
-                    <a:pt x="5801424" y="3144380"/>
-                  </a:lnTo>
-                  <a:lnTo>
-                    <a:pt x="5729802" y="3137223"/>
-                  </a:lnTo>
-                  <a:lnTo>
-                    <a:pt x="5658179" y="3129966"/>
-                  </a:lnTo>
-                  <a:lnTo>
-                    <a:pt x="5586557" y="3122606"/>
-                  </a:lnTo>
-                  <a:lnTo>
-                    <a:pt x="5514934" y="3115143"/>
-                  </a:lnTo>
-                  <a:lnTo>
-                    <a:pt x="5443311" y="3107575"/>
-                  </a:lnTo>
-                  <a:lnTo>
-                    <a:pt x="5371689" y="3099900"/>
-                  </a:lnTo>
-                  <a:lnTo>
-                    <a:pt x="5300066" y="3092117"/>
-                  </a:lnTo>
-                  <a:lnTo>
-                    <a:pt x="5228444" y="3084224"/>
-                  </a:lnTo>
-                  <a:lnTo>
-                    <a:pt x="5156821" y="3076220"/>
-                  </a:lnTo>
-                  <a:lnTo>
-                    <a:pt x="5085199" y="3068104"/>
-                  </a:lnTo>
-                  <a:lnTo>
-                    <a:pt x="5013576" y="3059873"/>
-                  </a:lnTo>
-                  <a:lnTo>
-                    <a:pt x="4941954" y="3051527"/>
-                  </a:lnTo>
-                  <a:lnTo>
-                    <a:pt x="4870331" y="3043063"/>
-                  </a:lnTo>
-                  <a:lnTo>
-                    <a:pt x="4798709" y="3034479"/>
-                  </a:lnTo>
-                  <a:lnTo>
-                    <a:pt x="4727086" y="3025775"/>
-                  </a:lnTo>
-                  <a:lnTo>
-                    <a:pt x="4655464" y="3016948"/>
-                  </a:lnTo>
-                  <a:lnTo>
-                    <a:pt x="4583841" y="3007997"/>
-                  </a:lnTo>
-                  <a:lnTo>
-                    <a:pt x="4512219" y="2998920"/>
-                  </a:lnTo>
-                  <a:lnTo>
-                    <a:pt x="4440596" y="2989715"/>
-                  </a:lnTo>
-                  <a:lnTo>
-                    <a:pt x="4368974" y="2980381"/>
-                  </a:lnTo>
-                  <a:lnTo>
-                    <a:pt x="4297351" y="2970915"/>
-                  </a:lnTo>
-                  <a:lnTo>
-                    <a:pt x="4225729" y="2961316"/>
-                  </a:lnTo>
-                  <a:lnTo>
-                    <a:pt x="4154106" y="2951582"/>
-                  </a:lnTo>
-                  <a:lnTo>
-                    <a:pt x="4082483" y="2941710"/>
-                  </a:lnTo>
-                  <a:lnTo>
-                    <a:pt x="4010861" y="2931700"/>
-                  </a:lnTo>
-                  <a:lnTo>
-                    <a:pt x="3939238" y="2921548"/>
-                  </a:lnTo>
-                  <a:lnTo>
-                    <a:pt x="3867616" y="2911254"/>
-                  </a:lnTo>
-                  <a:lnTo>
-                    <a:pt x="3795993" y="2900815"/>
-                  </a:lnTo>
-                  <a:lnTo>
-                    <a:pt x="3724371" y="2890229"/>
-                  </a:lnTo>
-                  <a:lnTo>
-                    <a:pt x="3652748" y="2879493"/>
-                  </a:lnTo>
-                  <a:lnTo>
-                    <a:pt x="3581126" y="2868607"/>
-                  </a:lnTo>
-                  <a:lnTo>
-                    <a:pt x="3509503" y="2857567"/>
-                  </a:lnTo>
-                  <a:lnTo>
-                    <a:pt x="3437881" y="2846372"/>
-                  </a:lnTo>
-                  <a:lnTo>
-                    <a:pt x="3366258" y="2835019"/>
-                  </a:lnTo>
-                  <a:lnTo>
-                    <a:pt x="3294636" y="2823506"/>
-                  </a:lnTo>
-                  <a:lnTo>
-                    <a:pt x="3223013" y="2811831"/>
-                  </a:lnTo>
-                  <a:lnTo>
-                    <a:pt x="3151391" y="2799992"/>
-                  </a:lnTo>
-                  <a:lnTo>
-                    <a:pt x="3079768" y="2787986"/>
-                  </a:lnTo>
-                  <a:lnTo>
-                    <a:pt x="3008146" y="2800790"/>
-                  </a:lnTo>
-                  <a:lnTo>
-                    <a:pt x="2936523" y="2830367"/>
-                  </a:lnTo>
-                  <a:lnTo>
-                    <a:pt x="2864901" y="2858918"/>
-                  </a:lnTo>
-                  <a:lnTo>
-                    <a:pt x="2793278" y="2886478"/>
-                  </a:lnTo>
-                  <a:lnTo>
-                    <a:pt x="2721655" y="2913080"/>
-                  </a:lnTo>
-                  <a:lnTo>
-                    <a:pt x="2650033" y="2938759"/>
-                  </a:lnTo>
-                  <a:lnTo>
-                    <a:pt x="2578410" y="2963546"/>
-                  </a:lnTo>
-                  <a:lnTo>
-                    <a:pt x="2506788" y="2987473"/>
-                  </a:lnTo>
-                  <a:lnTo>
-                    <a:pt x="2435165" y="3010569"/>
-                  </a:lnTo>
-                  <a:lnTo>
-                    <a:pt x="2363543" y="3032862"/>
-                  </a:lnTo>
-                  <a:lnTo>
-                    <a:pt x="2291920" y="3054382"/>
-                  </a:lnTo>
-                  <a:lnTo>
-                    <a:pt x="2220298" y="3075155"/>
-                  </a:lnTo>
-                  <a:lnTo>
-                    <a:pt x="2148675" y="3095206"/>
-                  </a:lnTo>
-                  <a:lnTo>
-                    <a:pt x="2077053" y="3114561"/>
-                  </a:lnTo>
-                  <a:lnTo>
-                    <a:pt x="2005430" y="3133244"/>
-                  </a:lnTo>
-                  <a:lnTo>
-                    <a:pt x="1933808" y="3151279"/>
-                  </a:lnTo>
-                  <a:lnTo>
-                    <a:pt x="1862185" y="3168687"/>
-                  </a:lnTo>
-                  <a:lnTo>
-                    <a:pt x="1790563" y="3185491"/>
-                  </a:lnTo>
-                  <a:lnTo>
-                    <a:pt x="1718940" y="3201711"/>
-                  </a:lnTo>
-                  <a:lnTo>
-                    <a:pt x="1647318" y="3217368"/>
-                  </a:lnTo>
-                  <a:lnTo>
-                    <a:pt x="1575695" y="3232482"/>
-                  </a:lnTo>
-                  <a:lnTo>
-                    <a:pt x="1504073" y="3247070"/>
-                  </a:lnTo>
-                  <a:lnTo>
-                    <a:pt x="1432450" y="3261153"/>
-                  </a:lnTo>
-                  <a:lnTo>
-                    <a:pt x="1360827" y="3274746"/>
-                  </a:lnTo>
-                  <a:lnTo>
-                    <a:pt x="1289205" y="3287867"/>
-                  </a:lnTo>
-                  <a:lnTo>
-                    <a:pt x="1217582" y="3300533"/>
-                  </a:lnTo>
-                  <a:lnTo>
-                    <a:pt x="1145960" y="3312758"/>
-                  </a:lnTo>
-                  <a:lnTo>
-                    <a:pt x="1074337" y="3324560"/>
-                  </a:lnTo>
-                  <a:lnTo>
-                    <a:pt x="1002715" y="3335951"/>
-                  </a:lnTo>
-                  <a:lnTo>
-                    <a:pt x="931092" y="3346947"/>
-                  </a:lnTo>
-                  <a:lnTo>
-                    <a:pt x="859470" y="3357562"/>
-                  </a:lnTo>
-                  <a:lnTo>
-                    <a:pt x="787847" y="3367807"/>
-                  </a:lnTo>
-                  <a:lnTo>
-                    <a:pt x="716225" y="3377697"/>
-                  </a:lnTo>
-                  <a:lnTo>
-                    <a:pt x="644602" y="3387244"/>
-                  </a:lnTo>
-                  <a:lnTo>
-                    <a:pt x="572980" y="3396459"/>
-                  </a:lnTo>
-                  <a:lnTo>
-                    <a:pt x="501357" y="3405354"/>
-                  </a:lnTo>
-                  <a:lnTo>
-                    <a:pt x="429735" y="3413940"/>
-                  </a:lnTo>
-                  <a:lnTo>
-                    <a:pt x="358112" y="3422229"/>
-                  </a:lnTo>
-                  <a:lnTo>
-                    <a:pt x="286490" y="3430229"/>
-                  </a:lnTo>
-                  <a:lnTo>
-                    <a:pt x="214867" y="3437952"/>
-                  </a:lnTo>
-                  <a:lnTo>
-                    <a:pt x="143245" y="3445406"/>
-                  </a:lnTo>
-                  <a:lnTo>
-                    <a:pt x="71622" y="3452602"/>
-                  </a:lnTo>
-                  <a:lnTo>
-                    <a:pt x="0" y="3459547"/>
+                    <a:pt x="7090630" y="3435851"/>
+                  </a:lnTo>
+                  <a:lnTo>
+                    <a:pt x="7019007" y="3430446"/>
+                  </a:lnTo>
+                  <a:lnTo>
+                    <a:pt x="6947385" y="3424906"/>
+                  </a:lnTo>
+                  <a:lnTo>
+                    <a:pt x="6875762" y="3419229"/>
+                  </a:lnTo>
+                  <a:lnTo>
+                    <a:pt x="6804139" y="3413410"/>
+                  </a:lnTo>
+                  <a:lnTo>
+                    <a:pt x="6732517" y="3407446"/>
+                  </a:lnTo>
+                  <a:lnTo>
+                    <a:pt x="6660894" y="3401333"/>
+                  </a:lnTo>
+                  <a:lnTo>
+                    <a:pt x="6589272" y="3395067"/>
+                  </a:lnTo>
+                  <a:lnTo>
+                    <a:pt x="6517649" y="3388646"/>
+                  </a:lnTo>
+                  <a:lnTo>
+                    <a:pt x="6446027" y="3382064"/>
+                  </a:lnTo>
+                  <a:lnTo>
+                    <a:pt x="6374404" y="3375319"/>
+                  </a:lnTo>
+                  <a:lnTo>
+                    <a:pt x="6302782" y="3368405"/>
+                  </a:lnTo>
+                  <a:lnTo>
+                    <a:pt x="6231159" y="3361319"/>
+                  </a:lnTo>
+                  <a:lnTo>
+                    <a:pt x="6159537" y="3354056"/>
+                  </a:lnTo>
+                  <a:lnTo>
+                    <a:pt x="6087914" y="3346612"/>
+                  </a:lnTo>
+                  <a:lnTo>
+                    <a:pt x="6016292" y="3338982"/>
+                  </a:lnTo>
+                  <a:lnTo>
+                    <a:pt x="5944669" y="3331163"/>
+                  </a:lnTo>
+                  <a:lnTo>
+                    <a:pt x="5873047" y="3323148"/>
+                  </a:lnTo>
+                  <a:lnTo>
+                    <a:pt x="5801424" y="3314934"/>
+                  </a:lnTo>
+                  <a:lnTo>
+                    <a:pt x="5729802" y="3306514"/>
+                  </a:lnTo>
+                  <a:lnTo>
+                    <a:pt x="5658179" y="3297885"/>
+                  </a:lnTo>
+                  <a:lnTo>
+                    <a:pt x="5586557" y="3289041"/>
+                  </a:lnTo>
+                  <a:lnTo>
+                    <a:pt x="5514934" y="3279976"/>
+                  </a:lnTo>
+                  <a:lnTo>
+                    <a:pt x="5443311" y="3270686"/>
+                  </a:lnTo>
+                  <a:lnTo>
+                    <a:pt x="5371689" y="3261163"/>
+                  </a:lnTo>
+                  <a:lnTo>
+                    <a:pt x="5300066" y="3251403"/>
+                  </a:lnTo>
+                  <a:lnTo>
+                    <a:pt x="5228444" y="3241400"/>
+                  </a:lnTo>
+                  <a:lnTo>
+                    <a:pt x="5156821" y="3231148"/>
+                  </a:lnTo>
+                  <a:lnTo>
+                    <a:pt x="5085199" y="3220640"/>
+                  </a:lnTo>
+                  <a:lnTo>
+                    <a:pt x="5013576" y="3209870"/>
+                  </a:lnTo>
+                  <a:lnTo>
+                    <a:pt x="4941954" y="3198831"/>
+                  </a:lnTo>
+                  <a:lnTo>
+                    <a:pt x="4870331" y="3187517"/>
+                  </a:lnTo>
+                  <a:lnTo>
+                    <a:pt x="4798709" y="3175922"/>
+                  </a:lnTo>
+                  <a:lnTo>
+                    <a:pt x="4727086" y="3164037"/>
+                  </a:lnTo>
+                  <a:lnTo>
+                    <a:pt x="4655464" y="3151856"/>
+                  </a:lnTo>
+                  <a:lnTo>
+                    <a:pt x="4583841" y="3139371"/>
+                  </a:lnTo>
+                  <a:lnTo>
+                    <a:pt x="4512219" y="3126575"/>
+                  </a:lnTo>
+                  <a:lnTo>
+                    <a:pt x="4440596" y="3113460"/>
+                  </a:lnTo>
+                  <a:lnTo>
+                    <a:pt x="4368974" y="3100017"/>
+                  </a:lnTo>
+                  <a:lnTo>
+                    <a:pt x="4297351" y="3086240"/>
+                  </a:lnTo>
+                  <a:lnTo>
+                    <a:pt x="4225729" y="3072120"/>
+                  </a:lnTo>
+                  <a:lnTo>
+                    <a:pt x="4154106" y="3057647"/>
+                  </a:lnTo>
+                  <a:lnTo>
+                    <a:pt x="4082483" y="3042813"/>
+                  </a:lnTo>
+                  <a:lnTo>
+                    <a:pt x="4010861" y="3027610"/>
+                  </a:lnTo>
+                  <a:lnTo>
+                    <a:pt x="3939238" y="3012028"/>
+                  </a:lnTo>
+                  <a:lnTo>
+                    <a:pt x="3867616" y="2996057"/>
+                  </a:lnTo>
+                  <a:lnTo>
+                    <a:pt x="3795993" y="2979688"/>
+                  </a:lnTo>
+                  <a:lnTo>
+                    <a:pt x="3724371" y="2962911"/>
+                  </a:lnTo>
+                  <a:lnTo>
+                    <a:pt x="3652748" y="2945715"/>
+                  </a:lnTo>
+                  <a:lnTo>
+                    <a:pt x="3581126" y="2928091"/>
+                  </a:lnTo>
+                  <a:lnTo>
+                    <a:pt x="3509503" y="2910028"/>
+                  </a:lnTo>
+                  <a:lnTo>
+                    <a:pt x="3437881" y="2891514"/>
+                  </a:lnTo>
+                  <a:lnTo>
+                    <a:pt x="3366258" y="2872539"/>
+                  </a:lnTo>
+                  <a:lnTo>
+                    <a:pt x="3294636" y="2853091"/>
+                  </a:lnTo>
+                  <a:lnTo>
+                    <a:pt x="3223013" y="2833158"/>
+                  </a:lnTo>
+                  <a:lnTo>
+                    <a:pt x="3151391" y="2812727"/>
+                  </a:lnTo>
+                  <a:lnTo>
+                    <a:pt x="3079768" y="2791788"/>
+                  </a:lnTo>
+                  <a:lnTo>
+                    <a:pt x="3008146" y="2798159"/>
+                  </a:lnTo>
+                  <a:lnTo>
+                    <a:pt x="2936523" y="2823476"/>
+                  </a:lnTo>
+                  <a:lnTo>
+                    <a:pt x="2864901" y="2848044"/>
+                  </a:lnTo>
+                  <a:lnTo>
+                    <a:pt x="2793278" y="2871883"/>
+                  </a:lnTo>
+                  <a:lnTo>
+                    <a:pt x="2721655" y="2895016"/>
+                  </a:lnTo>
+                  <a:lnTo>
+                    <a:pt x="2650033" y="2917463"/>
+                  </a:lnTo>
+                  <a:lnTo>
+                    <a:pt x="2578410" y="2939246"/>
+                  </a:lnTo>
+                  <a:lnTo>
+                    <a:pt x="2506788" y="2960383"/>
+                  </a:lnTo>
+                  <a:lnTo>
+                    <a:pt x="2435165" y="2980894"/>
+                  </a:lnTo>
+                  <a:lnTo>
+                    <a:pt x="2363543" y="3000797"/>
+                  </a:lnTo>
+                  <a:lnTo>
+                    <a:pt x="2291920" y="3020110"/>
+                  </a:lnTo>
+                  <a:lnTo>
+                    <a:pt x="2220298" y="3038852"/>
+                  </a:lnTo>
+                  <a:lnTo>
+                    <a:pt x="2148675" y="3057038"/>
+                  </a:lnTo>
+                  <a:lnTo>
+                    <a:pt x="2077053" y="3074685"/>
+                  </a:lnTo>
+                  <a:lnTo>
+                    <a:pt x="2005430" y="3091809"/>
+                  </a:lnTo>
+                  <a:lnTo>
+                    <a:pt x="1933808" y="3108426"/>
+                  </a:lnTo>
+                  <a:lnTo>
+                    <a:pt x="1862185" y="3124550"/>
+                  </a:lnTo>
+                  <a:lnTo>
+                    <a:pt x="1790563" y="3140197"/>
+                  </a:lnTo>
+                  <a:lnTo>
+                    <a:pt x="1718940" y="3155380"/>
+                  </a:lnTo>
+                  <a:lnTo>
+                    <a:pt x="1647318" y="3170114"/>
+                  </a:lnTo>
+                  <a:lnTo>
+                    <a:pt x="1575695" y="3184410"/>
+                  </a:lnTo>
+                  <a:lnTo>
+                    <a:pt x="1504073" y="3198283"/>
+                  </a:lnTo>
+                  <a:lnTo>
+                    <a:pt x="1432450" y="3211746"/>
+                  </a:lnTo>
+                  <a:lnTo>
+                    <a:pt x="1360827" y="3224809"/>
+                  </a:lnTo>
+                  <a:lnTo>
+                    <a:pt x="1289205" y="3237485"/>
+                  </a:lnTo>
+                  <a:lnTo>
+                    <a:pt x="1217582" y="3249786"/>
+                  </a:lnTo>
+                  <a:lnTo>
+                    <a:pt x="1145960" y="3261722"/>
+                  </a:lnTo>
+                  <a:lnTo>
+                    <a:pt x="1074337" y="3273304"/>
+                  </a:lnTo>
+                  <a:lnTo>
+                    <a:pt x="1002715" y="3284544"/>
+                  </a:lnTo>
+                  <a:lnTo>
+                    <a:pt x="931092" y="3295450"/>
+                  </a:lnTo>
+                  <a:lnTo>
+                    <a:pt x="859470" y="3306033"/>
+                  </a:lnTo>
+                  <a:lnTo>
+                    <a:pt x="787847" y="3316303"/>
+                  </a:lnTo>
+                  <a:lnTo>
+                    <a:pt x="716225" y="3326268"/>
+                  </a:lnTo>
+                  <a:lnTo>
+                    <a:pt x="644602" y="3335938"/>
+                  </a:lnTo>
+                  <a:lnTo>
+                    <a:pt x="572980" y="3345322"/>
+                  </a:lnTo>
+                  <a:lnTo>
+                    <a:pt x="501357" y="3354428"/>
+                  </a:lnTo>
+                  <a:lnTo>
+                    <a:pt x="429735" y="3363263"/>
+                  </a:lnTo>
+                  <a:lnTo>
+                    <a:pt x="358112" y="3371837"/>
+                  </a:lnTo>
+                  <a:lnTo>
+                    <a:pt x="286490" y="3380157"/>
+                  </a:lnTo>
+                  <a:lnTo>
+                    <a:pt x="214867" y="3388231"/>
+                  </a:lnTo>
+                  <a:lnTo>
+                    <a:pt x="143245" y="3396065"/>
+                  </a:lnTo>
+                  <a:lnTo>
+                    <a:pt x="71622" y="3403667"/>
+                  </a:lnTo>
+                  <a:lnTo>
+                    <a:pt x="0" y="3411044"/>
                   </a:lnTo>
                   <a:close/>
                 </a:path>
@@ -3721,266 +3742,287 @@
           <p:spPr>
             <a:xfrm>
               <a:off x="1172049" y="1896563"/>
-              <a:ext cx="5958461" cy="2775811"/>
+              <a:ext cx="6467308" cy="2772069"/>
             </a:xfrm>
             <a:custGeom>
               <a:avLst/>
               <a:pathLst>
-                <a:path w="5958461" h="2775811">
+                <a:path w="6467308" h="2772069">
                   <a:moveTo>
-                    <a:pt x="0" y="2075172"/>
+                    <a:pt x="0" y="1170717"/>
                   </a:moveTo>
                   <a:lnTo>
-                    <a:pt x="71622" y="2097076"/>
-                  </a:lnTo>
-                  <a:lnTo>
-                    <a:pt x="143245" y="2118675"/>
-                  </a:lnTo>
-                  <a:lnTo>
-                    <a:pt x="214867" y="2139974"/>
-                  </a:lnTo>
-                  <a:lnTo>
-                    <a:pt x="286490" y="2160978"/>
-                  </a:lnTo>
-                  <a:lnTo>
-                    <a:pt x="358112" y="2181690"/>
-                  </a:lnTo>
-                  <a:lnTo>
-                    <a:pt x="429735" y="2202114"/>
-                  </a:lnTo>
-                  <a:lnTo>
-                    <a:pt x="501357" y="2222255"/>
-                  </a:lnTo>
-                  <a:lnTo>
-                    <a:pt x="572980" y="2242116"/>
-                  </a:lnTo>
-                  <a:lnTo>
-                    <a:pt x="644602" y="2261702"/>
-                  </a:lnTo>
-                  <a:lnTo>
-                    <a:pt x="716225" y="2281015"/>
-                  </a:lnTo>
-                  <a:lnTo>
-                    <a:pt x="787847" y="2300060"/>
-                  </a:lnTo>
-                  <a:lnTo>
-                    <a:pt x="859470" y="2318841"/>
-                  </a:lnTo>
-                  <a:lnTo>
-                    <a:pt x="931092" y="2337361"/>
-                  </a:lnTo>
-                  <a:lnTo>
-                    <a:pt x="1002715" y="2355624"/>
-                  </a:lnTo>
-                  <a:lnTo>
-                    <a:pt x="1074337" y="2373634"/>
-                  </a:lnTo>
-                  <a:lnTo>
-                    <a:pt x="1145960" y="2391393"/>
-                  </a:lnTo>
-                  <a:lnTo>
-                    <a:pt x="1217582" y="2408905"/>
-                  </a:lnTo>
-                  <a:lnTo>
-                    <a:pt x="1289205" y="2426175"/>
-                  </a:lnTo>
-                  <a:lnTo>
-                    <a:pt x="1360827" y="2443205"/>
-                  </a:lnTo>
-                  <a:lnTo>
-                    <a:pt x="1432450" y="2459998"/>
-                  </a:lnTo>
-                  <a:lnTo>
-                    <a:pt x="1504073" y="2476558"/>
-                  </a:lnTo>
-                  <a:lnTo>
-                    <a:pt x="1575695" y="2492888"/>
-                  </a:lnTo>
-                  <a:lnTo>
-                    <a:pt x="1647318" y="2508991"/>
-                  </a:lnTo>
-                  <a:lnTo>
-                    <a:pt x="1718940" y="2524871"/>
-                  </a:lnTo>
-                  <a:lnTo>
-                    <a:pt x="1790563" y="2540530"/>
-                  </a:lnTo>
-                  <a:lnTo>
-                    <a:pt x="1862185" y="2555972"/>
-                  </a:lnTo>
-                  <a:lnTo>
-                    <a:pt x="1933808" y="2571200"/>
-                  </a:lnTo>
-                  <a:lnTo>
-                    <a:pt x="2005430" y="2586216"/>
-                  </a:lnTo>
-                  <a:lnTo>
-                    <a:pt x="2077053" y="2601023"/>
-                  </a:lnTo>
-                  <a:lnTo>
-                    <a:pt x="2148675" y="2615625"/>
-                  </a:lnTo>
-                  <a:lnTo>
-                    <a:pt x="2220298" y="2630024"/>
-                  </a:lnTo>
-                  <a:lnTo>
-                    <a:pt x="2291920" y="2644224"/>
-                  </a:lnTo>
-                  <a:lnTo>
-                    <a:pt x="2363543" y="2658226"/>
-                  </a:lnTo>
-                  <a:lnTo>
-                    <a:pt x="2435165" y="2672033"/>
-                  </a:lnTo>
-                  <a:lnTo>
-                    <a:pt x="2506788" y="2685649"/>
-                  </a:lnTo>
-                  <a:lnTo>
-                    <a:pt x="2578410" y="2699076"/>
-                  </a:lnTo>
-                  <a:lnTo>
-                    <a:pt x="2650033" y="2712316"/>
-                  </a:lnTo>
-                  <a:lnTo>
-                    <a:pt x="2721655" y="2725373"/>
-                  </a:lnTo>
-                  <a:lnTo>
-                    <a:pt x="2793278" y="2738248"/>
-                  </a:lnTo>
-                  <a:lnTo>
-                    <a:pt x="2864901" y="2750945"/>
-                  </a:lnTo>
-                  <a:lnTo>
-                    <a:pt x="2936523" y="2763465"/>
-                  </a:lnTo>
-                  <a:lnTo>
-                    <a:pt x="3008146" y="2775811"/>
-                  </a:lnTo>
-                  <a:lnTo>
-                    <a:pt x="3079768" y="2770148"/>
-                  </a:lnTo>
-                  <a:lnTo>
-                    <a:pt x="3151391" y="2738404"/>
-                  </a:lnTo>
-                  <a:lnTo>
-                    <a:pt x="3223013" y="2705518"/>
-                  </a:lnTo>
-                  <a:lnTo>
-                    <a:pt x="3294636" y="2671450"/>
-                  </a:lnTo>
-                  <a:lnTo>
-                    <a:pt x="3366258" y="2636156"/>
-                  </a:lnTo>
-                  <a:lnTo>
-                    <a:pt x="3437881" y="2599592"/>
-                  </a:lnTo>
-                  <a:lnTo>
-                    <a:pt x="3509503" y="2561713"/>
-                  </a:lnTo>
-                  <a:lnTo>
-                    <a:pt x="3581126" y="2522472"/>
-                  </a:lnTo>
-                  <a:lnTo>
-                    <a:pt x="3652748" y="2481819"/>
-                  </a:lnTo>
-                  <a:lnTo>
-                    <a:pt x="3724371" y="2439703"/>
-                  </a:lnTo>
-                  <a:lnTo>
-                    <a:pt x="3795993" y="2396073"/>
-                  </a:lnTo>
-                  <a:lnTo>
-                    <a:pt x="3867616" y="2350874"/>
-                  </a:lnTo>
-                  <a:lnTo>
-                    <a:pt x="3939238" y="2304048"/>
-                  </a:lnTo>
-                  <a:lnTo>
-                    <a:pt x="4010861" y="2255539"/>
-                  </a:lnTo>
-                  <a:lnTo>
-                    <a:pt x="4082483" y="2205284"/>
-                  </a:lnTo>
-                  <a:lnTo>
-                    <a:pt x="4154106" y="2153221"/>
-                  </a:lnTo>
-                  <a:lnTo>
-                    <a:pt x="4225729" y="2099286"/>
-                  </a:lnTo>
-                  <a:lnTo>
-                    <a:pt x="4297351" y="2043411"/>
-                  </a:lnTo>
-                  <a:lnTo>
-                    <a:pt x="4368974" y="1985526"/>
-                  </a:lnTo>
-                  <a:lnTo>
-                    <a:pt x="4440596" y="1925559"/>
-                  </a:lnTo>
-                  <a:lnTo>
-                    <a:pt x="4512219" y="1863435"/>
-                  </a:lnTo>
-                  <a:lnTo>
-                    <a:pt x="4583841" y="1799076"/>
-                  </a:lnTo>
-                  <a:lnTo>
-                    <a:pt x="4655464" y="1732402"/>
-                  </a:lnTo>
-                  <a:lnTo>
-                    <a:pt x="4727086" y="1663330"/>
-                  </a:lnTo>
-                  <a:lnTo>
-                    <a:pt x="4798709" y="1591773"/>
-                  </a:lnTo>
-                  <a:lnTo>
-                    <a:pt x="4870331" y="1517642"/>
-                  </a:lnTo>
-                  <a:lnTo>
-                    <a:pt x="4941954" y="1440845"/>
-                  </a:lnTo>
-                  <a:lnTo>
-                    <a:pt x="5013576" y="1361285"/>
-                  </a:lnTo>
-                  <a:lnTo>
-                    <a:pt x="5085199" y="1278864"/>
-                  </a:lnTo>
-                  <a:lnTo>
-                    <a:pt x="5156821" y="1193477"/>
-                  </a:lnTo>
-                  <a:lnTo>
-                    <a:pt x="5228444" y="1105020"/>
-                  </a:lnTo>
-                  <a:lnTo>
-                    <a:pt x="5300066" y="1013380"/>
-                  </a:lnTo>
-                  <a:lnTo>
-                    <a:pt x="5371689" y="918444"/>
-                  </a:lnTo>
-                  <a:lnTo>
-                    <a:pt x="5443311" y="820094"/>
-                  </a:lnTo>
-                  <a:lnTo>
-                    <a:pt x="5514934" y="718205"/>
-                  </a:lnTo>
-                  <a:lnTo>
-                    <a:pt x="5586557" y="612652"/>
-                  </a:lnTo>
-                  <a:lnTo>
-                    <a:pt x="5658179" y="503301"/>
-                  </a:lnTo>
-                  <a:lnTo>
-                    <a:pt x="5729802" y="390018"/>
-                  </a:lnTo>
-                  <a:lnTo>
-                    <a:pt x="5801424" y="272659"/>
-                  </a:lnTo>
-                  <a:lnTo>
-                    <a:pt x="5873047" y="151079"/>
-                  </a:lnTo>
-                  <a:lnTo>
-                    <a:pt x="5944669" y="25126"/>
-                  </a:lnTo>
-                  <a:lnTo>
-                    <a:pt x="5958461" y="0"/>
+                    <a:pt x="71622" y="1231088"/>
+                  </a:lnTo>
+                  <a:lnTo>
+                    <a:pt x="143245" y="1289989"/>
+                  </a:lnTo>
+                  <a:lnTo>
+                    <a:pt x="214867" y="1347459"/>
+                  </a:lnTo>
+                  <a:lnTo>
+                    <a:pt x="286490" y="1403530"/>
+                  </a:lnTo>
+                  <a:lnTo>
+                    <a:pt x="358112" y="1458238"/>
+                  </a:lnTo>
+                  <a:lnTo>
+                    <a:pt x="429735" y="1511614"/>
+                  </a:lnTo>
+                  <a:lnTo>
+                    <a:pt x="501357" y="1563693"/>
+                  </a:lnTo>
+                  <a:lnTo>
+                    <a:pt x="572980" y="1614504"/>
+                  </a:lnTo>
+                  <a:lnTo>
+                    <a:pt x="644602" y="1664080"/>
+                  </a:lnTo>
+                  <a:lnTo>
+                    <a:pt x="716225" y="1712450"/>
+                  </a:lnTo>
+                  <a:lnTo>
+                    <a:pt x="787847" y="1759643"/>
+                  </a:lnTo>
+                  <a:lnTo>
+                    <a:pt x="859470" y="1805689"/>
+                  </a:lnTo>
+                  <a:lnTo>
+                    <a:pt x="931092" y="1850614"/>
+                  </a:lnTo>
+                  <a:lnTo>
+                    <a:pt x="1002715" y="1894447"/>
+                  </a:lnTo>
+                  <a:lnTo>
+                    <a:pt x="1074337" y="1937213"/>
+                  </a:lnTo>
+                  <a:lnTo>
+                    <a:pt x="1145960" y="1978939"/>
+                  </a:lnTo>
+                  <a:lnTo>
+                    <a:pt x="1217582" y="2019650"/>
+                  </a:lnTo>
+                  <a:lnTo>
+                    <a:pt x="1289205" y="2059371"/>
+                  </a:lnTo>
+                  <a:lnTo>
+                    <a:pt x="1360827" y="2098126"/>
+                  </a:lnTo>
+                  <a:lnTo>
+                    <a:pt x="1432450" y="2135938"/>
+                  </a:lnTo>
+                  <a:lnTo>
+                    <a:pt x="1504073" y="2172831"/>
+                  </a:lnTo>
+                  <a:lnTo>
+                    <a:pt x="1575695" y="2208826"/>
+                  </a:lnTo>
+                  <a:lnTo>
+                    <a:pt x="1647318" y="2243945"/>
+                  </a:lnTo>
+                  <a:lnTo>
+                    <a:pt x="1718940" y="2278210"/>
+                  </a:lnTo>
+                  <a:lnTo>
+                    <a:pt x="1790563" y="2311642"/>
+                  </a:lnTo>
+                  <a:lnTo>
+                    <a:pt x="1862185" y="2344261"/>
+                  </a:lnTo>
+                  <a:lnTo>
+                    <a:pt x="1933808" y="2376086"/>
+                  </a:lnTo>
+                  <a:lnTo>
+                    <a:pt x="2005430" y="2407137"/>
+                  </a:lnTo>
+                  <a:lnTo>
+                    <a:pt x="2077053" y="2437433"/>
+                  </a:lnTo>
+                  <a:lnTo>
+                    <a:pt x="2148675" y="2466991"/>
+                  </a:lnTo>
+                  <a:lnTo>
+                    <a:pt x="2220298" y="2495831"/>
+                  </a:lnTo>
+                  <a:lnTo>
+                    <a:pt x="2291920" y="2523969"/>
+                  </a:lnTo>
+                  <a:lnTo>
+                    <a:pt x="2363543" y="2551423"/>
+                  </a:lnTo>
+                  <a:lnTo>
+                    <a:pt x="2435165" y="2578209"/>
+                  </a:lnTo>
+                  <a:lnTo>
+                    <a:pt x="2506788" y="2604344"/>
+                  </a:lnTo>
+                  <a:lnTo>
+                    <a:pt x="2578410" y="2629843"/>
+                  </a:lnTo>
+                  <a:lnTo>
+                    <a:pt x="2650033" y="2654721"/>
+                  </a:lnTo>
+                  <a:lnTo>
+                    <a:pt x="2721655" y="2678995"/>
+                  </a:lnTo>
+                  <a:lnTo>
+                    <a:pt x="2793278" y="2702678"/>
+                  </a:lnTo>
+                  <a:lnTo>
+                    <a:pt x="2864901" y="2725785"/>
+                  </a:lnTo>
+                  <a:lnTo>
+                    <a:pt x="2936523" y="2748330"/>
+                  </a:lnTo>
+                  <a:lnTo>
+                    <a:pt x="3008146" y="2770326"/>
+                  </a:lnTo>
+                  <a:lnTo>
+                    <a:pt x="3079768" y="2772069"/>
+                  </a:lnTo>
+                  <a:lnTo>
+                    <a:pt x="3151391" y="2745182"/>
+                  </a:lnTo>
+                  <a:lnTo>
+                    <a:pt x="3223013" y="2717474"/>
+                  </a:lnTo>
+                  <a:lnTo>
+                    <a:pt x="3294636" y="2688920"/>
+                  </a:lnTo>
+                  <a:lnTo>
+                    <a:pt x="3366258" y="2659494"/>
+                  </a:lnTo>
+                  <a:lnTo>
+                    <a:pt x="3437881" y="2629170"/>
+                  </a:lnTo>
+                  <a:lnTo>
+                    <a:pt x="3509503" y="2597919"/>
+                  </a:lnTo>
+                  <a:lnTo>
+                    <a:pt x="3581126" y="2565715"/>
+                  </a:lnTo>
+                  <a:lnTo>
+                    <a:pt x="3652748" y="2532527"/>
+                  </a:lnTo>
+                  <a:lnTo>
+                    <a:pt x="3724371" y="2498326"/>
+                  </a:lnTo>
+                  <a:lnTo>
+                    <a:pt x="3795993" y="2463081"/>
+                  </a:lnTo>
+                  <a:lnTo>
+                    <a:pt x="3867616" y="2426759"/>
+                  </a:lnTo>
+                  <a:lnTo>
+                    <a:pt x="3939238" y="2389329"/>
+                  </a:lnTo>
+                  <a:lnTo>
+                    <a:pt x="4010861" y="2350756"/>
+                  </a:lnTo>
+                  <a:lnTo>
+                    <a:pt x="4082483" y="2311004"/>
+                  </a:lnTo>
+                  <a:lnTo>
+                    <a:pt x="4154106" y="2270039"/>
+                  </a:lnTo>
+                  <a:lnTo>
+                    <a:pt x="4225729" y="2227824"/>
+                  </a:lnTo>
+                  <a:lnTo>
+                    <a:pt x="4297351" y="2184319"/>
+                  </a:lnTo>
+                  <a:lnTo>
+                    <a:pt x="4368974" y="2139486"/>
+                  </a:lnTo>
+                  <a:lnTo>
+                    <a:pt x="4440596" y="2093284"/>
+                  </a:lnTo>
+                  <a:lnTo>
+                    <a:pt x="4512219" y="2045671"/>
+                  </a:lnTo>
+                  <a:lnTo>
+                    <a:pt x="4583841" y="1996605"/>
+                  </a:lnTo>
+                  <a:lnTo>
+                    <a:pt x="4655464" y="1946040"/>
+                  </a:lnTo>
+                  <a:lnTo>
+                    <a:pt x="4727086" y="1893932"/>
+                  </a:lnTo>
+                  <a:lnTo>
+                    <a:pt x="4798709" y="1840232"/>
+                  </a:lnTo>
+                  <a:lnTo>
+                    <a:pt x="4870331" y="1784893"/>
+                  </a:lnTo>
+                  <a:lnTo>
+                    <a:pt x="4941954" y="1727864"/>
+                  </a:lnTo>
+                  <a:lnTo>
+                    <a:pt x="5013576" y="1669094"/>
+                  </a:lnTo>
+                  <a:lnTo>
+                    <a:pt x="5085199" y="1608529"/>
+                  </a:lnTo>
+                  <a:lnTo>
+                    <a:pt x="5156821" y="1546115"/>
+                  </a:lnTo>
+                  <a:lnTo>
+                    <a:pt x="5228444" y="1481796"/>
+                  </a:lnTo>
+                  <a:lnTo>
+                    <a:pt x="5300066" y="1415512"/>
+                  </a:lnTo>
+                  <a:lnTo>
+                    <a:pt x="5371689" y="1347205"/>
+                  </a:lnTo>
+                  <a:lnTo>
+                    <a:pt x="5443311" y="1276812"/>
+                  </a:lnTo>
+                  <a:lnTo>
+                    <a:pt x="5514934" y="1204270"/>
+                  </a:lnTo>
+                  <a:lnTo>
+                    <a:pt x="5586557" y="1129512"/>
+                  </a:lnTo>
+                  <a:lnTo>
+                    <a:pt x="5658179" y="1052472"/>
+                  </a:lnTo>
+                  <a:lnTo>
+                    <a:pt x="5729802" y="973080"/>
+                  </a:lnTo>
+                  <a:lnTo>
+                    <a:pt x="5801424" y="891264"/>
+                  </a:lnTo>
+                  <a:lnTo>
+                    <a:pt x="5873047" y="806949"/>
+                  </a:lnTo>
+                  <a:lnTo>
+                    <a:pt x="5944669" y="720060"/>
+                  </a:lnTo>
+                  <a:lnTo>
+                    <a:pt x="6016292" y="630518"/>
+                  </a:lnTo>
+                  <a:lnTo>
+                    <a:pt x="6087914" y="538242"/>
+                  </a:lnTo>
+                  <a:lnTo>
+                    <a:pt x="6159537" y="443149"/>
+                  </a:lnTo>
+                  <a:lnTo>
+                    <a:pt x="6231159" y="345152"/>
+                  </a:lnTo>
+                  <a:lnTo>
+                    <a:pt x="6302782" y="244162"/>
+                  </a:lnTo>
+                  <a:lnTo>
+                    <a:pt x="6374404" y="140090"/>
+                  </a:lnTo>
+                  <a:lnTo>
+                    <a:pt x="6446027" y="32839"/>
+                  </a:lnTo>
+                  <a:lnTo>
+                    <a:pt x="6467308" y="0"/>
                   </a:lnTo>
                 </a:path>
               </a:pathLst>
@@ -4000,312 +4042,312 @@
           </p:nvSpPr>
           <p:spPr>
             <a:xfrm>
-              <a:off x="1172049" y="4684550"/>
-              <a:ext cx="7090630" cy="671561"/>
+              <a:off x="1172049" y="4688351"/>
+              <a:ext cx="7090630" cy="644062"/>
             </a:xfrm>
             <a:custGeom>
               <a:avLst/>
               <a:pathLst>
-                <a:path w="7090630" h="671561">
+                <a:path w="7090630" h="644062">
                   <a:moveTo>
-                    <a:pt x="7090630" y="469487"/>
+                    <a:pt x="7090630" y="644062"/>
                   </a:moveTo>
                   <a:lnTo>
-                    <a:pt x="7019007" y="463922"/>
-                  </a:lnTo>
-                  <a:lnTo>
-                    <a:pt x="6947385" y="458280"/>
-                  </a:lnTo>
-                  <a:lnTo>
-                    <a:pt x="6875762" y="452558"/>
-                  </a:lnTo>
-                  <a:lnTo>
-                    <a:pt x="6804139" y="446755"/>
-                  </a:lnTo>
-                  <a:lnTo>
-                    <a:pt x="6732517" y="440871"/>
-                  </a:lnTo>
-                  <a:lnTo>
-                    <a:pt x="6660894" y="434904"/>
-                  </a:lnTo>
-                  <a:lnTo>
-                    <a:pt x="6589272" y="428852"/>
-                  </a:lnTo>
-                  <a:lnTo>
-                    <a:pt x="6517649" y="422716"/>
-                  </a:lnTo>
-                  <a:lnTo>
-                    <a:pt x="6446027" y="416493"/>
-                  </a:lnTo>
-                  <a:lnTo>
-                    <a:pt x="6374404" y="410183"/>
-                  </a:lnTo>
-                  <a:lnTo>
-                    <a:pt x="6302782" y="403783"/>
-                  </a:lnTo>
-                  <a:lnTo>
-                    <a:pt x="6231159" y="397294"/>
-                  </a:lnTo>
-                  <a:lnTo>
-                    <a:pt x="6159537" y="390713"/>
-                  </a:lnTo>
-                  <a:lnTo>
-                    <a:pt x="6087914" y="384040"/>
-                  </a:lnTo>
-                  <a:lnTo>
-                    <a:pt x="6016292" y="377272"/>
-                  </a:lnTo>
-                  <a:lnTo>
-                    <a:pt x="5944669" y="370410"/>
-                  </a:lnTo>
-                  <a:lnTo>
-                    <a:pt x="5873047" y="363450"/>
-                  </a:lnTo>
-                  <a:lnTo>
-                    <a:pt x="5801424" y="356393"/>
-                  </a:lnTo>
-                  <a:lnTo>
-                    <a:pt x="5729802" y="349236"/>
-                  </a:lnTo>
-                  <a:lnTo>
-                    <a:pt x="5658179" y="341979"/>
-                  </a:lnTo>
-                  <a:lnTo>
-                    <a:pt x="5586557" y="334619"/>
-                  </a:lnTo>
-                  <a:lnTo>
-                    <a:pt x="5514934" y="327156"/>
-                  </a:lnTo>
-                  <a:lnTo>
-                    <a:pt x="5443311" y="319588"/>
-                  </a:lnTo>
-                  <a:lnTo>
-                    <a:pt x="5371689" y="311913"/>
-                  </a:lnTo>
-                  <a:lnTo>
-                    <a:pt x="5300066" y="304130"/>
-                  </a:lnTo>
-                  <a:lnTo>
-                    <a:pt x="5228444" y="296237"/>
-                  </a:lnTo>
-                  <a:lnTo>
-                    <a:pt x="5156821" y="288233"/>
-                  </a:lnTo>
-                  <a:lnTo>
-                    <a:pt x="5085199" y="280117"/>
-                  </a:lnTo>
-                  <a:lnTo>
-                    <a:pt x="5013576" y="271886"/>
-                  </a:lnTo>
-                  <a:lnTo>
-                    <a:pt x="4941954" y="263540"/>
-                  </a:lnTo>
-                  <a:lnTo>
-                    <a:pt x="4870331" y="255076"/>
-                  </a:lnTo>
-                  <a:lnTo>
-                    <a:pt x="4798709" y="246492"/>
-                  </a:lnTo>
-                  <a:lnTo>
-                    <a:pt x="4727086" y="237788"/>
-                  </a:lnTo>
-                  <a:lnTo>
-                    <a:pt x="4655464" y="228961"/>
-                  </a:lnTo>
-                  <a:lnTo>
-                    <a:pt x="4583841" y="220010"/>
-                  </a:lnTo>
-                  <a:lnTo>
-                    <a:pt x="4512219" y="210933"/>
-                  </a:lnTo>
-                  <a:lnTo>
-                    <a:pt x="4440596" y="201729"/>
-                  </a:lnTo>
-                  <a:lnTo>
-                    <a:pt x="4368974" y="192394"/>
-                  </a:lnTo>
-                  <a:lnTo>
-                    <a:pt x="4297351" y="182928"/>
-                  </a:lnTo>
-                  <a:lnTo>
-                    <a:pt x="4225729" y="173329"/>
-                  </a:lnTo>
-                  <a:lnTo>
-                    <a:pt x="4154106" y="163595"/>
-                  </a:lnTo>
-                  <a:lnTo>
-                    <a:pt x="4082483" y="153723"/>
-                  </a:lnTo>
-                  <a:lnTo>
-                    <a:pt x="4010861" y="143713"/>
-                  </a:lnTo>
-                  <a:lnTo>
-                    <a:pt x="3939238" y="133561"/>
-                  </a:lnTo>
-                  <a:lnTo>
-                    <a:pt x="3867616" y="123267"/>
-                  </a:lnTo>
-                  <a:lnTo>
-                    <a:pt x="3795993" y="112828"/>
-                  </a:lnTo>
-                  <a:lnTo>
-                    <a:pt x="3724371" y="102242"/>
-                  </a:lnTo>
-                  <a:lnTo>
-                    <a:pt x="3652748" y="91506"/>
-                  </a:lnTo>
-                  <a:lnTo>
-                    <a:pt x="3581126" y="80620"/>
-                  </a:lnTo>
-                  <a:lnTo>
-                    <a:pt x="3509503" y="69580"/>
-                  </a:lnTo>
-                  <a:lnTo>
-                    <a:pt x="3437881" y="58385"/>
-                  </a:lnTo>
-                  <a:lnTo>
-                    <a:pt x="3366258" y="47032"/>
-                  </a:lnTo>
-                  <a:lnTo>
-                    <a:pt x="3294636" y="35519"/>
-                  </a:lnTo>
-                  <a:lnTo>
-                    <a:pt x="3223013" y="23845"/>
-                  </a:lnTo>
-                  <a:lnTo>
-                    <a:pt x="3151391" y="12005"/>
+                    <a:pt x="7019007" y="638658"/>
+                  </a:lnTo>
+                  <a:lnTo>
+                    <a:pt x="6947385" y="633118"/>
+                  </a:lnTo>
+                  <a:lnTo>
+                    <a:pt x="6875762" y="627440"/>
+                  </a:lnTo>
+                  <a:lnTo>
+                    <a:pt x="6804139" y="621621"/>
+                  </a:lnTo>
+                  <a:lnTo>
+                    <a:pt x="6732517" y="615657"/>
+                  </a:lnTo>
+                  <a:lnTo>
+                    <a:pt x="6660894" y="609544"/>
+                  </a:lnTo>
+                  <a:lnTo>
+                    <a:pt x="6589272" y="603279"/>
+                  </a:lnTo>
+                  <a:lnTo>
+                    <a:pt x="6517649" y="596858"/>
+                  </a:lnTo>
+                  <a:lnTo>
+                    <a:pt x="6446027" y="590276"/>
+                  </a:lnTo>
+                  <a:lnTo>
+                    <a:pt x="6374404" y="583530"/>
+                  </a:lnTo>
+                  <a:lnTo>
+                    <a:pt x="6302782" y="576616"/>
+                  </a:lnTo>
+                  <a:lnTo>
+                    <a:pt x="6231159" y="569530"/>
+                  </a:lnTo>
+                  <a:lnTo>
+                    <a:pt x="6159537" y="562267"/>
+                  </a:lnTo>
+                  <a:lnTo>
+                    <a:pt x="6087914" y="554824"/>
+                  </a:lnTo>
+                  <a:lnTo>
+                    <a:pt x="6016292" y="547194"/>
+                  </a:lnTo>
+                  <a:lnTo>
+                    <a:pt x="5944669" y="539374"/>
+                  </a:lnTo>
+                  <a:lnTo>
+                    <a:pt x="5873047" y="531360"/>
+                  </a:lnTo>
+                  <a:lnTo>
+                    <a:pt x="5801424" y="523145"/>
+                  </a:lnTo>
+                  <a:lnTo>
+                    <a:pt x="5729802" y="514726"/>
+                  </a:lnTo>
+                  <a:lnTo>
+                    <a:pt x="5658179" y="506097"/>
+                  </a:lnTo>
+                  <a:lnTo>
+                    <a:pt x="5586557" y="497253"/>
+                  </a:lnTo>
+                  <a:lnTo>
+                    <a:pt x="5514934" y="488188"/>
+                  </a:lnTo>
+                  <a:lnTo>
+                    <a:pt x="5443311" y="478897"/>
+                  </a:lnTo>
+                  <a:lnTo>
+                    <a:pt x="5371689" y="469375"/>
+                  </a:lnTo>
+                  <a:lnTo>
+                    <a:pt x="5300066" y="459615"/>
+                  </a:lnTo>
+                  <a:lnTo>
+                    <a:pt x="5228444" y="449612"/>
+                  </a:lnTo>
+                  <a:lnTo>
+                    <a:pt x="5156821" y="439359"/>
+                  </a:lnTo>
+                  <a:lnTo>
+                    <a:pt x="5085199" y="428851"/>
+                  </a:lnTo>
+                  <a:lnTo>
+                    <a:pt x="5013576" y="418081"/>
+                  </a:lnTo>
+                  <a:lnTo>
+                    <a:pt x="4941954" y="407043"/>
+                  </a:lnTo>
+                  <a:lnTo>
+                    <a:pt x="4870331" y="395729"/>
+                  </a:lnTo>
+                  <a:lnTo>
+                    <a:pt x="4798709" y="384133"/>
+                  </a:lnTo>
+                  <a:lnTo>
+                    <a:pt x="4727086" y="372248"/>
+                  </a:lnTo>
+                  <a:lnTo>
+                    <a:pt x="4655464" y="360067"/>
+                  </a:lnTo>
+                  <a:lnTo>
+                    <a:pt x="4583841" y="347582"/>
+                  </a:lnTo>
+                  <a:lnTo>
+                    <a:pt x="4512219" y="334786"/>
+                  </a:lnTo>
+                  <a:lnTo>
+                    <a:pt x="4440596" y="321671"/>
+                  </a:lnTo>
+                  <a:lnTo>
+                    <a:pt x="4368974" y="308229"/>
+                  </a:lnTo>
+                  <a:lnTo>
+                    <a:pt x="4297351" y="294452"/>
+                  </a:lnTo>
+                  <a:lnTo>
+                    <a:pt x="4225729" y="280331"/>
+                  </a:lnTo>
+                  <a:lnTo>
+                    <a:pt x="4154106" y="265858"/>
+                  </a:lnTo>
+                  <a:lnTo>
+                    <a:pt x="4082483" y="251025"/>
+                  </a:lnTo>
+                  <a:lnTo>
+                    <a:pt x="4010861" y="235822"/>
+                  </a:lnTo>
+                  <a:lnTo>
+                    <a:pt x="3939238" y="220239"/>
+                  </a:lnTo>
+                  <a:lnTo>
+                    <a:pt x="3867616" y="204268"/>
+                  </a:lnTo>
+                  <a:lnTo>
+                    <a:pt x="3795993" y="187899"/>
+                  </a:lnTo>
+                  <a:lnTo>
+                    <a:pt x="3724371" y="171122"/>
+                  </a:lnTo>
+                  <a:lnTo>
+                    <a:pt x="3652748" y="153927"/>
+                  </a:lnTo>
+                  <a:lnTo>
+                    <a:pt x="3581126" y="136303"/>
+                  </a:lnTo>
+                  <a:lnTo>
+                    <a:pt x="3509503" y="118240"/>
+                  </a:lnTo>
+                  <a:lnTo>
+                    <a:pt x="3437881" y="99726"/>
+                  </a:lnTo>
+                  <a:lnTo>
+                    <a:pt x="3366258" y="80751"/>
+                  </a:lnTo>
+                  <a:lnTo>
+                    <a:pt x="3294636" y="61302"/>
+                  </a:lnTo>
+                  <a:lnTo>
+                    <a:pt x="3223013" y="41369"/>
+                  </a:lnTo>
+                  <a:lnTo>
+                    <a:pt x="3151391" y="20939"/>
                   </a:lnTo>
                   <a:lnTo>
                     <a:pt x="3079768" y="0"/>
                   </a:lnTo>
                   <a:lnTo>
-                    <a:pt x="3008146" y="12803"/>
-                  </a:lnTo>
-                  <a:lnTo>
-                    <a:pt x="2936523" y="42381"/>
-                  </a:lnTo>
-                  <a:lnTo>
-                    <a:pt x="2864901" y="70931"/>
-                  </a:lnTo>
-                  <a:lnTo>
-                    <a:pt x="2793278" y="98491"/>
-                  </a:lnTo>
-                  <a:lnTo>
-                    <a:pt x="2721655" y="125093"/>
-                  </a:lnTo>
-                  <a:lnTo>
-                    <a:pt x="2650033" y="150772"/>
-                  </a:lnTo>
-                  <a:lnTo>
-                    <a:pt x="2578410" y="175559"/>
-                  </a:lnTo>
-                  <a:lnTo>
-                    <a:pt x="2506788" y="199486"/>
-                  </a:lnTo>
-                  <a:lnTo>
-                    <a:pt x="2435165" y="222582"/>
-                  </a:lnTo>
-                  <a:lnTo>
-                    <a:pt x="2363543" y="244876"/>
-                  </a:lnTo>
-                  <a:lnTo>
-                    <a:pt x="2291920" y="266395"/>
-                  </a:lnTo>
-                  <a:lnTo>
-                    <a:pt x="2220298" y="287168"/>
-                  </a:lnTo>
-                  <a:lnTo>
-                    <a:pt x="2148675" y="307219"/>
-                  </a:lnTo>
-                  <a:lnTo>
-                    <a:pt x="2077053" y="326574"/>
-                  </a:lnTo>
-                  <a:lnTo>
-                    <a:pt x="2005430" y="345258"/>
-                  </a:lnTo>
-                  <a:lnTo>
-                    <a:pt x="1933808" y="363292"/>
-                  </a:lnTo>
-                  <a:lnTo>
-                    <a:pt x="1862185" y="380700"/>
-                  </a:lnTo>
-                  <a:lnTo>
-                    <a:pt x="1790563" y="397504"/>
-                  </a:lnTo>
-                  <a:lnTo>
-                    <a:pt x="1718940" y="413724"/>
-                  </a:lnTo>
-                  <a:lnTo>
-                    <a:pt x="1647318" y="429381"/>
-                  </a:lnTo>
-                  <a:lnTo>
-                    <a:pt x="1575695" y="444495"/>
-                  </a:lnTo>
-                  <a:lnTo>
-                    <a:pt x="1504073" y="459083"/>
-                  </a:lnTo>
-                  <a:lnTo>
-                    <a:pt x="1432450" y="473166"/>
-                  </a:lnTo>
-                  <a:lnTo>
-                    <a:pt x="1360827" y="486759"/>
-                  </a:lnTo>
-                  <a:lnTo>
-                    <a:pt x="1289205" y="499880"/>
-                  </a:lnTo>
-                  <a:lnTo>
-                    <a:pt x="1217582" y="512546"/>
-                  </a:lnTo>
-                  <a:lnTo>
-                    <a:pt x="1145960" y="524772"/>
-                  </a:lnTo>
-                  <a:lnTo>
-                    <a:pt x="1074337" y="536573"/>
-                  </a:lnTo>
-                  <a:lnTo>
-                    <a:pt x="1002715" y="547964"/>
-                  </a:lnTo>
-                  <a:lnTo>
-                    <a:pt x="931092" y="558961"/>
-                  </a:lnTo>
-                  <a:lnTo>
-                    <a:pt x="859470" y="569575"/>
-                  </a:lnTo>
-                  <a:lnTo>
-                    <a:pt x="787847" y="579821"/>
-                  </a:lnTo>
-                  <a:lnTo>
-                    <a:pt x="716225" y="589710"/>
-                  </a:lnTo>
-                  <a:lnTo>
-                    <a:pt x="644602" y="599257"/>
-                  </a:lnTo>
-                  <a:lnTo>
-                    <a:pt x="572980" y="608472"/>
-                  </a:lnTo>
-                  <a:lnTo>
-                    <a:pt x="501357" y="617367"/>
-                  </a:lnTo>
-                  <a:lnTo>
-                    <a:pt x="429735" y="625954"/>
-                  </a:lnTo>
-                  <a:lnTo>
-                    <a:pt x="358112" y="634242"/>
-                  </a:lnTo>
-                  <a:lnTo>
-                    <a:pt x="286490" y="642242"/>
-                  </a:lnTo>
-                  <a:lnTo>
-                    <a:pt x="214867" y="649965"/>
-                  </a:lnTo>
-                  <a:lnTo>
-                    <a:pt x="143245" y="657419"/>
-                  </a:lnTo>
-                  <a:lnTo>
-                    <a:pt x="71622" y="664615"/>
-                  </a:lnTo>
-                  <a:lnTo>
-                    <a:pt x="0" y="671561"/>
+                    <a:pt x="3008146" y="6371"/>
+                  </a:lnTo>
+                  <a:lnTo>
+                    <a:pt x="2936523" y="31688"/>
+                  </a:lnTo>
+                  <a:lnTo>
+                    <a:pt x="2864901" y="56255"/>
+                  </a:lnTo>
+                  <a:lnTo>
+                    <a:pt x="2793278" y="80094"/>
+                  </a:lnTo>
+                  <a:lnTo>
+                    <a:pt x="2721655" y="103227"/>
+                  </a:lnTo>
+                  <a:lnTo>
+                    <a:pt x="2650033" y="125675"/>
+                  </a:lnTo>
+                  <a:lnTo>
+                    <a:pt x="2578410" y="147458"/>
+                  </a:lnTo>
+                  <a:lnTo>
+                    <a:pt x="2506788" y="168595"/>
+                  </a:lnTo>
+                  <a:lnTo>
+                    <a:pt x="2435165" y="189105"/>
+                  </a:lnTo>
+                  <a:lnTo>
+                    <a:pt x="2363543" y="209009"/>
+                  </a:lnTo>
+                  <a:lnTo>
+                    <a:pt x="2291920" y="228322"/>
+                  </a:lnTo>
+                  <a:lnTo>
+                    <a:pt x="2220298" y="247063"/>
+                  </a:lnTo>
+                  <a:lnTo>
+                    <a:pt x="2148675" y="265249"/>
+                  </a:lnTo>
+                  <a:lnTo>
+                    <a:pt x="2077053" y="282896"/>
+                  </a:lnTo>
+                  <a:lnTo>
+                    <a:pt x="2005430" y="300020"/>
+                  </a:lnTo>
+                  <a:lnTo>
+                    <a:pt x="1933808" y="316637"/>
+                  </a:lnTo>
+                  <a:lnTo>
+                    <a:pt x="1862185" y="332762"/>
+                  </a:lnTo>
+                  <a:lnTo>
+                    <a:pt x="1790563" y="348409"/>
+                  </a:lnTo>
+                  <a:lnTo>
+                    <a:pt x="1718940" y="363592"/>
+                  </a:lnTo>
+                  <a:lnTo>
+                    <a:pt x="1647318" y="378325"/>
+                  </a:lnTo>
+                  <a:lnTo>
+                    <a:pt x="1575695" y="392622"/>
+                  </a:lnTo>
+                  <a:lnTo>
+                    <a:pt x="1504073" y="406495"/>
+                  </a:lnTo>
+                  <a:lnTo>
+                    <a:pt x="1432450" y="419957"/>
+                  </a:lnTo>
+                  <a:lnTo>
+                    <a:pt x="1360827" y="433020"/>
+                  </a:lnTo>
+                  <a:lnTo>
+                    <a:pt x="1289205" y="445697"/>
+                  </a:lnTo>
+                  <a:lnTo>
+                    <a:pt x="1217582" y="457997"/>
+                  </a:lnTo>
+                  <a:lnTo>
+                    <a:pt x="1145960" y="469933"/>
+                  </a:lnTo>
+                  <a:lnTo>
+                    <a:pt x="1074337" y="481516"/>
+                  </a:lnTo>
+                  <a:lnTo>
+                    <a:pt x="1002715" y="492755"/>
+                  </a:lnTo>
+                  <a:lnTo>
+                    <a:pt x="931092" y="503662"/>
+                  </a:lnTo>
+                  <a:lnTo>
+                    <a:pt x="859470" y="514245"/>
+                  </a:lnTo>
+                  <a:lnTo>
+                    <a:pt x="787847" y="524515"/>
+                  </a:lnTo>
+                  <a:lnTo>
+                    <a:pt x="716225" y="534480"/>
+                  </a:lnTo>
+                  <a:lnTo>
+                    <a:pt x="644602" y="544150"/>
+                  </a:lnTo>
+                  <a:lnTo>
+                    <a:pt x="572980" y="553534"/>
+                  </a:lnTo>
+                  <a:lnTo>
+                    <a:pt x="501357" y="562639"/>
+                  </a:lnTo>
+                  <a:lnTo>
+                    <a:pt x="429735" y="571475"/>
+                  </a:lnTo>
+                  <a:lnTo>
+                    <a:pt x="358112" y="580049"/>
+                  </a:lnTo>
+                  <a:lnTo>
+                    <a:pt x="286490" y="588369"/>
+                  </a:lnTo>
+                  <a:lnTo>
+                    <a:pt x="214867" y="596442"/>
+                  </a:lnTo>
+                  <a:lnTo>
+                    <a:pt x="143245" y="604277"/>
+                  </a:lnTo>
+                  <a:lnTo>
+                    <a:pt x="71622" y="611879"/>
+                  </a:lnTo>
+                  <a:lnTo>
+                    <a:pt x="0" y="619256"/>
                   </a:lnTo>
                 </a:path>
               </a:pathLst>
@@ -4325,309 +4367,309 @@
           </p:nvSpPr>
           <p:spPr>
             <a:xfrm>
-              <a:off x="1172049" y="3960748"/>
-              <a:ext cx="7090630" cy="1036550"/>
+              <a:off x="1172049" y="4534959"/>
+              <a:ext cx="7090630" cy="239889"/>
             </a:xfrm>
             <a:custGeom>
               <a:avLst/>
               <a:pathLst>
-                <a:path w="7090630" h="1036550">
+                <a:path w="7090630" h="239889">
                   <a:moveTo>
-                    <a:pt x="0" y="1036550"/>
+                    <a:pt x="0" y="239889"/>
                   </a:moveTo>
                   <a:lnTo>
-                    <a:pt x="71622" y="1030625"/>
-                  </a:lnTo>
-                  <a:lnTo>
-                    <a:pt x="143245" y="1024636"/>
-                  </a:lnTo>
-                  <a:lnTo>
-                    <a:pt x="214867" y="1018584"/>
-                  </a:lnTo>
-                  <a:lnTo>
-                    <a:pt x="286490" y="1012466"/>
-                  </a:lnTo>
-                  <a:lnTo>
-                    <a:pt x="358112" y="1006282"/>
-                  </a:lnTo>
-                  <a:lnTo>
-                    <a:pt x="429735" y="1000032"/>
-                  </a:lnTo>
-                  <a:lnTo>
-                    <a:pt x="501357" y="993715"/>
-                  </a:lnTo>
-                  <a:lnTo>
-                    <a:pt x="572980" y="987331"/>
-                  </a:lnTo>
-                  <a:lnTo>
-                    <a:pt x="644602" y="980877"/>
-                  </a:lnTo>
-                  <a:lnTo>
-                    <a:pt x="716225" y="974355"/>
-                  </a:lnTo>
-                  <a:lnTo>
-                    <a:pt x="787847" y="967762"/>
-                  </a:lnTo>
-                  <a:lnTo>
-                    <a:pt x="859470" y="961099"/>
-                  </a:lnTo>
-                  <a:lnTo>
-                    <a:pt x="931092" y="954364"/>
-                  </a:lnTo>
-                  <a:lnTo>
-                    <a:pt x="1002715" y="947557"/>
-                  </a:lnTo>
-                  <a:lnTo>
-                    <a:pt x="1074337" y="940676"/>
-                  </a:lnTo>
-                  <a:lnTo>
-                    <a:pt x="1145960" y="933722"/>
-                  </a:lnTo>
-                  <a:lnTo>
-                    <a:pt x="1217582" y="926693"/>
-                  </a:lnTo>
-                  <a:lnTo>
-                    <a:pt x="1289205" y="919589"/>
-                  </a:lnTo>
-                  <a:lnTo>
-                    <a:pt x="1360827" y="912408"/>
-                  </a:lnTo>
-                  <a:lnTo>
-                    <a:pt x="1432450" y="905151"/>
-                  </a:lnTo>
-                  <a:lnTo>
-                    <a:pt x="1504073" y="897815"/>
-                  </a:lnTo>
-                  <a:lnTo>
-                    <a:pt x="1575695" y="890401"/>
-                  </a:lnTo>
-                  <a:lnTo>
-                    <a:pt x="1647318" y="882907"/>
-                  </a:lnTo>
-                  <a:lnTo>
-                    <a:pt x="1718940" y="875333"/>
-                  </a:lnTo>
-                  <a:lnTo>
-                    <a:pt x="1790563" y="867677"/>
-                  </a:lnTo>
-                  <a:lnTo>
-                    <a:pt x="1862185" y="859939"/>
-                  </a:lnTo>
-                  <a:lnTo>
-                    <a:pt x="1933808" y="852118"/>
-                  </a:lnTo>
-                  <a:lnTo>
-                    <a:pt x="2005430" y="844213"/>
-                  </a:lnTo>
-                  <a:lnTo>
-                    <a:pt x="2077053" y="836223"/>
-                  </a:lnTo>
-                  <a:lnTo>
-                    <a:pt x="2148675" y="828148"/>
-                  </a:lnTo>
-                  <a:lnTo>
-                    <a:pt x="2220298" y="819986"/>
-                  </a:lnTo>
-                  <a:lnTo>
-                    <a:pt x="2291920" y="811736"/>
-                  </a:lnTo>
-                  <a:lnTo>
-                    <a:pt x="2363543" y="803397"/>
-                  </a:lnTo>
-                  <a:lnTo>
-                    <a:pt x="2435165" y="794970"/>
-                  </a:lnTo>
-                  <a:lnTo>
-                    <a:pt x="2506788" y="786451"/>
-                  </a:lnTo>
-                  <a:lnTo>
-                    <a:pt x="2578410" y="777841"/>
-                  </a:lnTo>
-                  <a:lnTo>
-                    <a:pt x="2650033" y="769139"/>
-                  </a:lnTo>
-                  <a:lnTo>
-                    <a:pt x="2721655" y="760343"/>
-                  </a:lnTo>
-                  <a:lnTo>
-                    <a:pt x="2793278" y="751453"/>
-                  </a:lnTo>
-                  <a:lnTo>
-                    <a:pt x="2864901" y="742468"/>
-                  </a:lnTo>
-                  <a:lnTo>
-                    <a:pt x="2936523" y="733386"/>
-                  </a:lnTo>
-                  <a:lnTo>
-                    <a:pt x="3008146" y="724206"/>
-                  </a:lnTo>
-                  <a:lnTo>
-                    <a:pt x="3079768" y="714928"/>
-                  </a:lnTo>
-                  <a:lnTo>
-                    <a:pt x="3151391" y="705550"/>
-                  </a:lnTo>
-                  <a:lnTo>
-                    <a:pt x="3223013" y="696072"/>
-                  </a:lnTo>
-                  <a:lnTo>
-                    <a:pt x="3294636" y="686492"/>
-                  </a:lnTo>
-                  <a:lnTo>
-                    <a:pt x="3366258" y="676809"/>
-                  </a:lnTo>
-                  <a:lnTo>
-                    <a:pt x="3437881" y="667022"/>
-                  </a:lnTo>
-                  <a:lnTo>
-                    <a:pt x="3509503" y="657130"/>
-                  </a:lnTo>
-                  <a:lnTo>
-                    <a:pt x="3581126" y="647132"/>
-                  </a:lnTo>
-                  <a:lnTo>
-                    <a:pt x="3652748" y="637026"/>
-                  </a:lnTo>
-                  <a:lnTo>
-                    <a:pt x="3724371" y="626813"/>
-                  </a:lnTo>
-                  <a:lnTo>
-                    <a:pt x="3795993" y="616489"/>
-                  </a:lnTo>
-                  <a:lnTo>
-                    <a:pt x="3867616" y="606054"/>
-                  </a:lnTo>
-                  <a:lnTo>
-                    <a:pt x="3939238" y="595508"/>
-                  </a:lnTo>
-                  <a:lnTo>
-                    <a:pt x="4010861" y="584848"/>
-                  </a:lnTo>
-                  <a:lnTo>
-                    <a:pt x="4082483" y="574074"/>
-                  </a:lnTo>
-                  <a:lnTo>
-                    <a:pt x="4154106" y="563184"/>
-                  </a:lnTo>
-                  <a:lnTo>
-                    <a:pt x="4225729" y="552178"/>
-                  </a:lnTo>
-                  <a:lnTo>
-                    <a:pt x="4297351" y="541053"/>
-                  </a:lnTo>
-                  <a:lnTo>
-                    <a:pt x="4368974" y="529809"/>
-                  </a:lnTo>
-                  <a:lnTo>
-                    <a:pt x="4440596" y="518444"/>
-                  </a:lnTo>
-                  <a:lnTo>
-                    <a:pt x="4512219" y="506957"/>
-                  </a:lnTo>
-                  <a:lnTo>
-                    <a:pt x="4583841" y="495346"/>
-                  </a:lnTo>
-                  <a:lnTo>
-                    <a:pt x="4655464" y="483611"/>
-                  </a:lnTo>
-                  <a:lnTo>
-                    <a:pt x="4727086" y="471750"/>
-                  </a:lnTo>
-                  <a:lnTo>
-                    <a:pt x="4798709" y="459762"/>
-                  </a:lnTo>
-                  <a:lnTo>
-                    <a:pt x="4870331" y="447645"/>
-                  </a:lnTo>
-                  <a:lnTo>
-                    <a:pt x="4941954" y="435398"/>
-                  </a:lnTo>
-                  <a:lnTo>
-                    <a:pt x="5013576" y="423019"/>
-                  </a:lnTo>
-                  <a:lnTo>
-                    <a:pt x="5085199" y="410508"/>
-                  </a:lnTo>
-                  <a:lnTo>
-                    <a:pt x="5156821" y="397862"/>
-                  </a:lnTo>
-                  <a:lnTo>
-                    <a:pt x="5228444" y="385081"/>
-                  </a:lnTo>
-                  <a:lnTo>
-                    <a:pt x="5300066" y="372162"/>
-                  </a:lnTo>
-                  <a:lnTo>
-                    <a:pt x="5371689" y="359105"/>
-                  </a:lnTo>
-                  <a:lnTo>
-                    <a:pt x="5443311" y="345907"/>
-                  </a:lnTo>
-                  <a:lnTo>
-                    <a:pt x="5514934" y="332568"/>
-                  </a:lnTo>
-                  <a:lnTo>
-                    <a:pt x="5586557" y="319085"/>
-                  </a:lnTo>
-                  <a:lnTo>
-                    <a:pt x="5658179" y="305458"/>
-                  </a:lnTo>
-                  <a:lnTo>
-                    <a:pt x="5729802" y="291685"/>
-                  </a:lnTo>
-                  <a:lnTo>
-                    <a:pt x="5801424" y="277763"/>
-                  </a:lnTo>
-                  <a:lnTo>
-                    <a:pt x="5873047" y="263693"/>
-                  </a:lnTo>
-                  <a:lnTo>
-                    <a:pt x="5944669" y="249471"/>
-                  </a:lnTo>
-                  <a:lnTo>
-                    <a:pt x="6016292" y="235096"/>
-                  </a:lnTo>
-                  <a:lnTo>
-                    <a:pt x="6087914" y="220567"/>
-                  </a:lnTo>
-                  <a:lnTo>
-                    <a:pt x="6159537" y="205883"/>
-                  </a:lnTo>
-                  <a:lnTo>
-                    <a:pt x="6231159" y="191040"/>
-                  </a:lnTo>
-                  <a:lnTo>
-                    <a:pt x="6302782" y="176038"/>
-                  </a:lnTo>
-                  <a:lnTo>
-                    <a:pt x="6374404" y="160875"/>
-                  </a:lnTo>
-                  <a:lnTo>
-                    <a:pt x="6446027" y="145550"/>
-                  </a:lnTo>
-                  <a:lnTo>
-                    <a:pt x="6517649" y="130060"/>
-                  </a:lnTo>
-                  <a:lnTo>
-                    <a:pt x="6589272" y="114403"/>
-                  </a:lnTo>
-                  <a:lnTo>
-                    <a:pt x="6660894" y="98579"/>
-                  </a:lnTo>
-                  <a:lnTo>
-                    <a:pt x="6732517" y="82584"/>
-                  </a:lnTo>
-                  <a:lnTo>
-                    <a:pt x="6804139" y="66418"/>
-                  </a:lnTo>
-                  <a:lnTo>
-                    <a:pt x="6875762" y="50079"/>
-                  </a:lnTo>
-                  <a:lnTo>
-                    <a:pt x="6947385" y="33563"/>
-                  </a:lnTo>
-                  <a:lnTo>
-                    <a:pt x="7019007" y="16871"/>
+                    <a:pt x="71622" y="237775"/>
+                  </a:lnTo>
+                  <a:lnTo>
+                    <a:pt x="143245" y="235655"/>
+                  </a:lnTo>
+                  <a:lnTo>
+                    <a:pt x="214867" y="233530"/>
+                  </a:lnTo>
+                  <a:lnTo>
+                    <a:pt x="286490" y="231399"/>
+                  </a:lnTo>
+                  <a:lnTo>
+                    <a:pt x="358112" y="229262"/>
+                  </a:lnTo>
+                  <a:lnTo>
+                    <a:pt x="429735" y="227119"/>
+                  </a:lnTo>
+                  <a:lnTo>
+                    <a:pt x="501357" y="224971"/>
+                  </a:lnTo>
+                  <a:lnTo>
+                    <a:pt x="572980" y="222816"/>
+                  </a:lnTo>
+                  <a:lnTo>
+                    <a:pt x="644602" y="220656"/>
+                  </a:lnTo>
+                  <a:lnTo>
+                    <a:pt x="716225" y="218490"/>
+                  </a:lnTo>
+                  <a:lnTo>
+                    <a:pt x="787847" y="216318"/>
+                  </a:lnTo>
+                  <a:lnTo>
+                    <a:pt x="859470" y="214140"/>
+                  </a:lnTo>
+                  <a:lnTo>
+                    <a:pt x="931092" y="211956"/>
+                  </a:lnTo>
+                  <a:lnTo>
+                    <a:pt x="1002715" y="209766"/>
+                  </a:lnTo>
+                  <a:lnTo>
+                    <a:pt x="1074337" y="207570"/>
+                  </a:lnTo>
+                  <a:lnTo>
+                    <a:pt x="1145960" y="205368"/>
+                  </a:lnTo>
+                  <a:lnTo>
+                    <a:pt x="1217582" y="203160"/>
+                  </a:lnTo>
+                  <a:lnTo>
+                    <a:pt x="1289205" y="200946"/>
+                  </a:lnTo>
+                  <a:lnTo>
+                    <a:pt x="1360827" y="198726"/>
+                  </a:lnTo>
+                  <a:lnTo>
+                    <a:pt x="1432450" y="196500"/>
+                  </a:lnTo>
+                  <a:lnTo>
+                    <a:pt x="1504073" y="194268"/>
+                  </a:lnTo>
+                  <a:lnTo>
+                    <a:pt x="1575695" y="192029"/>
+                  </a:lnTo>
+                  <a:lnTo>
+                    <a:pt x="1647318" y="189785"/>
+                  </a:lnTo>
+                  <a:lnTo>
+                    <a:pt x="1718940" y="187534"/>
+                  </a:lnTo>
+                  <a:lnTo>
+                    <a:pt x="1790563" y="185278"/>
+                  </a:lnTo>
+                  <a:lnTo>
+                    <a:pt x="1862185" y="183015"/>
+                  </a:lnTo>
+                  <a:lnTo>
+                    <a:pt x="1933808" y="180746"/>
+                  </a:lnTo>
+                  <a:lnTo>
+                    <a:pt x="2005430" y="178471"/>
+                  </a:lnTo>
+                  <a:lnTo>
+                    <a:pt x="2077053" y="176189"/>
+                  </a:lnTo>
+                  <a:lnTo>
+                    <a:pt x="2148675" y="173902"/>
+                  </a:lnTo>
+                  <a:lnTo>
+                    <a:pt x="2220298" y="171608"/>
+                  </a:lnTo>
+                  <a:lnTo>
+                    <a:pt x="2291920" y="169308"/>
+                  </a:lnTo>
+                  <a:lnTo>
+                    <a:pt x="2363543" y="167001"/>
+                  </a:lnTo>
+                  <a:lnTo>
+                    <a:pt x="2435165" y="164689"/>
+                  </a:lnTo>
+                  <a:lnTo>
+                    <a:pt x="2506788" y="162370"/>
+                  </a:lnTo>
+                  <a:lnTo>
+                    <a:pt x="2578410" y="160044"/>
+                  </a:lnTo>
+                  <a:lnTo>
+                    <a:pt x="2650033" y="157713"/>
+                  </a:lnTo>
+                  <a:lnTo>
+                    <a:pt x="2721655" y="155375"/>
+                  </a:lnTo>
+                  <a:lnTo>
+                    <a:pt x="2793278" y="153030"/>
+                  </a:lnTo>
+                  <a:lnTo>
+                    <a:pt x="2864901" y="150679"/>
+                  </a:lnTo>
+                  <a:lnTo>
+                    <a:pt x="2936523" y="148322"/>
+                  </a:lnTo>
+                  <a:lnTo>
+                    <a:pt x="3008146" y="145959"/>
+                  </a:lnTo>
+                  <a:lnTo>
+                    <a:pt x="3079768" y="143588"/>
+                  </a:lnTo>
+                  <a:lnTo>
+                    <a:pt x="3151391" y="141212"/>
+                  </a:lnTo>
+                  <a:lnTo>
+                    <a:pt x="3223013" y="138829"/>
+                  </a:lnTo>
+                  <a:lnTo>
+                    <a:pt x="3294636" y="136439"/>
+                  </a:lnTo>
+                  <a:lnTo>
+                    <a:pt x="3366258" y="134043"/>
+                  </a:lnTo>
+                  <a:lnTo>
+                    <a:pt x="3437881" y="131640"/>
+                  </a:lnTo>
+                  <a:lnTo>
+                    <a:pt x="3509503" y="129231"/>
+                  </a:lnTo>
+                  <a:lnTo>
+                    <a:pt x="3581126" y="126815"/>
+                  </a:lnTo>
+                  <a:lnTo>
+                    <a:pt x="3652748" y="124393"/>
+                  </a:lnTo>
+                  <a:lnTo>
+                    <a:pt x="3724371" y="121964"/>
+                  </a:lnTo>
+                  <a:lnTo>
+                    <a:pt x="3795993" y="119528"/>
+                  </a:lnTo>
+                  <a:lnTo>
+                    <a:pt x="3867616" y="117086"/>
+                  </a:lnTo>
+                  <a:lnTo>
+                    <a:pt x="3939238" y="114637"/>
+                  </a:lnTo>
+                  <a:lnTo>
+                    <a:pt x="4010861" y="112182"/>
+                  </a:lnTo>
+                  <a:lnTo>
+                    <a:pt x="4082483" y="109719"/>
+                  </a:lnTo>
+                  <a:lnTo>
+                    <a:pt x="4154106" y="107250"/>
+                  </a:lnTo>
+                  <a:lnTo>
+                    <a:pt x="4225729" y="104774"/>
+                  </a:lnTo>
+                  <a:lnTo>
+                    <a:pt x="4297351" y="102292"/>
+                  </a:lnTo>
+                  <a:lnTo>
+                    <a:pt x="4368974" y="99803"/>
+                  </a:lnTo>
+                  <a:lnTo>
+                    <a:pt x="4440596" y="97306"/>
+                  </a:lnTo>
+                  <a:lnTo>
+                    <a:pt x="4512219" y="94804"/>
+                  </a:lnTo>
+                  <a:lnTo>
+                    <a:pt x="4583841" y="92294"/>
+                  </a:lnTo>
+                  <a:lnTo>
+                    <a:pt x="4655464" y="89777"/>
+                  </a:lnTo>
+                  <a:lnTo>
+                    <a:pt x="4727086" y="87254"/>
+                  </a:lnTo>
+                  <a:lnTo>
+                    <a:pt x="4798709" y="84723"/>
+                  </a:lnTo>
+                  <a:lnTo>
+                    <a:pt x="4870331" y="82186"/>
+                  </a:lnTo>
+                  <a:lnTo>
+                    <a:pt x="4941954" y="79642"/>
+                  </a:lnTo>
+                  <a:lnTo>
+                    <a:pt x="5013576" y="77091"/>
+                  </a:lnTo>
+                  <a:lnTo>
+                    <a:pt x="5085199" y="74533"/>
+                  </a:lnTo>
+                  <a:lnTo>
+                    <a:pt x="5156821" y="71967"/>
+                  </a:lnTo>
+                  <a:lnTo>
+                    <a:pt x="5228444" y="69395"/>
+                  </a:lnTo>
+                  <a:lnTo>
+                    <a:pt x="5300066" y="66816"/>
+                  </a:lnTo>
+                  <a:lnTo>
+                    <a:pt x="5371689" y="64230"/>
+                  </a:lnTo>
+                  <a:lnTo>
+                    <a:pt x="5443311" y="61637"/>
+                  </a:lnTo>
+                  <a:lnTo>
+                    <a:pt x="5514934" y="59037"/>
+                  </a:lnTo>
+                  <a:lnTo>
+                    <a:pt x="5586557" y="56429"/>
+                  </a:lnTo>
+                  <a:lnTo>
+                    <a:pt x="5658179" y="53815"/>
+                  </a:lnTo>
+                  <a:lnTo>
+                    <a:pt x="5729802" y="51193"/>
+                  </a:lnTo>
+                  <a:lnTo>
+                    <a:pt x="5801424" y="48564"/>
+                  </a:lnTo>
+                  <a:lnTo>
+                    <a:pt x="5873047" y="45928"/>
+                  </a:lnTo>
+                  <a:lnTo>
+                    <a:pt x="5944669" y="43285"/>
+                  </a:lnTo>
+                  <a:lnTo>
+                    <a:pt x="6016292" y="40635"/>
+                  </a:lnTo>
+                  <a:lnTo>
+                    <a:pt x="6087914" y="37977"/>
+                  </a:lnTo>
+                  <a:lnTo>
+                    <a:pt x="6159537" y="35312"/>
+                  </a:lnTo>
+                  <a:lnTo>
+                    <a:pt x="6231159" y="32640"/>
+                  </a:lnTo>
+                  <a:lnTo>
+                    <a:pt x="6302782" y="29961"/>
+                  </a:lnTo>
+                  <a:lnTo>
+                    <a:pt x="6374404" y="27274"/>
+                  </a:lnTo>
+                  <a:lnTo>
+                    <a:pt x="6446027" y="24580"/>
+                  </a:lnTo>
+                  <a:lnTo>
+                    <a:pt x="6517649" y="21878"/>
+                  </a:lnTo>
+                  <a:lnTo>
+                    <a:pt x="6589272" y="19169"/>
+                  </a:lnTo>
+                  <a:lnTo>
+                    <a:pt x="6660894" y="16453"/>
+                  </a:lnTo>
+                  <a:lnTo>
+                    <a:pt x="6732517" y="13730"/>
+                  </a:lnTo>
+                  <a:lnTo>
+                    <a:pt x="6804139" y="10999"/>
+                  </a:lnTo>
+                  <a:lnTo>
+                    <a:pt x="6875762" y="8260"/>
+                  </a:lnTo>
+                  <a:lnTo>
+                    <a:pt x="6947385" y="5514"/>
+                  </a:lnTo>
+                  <a:lnTo>
+                    <a:pt x="7019007" y="2761"/>
                   </a:lnTo>
                   <a:lnTo>
                     <a:pt x="7090630" y="0"/>

--- a/docs/plots/carbo/jx_carbo_linsubhr_dosedisc_anemia3.pptx
+++ b/docs/plots/carbo/jx_carbo_linsubhr_dosedisc_anemia3.pptx
@@ -3145,7 +3145,7 @@
                     <a:pt x="71622" y="1231088"/>
                   </a:lnTo>
                   <a:lnTo>
-                    <a:pt x="143245" y="1289989"/>
+                    <a:pt x="143245" y="1289990"/>
                   </a:lnTo>
                   <a:lnTo>
                     <a:pt x="214867" y="1347459"/>
@@ -3163,7 +3163,7 @@
                     <a:pt x="501357" y="1563693"/>
                   </a:lnTo>
                   <a:lnTo>
-                    <a:pt x="572980" y="1614504"/>
+                    <a:pt x="572980" y="1614505"/>
                   </a:lnTo>
                   <a:lnTo>
                     <a:pt x="644602" y="1664080"/>
@@ -3190,7 +3190,7 @@
                     <a:pt x="1145960" y="1978939"/>
                   </a:lnTo>
                   <a:lnTo>
-                    <a:pt x="1217582" y="2019650"/>
+                    <a:pt x="1217582" y="2019651"/>
                   </a:lnTo>
                   <a:lnTo>
                     <a:pt x="1289205" y="2059371"/>
@@ -3250,7 +3250,7 @@
                     <a:pt x="2578410" y="2629843"/>
                   </a:lnTo>
                   <a:lnTo>
-                    <a:pt x="2650033" y="2654721"/>
+                    <a:pt x="2650033" y="2654722"/>
                   </a:lnTo>
                   <a:lnTo>
                     <a:pt x="2721655" y="2678995"/>
@@ -3313,7 +3313,7 @@
                     <a:pt x="4082483" y="2311004"/>
                   </a:lnTo>
                   <a:lnTo>
-                    <a:pt x="4154106" y="2270039"/>
+                    <a:pt x="4154106" y="2270040"/>
                   </a:lnTo>
                   <a:lnTo>
                     <a:pt x="4225729" y="2227824"/>
@@ -3328,13 +3328,13 @@
                     <a:pt x="4440596" y="2093284"/>
                   </a:lnTo>
                   <a:lnTo>
-                    <a:pt x="4512219" y="2045671"/>
+                    <a:pt x="4512219" y="2045672"/>
                   </a:lnTo>
                   <a:lnTo>
                     <a:pt x="4583841" y="1996605"/>
                   </a:lnTo>
                   <a:lnTo>
-                    <a:pt x="4655464" y="1946040"/>
+                    <a:pt x="4655464" y="1946041"/>
                   </a:lnTo>
                   <a:lnTo>
                     <a:pt x="4727086" y="1893932"/>
@@ -3352,16 +3352,16 @@
                     <a:pt x="5013576" y="1669094"/>
                   </a:lnTo>
                   <a:lnTo>
-                    <a:pt x="5085199" y="1608529"/>
-                  </a:lnTo>
-                  <a:lnTo>
-                    <a:pt x="5156821" y="1546115"/>
+                    <a:pt x="5085199" y="1608530"/>
+                  </a:lnTo>
+                  <a:lnTo>
+                    <a:pt x="5156821" y="1546116"/>
                   </a:lnTo>
                   <a:lnTo>
                     <a:pt x="5228444" y="1481796"/>
                   </a:lnTo>
                   <a:lnTo>
-                    <a:pt x="5300066" y="1415512"/>
+                    <a:pt x="5300066" y="1415513"/>
                   </a:lnTo>
                   <a:lnTo>
                     <a:pt x="5371689" y="1347205"/>
@@ -3394,7 +3394,7 @@
                     <a:pt x="6016292" y="630518"/>
                   </a:lnTo>
                   <a:lnTo>
-                    <a:pt x="6087914" y="538242"/>
+                    <a:pt x="6087914" y="538243"/>
                   </a:lnTo>
                   <a:lnTo>
                     <a:pt x="6159537" y="443149"/>
@@ -3403,13 +3403,13 @@
                     <a:pt x="6231159" y="345152"/>
                   </a:lnTo>
                   <a:lnTo>
-                    <a:pt x="6302782" y="244162"/>
+                    <a:pt x="6302782" y="244163"/>
                   </a:lnTo>
                   <a:lnTo>
                     <a:pt x="6374404" y="140090"/>
                   </a:lnTo>
                   <a:lnTo>
-                    <a:pt x="6446027" y="32839"/>
+                    <a:pt x="6446027" y="32840"/>
                   </a:lnTo>
                   <a:lnTo>
                     <a:pt x="6467308" y="0"/>
@@ -3487,7 +3487,7 @@
                     <a:pt x="5514934" y="3279976"/>
                   </a:lnTo>
                   <a:lnTo>
-                    <a:pt x="5443311" y="3270686"/>
+                    <a:pt x="5443311" y="3270685"/>
                   </a:lnTo>
                   <a:lnTo>
                     <a:pt x="5371689" y="3261163"/>
@@ -3646,7 +3646,7 @@
                     <a:pt x="1718940" y="3155380"/>
                   </a:lnTo>
                   <a:lnTo>
-                    <a:pt x="1647318" y="3170114"/>
+                    <a:pt x="1647318" y="3170113"/>
                   </a:lnTo>
                   <a:lnTo>
                     <a:pt x="1575695" y="3184410"/>
@@ -3755,7 +3755,7 @@
                     <a:pt x="71622" y="1231088"/>
                   </a:lnTo>
                   <a:lnTo>
-                    <a:pt x="143245" y="1289989"/>
+                    <a:pt x="143245" y="1289990"/>
                   </a:lnTo>
                   <a:lnTo>
                     <a:pt x="214867" y="1347459"/>
@@ -3773,7 +3773,7 @@
                     <a:pt x="501357" y="1563693"/>
                   </a:lnTo>
                   <a:lnTo>
-                    <a:pt x="572980" y="1614504"/>
+                    <a:pt x="572980" y="1614505"/>
                   </a:lnTo>
                   <a:lnTo>
                     <a:pt x="644602" y="1664080"/>
@@ -3800,7 +3800,7 @@
                     <a:pt x="1145960" y="1978939"/>
                   </a:lnTo>
                   <a:lnTo>
-                    <a:pt x="1217582" y="2019650"/>
+                    <a:pt x="1217582" y="2019651"/>
                   </a:lnTo>
                   <a:lnTo>
                     <a:pt x="1289205" y="2059371"/>
@@ -3860,7 +3860,7 @@
                     <a:pt x="2578410" y="2629843"/>
                   </a:lnTo>
                   <a:lnTo>
-                    <a:pt x="2650033" y="2654721"/>
+                    <a:pt x="2650033" y="2654722"/>
                   </a:lnTo>
                   <a:lnTo>
                     <a:pt x="2721655" y="2678995"/>
@@ -3923,7 +3923,7 @@
                     <a:pt x="4082483" y="2311004"/>
                   </a:lnTo>
                   <a:lnTo>
-                    <a:pt x="4154106" y="2270039"/>
+                    <a:pt x="4154106" y="2270040"/>
                   </a:lnTo>
                   <a:lnTo>
                     <a:pt x="4225729" y="2227824"/>
@@ -3938,13 +3938,13 @@
                     <a:pt x="4440596" y="2093284"/>
                   </a:lnTo>
                   <a:lnTo>
-                    <a:pt x="4512219" y="2045671"/>
+                    <a:pt x="4512219" y="2045672"/>
                   </a:lnTo>
                   <a:lnTo>
                     <a:pt x="4583841" y="1996605"/>
                   </a:lnTo>
                   <a:lnTo>
-                    <a:pt x="4655464" y="1946040"/>
+                    <a:pt x="4655464" y="1946041"/>
                   </a:lnTo>
                   <a:lnTo>
                     <a:pt x="4727086" y="1893932"/>
@@ -3962,16 +3962,16 @@
                     <a:pt x="5013576" y="1669094"/>
                   </a:lnTo>
                   <a:lnTo>
-                    <a:pt x="5085199" y="1608529"/>
-                  </a:lnTo>
-                  <a:lnTo>
-                    <a:pt x="5156821" y="1546115"/>
+                    <a:pt x="5085199" y="1608530"/>
+                  </a:lnTo>
+                  <a:lnTo>
+                    <a:pt x="5156821" y="1546116"/>
                   </a:lnTo>
                   <a:lnTo>
                     <a:pt x="5228444" y="1481796"/>
                   </a:lnTo>
                   <a:lnTo>
-                    <a:pt x="5300066" y="1415512"/>
+                    <a:pt x="5300066" y="1415513"/>
                   </a:lnTo>
                   <a:lnTo>
                     <a:pt x="5371689" y="1347205"/>
@@ -4004,7 +4004,7 @@
                     <a:pt x="6016292" y="630518"/>
                   </a:lnTo>
                   <a:lnTo>
-                    <a:pt x="6087914" y="538242"/>
+                    <a:pt x="6087914" y="538243"/>
                   </a:lnTo>
                   <a:lnTo>
                     <a:pt x="6159537" y="443149"/>
@@ -4013,13 +4013,13 @@
                     <a:pt x="6231159" y="345152"/>
                   </a:lnTo>
                   <a:lnTo>
-                    <a:pt x="6302782" y="244162"/>
+                    <a:pt x="6302782" y="244163"/>
                   </a:lnTo>
                   <a:lnTo>
                     <a:pt x="6374404" y="140090"/>
                   </a:lnTo>
                   <a:lnTo>
-                    <a:pt x="6446027" y="32839"/>
+                    <a:pt x="6446027" y="32840"/>
                   </a:lnTo>
                   <a:lnTo>
                     <a:pt x="6467308" y="0"/>
@@ -4074,7 +4074,7 @@
                     <a:pt x="6589272" y="603279"/>
                   </a:lnTo>
                   <a:lnTo>
-                    <a:pt x="6517649" y="596858"/>
+                    <a:pt x="6517649" y="596857"/>
                   </a:lnTo>
                   <a:lnTo>
                     <a:pt x="6446027" y="590276"/>
@@ -4347,7 +4347,7 @@
                     <a:pt x="71622" y="611879"/>
                   </a:lnTo>
                   <a:lnTo>
-                    <a:pt x="0" y="619256"/>
+                    <a:pt x="0" y="619255"/>
                   </a:lnTo>
                 </a:path>
               </a:pathLst>
@@ -4438,7 +4438,7 @@
                     <a:pt x="1432450" y="196500"/>
                   </a:lnTo>
                   <a:lnTo>
-                    <a:pt x="1504073" y="194268"/>
+                    <a:pt x="1504073" y="194267"/>
                   </a:lnTo>
                   <a:lnTo>
                     <a:pt x="1575695" y="192029"/>
@@ -4564,7 +4564,7 @@
                     <a:pt x="4440596" y="97306"/>
                   </a:lnTo>
                   <a:lnTo>
-                    <a:pt x="4512219" y="94804"/>
+                    <a:pt x="4512219" y="94803"/>
                   </a:lnTo>
                   <a:lnTo>
                     <a:pt x="4583841" y="92294"/>

--- a/docs/plots/carbo/jx_carbo_linsubhr_dosedisc_anemia3.pptx
+++ b/docs/plots/carbo/jx_carbo_linsubhr_dosedisc_anemia3.pptx
@@ -2271,7 +2271,7 @@
           </p:nvSpPr>
           <p:spPr>
             <a:xfrm>
-              <a:off x="817517" y="5114368"/>
+              <a:off x="817517" y="5142518"/>
               <a:ext cx="7799693" cy="0"/>
             </a:xfrm>
             <a:custGeom>
@@ -2314,7 +2314,7 @@
           </p:nvSpPr>
           <p:spPr>
             <a:xfrm>
-              <a:off x="817517" y="4244691"/>
+              <a:off x="817517" y="4313054"/>
               <a:ext cx="7799693" cy="0"/>
             </a:xfrm>
             <a:custGeom>
@@ -2357,7 +2357,7 @@
           </p:nvSpPr>
           <p:spPr>
             <a:xfrm>
-              <a:off x="817517" y="3375014"/>
+              <a:off x="817517" y="3483591"/>
               <a:ext cx="7799693" cy="0"/>
             </a:xfrm>
             <a:custGeom>
@@ -2400,7 +2400,7 @@
           </p:nvSpPr>
           <p:spPr>
             <a:xfrm>
-              <a:off x="817517" y="2505337"/>
+              <a:off x="817517" y="2654127"/>
               <a:ext cx="7799693" cy="0"/>
             </a:xfrm>
             <a:custGeom>
@@ -2443,15 +2443,15 @@
           </p:nvSpPr>
           <p:spPr>
             <a:xfrm>
-              <a:off x="2122745" y="1896563"/>
-              <a:ext cx="0" cy="3826579"/>
+              <a:off x="2122745" y="2073503"/>
+              <a:ext cx="0" cy="3649639"/>
             </a:xfrm>
             <a:custGeom>
               <a:avLst/>
               <a:pathLst>
-                <a:path w="0" h="3826579">
+                <a:path w="0" h="3649639">
                   <a:moveTo>
-                    <a:pt x="0" y="3826579"/>
+                    <a:pt x="0" y="3649639"/>
                   </a:moveTo>
                   <a:lnTo>
                     <a:pt x="0" y="0"/>
@@ -2486,15 +2486,15 @@
           </p:nvSpPr>
           <p:spPr>
             <a:xfrm>
-              <a:off x="3487174" y="1896563"/>
-              <a:ext cx="0" cy="3826579"/>
+              <a:off x="3487174" y="2073503"/>
+              <a:ext cx="0" cy="3649639"/>
             </a:xfrm>
             <a:custGeom>
               <a:avLst/>
               <a:pathLst>
-                <a:path w="0" h="3826579">
+                <a:path w="0" h="3649639">
                   <a:moveTo>
-                    <a:pt x="0" y="3826579"/>
+                    <a:pt x="0" y="3649639"/>
                   </a:moveTo>
                   <a:lnTo>
                     <a:pt x="0" y="0"/>
@@ -2529,15 +2529,15 @@
           </p:nvSpPr>
           <p:spPr>
             <a:xfrm>
-              <a:off x="4851604" y="1896563"/>
-              <a:ext cx="0" cy="3826579"/>
+              <a:off x="4851604" y="2073503"/>
+              <a:ext cx="0" cy="3649639"/>
             </a:xfrm>
             <a:custGeom>
               <a:avLst/>
               <a:pathLst>
-                <a:path w="0" h="3826579">
+                <a:path w="0" h="3649639">
                   <a:moveTo>
-                    <a:pt x="0" y="3826579"/>
+                    <a:pt x="0" y="3649639"/>
                   </a:moveTo>
                   <a:lnTo>
                     <a:pt x="0" y="0"/>
@@ -2572,15 +2572,15 @@
           </p:nvSpPr>
           <p:spPr>
             <a:xfrm>
-              <a:off x="6216034" y="1896563"/>
-              <a:ext cx="0" cy="3826579"/>
+              <a:off x="6216034" y="2073503"/>
+              <a:ext cx="0" cy="3649639"/>
             </a:xfrm>
             <a:custGeom>
               <a:avLst/>
               <a:pathLst>
-                <a:path w="0" h="3826579">
+                <a:path w="0" h="3649639">
                   <a:moveTo>
-                    <a:pt x="0" y="3826579"/>
+                    <a:pt x="0" y="3649639"/>
                   </a:moveTo>
                   <a:lnTo>
                     <a:pt x="0" y="0"/>
@@ -2615,15 +2615,15 @@
           </p:nvSpPr>
           <p:spPr>
             <a:xfrm>
-              <a:off x="7580464" y="1896563"/>
-              <a:ext cx="0" cy="3826579"/>
+              <a:off x="7580464" y="2073503"/>
+              <a:ext cx="0" cy="3649639"/>
             </a:xfrm>
             <a:custGeom>
               <a:avLst/>
               <a:pathLst>
-                <a:path w="0" h="3826579">
+                <a:path w="0" h="3649639">
                   <a:moveTo>
-                    <a:pt x="0" y="3826579"/>
+                    <a:pt x="0" y="3649639"/>
                   </a:moveTo>
                   <a:lnTo>
                     <a:pt x="0" y="0"/>
@@ -2658,7 +2658,7 @@
           </p:nvSpPr>
           <p:spPr>
             <a:xfrm>
-              <a:off x="817517" y="5549207"/>
+              <a:off x="817517" y="5557249"/>
               <a:ext cx="7799693" cy="0"/>
             </a:xfrm>
             <a:custGeom>
@@ -2701,7 +2701,7 @@
           </p:nvSpPr>
           <p:spPr>
             <a:xfrm>
-              <a:off x="817517" y="4679530"/>
+              <a:off x="817517" y="4727786"/>
               <a:ext cx="7799693" cy="0"/>
             </a:xfrm>
             <a:custGeom>
@@ -2744,7 +2744,7 @@
           </p:nvSpPr>
           <p:spPr>
             <a:xfrm>
-              <a:off x="817517" y="3809853"/>
+              <a:off x="817517" y="3898322"/>
               <a:ext cx="7799693" cy="0"/>
             </a:xfrm>
             <a:custGeom>
@@ -2787,7 +2787,7 @@
           </p:nvSpPr>
           <p:spPr>
             <a:xfrm>
-              <a:off x="817517" y="2940175"/>
+              <a:off x="817517" y="3068859"/>
               <a:ext cx="7799693" cy="0"/>
             </a:xfrm>
             <a:custGeom>
@@ -2830,7 +2830,7 @@
           </p:nvSpPr>
           <p:spPr>
             <a:xfrm>
-              <a:off x="817517" y="2070498"/>
+              <a:off x="817517" y="2239395"/>
               <a:ext cx="7799693" cy="0"/>
             </a:xfrm>
             <a:custGeom>
@@ -2873,15 +2873,15 @@
           </p:nvSpPr>
           <p:spPr>
             <a:xfrm>
-              <a:off x="1440530" y="1896563"/>
-              <a:ext cx="0" cy="3826579"/>
+              <a:off x="1440530" y="2073503"/>
+              <a:ext cx="0" cy="3649639"/>
             </a:xfrm>
             <a:custGeom>
               <a:avLst/>
               <a:pathLst>
-                <a:path w="0" h="3826579">
+                <a:path w="0" h="3649639">
                   <a:moveTo>
-                    <a:pt x="0" y="3826579"/>
+                    <a:pt x="0" y="3649639"/>
                   </a:moveTo>
                   <a:lnTo>
                     <a:pt x="0" y="0"/>
@@ -2916,15 +2916,15 @@
           </p:nvSpPr>
           <p:spPr>
             <a:xfrm>
-              <a:off x="2804959" y="1896563"/>
-              <a:ext cx="0" cy="3826579"/>
+              <a:off x="2804959" y="2073503"/>
+              <a:ext cx="0" cy="3649639"/>
             </a:xfrm>
             <a:custGeom>
               <a:avLst/>
               <a:pathLst>
-                <a:path w="0" h="3826579">
+                <a:path w="0" h="3649639">
                   <a:moveTo>
-                    <a:pt x="0" y="3826579"/>
+                    <a:pt x="0" y="3649639"/>
                   </a:moveTo>
                   <a:lnTo>
                     <a:pt x="0" y="0"/>
@@ -2959,15 +2959,15 @@
           </p:nvSpPr>
           <p:spPr>
             <a:xfrm>
-              <a:off x="4169389" y="1896563"/>
-              <a:ext cx="0" cy="3826579"/>
+              <a:off x="4169389" y="2073503"/>
+              <a:ext cx="0" cy="3649639"/>
             </a:xfrm>
             <a:custGeom>
               <a:avLst/>
               <a:pathLst>
-                <a:path w="0" h="3826579">
+                <a:path w="0" h="3649639">
                   <a:moveTo>
-                    <a:pt x="0" y="3826579"/>
+                    <a:pt x="0" y="3649639"/>
                   </a:moveTo>
                   <a:lnTo>
                     <a:pt x="0" y="0"/>
@@ -3002,15 +3002,15 @@
           </p:nvSpPr>
           <p:spPr>
             <a:xfrm>
-              <a:off x="5533819" y="1896563"/>
-              <a:ext cx="0" cy="3826579"/>
+              <a:off x="5533819" y="2073503"/>
+              <a:ext cx="0" cy="3649639"/>
             </a:xfrm>
             <a:custGeom>
               <a:avLst/>
               <a:pathLst>
-                <a:path w="0" h="3826579">
+                <a:path w="0" h="3649639">
                   <a:moveTo>
-                    <a:pt x="0" y="3826579"/>
+                    <a:pt x="0" y="3649639"/>
                   </a:moveTo>
                   <a:lnTo>
                     <a:pt x="0" y="0"/>
@@ -3045,15 +3045,15 @@
           </p:nvSpPr>
           <p:spPr>
             <a:xfrm>
-              <a:off x="6898249" y="1896563"/>
-              <a:ext cx="0" cy="3826579"/>
+              <a:off x="6898249" y="2073503"/>
+              <a:ext cx="0" cy="3649639"/>
             </a:xfrm>
             <a:custGeom>
               <a:avLst/>
               <a:pathLst>
-                <a:path w="0" h="3826579">
+                <a:path w="0" h="3649639">
                   <a:moveTo>
-                    <a:pt x="0" y="3826579"/>
+                    <a:pt x="0" y="3649639"/>
                   </a:moveTo>
                   <a:lnTo>
                     <a:pt x="0" y="0"/>
@@ -3088,15 +3088,15 @@
           </p:nvSpPr>
           <p:spPr>
             <a:xfrm>
-              <a:off x="8262679" y="1896563"/>
-              <a:ext cx="0" cy="3826579"/>
+              <a:off x="8262679" y="2073503"/>
+              <a:ext cx="0" cy="3649639"/>
             </a:xfrm>
             <a:custGeom>
               <a:avLst/>
               <a:pathLst>
-                <a:path w="0" h="3826579">
+                <a:path w="0" h="3649639">
                   <a:moveTo>
-                    <a:pt x="0" y="3826579"/>
+                    <a:pt x="0" y="3649639"/>
                   </a:moveTo>
                   <a:lnTo>
                     <a:pt x="0" y="0"/>
@@ -3131,285 +3131,285 @@
           </p:nvSpPr>
           <p:spPr>
             <a:xfrm>
-              <a:off x="1172049" y="1896563"/>
-              <a:ext cx="7090630" cy="3435851"/>
+              <a:off x="1172049" y="2073503"/>
+              <a:ext cx="7090630" cy="3276978"/>
             </a:xfrm>
             <a:custGeom>
               <a:avLst/>
               <a:pathLst>
-                <a:path w="7090630" h="3435851">
+                <a:path w="7090630" h="3276978">
                   <a:moveTo>
-                    <a:pt x="0" y="1170717"/>
+                    <a:pt x="0" y="1116584"/>
                   </a:moveTo>
                   <a:lnTo>
-                    <a:pt x="71622" y="1231088"/>
-                  </a:lnTo>
-                  <a:lnTo>
-                    <a:pt x="143245" y="1289990"/>
-                  </a:lnTo>
-                  <a:lnTo>
-                    <a:pt x="214867" y="1347459"/>
-                  </a:lnTo>
-                  <a:lnTo>
-                    <a:pt x="286490" y="1403530"/>
-                  </a:lnTo>
-                  <a:lnTo>
-                    <a:pt x="358112" y="1458238"/>
-                  </a:lnTo>
-                  <a:lnTo>
-                    <a:pt x="429735" y="1511614"/>
-                  </a:lnTo>
-                  <a:lnTo>
-                    <a:pt x="501357" y="1563693"/>
-                  </a:lnTo>
-                  <a:lnTo>
-                    <a:pt x="572980" y="1614505"/>
-                  </a:lnTo>
-                  <a:lnTo>
-                    <a:pt x="644602" y="1664080"/>
-                  </a:lnTo>
-                  <a:lnTo>
-                    <a:pt x="716225" y="1712450"/>
-                  </a:lnTo>
-                  <a:lnTo>
-                    <a:pt x="787847" y="1759643"/>
-                  </a:lnTo>
-                  <a:lnTo>
-                    <a:pt x="859470" y="1805689"/>
-                  </a:lnTo>
-                  <a:lnTo>
-                    <a:pt x="931092" y="1850614"/>
-                  </a:lnTo>
-                  <a:lnTo>
-                    <a:pt x="1002715" y="1894447"/>
-                  </a:lnTo>
-                  <a:lnTo>
-                    <a:pt x="1074337" y="1937213"/>
-                  </a:lnTo>
-                  <a:lnTo>
-                    <a:pt x="1145960" y="1978939"/>
-                  </a:lnTo>
-                  <a:lnTo>
-                    <a:pt x="1217582" y="2019651"/>
-                  </a:lnTo>
-                  <a:lnTo>
-                    <a:pt x="1289205" y="2059371"/>
-                  </a:lnTo>
-                  <a:lnTo>
-                    <a:pt x="1360827" y="2098126"/>
-                  </a:lnTo>
-                  <a:lnTo>
-                    <a:pt x="1432450" y="2135938"/>
-                  </a:lnTo>
-                  <a:lnTo>
-                    <a:pt x="1504073" y="2172831"/>
-                  </a:lnTo>
-                  <a:lnTo>
-                    <a:pt x="1575695" y="2208826"/>
-                  </a:lnTo>
-                  <a:lnTo>
-                    <a:pt x="1647318" y="2243945"/>
-                  </a:lnTo>
-                  <a:lnTo>
-                    <a:pt x="1718940" y="2278210"/>
-                  </a:lnTo>
-                  <a:lnTo>
-                    <a:pt x="1790563" y="2311642"/>
-                  </a:lnTo>
-                  <a:lnTo>
-                    <a:pt x="1862185" y="2344261"/>
-                  </a:lnTo>
-                  <a:lnTo>
-                    <a:pt x="1933808" y="2376086"/>
-                  </a:lnTo>
-                  <a:lnTo>
-                    <a:pt x="2005430" y="2407137"/>
-                  </a:lnTo>
-                  <a:lnTo>
-                    <a:pt x="2077053" y="2437433"/>
-                  </a:lnTo>
-                  <a:lnTo>
-                    <a:pt x="2148675" y="2466991"/>
-                  </a:lnTo>
-                  <a:lnTo>
-                    <a:pt x="2220298" y="2495831"/>
-                  </a:lnTo>
-                  <a:lnTo>
-                    <a:pt x="2291920" y="2523969"/>
-                  </a:lnTo>
-                  <a:lnTo>
-                    <a:pt x="2363543" y="2551423"/>
-                  </a:lnTo>
-                  <a:lnTo>
-                    <a:pt x="2435165" y="2578209"/>
-                  </a:lnTo>
-                  <a:lnTo>
-                    <a:pt x="2506788" y="2604344"/>
-                  </a:lnTo>
-                  <a:lnTo>
-                    <a:pt x="2578410" y="2629843"/>
-                  </a:lnTo>
-                  <a:lnTo>
-                    <a:pt x="2650033" y="2654722"/>
-                  </a:lnTo>
-                  <a:lnTo>
-                    <a:pt x="2721655" y="2678995"/>
-                  </a:lnTo>
-                  <a:lnTo>
-                    <a:pt x="2793278" y="2702678"/>
-                  </a:lnTo>
-                  <a:lnTo>
-                    <a:pt x="2864901" y="2725785"/>
-                  </a:lnTo>
-                  <a:lnTo>
-                    <a:pt x="2936523" y="2748330"/>
-                  </a:lnTo>
-                  <a:lnTo>
-                    <a:pt x="3008146" y="2770326"/>
-                  </a:lnTo>
-                  <a:lnTo>
-                    <a:pt x="3079768" y="2772069"/>
-                  </a:lnTo>
-                  <a:lnTo>
-                    <a:pt x="3151391" y="2745182"/>
-                  </a:lnTo>
-                  <a:lnTo>
-                    <a:pt x="3223013" y="2717474"/>
-                  </a:lnTo>
-                  <a:lnTo>
-                    <a:pt x="3294636" y="2688920"/>
-                  </a:lnTo>
-                  <a:lnTo>
-                    <a:pt x="3366258" y="2659494"/>
-                  </a:lnTo>
-                  <a:lnTo>
-                    <a:pt x="3437881" y="2629170"/>
-                  </a:lnTo>
-                  <a:lnTo>
-                    <a:pt x="3509503" y="2597919"/>
-                  </a:lnTo>
-                  <a:lnTo>
-                    <a:pt x="3581126" y="2565715"/>
-                  </a:lnTo>
-                  <a:lnTo>
-                    <a:pt x="3652748" y="2532527"/>
-                  </a:lnTo>
-                  <a:lnTo>
-                    <a:pt x="3724371" y="2498326"/>
-                  </a:lnTo>
-                  <a:lnTo>
-                    <a:pt x="3795993" y="2463081"/>
-                  </a:lnTo>
-                  <a:lnTo>
-                    <a:pt x="3867616" y="2426759"/>
-                  </a:lnTo>
-                  <a:lnTo>
-                    <a:pt x="3939238" y="2389329"/>
-                  </a:lnTo>
-                  <a:lnTo>
-                    <a:pt x="4010861" y="2350756"/>
-                  </a:lnTo>
-                  <a:lnTo>
-                    <a:pt x="4082483" y="2311004"/>
-                  </a:lnTo>
-                  <a:lnTo>
-                    <a:pt x="4154106" y="2270040"/>
-                  </a:lnTo>
-                  <a:lnTo>
-                    <a:pt x="4225729" y="2227824"/>
-                  </a:lnTo>
-                  <a:lnTo>
-                    <a:pt x="4297351" y="2184319"/>
-                  </a:lnTo>
-                  <a:lnTo>
-                    <a:pt x="4368974" y="2139486"/>
-                  </a:lnTo>
-                  <a:lnTo>
-                    <a:pt x="4440596" y="2093284"/>
-                  </a:lnTo>
-                  <a:lnTo>
-                    <a:pt x="4512219" y="2045672"/>
-                  </a:lnTo>
-                  <a:lnTo>
-                    <a:pt x="4583841" y="1996605"/>
-                  </a:lnTo>
-                  <a:lnTo>
-                    <a:pt x="4655464" y="1946041"/>
-                  </a:lnTo>
-                  <a:lnTo>
-                    <a:pt x="4727086" y="1893932"/>
-                  </a:lnTo>
-                  <a:lnTo>
-                    <a:pt x="4798709" y="1840232"/>
-                  </a:lnTo>
-                  <a:lnTo>
-                    <a:pt x="4870331" y="1784893"/>
-                  </a:lnTo>
-                  <a:lnTo>
-                    <a:pt x="4941954" y="1727864"/>
-                  </a:lnTo>
-                  <a:lnTo>
-                    <a:pt x="5013576" y="1669094"/>
-                  </a:lnTo>
-                  <a:lnTo>
-                    <a:pt x="5085199" y="1608530"/>
-                  </a:lnTo>
-                  <a:lnTo>
-                    <a:pt x="5156821" y="1546116"/>
-                  </a:lnTo>
-                  <a:lnTo>
-                    <a:pt x="5228444" y="1481796"/>
-                  </a:lnTo>
-                  <a:lnTo>
-                    <a:pt x="5300066" y="1415513"/>
-                  </a:lnTo>
-                  <a:lnTo>
-                    <a:pt x="5371689" y="1347205"/>
-                  </a:lnTo>
-                  <a:lnTo>
-                    <a:pt x="5443311" y="1276812"/>
-                  </a:lnTo>
-                  <a:lnTo>
-                    <a:pt x="5514934" y="1204270"/>
-                  </a:lnTo>
-                  <a:lnTo>
-                    <a:pt x="5586557" y="1129512"/>
-                  </a:lnTo>
-                  <a:lnTo>
-                    <a:pt x="5658179" y="1052472"/>
-                  </a:lnTo>
-                  <a:lnTo>
-                    <a:pt x="5729802" y="973080"/>
-                  </a:lnTo>
-                  <a:lnTo>
-                    <a:pt x="5801424" y="891264"/>
-                  </a:lnTo>
-                  <a:lnTo>
-                    <a:pt x="5873047" y="806949"/>
-                  </a:lnTo>
-                  <a:lnTo>
-                    <a:pt x="5944669" y="720060"/>
-                  </a:lnTo>
-                  <a:lnTo>
-                    <a:pt x="6016292" y="630518"/>
-                  </a:lnTo>
-                  <a:lnTo>
-                    <a:pt x="6087914" y="538243"/>
-                  </a:lnTo>
-                  <a:lnTo>
-                    <a:pt x="6159537" y="443149"/>
-                  </a:lnTo>
-                  <a:lnTo>
-                    <a:pt x="6231159" y="345152"/>
-                  </a:lnTo>
-                  <a:lnTo>
-                    <a:pt x="6302782" y="244163"/>
-                  </a:lnTo>
-                  <a:lnTo>
-                    <a:pt x="6374404" y="140090"/>
-                  </a:lnTo>
-                  <a:lnTo>
-                    <a:pt x="6446027" y="32840"/>
+                    <a:pt x="71622" y="1174163"/>
+                  </a:lnTo>
+                  <a:lnTo>
+                    <a:pt x="143245" y="1230341"/>
+                  </a:lnTo>
+                  <a:lnTo>
+                    <a:pt x="214867" y="1285153"/>
+                  </a:lnTo>
+                  <a:lnTo>
+                    <a:pt x="286490" y="1338631"/>
+                  </a:lnTo>
+                  <a:lnTo>
+                    <a:pt x="358112" y="1390809"/>
+                  </a:lnTo>
+                  <a:lnTo>
+                    <a:pt x="429735" y="1441718"/>
+                  </a:lnTo>
+                  <a:lnTo>
+                    <a:pt x="501357" y="1491388"/>
+                  </a:lnTo>
+                  <a:lnTo>
+                    <a:pt x="572980" y="1539850"/>
+                  </a:lnTo>
+                  <a:lnTo>
+                    <a:pt x="644602" y="1587134"/>
+                  </a:lnTo>
+                  <a:lnTo>
+                    <a:pt x="716225" y="1633267"/>
+                  </a:lnTo>
+                  <a:lnTo>
+                    <a:pt x="787847" y="1678278"/>
+                  </a:lnTo>
+                  <a:lnTo>
+                    <a:pt x="859470" y="1722194"/>
+                  </a:lnTo>
+                  <a:lnTo>
+                    <a:pt x="931092" y="1765042"/>
+                  </a:lnTo>
+                  <a:lnTo>
+                    <a:pt x="1002715" y="1806848"/>
+                  </a:lnTo>
+                  <a:lnTo>
+                    <a:pt x="1074337" y="1847637"/>
+                  </a:lnTo>
+                  <a:lnTo>
+                    <a:pt x="1145960" y="1887434"/>
+                  </a:lnTo>
+                  <a:lnTo>
+                    <a:pt x="1217582" y="1926263"/>
+                  </a:lnTo>
+                  <a:lnTo>
+                    <a:pt x="1289205" y="1964147"/>
+                  </a:lnTo>
+                  <a:lnTo>
+                    <a:pt x="1360827" y="2001110"/>
+                  </a:lnTo>
+                  <a:lnTo>
+                    <a:pt x="1432450" y="2037173"/>
+                  </a:lnTo>
+                  <a:lnTo>
+                    <a:pt x="1504073" y="2072360"/>
+                  </a:lnTo>
+                  <a:lnTo>
+                    <a:pt x="1575695" y="2106690"/>
+                  </a:lnTo>
+                  <a:lnTo>
+                    <a:pt x="1647318" y="2140186"/>
+                  </a:lnTo>
+                  <a:lnTo>
+                    <a:pt x="1718940" y="2172867"/>
+                  </a:lnTo>
+                  <a:lnTo>
+                    <a:pt x="1790563" y="2204753"/>
+                  </a:lnTo>
+                  <a:lnTo>
+                    <a:pt x="1862185" y="2235863"/>
+                  </a:lnTo>
+                  <a:lnTo>
+                    <a:pt x="1933808" y="2266216"/>
+                  </a:lnTo>
+                  <a:lnTo>
+                    <a:pt x="2005430" y="2295832"/>
+                  </a:lnTo>
+                  <a:lnTo>
+                    <a:pt x="2077053" y="2324727"/>
+                  </a:lnTo>
+                  <a:lnTo>
+                    <a:pt x="2148675" y="2352919"/>
+                  </a:lnTo>
+                  <a:lnTo>
+                    <a:pt x="2220298" y="2380425"/>
+                  </a:lnTo>
+                  <a:lnTo>
+                    <a:pt x="2291920" y="2407262"/>
+                  </a:lnTo>
+                  <a:lnTo>
+                    <a:pt x="2363543" y="2433446"/>
+                  </a:lnTo>
+                  <a:lnTo>
+                    <a:pt x="2435165" y="2458994"/>
+                  </a:lnTo>
+                  <a:lnTo>
+                    <a:pt x="2506788" y="2483920"/>
+                  </a:lnTo>
+                  <a:lnTo>
+                    <a:pt x="2578410" y="2508240"/>
+                  </a:lnTo>
+                  <a:lnTo>
+                    <a:pt x="2650033" y="2531968"/>
+                  </a:lnTo>
+                  <a:lnTo>
+                    <a:pt x="2721655" y="2555119"/>
+                  </a:lnTo>
+                  <a:lnTo>
+                    <a:pt x="2793278" y="2577707"/>
+                  </a:lnTo>
+                  <a:lnTo>
+                    <a:pt x="2864901" y="2599746"/>
+                  </a:lnTo>
+                  <a:lnTo>
+                    <a:pt x="2936523" y="2621248"/>
+                  </a:lnTo>
+                  <a:lnTo>
+                    <a:pt x="3008146" y="2642228"/>
+                  </a:lnTo>
+                  <a:lnTo>
+                    <a:pt x="3079768" y="2643889"/>
+                  </a:lnTo>
+                  <a:lnTo>
+                    <a:pt x="3151391" y="2618245"/>
+                  </a:lnTo>
+                  <a:lnTo>
+                    <a:pt x="3223013" y="2591819"/>
+                  </a:lnTo>
+                  <a:lnTo>
+                    <a:pt x="3294636" y="2564585"/>
+                  </a:lnTo>
+                  <a:lnTo>
+                    <a:pt x="3366258" y="2536520"/>
+                  </a:lnTo>
+                  <a:lnTo>
+                    <a:pt x="3437881" y="2507598"/>
+                  </a:lnTo>
+                  <a:lnTo>
+                    <a:pt x="3509503" y="2477792"/>
+                  </a:lnTo>
+                  <a:lnTo>
+                    <a:pt x="3581126" y="2447077"/>
+                  </a:lnTo>
+                  <a:lnTo>
+                    <a:pt x="3652748" y="2415424"/>
+                  </a:lnTo>
+                  <a:lnTo>
+                    <a:pt x="3724371" y="2382805"/>
+                  </a:lnTo>
+                  <a:lnTo>
+                    <a:pt x="3795993" y="2349189"/>
+                  </a:lnTo>
+                  <a:lnTo>
+                    <a:pt x="3867616" y="2314547"/>
+                  </a:lnTo>
+                  <a:lnTo>
+                    <a:pt x="3939238" y="2278847"/>
+                  </a:lnTo>
+                  <a:lnTo>
+                    <a:pt x="4010861" y="2242057"/>
+                  </a:lnTo>
+                  <a:lnTo>
+                    <a:pt x="4082483" y="2204144"/>
+                  </a:lnTo>
+                  <a:lnTo>
+                    <a:pt x="4154106" y="2165074"/>
+                  </a:lnTo>
+                  <a:lnTo>
+                    <a:pt x="4225729" y="2124810"/>
+                  </a:lnTo>
+                  <a:lnTo>
+                    <a:pt x="4297351" y="2083317"/>
+                  </a:lnTo>
+                  <a:lnTo>
+                    <a:pt x="4368974" y="2040557"/>
+                  </a:lnTo>
+                  <a:lnTo>
+                    <a:pt x="4440596" y="1996491"/>
+                  </a:lnTo>
+                  <a:lnTo>
+                    <a:pt x="4512219" y="1951080"/>
+                  </a:lnTo>
+                  <a:lnTo>
+                    <a:pt x="4583841" y="1904283"/>
+                  </a:lnTo>
+                  <a:lnTo>
+                    <a:pt x="4655464" y="1856056"/>
+                  </a:lnTo>
+                  <a:lnTo>
+                    <a:pt x="4727086" y="1806357"/>
+                  </a:lnTo>
+                  <a:lnTo>
+                    <a:pt x="4798709" y="1755141"/>
+                  </a:lnTo>
+                  <a:lnTo>
+                    <a:pt x="4870331" y="1702360"/>
+                  </a:lnTo>
+                  <a:lnTo>
+                    <a:pt x="4941954" y="1647969"/>
+                  </a:lnTo>
+                  <a:lnTo>
+                    <a:pt x="5013576" y="1591916"/>
+                  </a:lnTo>
+                  <a:lnTo>
+                    <a:pt x="5085199" y="1534152"/>
+                  </a:lnTo>
+                  <a:lnTo>
+                    <a:pt x="5156821" y="1474624"/>
+                  </a:lnTo>
+                  <a:lnTo>
+                    <a:pt x="5228444" y="1413278"/>
+                  </a:lnTo>
+                  <a:lnTo>
+                    <a:pt x="5300066" y="1350060"/>
+                  </a:lnTo>
+                  <a:lnTo>
+                    <a:pt x="5371689" y="1284911"/>
+                  </a:lnTo>
+                  <a:lnTo>
+                    <a:pt x="5443311" y="1217773"/>
+                  </a:lnTo>
+                  <a:lnTo>
+                    <a:pt x="5514934" y="1148585"/>
+                  </a:lnTo>
+                  <a:lnTo>
+                    <a:pt x="5586557" y="1077284"/>
+                  </a:lnTo>
+                  <a:lnTo>
+                    <a:pt x="5658179" y="1003806"/>
+                  </a:lnTo>
+                  <a:lnTo>
+                    <a:pt x="5729802" y="928085"/>
+                  </a:lnTo>
+                  <a:lnTo>
+                    <a:pt x="5801424" y="850052"/>
+                  </a:lnTo>
+                  <a:lnTo>
+                    <a:pt x="5873047" y="769636"/>
+                  </a:lnTo>
+                  <a:lnTo>
+                    <a:pt x="5944669" y="686765"/>
+                  </a:lnTo>
+                  <a:lnTo>
+                    <a:pt x="6016292" y="601364"/>
+                  </a:lnTo>
+                  <a:lnTo>
+                    <a:pt x="6087914" y="513354"/>
+                  </a:lnTo>
+                  <a:lnTo>
+                    <a:pt x="6159537" y="422658"/>
+                  </a:lnTo>
+                  <a:lnTo>
+                    <a:pt x="6231159" y="329192"/>
+                  </a:lnTo>
+                  <a:lnTo>
+                    <a:pt x="6302782" y="232873"/>
+                  </a:lnTo>
+                  <a:lnTo>
+                    <a:pt x="6374404" y="133612"/>
+                  </a:lnTo>
+                  <a:lnTo>
+                    <a:pt x="6446027" y="31321"/>
                   </a:lnTo>
                   <a:lnTo>
                     <a:pt x="6467308" y="0"/>
@@ -3418,304 +3418,304 @@
                     <a:pt x="7090630" y="0"/>
                   </a:lnTo>
                   <a:lnTo>
-                    <a:pt x="7090630" y="3435851"/>
-                  </a:lnTo>
-                  <a:lnTo>
-                    <a:pt x="7019007" y="3430446"/>
-                  </a:lnTo>
-                  <a:lnTo>
-                    <a:pt x="6947385" y="3424906"/>
-                  </a:lnTo>
-                  <a:lnTo>
-                    <a:pt x="6875762" y="3419229"/>
-                  </a:lnTo>
-                  <a:lnTo>
-                    <a:pt x="6804139" y="3413410"/>
-                  </a:lnTo>
-                  <a:lnTo>
-                    <a:pt x="6732517" y="3407446"/>
-                  </a:lnTo>
-                  <a:lnTo>
-                    <a:pt x="6660894" y="3401333"/>
-                  </a:lnTo>
-                  <a:lnTo>
-                    <a:pt x="6589272" y="3395067"/>
-                  </a:lnTo>
-                  <a:lnTo>
-                    <a:pt x="6517649" y="3388646"/>
-                  </a:lnTo>
-                  <a:lnTo>
-                    <a:pt x="6446027" y="3382064"/>
-                  </a:lnTo>
-                  <a:lnTo>
-                    <a:pt x="6374404" y="3375319"/>
-                  </a:lnTo>
-                  <a:lnTo>
-                    <a:pt x="6302782" y="3368405"/>
-                  </a:lnTo>
-                  <a:lnTo>
-                    <a:pt x="6231159" y="3361319"/>
-                  </a:lnTo>
-                  <a:lnTo>
-                    <a:pt x="6159537" y="3354056"/>
-                  </a:lnTo>
-                  <a:lnTo>
-                    <a:pt x="6087914" y="3346612"/>
-                  </a:lnTo>
-                  <a:lnTo>
-                    <a:pt x="6016292" y="3338982"/>
-                  </a:lnTo>
-                  <a:lnTo>
-                    <a:pt x="5944669" y="3331163"/>
-                  </a:lnTo>
-                  <a:lnTo>
-                    <a:pt x="5873047" y="3323148"/>
-                  </a:lnTo>
-                  <a:lnTo>
-                    <a:pt x="5801424" y="3314934"/>
-                  </a:lnTo>
-                  <a:lnTo>
-                    <a:pt x="5729802" y="3306514"/>
-                  </a:lnTo>
-                  <a:lnTo>
-                    <a:pt x="5658179" y="3297885"/>
-                  </a:lnTo>
-                  <a:lnTo>
-                    <a:pt x="5586557" y="3289041"/>
-                  </a:lnTo>
-                  <a:lnTo>
-                    <a:pt x="5514934" y="3279976"/>
-                  </a:lnTo>
-                  <a:lnTo>
-                    <a:pt x="5443311" y="3270685"/>
-                  </a:lnTo>
-                  <a:lnTo>
-                    <a:pt x="5371689" y="3261163"/>
-                  </a:lnTo>
-                  <a:lnTo>
-                    <a:pt x="5300066" y="3251403"/>
-                  </a:lnTo>
-                  <a:lnTo>
-                    <a:pt x="5228444" y="3241400"/>
-                  </a:lnTo>
-                  <a:lnTo>
-                    <a:pt x="5156821" y="3231148"/>
-                  </a:lnTo>
-                  <a:lnTo>
-                    <a:pt x="5085199" y="3220640"/>
-                  </a:lnTo>
-                  <a:lnTo>
-                    <a:pt x="5013576" y="3209870"/>
-                  </a:lnTo>
-                  <a:lnTo>
-                    <a:pt x="4941954" y="3198831"/>
-                  </a:lnTo>
-                  <a:lnTo>
-                    <a:pt x="4870331" y="3187517"/>
-                  </a:lnTo>
-                  <a:lnTo>
-                    <a:pt x="4798709" y="3175922"/>
-                  </a:lnTo>
-                  <a:lnTo>
-                    <a:pt x="4727086" y="3164037"/>
-                  </a:lnTo>
-                  <a:lnTo>
-                    <a:pt x="4655464" y="3151856"/>
-                  </a:lnTo>
-                  <a:lnTo>
-                    <a:pt x="4583841" y="3139371"/>
-                  </a:lnTo>
-                  <a:lnTo>
-                    <a:pt x="4512219" y="3126575"/>
-                  </a:lnTo>
-                  <a:lnTo>
-                    <a:pt x="4440596" y="3113460"/>
-                  </a:lnTo>
-                  <a:lnTo>
-                    <a:pt x="4368974" y="3100017"/>
-                  </a:lnTo>
-                  <a:lnTo>
-                    <a:pt x="4297351" y="3086240"/>
-                  </a:lnTo>
-                  <a:lnTo>
-                    <a:pt x="4225729" y="3072120"/>
-                  </a:lnTo>
-                  <a:lnTo>
-                    <a:pt x="4154106" y="3057647"/>
-                  </a:lnTo>
-                  <a:lnTo>
-                    <a:pt x="4082483" y="3042813"/>
-                  </a:lnTo>
-                  <a:lnTo>
-                    <a:pt x="4010861" y="3027610"/>
-                  </a:lnTo>
-                  <a:lnTo>
-                    <a:pt x="3939238" y="3012028"/>
-                  </a:lnTo>
-                  <a:lnTo>
-                    <a:pt x="3867616" y="2996057"/>
-                  </a:lnTo>
-                  <a:lnTo>
-                    <a:pt x="3795993" y="2979688"/>
-                  </a:lnTo>
-                  <a:lnTo>
-                    <a:pt x="3724371" y="2962911"/>
-                  </a:lnTo>
-                  <a:lnTo>
-                    <a:pt x="3652748" y="2945715"/>
-                  </a:lnTo>
-                  <a:lnTo>
-                    <a:pt x="3581126" y="2928091"/>
-                  </a:lnTo>
-                  <a:lnTo>
-                    <a:pt x="3509503" y="2910028"/>
-                  </a:lnTo>
-                  <a:lnTo>
-                    <a:pt x="3437881" y="2891514"/>
-                  </a:lnTo>
-                  <a:lnTo>
-                    <a:pt x="3366258" y="2872539"/>
-                  </a:lnTo>
-                  <a:lnTo>
-                    <a:pt x="3294636" y="2853091"/>
-                  </a:lnTo>
-                  <a:lnTo>
-                    <a:pt x="3223013" y="2833158"/>
-                  </a:lnTo>
-                  <a:lnTo>
-                    <a:pt x="3151391" y="2812727"/>
-                  </a:lnTo>
-                  <a:lnTo>
-                    <a:pt x="3079768" y="2791788"/>
-                  </a:lnTo>
-                  <a:lnTo>
-                    <a:pt x="3008146" y="2798159"/>
-                  </a:lnTo>
-                  <a:lnTo>
-                    <a:pt x="2936523" y="2823476"/>
-                  </a:lnTo>
-                  <a:lnTo>
-                    <a:pt x="2864901" y="2848044"/>
-                  </a:lnTo>
-                  <a:lnTo>
-                    <a:pt x="2793278" y="2871883"/>
-                  </a:lnTo>
-                  <a:lnTo>
-                    <a:pt x="2721655" y="2895016"/>
-                  </a:lnTo>
-                  <a:lnTo>
-                    <a:pt x="2650033" y="2917463"/>
-                  </a:lnTo>
-                  <a:lnTo>
-                    <a:pt x="2578410" y="2939246"/>
-                  </a:lnTo>
-                  <a:lnTo>
-                    <a:pt x="2506788" y="2960383"/>
-                  </a:lnTo>
-                  <a:lnTo>
-                    <a:pt x="2435165" y="2980894"/>
-                  </a:lnTo>
-                  <a:lnTo>
-                    <a:pt x="2363543" y="3000797"/>
-                  </a:lnTo>
-                  <a:lnTo>
-                    <a:pt x="2291920" y="3020110"/>
-                  </a:lnTo>
-                  <a:lnTo>
-                    <a:pt x="2220298" y="3038852"/>
-                  </a:lnTo>
-                  <a:lnTo>
-                    <a:pt x="2148675" y="3057038"/>
-                  </a:lnTo>
-                  <a:lnTo>
-                    <a:pt x="2077053" y="3074685"/>
-                  </a:lnTo>
-                  <a:lnTo>
-                    <a:pt x="2005430" y="3091809"/>
-                  </a:lnTo>
-                  <a:lnTo>
-                    <a:pt x="1933808" y="3108426"/>
-                  </a:lnTo>
-                  <a:lnTo>
-                    <a:pt x="1862185" y="3124550"/>
-                  </a:lnTo>
-                  <a:lnTo>
-                    <a:pt x="1790563" y="3140197"/>
-                  </a:lnTo>
-                  <a:lnTo>
-                    <a:pt x="1718940" y="3155380"/>
-                  </a:lnTo>
-                  <a:lnTo>
-                    <a:pt x="1647318" y="3170113"/>
-                  </a:lnTo>
-                  <a:lnTo>
-                    <a:pt x="1575695" y="3184410"/>
-                  </a:lnTo>
-                  <a:lnTo>
-                    <a:pt x="1504073" y="3198283"/>
-                  </a:lnTo>
-                  <a:lnTo>
-                    <a:pt x="1432450" y="3211746"/>
-                  </a:lnTo>
-                  <a:lnTo>
-                    <a:pt x="1360827" y="3224809"/>
-                  </a:lnTo>
-                  <a:lnTo>
-                    <a:pt x="1289205" y="3237485"/>
-                  </a:lnTo>
-                  <a:lnTo>
-                    <a:pt x="1217582" y="3249786"/>
-                  </a:lnTo>
-                  <a:lnTo>
-                    <a:pt x="1145960" y="3261722"/>
-                  </a:lnTo>
-                  <a:lnTo>
-                    <a:pt x="1074337" y="3273304"/>
-                  </a:lnTo>
-                  <a:lnTo>
-                    <a:pt x="1002715" y="3284544"/>
-                  </a:lnTo>
-                  <a:lnTo>
-                    <a:pt x="931092" y="3295450"/>
-                  </a:lnTo>
-                  <a:lnTo>
-                    <a:pt x="859470" y="3306033"/>
-                  </a:lnTo>
-                  <a:lnTo>
-                    <a:pt x="787847" y="3316303"/>
-                  </a:lnTo>
-                  <a:lnTo>
-                    <a:pt x="716225" y="3326268"/>
-                  </a:lnTo>
-                  <a:lnTo>
-                    <a:pt x="644602" y="3335938"/>
-                  </a:lnTo>
-                  <a:lnTo>
-                    <a:pt x="572980" y="3345322"/>
-                  </a:lnTo>
-                  <a:lnTo>
-                    <a:pt x="501357" y="3354428"/>
-                  </a:lnTo>
-                  <a:lnTo>
-                    <a:pt x="429735" y="3363263"/>
-                  </a:lnTo>
-                  <a:lnTo>
-                    <a:pt x="358112" y="3371837"/>
-                  </a:lnTo>
-                  <a:lnTo>
-                    <a:pt x="286490" y="3380157"/>
-                  </a:lnTo>
-                  <a:lnTo>
-                    <a:pt x="214867" y="3388231"/>
-                  </a:lnTo>
-                  <a:lnTo>
-                    <a:pt x="143245" y="3396065"/>
-                  </a:lnTo>
-                  <a:lnTo>
-                    <a:pt x="71622" y="3403667"/>
-                  </a:lnTo>
-                  <a:lnTo>
-                    <a:pt x="0" y="3411044"/>
+                    <a:pt x="7090630" y="3276978"/>
+                  </a:lnTo>
+                  <a:lnTo>
+                    <a:pt x="7019007" y="3271823"/>
+                  </a:lnTo>
+                  <a:lnTo>
+                    <a:pt x="6947385" y="3266540"/>
+                  </a:lnTo>
+                  <a:lnTo>
+                    <a:pt x="6875762" y="3261125"/>
+                  </a:lnTo>
+                  <a:lnTo>
+                    <a:pt x="6804139" y="3255575"/>
+                  </a:lnTo>
+                  <a:lnTo>
+                    <a:pt x="6732517" y="3249887"/>
+                  </a:lnTo>
+                  <a:lnTo>
+                    <a:pt x="6660894" y="3244056"/>
+                  </a:lnTo>
+                  <a:lnTo>
+                    <a:pt x="6589272" y="3238081"/>
+                  </a:lnTo>
+                  <a:lnTo>
+                    <a:pt x="6517649" y="3231956"/>
+                  </a:lnTo>
+                  <a:lnTo>
+                    <a:pt x="6446027" y="3225679"/>
+                  </a:lnTo>
+                  <a:lnTo>
+                    <a:pt x="6374404" y="3219245"/>
+                  </a:lnTo>
+                  <a:lnTo>
+                    <a:pt x="6302782" y="3212651"/>
+                  </a:lnTo>
+                  <a:lnTo>
+                    <a:pt x="6231159" y="3205893"/>
+                  </a:lnTo>
+                  <a:lnTo>
+                    <a:pt x="6159537" y="3198966"/>
+                  </a:lnTo>
+                  <a:lnTo>
+                    <a:pt x="6087914" y="3191866"/>
+                  </a:lnTo>
+                  <a:lnTo>
+                    <a:pt x="6016292" y="3184589"/>
+                  </a:lnTo>
+                  <a:lnTo>
+                    <a:pt x="5944669" y="3177131"/>
+                  </a:lnTo>
+                  <a:lnTo>
+                    <a:pt x="5873047" y="3169487"/>
+                  </a:lnTo>
+                  <a:lnTo>
+                    <a:pt x="5801424" y="3161652"/>
+                  </a:lnTo>
+                  <a:lnTo>
+                    <a:pt x="5729802" y="3153622"/>
+                  </a:lnTo>
+                  <a:lnTo>
+                    <a:pt x="5658179" y="3145392"/>
+                  </a:lnTo>
+                  <a:lnTo>
+                    <a:pt x="5586557" y="3136957"/>
+                  </a:lnTo>
+                  <a:lnTo>
+                    <a:pt x="5514934" y="3128311"/>
+                  </a:lnTo>
+                  <a:lnTo>
+                    <a:pt x="5443311" y="3119450"/>
+                  </a:lnTo>
+                  <a:lnTo>
+                    <a:pt x="5371689" y="3110368"/>
+                  </a:lnTo>
+                  <a:lnTo>
+                    <a:pt x="5300066" y="3101060"/>
+                  </a:lnTo>
+                  <a:lnTo>
+                    <a:pt x="5228444" y="3091519"/>
+                  </a:lnTo>
+                  <a:lnTo>
+                    <a:pt x="5156821" y="3081741"/>
+                  </a:lnTo>
+                  <a:lnTo>
+                    <a:pt x="5085199" y="3071719"/>
+                  </a:lnTo>
+                  <a:lnTo>
+                    <a:pt x="5013576" y="3061446"/>
+                  </a:lnTo>
+                  <a:lnTo>
+                    <a:pt x="4941954" y="3050918"/>
+                  </a:lnTo>
+                  <a:lnTo>
+                    <a:pt x="4870331" y="3040128"/>
+                  </a:lnTo>
+                  <a:lnTo>
+                    <a:pt x="4798709" y="3029068"/>
+                  </a:lnTo>
+                  <a:lnTo>
+                    <a:pt x="4727086" y="3017733"/>
+                  </a:lnTo>
+                  <a:lnTo>
+                    <a:pt x="4655464" y="3006115"/>
+                  </a:lnTo>
+                  <a:lnTo>
+                    <a:pt x="4583841" y="2994207"/>
+                  </a:lnTo>
+                  <a:lnTo>
+                    <a:pt x="4512219" y="2982003"/>
+                  </a:lnTo>
+                  <a:lnTo>
+                    <a:pt x="4440596" y="2969494"/>
+                  </a:lnTo>
+                  <a:lnTo>
+                    <a:pt x="4368974" y="2956674"/>
+                  </a:lnTo>
+                  <a:lnTo>
+                    <a:pt x="4297351" y="2943534"/>
+                  </a:lnTo>
+                  <a:lnTo>
+                    <a:pt x="4225729" y="2930066"/>
+                  </a:lnTo>
+                  <a:lnTo>
+                    <a:pt x="4154106" y="2916262"/>
+                  </a:lnTo>
+                  <a:lnTo>
+                    <a:pt x="4082483" y="2902115"/>
+                  </a:lnTo>
+                  <a:lnTo>
+                    <a:pt x="4010861" y="2887614"/>
+                  </a:lnTo>
+                  <a:lnTo>
+                    <a:pt x="3939238" y="2872753"/>
+                  </a:lnTo>
+                  <a:lnTo>
+                    <a:pt x="3867616" y="2857520"/>
+                  </a:lnTo>
+                  <a:lnTo>
+                    <a:pt x="3795993" y="2841908"/>
+                  </a:lnTo>
+                  <a:lnTo>
+                    <a:pt x="3724371" y="2825907"/>
+                  </a:lnTo>
+                  <a:lnTo>
+                    <a:pt x="3652748" y="2809507"/>
+                  </a:lnTo>
+                  <a:lnTo>
+                    <a:pt x="3581126" y="2792698"/>
+                  </a:lnTo>
+                  <a:lnTo>
+                    <a:pt x="3509503" y="2775469"/>
+                  </a:lnTo>
+                  <a:lnTo>
+                    <a:pt x="3437881" y="2757812"/>
+                  </a:lnTo>
+                  <a:lnTo>
+                    <a:pt x="3366258" y="2739714"/>
+                  </a:lnTo>
+                  <a:lnTo>
+                    <a:pt x="3294636" y="2721165"/>
+                  </a:lnTo>
+                  <a:lnTo>
+                    <a:pt x="3223013" y="2702153"/>
+                  </a:lnTo>
+                  <a:lnTo>
+                    <a:pt x="3151391" y="2682668"/>
+                  </a:lnTo>
+                  <a:lnTo>
+                    <a:pt x="3079768" y="2662697"/>
+                  </a:lnTo>
+                  <a:lnTo>
+                    <a:pt x="3008146" y="2668773"/>
+                  </a:lnTo>
+                  <a:lnTo>
+                    <a:pt x="2936523" y="2692920"/>
+                  </a:lnTo>
+                  <a:lnTo>
+                    <a:pt x="2864901" y="2716351"/>
+                  </a:lnTo>
+                  <a:lnTo>
+                    <a:pt x="2793278" y="2739088"/>
+                  </a:lnTo>
+                  <a:lnTo>
+                    <a:pt x="2721655" y="2761151"/>
+                  </a:lnTo>
+                  <a:lnTo>
+                    <a:pt x="2650033" y="2782561"/>
+                  </a:lnTo>
+                  <a:lnTo>
+                    <a:pt x="2578410" y="2803336"/>
+                  </a:lnTo>
+                  <a:lnTo>
+                    <a:pt x="2506788" y="2823496"/>
+                  </a:lnTo>
+                  <a:lnTo>
+                    <a:pt x="2435165" y="2843058"/>
+                  </a:lnTo>
+                  <a:lnTo>
+                    <a:pt x="2363543" y="2862041"/>
+                  </a:lnTo>
+                  <a:lnTo>
+                    <a:pt x="2291920" y="2880462"/>
+                  </a:lnTo>
+                  <a:lnTo>
+                    <a:pt x="2220298" y="2898336"/>
+                  </a:lnTo>
+                  <a:lnTo>
+                    <a:pt x="2148675" y="2915681"/>
+                  </a:lnTo>
+                  <a:lnTo>
+                    <a:pt x="2077053" y="2932512"/>
+                  </a:lnTo>
+                  <a:lnTo>
+                    <a:pt x="2005430" y="2948845"/>
+                  </a:lnTo>
+                  <a:lnTo>
+                    <a:pt x="1933808" y="2964693"/>
+                  </a:lnTo>
+                  <a:lnTo>
+                    <a:pt x="1862185" y="2980072"/>
+                  </a:lnTo>
+                  <a:lnTo>
+                    <a:pt x="1790563" y="2994995"/>
+                  </a:lnTo>
+                  <a:lnTo>
+                    <a:pt x="1718940" y="3009477"/>
+                  </a:lnTo>
+                  <a:lnTo>
+                    <a:pt x="1647318" y="3023529"/>
+                  </a:lnTo>
+                  <a:lnTo>
+                    <a:pt x="1575695" y="3037164"/>
+                  </a:lnTo>
+                  <a:lnTo>
+                    <a:pt x="1504073" y="3050396"/>
+                  </a:lnTo>
+                  <a:lnTo>
+                    <a:pt x="1432450" y="3063236"/>
+                  </a:lnTo>
+                  <a:lnTo>
+                    <a:pt x="1360827" y="3075695"/>
+                  </a:lnTo>
+                  <a:lnTo>
+                    <a:pt x="1289205" y="3087785"/>
+                  </a:lnTo>
+                  <a:lnTo>
+                    <a:pt x="1217582" y="3099517"/>
+                  </a:lnTo>
+                  <a:lnTo>
+                    <a:pt x="1145960" y="3110901"/>
+                  </a:lnTo>
+                  <a:lnTo>
+                    <a:pt x="1074337" y="3121948"/>
+                  </a:lnTo>
+                  <a:lnTo>
+                    <a:pt x="1002715" y="3132668"/>
+                  </a:lnTo>
+                  <a:lnTo>
+                    <a:pt x="931092" y="3143070"/>
+                  </a:lnTo>
+                  <a:lnTo>
+                    <a:pt x="859470" y="3153164"/>
+                  </a:lnTo>
+                  <a:lnTo>
+                    <a:pt x="787847" y="3162958"/>
+                  </a:lnTo>
+                  <a:lnTo>
+                    <a:pt x="716225" y="3172463"/>
+                  </a:lnTo>
+                  <a:lnTo>
+                    <a:pt x="644602" y="3181686"/>
+                  </a:lnTo>
+                  <a:lnTo>
+                    <a:pt x="572980" y="3190636"/>
+                  </a:lnTo>
+                  <a:lnTo>
+                    <a:pt x="501357" y="3199320"/>
+                  </a:lnTo>
+                  <a:lnTo>
+                    <a:pt x="429735" y="3207747"/>
+                  </a:lnTo>
+                  <a:lnTo>
+                    <a:pt x="358112" y="3215925"/>
+                  </a:lnTo>
+                  <a:lnTo>
+                    <a:pt x="286490" y="3223860"/>
+                  </a:lnTo>
+                  <a:lnTo>
+                    <a:pt x="214867" y="3231560"/>
+                  </a:lnTo>
+                  <a:lnTo>
+                    <a:pt x="143245" y="3239032"/>
+                  </a:lnTo>
+                  <a:lnTo>
+                    <a:pt x="71622" y="3246283"/>
+                  </a:lnTo>
+                  <a:lnTo>
+                    <a:pt x="0" y="3253319"/>
                   </a:lnTo>
                   <a:close/>
                 </a:path>
@@ -3741,285 +3741,285 @@
           </p:nvSpPr>
           <p:spPr>
             <a:xfrm>
-              <a:off x="1172049" y="1896563"/>
-              <a:ext cx="6467308" cy="2772069"/>
+              <a:off x="1172049" y="2073503"/>
+              <a:ext cx="6467308" cy="2643889"/>
             </a:xfrm>
             <a:custGeom>
               <a:avLst/>
               <a:pathLst>
-                <a:path w="6467308" h="2772069">
+                <a:path w="6467308" h="2643889">
                   <a:moveTo>
-                    <a:pt x="0" y="1170717"/>
+                    <a:pt x="0" y="1116584"/>
                   </a:moveTo>
                   <a:lnTo>
-                    <a:pt x="71622" y="1231088"/>
-                  </a:lnTo>
-                  <a:lnTo>
-                    <a:pt x="143245" y="1289990"/>
-                  </a:lnTo>
-                  <a:lnTo>
-                    <a:pt x="214867" y="1347459"/>
-                  </a:lnTo>
-                  <a:lnTo>
-                    <a:pt x="286490" y="1403530"/>
-                  </a:lnTo>
-                  <a:lnTo>
-                    <a:pt x="358112" y="1458238"/>
-                  </a:lnTo>
-                  <a:lnTo>
-                    <a:pt x="429735" y="1511614"/>
-                  </a:lnTo>
-                  <a:lnTo>
-                    <a:pt x="501357" y="1563693"/>
-                  </a:lnTo>
-                  <a:lnTo>
-                    <a:pt x="572980" y="1614505"/>
-                  </a:lnTo>
-                  <a:lnTo>
-                    <a:pt x="644602" y="1664080"/>
-                  </a:lnTo>
-                  <a:lnTo>
-                    <a:pt x="716225" y="1712450"/>
-                  </a:lnTo>
-                  <a:lnTo>
-                    <a:pt x="787847" y="1759643"/>
-                  </a:lnTo>
-                  <a:lnTo>
-                    <a:pt x="859470" y="1805689"/>
-                  </a:lnTo>
-                  <a:lnTo>
-                    <a:pt x="931092" y="1850614"/>
-                  </a:lnTo>
-                  <a:lnTo>
-                    <a:pt x="1002715" y="1894447"/>
-                  </a:lnTo>
-                  <a:lnTo>
-                    <a:pt x="1074337" y="1937213"/>
-                  </a:lnTo>
-                  <a:lnTo>
-                    <a:pt x="1145960" y="1978939"/>
-                  </a:lnTo>
-                  <a:lnTo>
-                    <a:pt x="1217582" y="2019651"/>
-                  </a:lnTo>
-                  <a:lnTo>
-                    <a:pt x="1289205" y="2059371"/>
-                  </a:lnTo>
-                  <a:lnTo>
-                    <a:pt x="1360827" y="2098126"/>
-                  </a:lnTo>
-                  <a:lnTo>
-                    <a:pt x="1432450" y="2135938"/>
-                  </a:lnTo>
-                  <a:lnTo>
-                    <a:pt x="1504073" y="2172831"/>
-                  </a:lnTo>
-                  <a:lnTo>
-                    <a:pt x="1575695" y="2208826"/>
-                  </a:lnTo>
-                  <a:lnTo>
-                    <a:pt x="1647318" y="2243945"/>
-                  </a:lnTo>
-                  <a:lnTo>
-                    <a:pt x="1718940" y="2278210"/>
-                  </a:lnTo>
-                  <a:lnTo>
-                    <a:pt x="1790563" y="2311642"/>
-                  </a:lnTo>
-                  <a:lnTo>
-                    <a:pt x="1862185" y="2344261"/>
-                  </a:lnTo>
-                  <a:lnTo>
-                    <a:pt x="1933808" y="2376086"/>
-                  </a:lnTo>
-                  <a:lnTo>
-                    <a:pt x="2005430" y="2407137"/>
-                  </a:lnTo>
-                  <a:lnTo>
-                    <a:pt x="2077053" y="2437433"/>
-                  </a:lnTo>
-                  <a:lnTo>
-                    <a:pt x="2148675" y="2466991"/>
-                  </a:lnTo>
-                  <a:lnTo>
-                    <a:pt x="2220298" y="2495831"/>
-                  </a:lnTo>
-                  <a:lnTo>
-                    <a:pt x="2291920" y="2523969"/>
-                  </a:lnTo>
-                  <a:lnTo>
-                    <a:pt x="2363543" y="2551423"/>
-                  </a:lnTo>
-                  <a:lnTo>
-                    <a:pt x="2435165" y="2578209"/>
-                  </a:lnTo>
-                  <a:lnTo>
-                    <a:pt x="2506788" y="2604344"/>
-                  </a:lnTo>
-                  <a:lnTo>
-                    <a:pt x="2578410" y="2629843"/>
-                  </a:lnTo>
-                  <a:lnTo>
-                    <a:pt x="2650033" y="2654722"/>
-                  </a:lnTo>
-                  <a:lnTo>
-                    <a:pt x="2721655" y="2678995"/>
-                  </a:lnTo>
-                  <a:lnTo>
-                    <a:pt x="2793278" y="2702678"/>
-                  </a:lnTo>
-                  <a:lnTo>
-                    <a:pt x="2864901" y="2725785"/>
-                  </a:lnTo>
-                  <a:lnTo>
-                    <a:pt x="2936523" y="2748330"/>
-                  </a:lnTo>
-                  <a:lnTo>
-                    <a:pt x="3008146" y="2770326"/>
-                  </a:lnTo>
-                  <a:lnTo>
-                    <a:pt x="3079768" y="2772069"/>
-                  </a:lnTo>
-                  <a:lnTo>
-                    <a:pt x="3151391" y="2745182"/>
-                  </a:lnTo>
-                  <a:lnTo>
-                    <a:pt x="3223013" y="2717474"/>
-                  </a:lnTo>
-                  <a:lnTo>
-                    <a:pt x="3294636" y="2688920"/>
-                  </a:lnTo>
-                  <a:lnTo>
-                    <a:pt x="3366258" y="2659494"/>
-                  </a:lnTo>
-                  <a:lnTo>
-                    <a:pt x="3437881" y="2629170"/>
-                  </a:lnTo>
-                  <a:lnTo>
-                    <a:pt x="3509503" y="2597919"/>
-                  </a:lnTo>
-                  <a:lnTo>
-                    <a:pt x="3581126" y="2565715"/>
-                  </a:lnTo>
-                  <a:lnTo>
-                    <a:pt x="3652748" y="2532527"/>
-                  </a:lnTo>
-                  <a:lnTo>
-                    <a:pt x="3724371" y="2498326"/>
-                  </a:lnTo>
-                  <a:lnTo>
-                    <a:pt x="3795993" y="2463081"/>
-                  </a:lnTo>
-                  <a:lnTo>
-                    <a:pt x="3867616" y="2426759"/>
-                  </a:lnTo>
-                  <a:lnTo>
-                    <a:pt x="3939238" y="2389329"/>
-                  </a:lnTo>
-                  <a:lnTo>
-                    <a:pt x="4010861" y="2350756"/>
-                  </a:lnTo>
-                  <a:lnTo>
-                    <a:pt x="4082483" y="2311004"/>
-                  </a:lnTo>
-                  <a:lnTo>
-                    <a:pt x="4154106" y="2270040"/>
-                  </a:lnTo>
-                  <a:lnTo>
-                    <a:pt x="4225729" y="2227824"/>
-                  </a:lnTo>
-                  <a:lnTo>
-                    <a:pt x="4297351" y="2184319"/>
-                  </a:lnTo>
-                  <a:lnTo>
-                    <a:pt x="4368974" y="2139486"/>
-                  </a:lnTo>
-                  <a:lnTo>
-                    <a:pt x="4440596" y="2093284"/>
-                  </a:lnTo>
-                  <a:lnTo>
-                    <a:pt x="4512219" y="2045672"/>
-                  </a:lnTo>
-                  <a:lnTo>
-                    <a:pt x="4583841" y="1996605"/>
-                  </a:lnTo>
-                  <a:lnTo>
-                    <a:pt x="4655464" y="1946041"/>
-                  </a:lnTo>
-                  <a:lnTo>
-                    <a:pt x="4727086" y="1893932"/>
-                  </a:lnTo>
-                  <a:lnTo>
-                    <a:pt x="4798709" y="1840232"/>
-                  </a:lnTo>
-                  <a:lnTo>
-                    <a:pt x="4870331" y="1784893"/>
-                  </a:lnTo>
-                  <a:lnTo>
-                    <a:pt x="4941954" y="1727864"/>
-                  </a:lnTo>
-                  <a:lnTo>
-                    <a:pt x="5013576" y="1669094"/>
-                  </a:lnTo>
-                  <a:lnTo>
-                    <a:pt x="5085199" y="1608530"/>
-                  </a:lnTo>
-                  <a:lnTo>
-                    <a:pt x="5156821" y="1546116"/>
-                  </a:lnTo>
-                  <a:lnTo>
-                    <a:pt x="5228444" y="1481796"/>
-                  </a:lnTo>
-                  <a:lnTo>
-                    <a:pt x="5300066" y="1415513"/>
-                  </a:lnTo>
-                  <a:lnTo>
-                    <a:pt x="5371689" y="1347205"/>
-                  </a:lnTo>
-                  <a:lnTo>
-                    <a:pt x="5443311" y="1276812"/>
-                  </a:lnTo>
-                  <a:lnTo>
-                    <a:pt x="5514934" y="1204270"/>
-                  </a:lnTo>
-                  <a:lnTo>
-                    <a:pt x="5586557" y="1129512"/>
-                  </a:lnTo>
-                  <a:lnTo>
-                    <a:pt x="5658179" y="1052472"/>
-                  </a:lnTo>
-                  <a:lnTo>
-                    <a:pt x="5729802" y="973080"/>
-                  </a:lnTo>
-                  <a:lnTo>
-                    <a:pt x="5801424" y="891264"/>
-                  </a:lnTo>
-                  <a:lnTo>
-                    <a:pt x="5873047" y="806949"/>
-                  </a:lnTo>
-                  <a:lnTo>
-                    <a:pt x="5944669" y="720060"/>
-                  </a:lnTo>
-                  <a:lnTo>
-                    <a:pt x="6016292" y="630518"/>
-                  </a:lnTo>
-                  <a:lnTo>
-                    <a:pt x="6087914" y="538243"/>
-                  </a:lnTo>
-                  <a:lnTo>
-                    <a:pt x="6159537" y="443149"/>
-                  </a:lnTo>
-                  <a:lnTo>
-                    <a:pt x="6231159" y="345152"/>
-                  </a:lnTo>
-                  <a:lnTo>
-                    <a:pt x="6302782" y="244163"/>
-                  </a:lnTo>
-                  <a:lnTo>
-                    <a:pt x="6374404" y="140090"/>
-                  </a:lnTo>
-                  <a:lnTo>
-                    <a:pt x="6446027" y="32840"/>
+                    <a:pt x="71622" y="1174163"/>
+                  </a:lnTo>
+                  <a:lnTo>
+                    <a:pt x="143245" y="1230341"/>
+                  </a:lnTo>
+                  <a:lnTo>
+                    <a:pt x="214867" y="1285153"/>
+                  </a:lnTo>
+                  <a:lnTo>
+                    <a:pt x="286490" y="1338631"/>
+                  </a:lnTo>
+                  <a:lnTo>
+                    <a:pt x="358112" y="1390809"/>
+                  </a:lnTo>
+                  <a:lnTo>
+                    <a:pt x="429735" y="1441718"/>
+                  </a:lnTo>
+                  <a:lnTo>
+                    <a:pt x="501357" y="1491388"/>
+                  </a:lnTo>
+                  <a:lnTo>
+                    <a:pt x="572980" y="1539850"/>
+                  </a:lnTo>
+                  <a:lnTo>
+                    <a:pt x="644602" y="1587134"/>
+                  </a:lnTo>
+                  <a:lnTo>
+                    <a:pt x="716225" y="1633267"/>
+                  </a:lnTo>
+                  <a:lnTo>
+                    <a:pt x="787847" y="1678278"/>
+                  </a:lnTo>
+                  <a:lnTo>
+                    <a:pt x="859470" y="1722194"/>
+                  </a:lnTo>
+                  <a:lnTo>
+                    <a:pt x="931092" y="1765042"/>
+                  </a:lnTo>
+                  <a:lnTo>
+                    <a:pt x="1002715" y="1806848"/>
+                  </a:lnTo>
+                  <a:lnTo>
+                    <a:pt x="1074337" y="1847637"/>
+                  </a:lnTo>
+                  <a:lnTo>
+                    <a:pt x="1145960" y="1887434"/>
+                  </a:lnTo>
+                  <a:lnTo>
+                    <a:pt x="1217582" y="1926263"/>
+                  </a:lnTo>
+                  <a:lnTo>
+                    <a:pt x="1289205" y="1964147"/>
+                  </a:lnTo>
+                  <a:lnTo>
+                    <a:pt x="1360827" y="2001110"/>
+                  </a:lnTo>
+                  <a:lnTo>
+                    <a:pt x="1432450" y="2037173"/>
+                  </a:lnTo>
+                  <a:lnTo>
+                    <a:pt x="1504073" y="2072360"/>
+                  </a:lnTo>
+                  <a:lnTo>
+                    <a:pt x="1575695" y="2106690"/>
+                  </a:lnTo>
+                  <a:lnTo>
+                    <a:pt x="1647318" y="2140186"/>
+                  </a:lnTo>
+                  <a:lnTo>
+                    <a:pt x="1718940" y="2172867"/>
+                  </a:lnTo>
+                  <a:lnTo>
+                    <a:pt x="1790563" y="2204753"/>
+                  </a:lnTo>
+                  <a:lnTo>
+                    <a:pt x="1862185" y="2235863"/>
+                  </a:lnTo>
+                  <a:lnTo>
+                    <a:pt x="1933808" y="2266216"/>
+                  </a:lnTo>
+                  <a:lnTo>
+                    <a:pt x="2005430" y="2295832"/>
+                  </a:lnTo>
+                  <a:lnTo>
+                    <a:pt x="2077053" y="2324727"/>
+                  </a:lnTo>
+                  <a:lnTo>
+                    <a:pt x="2148675" y="2352919"/>
+                  </a:lnTo>
+                  <a:lnTo>
+                    <a:pt x="2220298" y="2380425"/>
+                  </a:lnTo>
+                  <a:lnTo>
+                    <a:pt x="2291920" y="2407262"/>
+                  </a:lnTo>
+                  <a:lnTo>
+                    <a:pt x="2363543" y="2433446"/>
+                  </a:lnTo>
+                  <a:lnTo>
+                    <a:pt x="2435165" y="2458994"/>
+                  </a:lnTo>
+                  <a:lnTo>
+                    <a:pt x="2506788" y="2483920"/>
+                  </a:lnTo>
+                  <a:lnTo>
+                    <a:pt x="2578410" y="2508240"/>
+                  </a:lnTo>
+                  <a:lnTo>
+                    <a:pt x="2650033" y="2531968"/>
+                  </a:lnTo>
+                  <a:lnTo>
+                    <a:pt x="2721655" y="2555119"/>
+                  </a:lnTo>
+                  <a:lnTo>
+                    <a:pt x="2793278" y="2577707"/>
+                  </a:lnTo>
+                  <a:lnTo>
+                    <a:pt x="2864901" y="2599746"/>
+                  </a:lnTo>
+                  <a:lnTo>
+                    <a:pt x="2936523" y="2621248"/>
+                  </a:lnTo>
+                  <a:lnTo>
+                    <a:pt x="3008146" y="2642228"/>
+                  </a:lnTo>
+                  <a:lnTo>
+                    <a:pt x="3079768" y="2643889"/>
+                  </a:lnTo>
+                  <a:lnTo>
+                    <a:pt x="3151391" y="2618245"/>
+                  </a:lnTo>
+                  <a:lnTo>
+                    <a:pt x="3223013" y="2591819"/>
+                  </a:lnTo>
+                  <a:lnTo>
+                    <a:pt x="3294636" y="2564585"/>
+                  </a:lnTo>
+                  <a:lnTo>
+                    <a:pt x="3366258" y="2536520"/>
+                  </a:lnTo>
+                  <a:lnTo>
+                    <a:pt x="3437881" y="2507598"/>
+                  </a:lnTo>
+                  <a:lnTo>
+                    <a:pt x="3509503" y="2477792"/>
+                  </a:lnTo>
+                  <a:lnTo>
+                    <a:pt x="3581126" y="2447077"/>
+                  </a:lnTo>
+                  <a:lnTo>
+                    <a:pt x="3652748" y="2415424"/>
+                  </a:lnTo>
+                  <a:lnTo>
+                    <a:pt x="3724371" y="2382805"/>
+                  </a:lnTo>
+                  <a:lnTo>
+                    <a:pt x="3795993" y="2349189"/>
+                  </a:lnTo>
+                  <a:lnTo>
+                    <a:pt x="3867616" y="2314547"/>
+                  </a:lnTo>
+                  <a:lnTo>
+                    <a:pt x="3939238" y="2278847"/>
+                  </a:lnTo>
+                  <a:lnTo>
+                    <a:pt x="4010861" y="2242057"/>
+                  </a:lnTo>
+                  <a:lnTo>
+                    <a:pt x="4082483" y="2204144"/>
+                  </a:lnTo>
+                  <a:lnTo>
+                    <a:pt x="4154106" y="2165074"/>
+                  </a:lnTo>
+                  <a:lnTo>
+                    <a:pt x="4225729" y="2124810"/>
+                  </a:lnTo>
+                  <a:lnTo>
+                    <a:pt x="4297351" y="2083317"/>
+                  </a:lnTo>
+                  <a:lnTo>
+                    <a:pt x="4368974" y="2040557"/>
+                  </a:lnTo>
+                  <a:lnTo>
+                    <a:pt x="4440596" y="1996491"/>
+                  </a:lnTo>
+                  <a:lnTo>
+                    <a:pt x="4512219" y="1951080"/>
+                  </a:lnTo>
+                  <a:lnTo>
+                    <a:pt x="4583841" y="1904283"/>
+                  </a:lnTo>
+                  <a:lnTo>
+                    <a:pt x="4655464" y="1856056"/>
+                  </a:lnTo>
+                  <a:lnTo>
+                    <a:pt x="4727086" y="1806357"/>
+                  </a:lnTo>
+                  <a:lnTo>
+                    <a:pt x="4798709" y="1755141"/>
+                  </a:lnTo>
+                  <a:lnTo>
+                    <a:pt x="4870331" y="1702360"/>
+                  </a:lnTo>
+                  <a:lnTo>
+                    <a:pt x="4941954" y="1647969"/>
+                  </a:lnTo>
+                  <a:lnTo>
+                    <a:pt x="5013576" y="1591916"/>
+                  </a:lnTo>
+                  <a:lnTo>
+                    <a:pt x="5085199" y="1534152"/>
+                  </a:lnTo>
+                  <a:lnTo>
+                    <a:pt x="5156821" y="1474624"/>
+                  </a:lnTo>
+                  <a:lnTo>
+                    <a:pt x="5228444" y="1413278"/>
+                  </a:lnTo>
+                  <a:lnTo>
+                    <a:pt x="5300066" y="1350060"/>
+                  </a:lnTo>
+                  <a:lnTo>
+                    <a:pt x="5371689" y="1284911"/>
+                  </a:lnTo>
+                  <a:lnTo>
+                    <a:pt x="5443311" y="1217773"/>
+                  </a:lnTo>
+                  <a:lnTo>
+                    <a:pt x="5514934" y="1148585"/>
+                  </a:lnTo>
+                  <a:lnTo>
+                    <a:pt x="5586557" y="1077284"/>
+                  </a:lnTo>
+                  <a:lnTo>
+                    <a:pt x="5658179" y="1003806"/>
+                  </a:lnTo>
+                  <a:lnTo>
+                    <a:pt x="5729802" y="928085"/>
+                  </a:lnTo>
+                  <a:lnTo>
+                    <a:pt x="5801424" y="850052"/>
+                  </a:lnTo>
+                  <a:lnTo>
+                    <a:pt x="5873047" y="769636"/>
+                  </a:lnTo>
+                  <a:lnTo>
+                    <a:pt x="5944669" y="686765"/>
+                  </a:lnTo>
+                  <a:lnTo>
+                    <a:pt x="6016292" y="601364"/>
+                  </a:lnTo>
+                  <a:lnTo>
+                    <a:pt x="6087914" y="513354"/>
+                  </a:lnTo>
+                  <a:lnTo>
+                    <a:pt x="6159537" y="422658"/>
+                  </a:lnTo>
+                  <a:lnTo>
+                    <a:pt x="6231159" y="329192"/>
+                  </a:lnTo>
+                  <a:lnTo>
+                    <a:pt x="6302782" y="232873"/>
+                  </a:lnTo>
+                  <a:lnTo>
+                    <a:pt x="6374404" y="133612"/>
+                  </a:lnTo>
+                  <a:lnTo>
+                    <a:pt x="6446027" y="31321"/>
                   </a:lnTo>
                   <a:lnTo>
                     <a:pt x="6467308" y="0"/>
@@ -4042,312 +4042,312 @@
           </p:nvSpPr>
           <p:spPr>
             <a:xfrm>
-              <a:off x="1172049" y="4688351"/>
-              <a:ext cx="7090630" cy="644062"/>
+              <a:off x="1172049" y="4736200"/>
+              <a:ext cx="7090630" cy="614281"/>
             </a:xfrm>
             <a:custGeom>
               <a:avLst/>
               <a:pathLst>
-                <a:path w="7090630" h="644062">
+                <a:path w="7090630" h="614281">
                   <a:moveTo>
-                    <a:pt x="7090630" y="644062"/>
+                    <a:pt x="7090630" y="614281"/>
                   </a:moveTo>
                   <a:lnTo>
-                    <a:pt x="7019007" y="638658"/>
-                  </a:lnTo>
-                  <a:lnTo>
-                    <a:pt x="6947385" y="633118"/>
-                  </a:lnTo>
-                  <a:lnTo>
-                    <a:pt x="6875762" y="627440"/>
-                  </a:lnTo>
-                  <a:lnTo>
-                    <a:pt x="6804139" y="621621"/>
-                  </a:lnTo>
-                  <a:lnTo>
-                    <a:pt x="6732517" y="615657"/>
-                  </a:lnTo>
-                  <a:lnTo>
-                    <a:pt x="6660894" y="609544"/>
-                  </a:lnTo>
-                  <a:lnTo>
-                    <a:pt x="6589272" y="603279"/>
-                  </a:lnTo>
-                  <a:lnTo>
-                    <a:pt x="6517649" y="596857"/>
-                  </a:lnTo>
-                  <a:lnTo>
-                    <a:pt x="6446027" y="590276"/>
-                  </a:lnTo>
-                  <a:lnTo>
-                    <a:pt x="6374404" y="583530"/>
-                  </a:lnTo>
-                  <a:lnTo>
-                    <a:pt x="6302782" y="576616"/>
-                  </a:lnTo>
-                  <a:lnTo>
-                    <a:pt x="6231159" y="569530"/>
-                  </a:lnTo>
-                  <a:lnTo>
-                    <a:pt x="6159537" y="562267"/>
-                  </a:lnTo>
-                  <a:lnTo>
-                    <a:pt x="6087914" y="554824"/>
-                  </a:lnTo>
-                  <a:lnTo>
-                    <a:pt x="6016292" y="547194"/>
-                  </a:lnTo>
-                  <a:lnTo>
-                    <a:pt x="5944669" y="539374"/>
-                  </a:lnTo>
-                  <a:lnTo>
-                    <a:pt x="5873047" y="531360"/>
-                  </a:lnTo>
-                  <a:lnTo>
-                    <a:pt x="5801424" y="523145"/>
-                  </a:lnTo>
-                  <a:lnTo>
-                    <a:pt x="5729802" y="514726"/>
-                  </a:lnTo>
-                  <a:lnTo>
-                    <a:pt x="5658179" y="506097"/>
-                  </a:lnTo>
-                  <a:lnTo>
-                    <a:pt x="5586557" y="497253"/>
-                  </a:lnTo>
-                  <a:lnTo>
-                    <a:pt x="5514934" y="488188"/>
-                  </a:lnTo>
-                  <a:lnTo>
-                    <a:pt x="5443311" y="478897"/>
-                  </a:lnTo>
-                  <a:lnTo>
-                    <a:pt x="5371689" y="469375"/>
-                  </a:lnTo>
-                  <a:lnTo>
-                    <a:pt x="5300066" y="459615"/>
-                  </a:lnTo>
-                  <a:lnTo>
-                    <a:pt x="5228444" y="449612"/>
-                  </a:lnTo>
-                  <a:lnTo>
-                    <a:pt x="5156821" y="439359"/>
-                  </a:lnTo>
-                  <a:lnTo>
-                    <a:pt x="5085199" y="428851"/>
-                  </a:lnTo>
-                  <a:lnTo>
-                    <a:pt x="5013576" y="418081"/>
-                  </a:lnTo>
-                  <a:lnTo>
-                    <a:pt x="4941954" y="407043"/>
-                  </a:lnTo>
-                  <a:lnTo>
-                    <a:pt x="4870331" y="395729"/>
-                  </a:lnTo>
-                  <a:lnTo>
-                    <a:pt x="4798709" y="384133"/>
-                  </a:lnTo>
-                  <a:lnTo>
-                    <a:pt x="4727086" y="372248"/>
-                  </a:lnTo>
-                  <a:lnTo>
-                    <a:pt x="4655464" y="360067"/>
-                  </a:lnTo>
-                  <a:lnTo>
-                    <a:pt x="4583841" y="347582"/>
-                  </a:lnTo>
-                  <a:lnTo>
-                    <a:pt x="4512219" y="334786"/>
-                  </a:lnTo>
-                  <a:lnTo>
-                    <a:pt x="4440596" y="321671"/>
-                  </a:lnTo>
-                  <a:lnTo>
-                    <a:pt x="4368974" y="308229"/>
-                  </a:lnTo>
-                  <a:lnTo>
-                    <a:pt x="4297351" y="294452"/>
-                  </a:lnTo>
-                  <a:lnTo>
-                    <a:pt x="4225729" y="280331"/>
-                  </a:lnTo>
-                  <a:lnTo>
-                    <a:pt x="4154106" y="265858"/>
-                  </a:lnTo>
-                  <a:lnTo>
-                    <a:pt x="4082483" y="251025"/>
-                  </a:lnTo>
-                  <a:lnTo>
-                    <a:pt x="4010861" y="235822"/>
-                  </a:lnTo>
-                  <a:lnTo>
-                    <a:pt x="3939238" y="220239"/>
-                  </a:lnTo>
-                  <a:lnTo>
-                    <a:pt x="3867616" y="204268"/>
-                  </a:lnTo>
-                  <a:lnTo>
-                    <a:pt x="3795993" y="187899"/>
-                  </a:lnTo>
-                  <a:lnTo>
-                    <a:pt x="3724371" y="171122"/>
-                  </a:lnTo>
-                  <a:lnTo>
-                    <a:pt x="3652748" y="153927"/>
-                  </a:lnTo>
-                  <a:lnTo>
-                    <a:pt x="3581126" y="136303"/>
-                  </a:lnTo>
-                  <a:lnTo>
-                    <a:pt x="3509503" y="118240"/>
-                  </a:lnTo>
-                  <a:lnTo>
-                    <a:pt x="3437881" y="99726"/>
-                  </a:lnTo>
-                  <a:lnTo>
-                    <a:pt x="3366258" y="80751"/>
-                  </a:lnTo>
-                  <a:lnTo>
-                    <a:pt x="3294636" y="61302"/>
-                  </a:lnTo>
-                  <a:lnTo>
-                    <a:pt x="3223013" y="41369"/>
-                  </a:lnTo>
-                  <a:lnTo>
-                    <a:pt x="3151391" y="20939"/>
+                    <a:pt x="7019007" y="609126"/>
+                  </a:lnTo>
+                  <a:lnTo>
+                    <a:pt x="6947385" y="603843"/>
+                  </a:lnTo>
+                  <a:lnTo>
+                    <a:pt x="6875762" y="598428"/>
+                  </a:lnTo>
+                  <a:lnTo>
+                    <a:pt x="6804139" y="592878"/>
+                  </a:lnTo>
+                  <a:lnTo>
+                    <a:pt x="6732517" y="587189"/>
+                  </a:lnTo>
+                  <a:lnTo>
+                    <a:pt x="6660894" y="581359"/>
+                  </a:lnTo>
+                  <a:lnTo>
+                    <a:pt x="6589272" y="575384"/>
+                  </a:lnTo>
+                  <a:lnTo>
+                    <a:pt x="6517649" y="569259"/>
+                  </a:lnTo>
+                  <a:lnTo>
+                    <a:pt x="6446027" y="562982"/>
+                  </a:lnTo>
+                  <a:lnTo>
+                    <a:pt x="6374404" y="556548"/>
+                  </a:lnTo>
+                  <a:lnTo>
+                    <a:pt x="6302782" y="549954"/>
+                  </a:lnTo>
+                  <a:lnTo>
+                    <a:pt x="6231159" y="543195"/>
+                  </a:lnTo>
+                  <a:lnTo>
+                    <a:pt x="6159537" y="536268"/>
+                  </a:lnTo>
+                  <a:lnTo>
+                    <a:pt x="6087914" y="529169"/>
+                  </a:lnTo>
+                  <a:lnTo>
+                    <a:pt x="6016292" y="521892"/>
+                  </a:lnTo>
+                  <a:lnTo>
+                    <a:pt x="5944669" y="514434"/>
+                  </a:lnTo>
+                  <a:lnTo>
+                    <a:pt x="5873047" y="506790"/>
+                  </a:lnTo>
+                  <a:lnTo>
+                    <a:pt x="5801424" y="498955"/>
+                  </a:lnTo>
+                  <a:lnTo>
+                    <a:pt x="5729802" y="490925"/>
+                  </a:lnTo>
+                  <a:lnTo>
+                    <a:pt x="5658179" y="482695"/>
+                  </a:lnTo>
+                  <a:lnTo>
+                    <a:pt x="5586557" y="474260"/>
+                  </a:lnTo>
+                  <a:lnTo>
+                    <a:pt x="5514934" y="465614"/>
+                  </a:lnTo>
+                  <a:lnTo>
+                    <a:pt x="5443311" y="456753"/>
+                  </a:lnTo>
+                  <a:lnTo>
+                    <a:pt x="5371689" y="447671"/>
+                  </a:lnTo>
+                  <a:lnTo>
+                    <a:pt x="5300066" y="438362"/>
+                  </a:lnTo>
+                  <a:lnTo>
+                    <a:pt x="5228444" y="428822"/>
+                  </a:lnTo>
+                  <a:lnTo>
+                    <a:pt x="5156821" y="419044"/>
+                  </a:lnTo>
+                  <a:lnTo>
+                    <a:pt x="5085199" y="409021"/>
+                  </a:lnTo>
+                  <a:lnTo>
+                    <a:pt x="5013576" y="398749"/>
+                  </a:lnTo>
+                  <a:lnTo>
+                    <a:pt x="4941954" y="388221"/>
+                  </a:lnTo>
+                  <a:lnTo>
+                    <a:pt x="4870331" y="377431"/>
+                  </a:lnTo>
+                  <a:lnTo>
+                    <a:pt x="4798709" y="366371"/>
+                  </a:lnTo>
+                  <a:lnTo>
+                    <a:pt x="4727086" y="355036"/>
+                  </a:lnTo>
+                  <a:lnTo>
+                    <a:pt x="4655464" y="343418"/>
+                  </a:lnTo>
+                  <a:lnTo>
+                    <a:pt x="4583841" y="331510"/>
+                  </a:lnTo>
+                  <a:lnTo>
+                    <a:pt x="4512219" y="319306"/>
+                  </a:lnTo>
+                  <a:lnTo>
+                    <a:pt x="4440596" y="306797"/>
+                  </a:lnTo>
+                  <a:lnTo>
+                    <a:pt x="4368974" y="293977"/>
+                  </a:lnTo>
+                  <a:lnTo>
+                    <a:pt x="4297351" y="280836"/>
+                  </a:lnTo>
+                  <a:lnTo>
+                    <a:pt x="4225729" y="267369"/>
+                  </a:lnTo>
+                  <a:lnTo>
+                    <a:pt x="4154106" y="253565"/>
+                  </a:lnTo>
+                  <a:lnTo>
+                    <a:pt x="4082483" y="239418"/>
+                  </a:lnTo>
+                  <a:lnTo>
+                    <a:pt x="4010861" y="224917"/>
+                  </a:lnTo>
+                  <a:lnTo>
+                    <a:pt x="3939238" y="210055"/>
+                  </a:lnTo>
+                  <a:lnTo>
+                    <a:pt x="3867616" y="194823"/>
+                  </a:lnTo>
+                  <a:lnTo>
+                    <a:pt x="3795993" y="179211"/>
+                  </a:lnTo>
+                  <a:lnTo>
+                    <a:pt x="3724371" y="163210"/>
+                  </a:lnTo>
+                  <a:lnTo>
+                    <a:pt x="3652748" y="146809"/>
+                  </a:lnTo>
+                  <a:lnTo>
+                    <a:pt x="3581126" y="130000"/>
+                  </a:lnTo>
+                  <a:lnTo>
+                    <a:pt x="3509503" y="112772"/>
+                  </a:lnTo>
+                  <a:lnTo>
+                    <a:pt x="3437881" y="95115"/>
+                  </a:lnTo>
+                  <a:lnTo>
+                    <a:pt x="3366258" y="77017"/>
+                  </a:lnTo>
+                  <a:lnTo>
+                    <a:pt x="3294636" y="58468"/>
+                  </a:lnTo>
+                  <a:lnTo>
+                    <a:pt x="3223013" y="39456"/>
+                  </a:lnTo>
+                  <a:lnTo>
+                    <a:pt x="3151391" y="19971"/>
                   </a:lnTo>
                   <a:lnTo>
                     <a:pt x="3079768" y="0"/>
                   </a:lnTo>
                   <a:lnTo>
-                    <a:pt x="3008146" y="6371"/>
-                  </a:lnTo>
-                  <a:lnTo>
-                    <a:pt x="2936523" y="31688"/>
-                  </a:lnTo>
-                  <a:lnTo>
-                    <a:pt x="2864901" y="56255"/>
-                  </a:lnTo>
-                  <a:lnTo>
-                    <a:pt x="2793278" y="80094"/>
-                  </a:lnTo>
-                  <a:lnTo>
-                    <a:pt x="2721655" y="103227"/>
-                  </a:lnTo>
-                  <a:lnTo>
-                    <a:pt x="2650033" y="125675"/>
-                  </a:lnTo>
-                  <a:lnTo>
-                    <a:pt x="2578410" y="147458"/>
-                  </a:lnTo>
-                  <a:lnTo>
-                    <a:pt x="2506788" y="168595"/>
-                  </a:lnTo>
-                  <a:lnTo>
-                    <a:pt x="2435165" y="189105"/>
-                  </a:lnTo>
-                  <a:lnTo>
-                    <a:pt x="2363543" y="209009"/>
-                  </a:lnTo>
-                  <a:lnTo>
-                    <a:pt x="2291920" y="228322"/>
-                  </a:lnTo>
-                  <a:lnTo>
-                    <a:pt x="2220298" y="247063"/>
-                  </a:lnTo>
-                  <a:lnTo>
-                    <a:pt x="2148675" y="265249"/>
-                  </a:lnTo>
-                  <a:lnTo>
-                    <a:pt x="2077053" y="282896"/>
-                  </a:lnTo>
-                  <a:lnTo>
-                    <a:pt x="2005430" y="300020"/>
-                  </a:lnTo>
-                  <a:lnTo>
-                    <a:pt x="1933808" y="316637"/>
-                  </a:lnTo>
-                  <a:lnTo>
-                    <a:pt x="1862185" y="332762"/>
-                  </a:lnTo>
-                  <a:lnTo>
-                    <a:pt x="1790563" y="348409"/>
-                  </a:lnTo>
-                  <a:lnTo>
-                    <a:pt x="1718940" y="363592"/>
-                  </a:lnTo>
-                  <a:lnTo>
-                    <a:pt x="1647318" y="378325"/>
-                  </a:lnTo>
-                  <a:lnTo>
-                    <a:pt x="1575695" y="392622"/>
-                  </a:lnTo>
-                  <a:lnTo>
-                    <a:pt x="1504073" y="406495"/>
-                  </a:lnTo>
-                  <a:lnTo>
-                    <a:pt x="1432450" y="419957"/>
-                  </a:lnTo>
-                  <a:lnTo>
-                    <a:pt x="1360827" y="433020"/>
-                  </a:lnTo>
-                  <a:lnTo>
-                    <a:pt x="1289205" y="445697"/>
-                  </a:lnTo>
-                  <a:lnTo>
-                    <a:pt x="1217582" y="457997"/>
-                  </a:lnTo>
-                  <a:lnTo>
-                    <a:pt x="1145960" y="469933"/>
-                  </a:lnTo>
-                  <a:lnTo>
-                    <a:pt x="1074337" y="481516"/>
-                  </a:lnTo>
-                  <a:lnTo>
-                    <a:pt x="1002715" y="492755"/>
-                  </a:lnTo>
-                  <a:lnTo>
-                    <a:pt x="931092" y="503662"/>
-                  </a:lnTo>
-                  <a:lnTo>
-                    <a:pt x="859470" y="514245"/>
-                  </a:lnTo>
-                  <a:lnTo>
-                    <a:pt x="787847" y="524515"/>
-                  </a:lnTo>
-                  <a:lnTo>
-                    <a:pt x="716225" y="534480"/>
-                  </a:lnTo>
-                  <a:lnTo>
-                    <a:pt x="644602" y="544150"/>
-                  </a:lnTo>
-                  <a:lnTo>
-                    <a:pt x="572980" y="553534"/>
-                  </a:lnTo>
-                  <a:lnTo>
-                    <a:pt x="501357" y="562639"/>
-                  </a:lnTo>
-                  <a:lnTo>
-                    <a:pt x="429735" y="571475"/>
-                  </a:lnTo>
-                  <a:lnTo>
-                    <a:pt x="358112" y="580049"/>
-                  </a:lnTo>
-                  <a:lnTo>
-                    <a:pt x="286490" y="588369"/>
-                  </a:lnTo>
-                  <a:lnTo>
-                    <a:pt x="214867" y="596442"/>
-                  </a:lnTo>
-                  <a:lnTo>
-                    <a:pt x="143245" y="604277"/>
-                  </a:lnTo>
-                  <a:lnTo>
-                    <a:pt x="71622" y="611879"/>
-                  </a:lnTo>
-                  <a:lnTo>
-                    <a:pt x="0" y="619255"/>
+                    <a:pt x="3008146" y="6076"/>
+                  </a:lnTo>
+                  <a:lnTo>
+                    <a:pt x="2936523" y="30223"/>
+                  </a:lnTo>
+                  <a:lnTo>
+                    <a:pt x="2864901" y="53654"/>
+                  </a:lnTo>
+                  <a:lnTo>
+                    <a:pt x="2793278" y="76391"/>
+                  </a:lnTo>
+                  <a:lnTo>
+                    <a:pt x="2721655" y="98454"/>
+                  </a:lnTo>
+                  <a:lnTo>
+                    <a:pt x="2650033" y="119864"/>
+                  </a:lnTo>
+                  <a:lnTo>
+                    <a:pt x="2578410" y="140639"/>
+                  </a:lnTo>
+                  <a:lnTo>
+                    <a:pt x="2506788" y="160799"/>
+                  </a:lnTo>
+                  <a:lnTo>
+                    <a:pt x="2435165" y="180361"/>
+                  </a:lnTo>
+                  <a:lnTo>
+                    <a:pt x="2363543" y="199344"/>
+                  </a:lnTo>
+                  <a:lnTo>
+                    <a:pt x="2291920" y="217764"/>
+                  </a:lnTo>
+                  <a:lnTo>
+                    <a:pt x="2220298" y="235639"/>
+                  </a:lnTo>
+                  <a:lnTo>
+                    <a:pt x="2148675" y="252984"/>
+                  </a:lnTo>
+                  <a:lnTo>
+                    <a:pt x="2077053" y="269815"/>
+                  </a:lnTo>
+                  <a:lnTo>
+                    <a:pt x="2005430" y="286148"/>
+                  </a:lnTo>
+                  <a:lnTo>
+                    <a:pt x="1933808" y="301996"/>
+                  </a:lnTo>
+                  <a:lnTo>
+                    <a:pt x="1862185" y="317375"/>
+                  </a:lnTo>
+                  <a:lnTo>
+                    <a:pt x="1790563" y="332298"/>
+                  </a:lnTo>
+                  <a:lnTo>
+                    <a:pt x="1718940" y="346779"/>
+                  </a:lnTo>
+                  <a:lnTo>
+                    <a:pt x="1647318" y="360831"/>
+                  </a:lnTo>
+                  <a:lnTo>
+                    <a:pt x="1575695" y="374467"/>
+                  </a:lnTo>
+                  <a:lnTo>
+                    <a:pt x="1504073" y="387699"/>
+                  </a:lnTo>
+                  <a:lnTo>
+                    <a:pt x="1432450" y="400538"/>
+                  </a:lnTo>
+                  <a:lnTo>
+                    <a:pt x="1360827" y="412998"/>
+                  </a:lnTo>
+                  <a:lnTo>
+                    <a:pt x="1289205" y="425088"/>
+                  </a:lnTo>
+                  <a:lnTo>
+                    <a:pt x="1217582" y="436820"/>
+                  </a:lnTo>
+                  <a:lnTo>
+                    <a:pt x="1145960" y="448204"/>
+                  </a:lnTo>
+                  <a:lnTo>
+                    <a:pt x="1074337" y="459251"/>
+                  </a:lnTo>
+                  <a:lnTo>
+                    <a:pt x="1002715" y="469971"/>
+                  </a:lnTo>
+                  <a:lnTo>
+                    <a:pt x="931092" y="480373"/>
+                  </a:lnTo>
+                  <a:lnTo>
+                    <a:pt x="859470" y="490466"/>
+                  </a:lnTo>
+                  <a:lnTo>
+                    <a:pt x="787847" y="500261"/>
+                  </a:lnTo>
+                  <a:lnTo>
+                    <a:pt x="716225" y="509766"/>
+                  </a:lnTo>
+                  <a:lnTo>
+                    <a:pt x="644602" y="518989"/>
+                  </a:lnTo>
+                  <a:lnTo>
+                    <a:pt x="572980" y="527938"/>
+                  </a:lnTo>
+                  <a:lnTo>
+                    <a:pt x="501357" y="536623"/>
+                  </a:lnTo>
+                  <a:lnTo>
+                    <a:pt x="429735" y="545050"/>
+                  </a:lnTo>
+                  <a:lnTo>
+                    <a:pt x="358112" y="553228"/>
+                  </a:lnTo>
+                  <a:lnTo>
+                    <a:pt x="286490" y="561163"/>
+                  </a:lnTo>
+                  <a:lnTo>
+                    <a:pt x="214867" y="568863"/>
+                  </a:lnTo>
+                  <a:lnTo>
+                    <a:pt x="143245" y="576335"/>
+                  </a:lnTo>
+                  <a:lnTo>
+                    <a:pt x="71622" y="583586"/>
+                  </a:lnTo>
+                  <a:lnTo>
+                    <a:pt x="0" y="590621"/>
                   </a:lnTo>
                 </a:path>
               </a:pathLst>
@@ -4367,309 +4367,309 @@
           </p:nvSpPr>
           <p:spPr>
             <a:xfrm>
-              <a:off x="1172049" y="4534959"/>
-              <a:ext cx="7090630" cy="239889"/>
+              <a:off x="1172049" y="4589900"/>
+              <a:ext cx="7090630" cy="228796"/>
             </a:xfrm>
             <a:custGeom>
               <a:avLst/>
               <a:pathLst>
-                <a:path w="7090630" h="239889">
+                <a:path w="7090630" h="228796">
                   <a:moveTo>
-                    <a:pt x="0" y="239889"/>
+                    <a:pt x="0" y="228796"/>
                   </a:moveTo>
                   <a:lnTo>
-                    <a:pt x="71622" y="237775"/>
-                  </a:lnTo>
-                  <a:lnTo>
-                    <a:pt x="143245" y="235655"/>
-                  </a:lnTo>
-                  <a:lnTo>
-                    <a:pt x="214867" y="233530"/>
-                  </a:lnTo>
-                  <a:lnTo>
-                    <a:pt x="286490" y="231399"/>
-                  </a:lnTo>
-                  <a:lnTo>
-                    <a:pt x="358112" y="229262"/>
-                  </a:lnTo>
-                  <a:lnTo>
-                    <a:pt x="429735" y="227119"/>
-                  </a:lnTo>
-                  <a:lnTo>
-                    <a:pt x="501357" y="224971"/>
-                  </a:lnTo>
-                  <a:lnTo>
-                    <a:pt x="572980" y="222816"/>
-                  </a:lnTo>
-                  <a:lnTo>
-                    <a:pt x="644602" y="220656"/>
-                  </a:lnTo>
-                  <a:lnTo>
-                    <a:pt x="716225" y="218490"/>
-                  </a:lnTo>
-                  <a:lnTo>
-                    <a:pt x="787847" y="216318"/>
-                  </a:lnTo>
-                  <a:lnTo>
-                    <a:pt x="859470" y="214140"/>
-                  </a:lnTo>
-                  <a:lnTo>
-                    <a:pt x="931092" y="211956"/>
-                  </a:lnTo>
-                  <a:lnTo>
-                    <a:pt x="1002715" y="209766"/>
-                  </a:lnTo>
-                  <a:lnTo>
-                    <a:pt x="1074337" y="207570"/>
-                  </a:lnTo>
-                  <a:lnTo>
-                    <a:pt x="1145960" y="205368"/>
-                  </a:lnTo>
-                  <a:lnTo>
-                    <a:pt x="1217582" y="203160"/>
-                  </a:lnTo>
-                  <a:lnTo>
-                    <a:pt x="1289205" y="200946"/>
-                  </a:lnTo>
-                  <a:lnTo>
-                    <a:pt x="1360827" y="198726"/>
-                  </a:lnTo>
-                  <a:lnTo>
-                    <a:pt x="1432450" y="196500"/>
-                  </a:lnTo>
-                  <a:lnTo>
-                    <a:pt x="1504073" y="194267"/>
-                  </a:lnTo>
-                  <a:lnTo>
-                    <a:pt x="1575695" y="192029"/>
-                  </a:lnTo>
-                  <a:lnTo>
-                    <a:pt x="1647318" y="189785"/>
-                  </a:lnTo>
-                  <a:lnTo>
-                    <a:pt x="1718940" y="187534"/>
-                  </a:lnTo>
-                  <a:lnTo>
-                    <a:pt x="1790563" y="185278"/>
-                  </a:lnTo>
-                  <a:lnTo>
-                    <a:pt x="1862185" y="183015"/>
-                  </a:lnTo>
-                  <a:lnTo>
-                    <a:pt x="1933808" y="180746"/>
-                  </a:lnTo>
-                  <a:lnTo>
-                    <a:pt x="2005430" y="178471"/>
-                  </a:lnTo>
-                  <a:lnTo>
-                    <a:pt x="2077053" y="176189"/>
-                  </a:lnTo>
-                  <a:lnTo>
-                    <a:pt x="2148675" y="173902"/>
-                  </a:lnTo>
-                  <a:lnTo>
-                    <a:pt x="2220298" y="171608"/>
-                  </a:lnTo>
-                  <a:lnTo>
-                    <a:pt x="2291920" y="169308"/>
-                  </a:lnTo>
-                  <a:lnTo>
-                    <a:pt x="2363543" y="167001"/>
-                  </a:lnTo>
-                  <a:lnTo>
-                    <a:pt x="2435165" y="164689"/>
-                  </a:lnTo>
-                  <a:lnTo>
-                    <a:pt x="2506788" y="162370"/>
-                  </a:lnTo>
-                  <a:lnTo>
-                    <a:pt x="2578410" y="160044"/>
-                  </a:lnTo>
-                  <a:lnTo>
-                    <a:pt x="2650033" y="157713"/>
-                  </a:lnTo>
-                  <a:lnTo>
-                    <a:pt x="2721655" y="155375"/>
-                  </a:lnTo>
-                  <a:lnTo>
-                    <a:pt x="2793278" y="153030"/>
-                  </a:lnTo>
-                  <a:lnTo>
-                    <a:pt x="2864901" y="150679"/>
-                  </a:lnTo>
-                  <a:lnTo>
-                    <a:pt x="2936523" y="148322"/>
-                  </a:lnTo>
-                  <a:lnTo>
-                    <a:pt x="3008146" y="145959"/>
-                  </a:lnTo>
-                  <a:lnTo>
-                    <a:pt x="3079768" y="143588"/>
-                  </a:lnTo>
-                  <a:lnTo>
-                    <a:pt x="3151391" y="141212"/>
-                  </a:lnTo>
-                  <a:lnTo>
-                    <a:pt x="3223013" y="138829"/>
-                  </a:lnTo>
-                  <a:lnTo>
-                    <a:pt x="3294636" y="136439"/>
-                  </a:lnTo>
-                  <a:lnTo>
-                    <a:pt x="3366258" y="134043"/>
-                  </a:lnTo>
-                  <a:lnTo>
-                    <a:pt x="3437881" y="131640"/>
-                  </a:lnTo>
-                  <a:lnTo>
-                    <a:pt x="3509503" y="129231"/>
-                  </a:lnTo>
-                  <a:lnTo>
-                    <a:pt x="3581126" y="126815"/>
-                  </a:lnTo>
-                  <a:lnTo>
-                    <a:pt x="3652748" y="124393"/>
-                  </a:lnTo>
-                  <a:lnTo>
-                    <a:pt x="3724371" y="121964"/>
-                  </a:lnTo>
-                  <a:lnTo>
-                    <a:pt x="3795993" y="119528"/>
-                  </a:lnTo>
-                  <a:lnTo>
-                    <a:pt x="3867616" y="117086"/>
-                  </a:lnTo>
-                  <a:lnTo>
-                    <a:pt x="3939238" y="114637"/>
-                  </a:lnTo>
-                  <a:lnTo>
-                    <a:pt x="4010861" y="112182"/>
-                  </a:lnTo>
-                  <a:lnTo>
-                    <a:pt x="4082483" y="109719"/>
-                  </a:lnTo>
-                  <a:lnTo>
-                    <a:pt x="4154106" y="107250"/>
-                  </a:lnTo>
-                  <a:lnTo>
-                    <a:pt x="4225729" y="104774"/>
-                  </a:lnTo>
-                  <a:lnTo>
-                    <a:pt x="4297351" y="102292"/>
-                  </a:lnTo>
-                  <a:lnTo>
-                    <a:pt x="4368974" y="99803"/>
-                  </a:lnTo>
-                  <a:lnTo>
-                    <a:pt x="4440596" y="97306"/>
-                  </a:lnTo>
-                  <a:lnTo>
-                    <a:pt x="4512219" y="94803"/>
-                  </a:lnTo>
-                  <a:lnTo>
-                    <a:pt x="4583841" y="92294"/>
-                  </a:lnTo>
-                  <a:lnTo>
-                    <a:pt x="4655464" y="89777"/>
-                  </a:lnTo>
-                  <a:lnTo>
-                    <a:pt x="4727086" y="87254"/>
-                  </a:lnTo>
-                  <a:lnTo>
-                    <a:pt x="4798709" y="84723"/>
-                  </a:lnTo>
-                  <a:lnTo>
-                    <a:pt x="4870331" y="82186"/>
-                  </a:lnTo>
-                  <a:lnTo>
-                    <a:pt x="4941954" y="79642"/>
-                  </a:lnTo>
-                  <a:lnTo>
-                    <a:pt x="5013576" y="77091"/>
-                  </a:lnTo>
-                  <a:lnTo>
-                    <a:pt x="5085199" y="74533"/>
-                  </a:lnTo>
-                  <a:lnTo>
-                    <a:pt x="5156821" y="71967"/>
-                  </a:lnTo>
-                  <a:lnTo>
-                    <a:pt x="5228444" y="69395"/>
-                  </a:lnTo>
-                  <a:lnTo>
-                    <a:pt x="5300066" y="66816"/>
-                  </a:lnTo>
-                  <a:lnTo>
-                    <a:pt x="5371689" y="64230"/>
-                  </a:lnTo>
-                  <a:lnTo>
-                    <a:pt x="5443311" y="61637"/>
-                  </a:lnTo>
-                  <a:lnTo>
-                    <a:pt x="5514934" y="59037"/>
-                  </a:lnTo>
-                  <a:lnTo>
-                    <a:pt x="5586557" y="56429"/>
-                  </a:lnTo>
-                  <a:lnTo>
-                    <a:pt x="5658179" y="53815"/>
-                  </a:lnTo>
-                  <a:lnTo>
-                    <a:pt x="5729802" y="51193"/>
-                  </a:lnTo>
-                  <a:lnTo>
-                    <a:pt x="5801424" y="48564"/>
-                  </a:lnTo>
-                  <a:lnTo>
-                    <a:pt x="5873047" y="45928"/>
-                  </a:lnTo>
-                  <a:lnTo>
-                    <a:pt x="5944669" y="43285"/>
-                  </a:lnTo>
-                  <a:lnTo>
-                    <a:pt x="6016292" y="40635"/>
-                  </a:lnTo>
-                  <a:lnTo>
-                    <a:pt x="6087914" y="37977"/>
-                  </a:lnTo>
-                  <a:lnTo>
-                    <a:pt x="6159537" y="35312"/>
-                  </a:lnTo>
-                  <a:lnTo>
-                    <a:pt x="6231159" y="32640"/>
-                  </a:lnTo>
-                  <a:lnTo>
-                    <a:pt x="6302782" y="29961"/>
-                  </a:lnTo>
-                  <a:lnTo>
-                    <a:pt x="6374404" y="27274"/>
-                  </a:lnTo>
-                  <a:lnTo>
-                    <a:pt x="6446027" y="24580"/>
-                  </a:lnTo>
-                  <a:lnTo>
-                    <a:pt x="6517649" y="21878"/>
-                  </a:lnTo>
-                  <a:lnTo>
-                    <a:pt x="6589272" y="19169"/>
-                  </a:lnTo>
-                  <a:lnTo>
-                    <a:pt x="6660894" y="16453"/>
-                  </a:lnTo>
-                  <a:lnTo>
-                    <a:pt x="6732517" y="13730"/>
-                  </a:lnTo>
-                  <a:lnTo>
-                    <a:pt x="6804139" y="10999"/>
-                  </a:lnTo>
-                  <a:lnTo>
-                    <a:pt x="6875762" y="8260"/>
-                  </a:lnTo>
-                  <a:lnTo>
-                    <a:pt x="6947385" y="5514"/>
-                  </a:lnTo>
-                  <a:lnTo>
-                    <a:pt x="7019007" y="2761"/>
+                    <a:pt x="71622" y="226780"/>
+                  </a:lnTo>
+                  <a:lnTo>
+                    <a:pt x="143245" y="224759"/>
+                  </a:lnTo>
+                  <a:lnTo>
+                    <a:pt x="214867" y="222732"/>
+                  </a:lnTo>
+                  <a:lnTo>
+                    <a:pt x="286490" y="220699"/>
+                  </a:lnTo>
+                  <a:lnTo>
+                    <a:pt x="358112" y="218661"/>
+                  </a:lnTo>
+                  <a:lnTo>
+                    <a:pt x="429735" y="216617"/>
+                  </a:lnTo>
+                  <a:lnTo>
+                    <a:pt x="501357" y="214568"/>
+                  </a:lnTo>
+                  <a:lnTo>
+                    <a:pt x="572980" y="212513"/>
+                  </a:lnTo>
+                  <a:lnTo>
+                    <a:pt x="644602" y="210453"/>
+                  </a:lnTo>
+                  <a:lnTo>
+                    <a:pt x="716225" y="208387"/>
+                  </a:lnTo>
+                  <a:lnTo>
+                    <a:pt x="787847" y="206315"/>
+                  </a:lnTo>
+                  <a:lnTo>
+                    <a:pt x="859470" y="204238"/>
+                  </a:lnTo>
+                  <a:lnTo>
+                    <a:pt x="931092" y="202155"/>
+                  </a:lnTo>
+                  <a:lnTo>
+                    <a:pt x="1002715" y="200066"/>
+                  </a:lnTo>
+                  <a:lnTo>
+                    <a:pt x="1074337" y="197972"/>
+                  </a:lnTo>
+                  <a:lnTo>
+                    <a:pt x="1145960" y="195872"/>
+                  </a:lnTo>
+                  <a:lnTo>
+                    <a:pt x="1217582" y="193766"/>
+                  </a:lnTo>
+                  <a:lnTo>
+                    <a:pt x="1289205" y="191654"/>
+                  </a:lnTo>
+                  <a:lnTo>
+                    <a:pt x="1360827" y="189537"/>
+                  </a:lnTo>
+                  <a:lnTo>
+                    <a:pt x="1432450" y="187414"/>
+                  </a:lnTo>
+                  <a:lnTo>
+                    <a:pt x="1504073" y="185285"/>
+                  </a:lnTo>
+                  <a:lnTo>
+                    <a:pt x="1575695" y="183150"/>
+                  </a:lnTo>
+                  <a:lnTo>
+                    <a:pt x="1647318" y="181009"/>
+                  </a:lnTo>
+                  <a:lnTo>
+                    <a:pt x="1718940" y="178863"/>
+                  </a:lnTo>
+                  <a:lnTo>
+                    <a:pt x="1790563" y="176711"/>
+                  </a:lnTo>
+                  <a:lnTo>
+                    <a:pt x="1862185" y="174552"/>
+                  </a:lnTo>
+                  <a:lnTo>
+                    <a:pt x="1933808" y="172388"/>
+                  </a:lnTo>
+                  <a:lnTo>
+                    <a:pt x="2005430" y="170218"/>
+                  </a:lnTo>
+                  <a:lnTo>
+                    <a:pt x="2077053" y="168042"/>
+                  </a:lnTo>
+                  <a:lnTo>
+                    <a:pt x="2148675" y="165861"/>
+                  </a:lnTo>
+                  <a:lnTo>
+                    <a:pt x="2220298" y="163673"/>
+                  </a:lnTo>
+                  <a:lnTo>
+                    <a:pt x="2291920" y="161479"/>
+                  </a:lnTo>
+                  <a:lnTo>
+                    <a:pt x="2363543" y="159279"/>
+                  </a:lnTo>
+                  <a:lnTo>
+                    <a:pt x="2435165" y="157074"/>
+                  </a:lnTo>
+                  <a:lnTo>
+                    <a:pt x="2506788" y="154862"/>
+                  </a:lnTo>
+                  <a:lnTo>
+                    <a:pt x="2578410" y="152644"/>
+                  </a:lnTo>
+                  <a:lnTo>
+                    <a:pt x="2650033" y="150420"/>
+                  </a:lnTo>
+                  <a:lnTo>
+                    <a:pt x="2721655" y="148190"/>
+                  </a:lnTo>
+                  <a:lnTo>
+                    <a:pt x="2793278" y="145954"/>
+                  </a:lnTo>
+                  <a:lnTo>
+                    <a:pt x="2864901" y="143712"/>
+                  </a:lnTo>
+                  <a:lnTo>
+                    <a:pt x="2936523" y="141464"/>
+                  </a:lnTo>
+                  <a:lnTo>
+                    <a:pt x="3008146" y="139209"/>
+                  </a:lnTo>
+                  <a:lnTo>
+                    <a:pt x="3079768" y="136949"/>
+                  </a:lnTo>
+                  <a:lnTo>
+                    <a:pt x="3151391" y="134682"/>
+                  </a:lnTo>
+                  <a:lnTo>
+                    <a:pt x="3223013" y="132409"/>
+                  </a:lnTo>
+                  <a:lnTo>
+                    <a:pt x="3294636" y="130130"/>
+                  </a:lnTo>
+                  <a:lnTo>
+                    <a:pt x="3366258" y="127845"/>
+                  </a:lnTo>
+                  <a:lnTo>
+                    <a:pt x="3437881" y="125553"/>
+                  </a:lnTo>
+                  <a:lnTo>
+                    <a:pt x="3509503" y="123256"/>
+                  </a:lnTo>
+                  <a:lnTo>
+                    <a:pt x="3581126" y="120951"/>
+                  </a:lnTo>
+                  <a:lnTo>
+                    <a:pt x="3652748" y="118641"/>
+                  </a:lnTo>
+                  <a:lnTo>
+                    <a:pt x="3724371" y="116324"/>
+                  </a:lnTo>
+                  <a:lnTo>
+                    <a:pt x="3795993" y="114001"/>
+                  </a:lnTo>
+                  <a:lnTo>
+                    <a:pt x="3867616" y="111672"/>
+                  </a:lnTo>
+                  <a:lnTo>
+                    <a:pt x="3939238" y="109336"/>
+                  </a:lnTo>
+                  <a:lnTo>
+                    <a:pt x="4010861" y="106994"/>
+                  </a:lnTo>
+                  <a:lnTo>
+                    <a:pt x="4082483" y="104646"/>
+                  </a:lnTo>
+                  <a:lnTo>
+                    <a:pt x="4154106" y="102291"/>
+                  </a:lnTo>
+                  <a:lnTo>
+                    <a:pt x="4225729" y="99930"/>
+                  </a:lnTo>
+                  <a:lnTo>
+                    <a:pt x="4297351" y="97562"/>
+                  </a:lnTo>
+                  <a:lnTo>
+                    <a:pt x="4368974" y="95188"/>
+                  </a:lnTo>
+                  <a:lnTo>
+                    <a:pt x="4440596" y="92807"/>
+                  </a:lnTo>
+                  <a:lnTo>
+                    <a:pt x="4512219" y="90420"/>
+                  </a:lnTo>
+                  <a:lnTo>
+                    <a:pt x="4583841" y="88026"/>
+                  </a:lnTo>
+                  <a:lnTo>
+                    <a:pt x="4655464" y="85626"/>
+                  </a:lnTo>
+                  <a:lnTo>
+                    <a:pt x="4727086" y="83219"/>
+                  </a:lnTo>
+                  <a:lnTo>
+                    <a:pt x="4798709" y="80806"/>
+                  </a:lnTo>
+                  <a:lnTo>
+                    <a:pt x="4870331" y="78386"/>
+                  </a:lnTo>
+                  <a:lnTo>
+                    <a:pt x="4941954" y="75959"/>
+                  </a:lnTo>
+                  <a:lnTo>
+                    <a:pt x="5013576" y="73526"/>
+                  </a:lnTo>
+                  <a:lnTo>
+                    <a:pt x="5085199" y="71086"/>
+                  </a:lnTo>
+                  <a:lnTo>
+                    <a:pt x="5156821" y="68640"/>
+                  </a:lnTo>
+                  <a:lnTo>
+                    <a:pt x="5228444" y="66186"/>
+                  </a:lnTo>
+                  <a:lnTo>
+                    <a:pt x="5300066" y="63727"/>
+                  </a:lnTo>
+                  <a:lnTo>
+                    <a:pt x="5371689" y="61260"/>
+                  </a:lnTo>
+                  <a:lnTo>
+                    <a:pt x="5443311" y="58787"/>
+                  </a:lnTo>
+                  <a:lnTo>
+                    <a:pt x="5514934" y="56307"/>
+                  </a:lnTo>
+                  <a:lnTo>
+                    <a:pt x="5586557" y="53820"/>
+                  </a:lnTo>
+                  <a:lnTo>
+                    <a:pt x="5658179" y="51326"/>
+                  </a:lnTo>
+                  <a:lnTo>
+                    <a:pt x="5729802" y="48826"/>
+                  </a:lnTo>
+                  <a:lnTo>
+                    <a:pt x="5801424" y="46319"/>
+                  </a:lnTo>
+                  <a:lnTo>
+                    <a:pt x="5873047" y="43804"/>
+                  </a:lnTo>
+                  <a:lnTo>
+                    <a:pt x="5944669" y="41284"/>
+                  </a:lnTo>
+                  <a:lnTo>
+                    <a:pt x="6016292" y="38756"/>
+                  </a:lnTo>
+                  <a:lnTo>
+                    <a:pt x="6087914" y="36221"/>
+                  </a:lnTo>
+                  <a:lnTo>
+                    <a:pt x="6159537" y="33679"/>
+                  </a:lnTo>
+                  <a:lnTo>
+                    <a:pt x="6231159" y="31131"/>
+                  </a:lnTo>
+                  <a:lnTo>
+                    <a:pt x="6302782" y="28575"/>
+                  </a:lnTo>
+                  <a:lnTo>
+                    <a:pt x="6374404" y="26013"/>
+                  </a:lnTo>
+                  <a:lnTo>
+                    <a:pt x="6446027" y="23443"/>
+                  </a:lnTo>
+                  <a:lnTo>
+                    <a:pt x="6517649" y="20867"/>
+                  </a:lnTo>
+                  <a:lnTo>
+                    <a:pt x="6589272" y="18283"/>
+                  </a:lnTo>
+                  <a:lnTo>
+                    <a:pt x="6660894" y="15692"/>
+                  </a:lnTo>
+                  <a:lnTo>
+                    <a:pt x="6732517" y="13095"/>
+                  </a:lnTo>
+                  <a:lnTo>
+                    <a:pt x="6804139" y="10490"/>
+                  </a:lnTo>
+                  <a:lnTo>
+                    <a:pt x="6875762" y="7878"/>
+                  </a:lnTo>
+                  <a:lnTo>
+                    <a:pt x="6947385" y="5259"/>
+                  </a:lnTo>
+                  <a:lnTo>
+                    <a:pt x="7019007" y="2633"/>
                   </a:lnTo>
                   <a:lnTo>
                     <a:pt x="7090630" y="0"/>
@@ -4701,7 +4701,7 @@
           </p:nvSpPr>
           <p:spPr>
             <a:xfrm>
-              <a:off x="817517" y="4679530"/>
+              <a:off x="817517" y="4727786"/>
               <a:ext cx="7799693" cy="0"/>
             </a:xfrm>
             <a:custGeom>
@@ -4744,15 +4744,15 @@
           </p:nvSpPr>
           <p:spPr>
             <a:xfrm>
-              <a:off x="4222163" y="1896563"/>
-              <a:ext cx="0" cy="3826579"/>
+              <a:off x="4222163" y="2073503"/>
+              <a:ext cx="0" cy="3649639"/>
             </a:xfrm>
             <a:custGeom>
               <a:avLst/>
               <a:pathLst>
-                <a:path w="0" h="3826579">
+                <a:path w="0" h="3649639">
                   <a:moveTo>
-                    <a:pt x="0" y="3826579"/>
+                    <a:pt x="0" y="3649639"/>
                   </a:moveTo>
                   <a:lnTo>
                     <a:pt x="0" y="0"/>
@@ -4787,7 +4787,7 @@
           </p:nvSpPr>
           <p:spPr>
             <a:xfrm>
-              <a:off x="692708" y="5509156"/>
+              <a:off x="692708" y="5517199"/>
               <a:ext cx="62179" cy="80101"/>
             </a:xfrm>
             <a:prstGeom prst="rect">
@@ -4833,7 +4833,7 @@
           </p:nvSpPr>
           <p:spPr>
             <a:xfrm>
-              <a:off x="692708" y="4639479"/>
+              <a:off x="692708" y="4687735"/>
               <a:ext cx="62179" cy="80101"/>
             </a:xfrm>
             <a:prstGeom prst="rect">
@@ -4879,7 +4879,7 @@
           </p:nvSpPr>
           <p:spPr>
             <a:xfrm>
-              <a:off x="692708" y="3769802"/>
+              <a:off x="692708" y="3858272"/>
               <a:ext cx="62179" cy="80101"/>
             </a:xfrm>
             <a:prstGeom prst="rect">
@@ -4925,7 +4925,7 @@
           </p:nvSpPr>
           <p:spPr>
             <a:xfrm>
-              <a:off x="692708" y="2900125"/>
+              <a:off x="692708" y="3028808"/>
               <a:ext cx="62179" cy="80101"/>
             </a:xfrm>
             <a:prstGeom prst="rect">
@@ -4971,7 +4971,7 @@
           </p:nvSpPr>
           <p:spPr>
             <a:xfrm>
-              <a:off x="692708" y="2030448"/>
+              <a:off x="692708" y="2199345"/>
               <a:ext cx="62179" cy="80101"/>
             </a:xfrm>
             <a:prstGeom prst="rect">
@@ -5339,7 +5339,7 @@
           </p:nvSpPr>
           <p:spPr>
             <a:xfrm rot="-5400000">
-              <a:off x="68446" y="3759743"/>
+              <a:off x="68446" y="3848213"/>
               <a:ext cx="1016904" cy="100218"/>
             </a:xfrm>
             <a:prstGeom prst="rect">
@@ -5380,6 +5380,52 @@
         <p:sp>
           <p:nvSpPr>
             <p:cNvPr id="43" name="tx43"/>
+            <p:cNvSpPr/>
+            <p:nvPr/>
+          </p:nvSpPr>
+          <p:spPr>
+            <a:xfrm>
+              <a:off x="817517" y="1896563"/>
+              <a:ext cx="4433376" cy="82021"/>
+            </a:xfrm>
+            <a:prstGeom prst="rect">
+              <a:avLst/>
+            </a:prstGeom>
+            <a:noFill/>
+          </p:spPr>
+          <p:txBody>
+            <a:bodyPr lIns="0" rIns="0" tIns="0" bIns="0" anchorCtr="1" anchor="ctr" wrap="none"/>
+            <a:lstStyle/>
+            <a:p>
+              <a:pPr algn="l" marL="0" marR="0" indent="0">
+                <a:lnSpc>
+                  <a:spcPts val="900"/>
+                </a:lnSpc>
+                <a:spcBef>
+                  <a:spcPts val="0"/>
+                </a:spcBef>
+                <a:spcAft>
+                  <a:spcPts val="0"/>
+                </a:spcAft>
+              </a:pPr>
+              <a:r>
+                <a:rPr sz="900">
+                  <a:solidFill>
+                    <a:srgbClr val="404040">
+                      <a:alpha val="100000"/>
+                    </a:srgbClr>
+                  </a:solidFill>
+                  <a:latin typeface="Helvetica"/>
+                  <a:cs typeface="Helvetica"/>
+                </a:rPr>
+                <a:t>subHR = 1.03 (95% CI 0.79-1.33), p = 0.845   (per 25 mg increase in dose discrepancy)</a:t>
+              </a:r>
+            </a:p>
+          </p:txBody>
+        </p:sp>
+        <p:sp>
+          <p:nvSpPr>
+            <p:cNvPr id="44" name="tx44"/>
             <p:cNvSpPr/>
             <p:nvPr/>
           </p:nvSpPr>

--- a/docs/plots/carbo/jx_carbo_linsubhr_dosedisc_anemia3.pptx
+++ b/docs/plots/carbo/jx_carbo_linsubhr_dosedisc_anemia3.pptx
@@ -2271,26 +2271,26 @@
           </p:nvSpPr>
           <p:spPr>
             <a:xfrm>
-              <a:off x="817517" y="5142518"/>
-              <a:ext cx="7799693" cy="0"/>
+              <a:off x="915645" y="5071743"/>
+              <a:ext cx="7682587" cy="0"/>
             </a:xfrm>
             <a:custGeom>
               <a:avLst/>
               <a:pathLst>
-                <a:path w="7799693" h="0">
+                <a:path w="7682587" h="0">
                   <a:moveTo>
                     <a:pt x="0" y="0"/>
                   </a:moveTo>
                   <a:lnTo>
-                    <a:pt x="7799693" y="0"/>
-                  </a:lnTo>
-                  <a:lnTo>
-                    <a:pt x="7799693" y="0"/>
+                    <a:pt x="7682587" y="0"/>
+                  </a:lnTo>
+                  <a:lnTo>
+                    <a:pt x="7682587" y="0"/>
                   </a:lnTo>
                 </a:path>
               </a:pathLst>
             </a:custGeom>
-            <a:ln w="6775" cap="flat">
+            <a:ln w="8623" cap="flat">
               <a:solidFill>
                 <a:srgbClr val="EBEBEB">
                   <a:alpha val="100000"/>
@@ -2314,26 +2314,26 @@
           </p:nvSpPr>
           <p:spPr>
             <a:xfrm>
-              <a:off x="817517" y="4313054"/>
-              <a:ext cx="7799693" cy="0"/>
+              <a:off x="915645" y="4298074"/>
+              <a:ext cx="7682587" cy="0"/>
             </a:xfrm>
             <a:custGeom>
               <a:avLst/>
               <a:pathLst>
-                <a:path w="7799693" h="0">
+                <a:path w="7682587" h="0">
                   <a:moveTo>
                     <a:pt x="0" y="0"/>
                   </a:moveTo>
                   <a:lnTo>
-                    <a:pt x="7799693" y="0"/>
-                  </a:lnTo>
-                  <a:lnTo>
-                    <a:pt x="7799693" y="0"/>
+                    <a:pt x="7682587" y="0"/>
+                  </a:lnTo>
+                  <a:lnTo>
+                    <a:pt x="7682587" y="0"/>
                   </a:lnTo>
                 </a:path>
               </a:pathLst>
             </a:custGeom>
-            <a:ln w="6775" cap="flat">
+            <a:ln w="8623" cap="flat">
               <a:solidFill>
                 <a:srgbClr val="EBEBEB">
                   <a:alpha val="100000"/>
@@ -2357,26 +2357,26 @@
           </p:nvSpPr>
           <p:spPr>
             <a:xfrm>
-              <a:off x="817517" y="3483591"/>
-              <a:ext cx="7799693" cy="0"/>
+              <a:off x="915645" y="3524405"/>
+              <a:ext cx="7682587" cy="0"/>
             </a:xfrm>
             <a:custGeom>
               <a:avLst/>
               <a:pathLst>
-                <a:path w="7799693" h="0">
+                <a:path w="7682587" h="0">
                   <a:moveTo>
                     <a:pt x="0" y="0"/>
                   </a:moveTo>
                   <a:lnTo>
-                    <a:pt x="7799693" y="0"/>
-                  </a:lnTo>
-                  <a:lnTo>
-                    <a:pt x="7799693" y="0"/>
+                    <a:pt x="7682587" y="0"/>
+                  </a:lnTo>
+                  <a:lnTo>
+                    <a:pt x="7682587" y="0"/>
                   </a:lnTo>
                 </a:path>
               </a:pathLst>
             </a:custGeom>
-            <a:ln w="6775" cap="flat">
+            <a:ln w="8623" cap="flat">
               <a:solidFill>
                 <a:srgbClr val="EBEBEB">
                   <a:alpha val="100000"/>
@@ -2400,26 +2400,26 @@
           </p:nvSpPr>
           <p:spPr>
             <a:xfrm>
-              <a:off x="817517" y="2654127"/>
-              <a:ext cx="7799693" cy="0"/>
+              <a:off x="915645" y="2750737"/>
+              <a:ext cx="7682587" cy="0"/>
             </a:xfrm>
             <a:custGeom>
               <a:avLst/>
               <a:pathLst>
-                <a:path w="7799693" h="0">
+                <a:path w="7682587" h="0">
                   <a:moveTo>
                     <a:pt x="0" y="0"/>
                   </a:moveTo>
                   <a:lnTo>
-                    <a:pt x="7799693" y="0"/>
-                  </a:lnTo>
-                  <a:lnTo>
-                    <a:pt x="7799693" y="0"/>
+                    <a:pt x="7682587" y="0"/>
+                  </a:lnTo>
+                  <a:lnTo>
+                    <a:pt x="7682587" y="0"/>
                   </a:lnTo>
                 </a:path>
               </a:pathLst>
             </a:custGeom>
-            <a:ln w="6775" cap="flat">
+            <a:ln w="8623" cap="flat">
               <a:solidFill>
                 <a:srgbClr val="EBEBEB">
                   <a:alpha val="100000"/>
@@ -2443,15 +2443,15 @@
           </p:nvSpPr>
           <p:spPr>
             <a:xfrm>
-              <a:off x="2122745" y="2073503"/>
-              <a:ext cx="0" cy="3649639"/>
+              <a:off x="2201275" y="2209169"/>
+              <a:ext cx="0" cy="3404141"/>
             </a:xfrm>
             <a:custGeom>
               <a:avLst/>
               <a:pathLst>
-                <a:path w="0" h="3649639">
+                <a:path w="0" h="3404141">
                   <a:moveTo>
-                    <a:pt x="0" y="3649639"/>
+                    <a:pt x="0" y="3404141"/>
                   </a:moveTo>
                   <a:lnTo>
                     <a:pt x="0" y="0"/>
@@ -2462,7 +2462,7 @@
                 </a:path>
               </a:pathLst>
             </a:custGeom>
-            <a:ln w="6775" cap="flat">
+            <a:ln w="8623" cap="flat">
               <a:solidFill>
                 <a:srgbClr val="EBEBEB">
                   <a:alpha val="100000"/>
@@ -2486,15 +2486,15 @@
           </p:nvSpPr>
           <p:spPr>
             <a:xfrm>
-              <a:off x="3487174" y="2073503"/>
-              <a:ext cx="0" cy="3649639"/>
+              <a:off x="3545219" y="2209169"/>
+              <a:ext cx="0" cy="3404141"/>
             </a:xfrm>
             <a:custGeom>
               <a:avLst/>
               <a:pathLst>
-                <a:path w="0" h="3649639">
+                <a:path w="0" h="3404141">
                   <a:moveTo>
-                    <a:pt x="0" y="3649639"/>
+                    <a:pt x="0" y="3404141"/>
                   </a:moveTo>
                   <a:lnTo>
                     <a:pt x="0" y="0"/>
@@ -2505,7 +2505,7 @@
                 </a:path>
               </a:pathLst>
             </a:custGeom>
-            <a:ln w="6775" cap="flat">
+            <a:ln w="8623" cap="flat">
               <a:solidFill>
                 <a:srgbClr val="EBEBEB">
                   <a:alpha val="100000"/>
@@ -2529,15 +2529,15 @@
           </p:nvSpPr>
           <p:spPr>
             <a:xfrm>
-              <a:off x="4851604" y="2073503"/>
-              <a:ext cx="0" cy="3649639"/>
+              <a:off x="4889163" y="2209169"/>
+              <a:ext cx="0" cy="3404141"/>
             </a:xfrm>
             <a:custGeom>
               <a:avLst/>
               <a:pathLst>
-                <a:path w="0" h="3649639">
+                <a:path w="0" h="3404141">
                   <a:moveTo>
-                    <a:pt x="0" y="3649639"/>
+                    <a:pt x="0" y="3404141"/>
                   </a:moveTo>
                   <a:lnTo>
                     <a:pt x="0" y="0"/>
@@ -2548,7 +2548,7 @@
                 </a:path>
               </a:pathLst>
             </a:custGeom>
-            <a:ln w="6775" cap="flat">
+            <a:ln w="8623" cap="flat">
               <a:solidFill>
                 <a:srgbClr val="EBEBEB">
                   <a:alpha val="100000"/>
@@ -2572,15 +2572,15 @@
           </p:nvSpPr>
           <p:spPr>
             <a:xfrm>
-              <a:off x="6216034" y="2073503"/>
-              <a:ext cx="0" cy="3649639"/>
+              <a:off x="6233107" y="2209169"/>
+              <a:ext cx="0" cy="3404141"/>
             </a:xfrm>
             <a:custGeom>
               <a:avLst/>
               <a:pathLst>
-                <a:path w="0" h="3649639">
+                <a:path w="0" h="3404141">
                   <a:moveTo>
-                    <a:pt x="0" y="3649639"/>
+                    <a:pt x="0" y="3404141"/>
                   </a:moveTo>
                   <a:lnTo>
                     <a:pt x="0" y="0"/>
@@ -2591,7 +2591,7 @@
                 </a:path>
               </a:pathLst>
             </a:custGeom>
-            <a:ln w="6775" cap="flat">
+            <a:ln w="8623" cap="flat">
               <a:solidFill>
                 <a:srgbClr val="EBEBEB">
                   <a:alpha val="100000"/>
@@ -2615,15 +2615,15 @@
           </p:nvSpPr>
           <p:spPr>
             <a:xfrm>
-              <a:off x="7580464" y="2073503"/>
-              <a:ext cx="0" cy="3649639"/>
+              <a:off x="7577051" y="2209169"/>
+              <a:ext cx="0" cy="3404141"/>
             </a:xfrm>
             <a:custGeom>
               <a:avLst/>
               <a:pathLst>
-                <a:path w="0" h="3649639">
+                <a:path w="0" h="3404141">
                   <a:moveTo>
-                    <a:pt x="0" y="3649639"/>
+                    <a:pt x="0" y="3404141"/>
                   </a:moveTo>
                   <a:lnTo>
                     <a:pt x="0" y="0"/>
@@ -2634,7 +2634,7 @@
                 </a:path>
               </a:pathLst>
             </a:custGeom>
-            <a:ln w="6775" cap="flat">
+            <a:ln w="8623" cap="flat">
               <a:solidFill>
                 <a:srgbClr val="EBEBEB">
                   <a:alpha val="100000"/>
@@ -2658,26 +2658,26 @@
           </p:nvSpPr>
           <p:spPr>
             <a:xfrm>
-              <a:off x="817517" y="5557249"/>
-              <a:ext cx="7799693" cy="0"/>
+              <a:off x="915645" y="5458577"/>
+              <a:ext cx="7682587" cy="0"/>
             </a:xfrm>
             <a:custGeom>
               <a:avLst/>
               <a:pathLst>
-                <a:path w="7799693" h="0">
+                <a:path w="7682587" h="0">
                   <a:moveTo>
                     <a:pt x="0" y="0"/>
                   </a:moveTo>
                   <a:lnTo>
-                    <a:pt x="7799693" y="0"/>
-                  </a:lnTo>
-                  <a:lnTo>
-                    <a:pt x="7799693" y="0"/>
+                    <a:pt x="7682587" y="0"/>
+                  </a:lnTo>
+                  <a:lnTo>
+                    <a:pt x="7682587" y="0"/>
                   </a:lnTo>
                 </a:path>
               </a:pathLst>
             </a:custGeom>
-            <a:ln w="13550" cap="flat">
+            <a:ln w="17246" cap="flat">
               <a:solidFill>
                 <a:srgbClr val="EBEBEB">
                   <a:alpha val="100000"/>
@@ -2701,26 +2701,26 @@
           </p:nvSpPr>
           <p:spPr>
             <a:xfrm>
-              <a:off x="817517" y="4727786"/>
-              <a:ext cx="7799693" cy="0"/>
+              <a:off x="915645" y="4684908"/>
+              <a:ext cx="7682587" cy="0"/>
             </a:xfrm>
             <a:custGeom>
               <a:avLst/>
               <a:pathLst>
-                <a:path w="7799693" h="0">
+                <a:path w="7682587" h="0">
                   <a:moveTo>
                     <a:pt x="0" y="0"/>
                   </a:moveTo>
                   <a:lnTo>
-                    <a:pt x="7799693" y="0"/>
-                  </a:lnTo>
-                  <a:lnTo>
-                    <a:pt x="7799693" y="0"/>
+                    <a:pt x="7682587" y="0"/>
+                  </a:lnTo>
+                  <a:lnTo>
+                    <a:pt x="7682587" y="0"/>
                   </a:lnTo>
                 </a:path>
               </a:pathLst>
             </a:custGeom>
-            <a:ln w="13550" cap="flat">
+            <a:ln w="17246" cap="flat">
               <a:solidFill>
                 <a:srgbClr val="EBEBEB">
                   <a:alpha val="100000"/>
@@ -2744,26 +2744,26 @@
           </p:nvSpPr>
           <p:spPr>
             <a:xfrm>
-              <a:off x="817517" y="3898322"/>
-              <a:ext cx="7799693" cy="0"/>
+              <a:off x="915645" y="3911240"/>
+              <a:ext cx="7682587" cy="0"/>
             </a:xfrm>
             <a:custGeom>
               <a:avLst/>
               <a:pathLst>
-                <a:path w="7799693" h="0">
+                <a:path w="7682587" h="0">
                   <a:moveTo>
                     <a:pt x="0" y="0"/>
                   </a:moveTo>
                   <a:lnTo>
-                    <a:pt x="7799693" y="0"/>
-                  </a:lnTo>
-                  <a:lnTo>
-                    <a:pt x="7799693" y="0"/>
+                    <a:pt x="7682587" y="0"/>
+                  </a:lnTo>
+                  <a:lnTo>
+                    <a:pt x="7682587" y="0"/>
                   </a:lnTo>
                 </a:path>
               </a:pathLst>
             </a:custGeom>
-            <a:ln w="13550" cap="flat">
+            <a:ln w="17246" cap="flat">
               <a:solidFill>
                 <a:srgbClr val="EBEBEB">
                   <a:alpha val="100000"/>
@@ -2787,26 +2787,26 @@
           </p:nvSpPr>
           <p:spPr>
             <a:xfrm>
-              <a:off x="817517" y="3068859"/>
-              <a:ext cx="7799693" cy="0"/>
+              <a:off x="915645" y="3137571"/>
+              <a:ext cx="7682587" cy="0"/>
             </a:xfrm>
             <a:custGeom>
               <a:avLst/>
               <a:pathLst>
-                <a:path w="7799693" h="0">
+                <a:path w="7682587" h="0">
                   <a:moveTo>
                     <a:pt x="0" y="0"/>
                   </a:moveTo>
                   <a:lnTo>
-                    <a:pt x="7799693" y="0"/>
-                  </a:lnTo>
-                  <a:lnTo>
-                    <a:pt x="7799693" y="0"/>
+                    <a:pt x="7682587" y="0"/>
+                  </a:lnTo>
+                  <a:lnTo>
+                    <a:pt x="7682587" y="0"/>
                   </a:lnTo>
                 </a:path>
               </a:pathLst>
             </a:custGeom>
-            <a:ln w="13550" cap="flat">
+            <a:ln w="17246" cap="flat">
               <a:solidFill>
                 <a:srgbClr val="EBEBEB">
                   <a:alpha val="100000"/>
@@ -2830,26 +2830,26 @@
           </p:nvSpPr>
           <p:spPr>
             <a:xfrm>
-              <a:off x="817517" y="2239395"/>
-              <a:ext cx="7799693" cy="0"/>
+              <a:off x="915645" y="2363903"/>
+              <a:ext cx="7682587" cy="0"/>
             </a:xfrm>
             <a:custGeom>
               <a:avLst/>
               <a:pathLst>
-                <a:path w="7799693" h="0">
+                <a:path w="7682587" h="0">
                   <a:moveTo>
                     <a:pt x="0" y="0"/>
                   </a:moveTo>
                   <a:lnTo>
-                    <a:pt x="7799693" y="0"/>
-                  </a:lnTo>
-                  <a:lnTo>
-                    <a:pt x="7799693" y="0"/>
+                    <a:pt x="7682587" y="0"/>
+                  </a:lnTo>
+                  <a:lnTo>
+                    <a:pt x="7682587" y="0"/>
                   </a:lnTo>
                 </a:path>
               </a:pathLst>
             </a:custGeom>
-            <a:ln w="13550" cap="flat">
+            <a:ln w="17246" cap="flat">
               <a:solidFill>
                 <a:srgbClr val="EBEBEB">
                   <a:alpha val="100000"/>
@@ -2873,15 +2873,15 @@
           </p:nvSpPr>
           <p:spPr>
             <a:xfrm>
-              <a:off x="1440530" y="2073503"/>
-              <a:ext cx="0" cy="3649639"/>
+              <a:off x="1529303" y="2209169"/>
+              <a:ext cx="0" cy="3404141"/>
             </a:xfrm>
             <a:custGeom>
               <a:avLst/>
               <a:pathLst>
-                <a:path w="0" h="3649639">
+                <a:path w="0" h="3404141">
                   <a:moveTo>
-                    <a:pt x="0" y="3649639"/>
+                    <a:pt x="0" y="3404141"/>
                   </a:moveTo>
                   <a:lnTo>
                     <a:pt x="0" y="0"/>
@@ -2892,7 +2892,7 @@
                 </a:path>
               </a:pathLst>
             </a:custGeom>
-            <a:ln w="13550" cap="flat">
+            <a:ln w="17246" cap="flat">
               <a:solidFill>
                 <a:srgbClr val="EBEBEB">
                   <a:alpha val="100000"/>
@@ -2916,15 +2916,15 @@
           </p:nvSpPr>
           <p:spPr>
             <a:xfrm>
-              <a:off x="2804959" y="2073503"/>
-              <a:ext cx="0" cy="3649639"/>
+              <a:off x="2873247" y="2209169"/>
+              <a:ext cx="0" cy="3404141"/>
             </a:xfrm>
             <a:custGeom>
               <a:avLst/>
               <a:pathLst>
-                <a:path w="0" h="3649639">
+                <a:path w="0" h="3404141">
                   <a:moveTo>
-                    <a:pt x="0" y="3649639"/>
+                    <a:pt x="0" y="3404141"/>
                   </a:moveTo>
                   <a:lnTo>
                     <a:pt x="0" y="0"/>
@@ -2935,7 +2935,7 @@
                 </a:path>
               </a:pathLst>
             </a:custGeom>
-            <a:ln w="13550" cap="flat">
+            <a:ln w="17246" cap="flat">
               <a:solidFill>
                 <a:srgbClr val="EBEBEB">
                   <a:alpha val="100000"/>
@@ -2959,15 +2959,15 @@
           </p:nvSpPr>
           <p:spPr>
             <a:xfrm>
-              <a:off x="4169389" y="2073503"/>
-              <a:ext cx="0" cy="3649639"/>
+              <a:off x="4217191" y="2209169"/>
+              <a:ext cx="0" cy="3404141"/>
             </a:xfrm>
             <a:custGeom>
               <a:avLst/>
               <a:pathLst>
-                <a:path w="0" h="3649639">
+                <a:path w="0" h="3404141">
                   <a:moveTo>
-                    <a:pt x="0" y="3649639"/>
+                    <a:pt x="0" y="3404141"/>
                   </a:moveTo>
                   <a:lnTo>
                     <a:pt x="0" y="0"/>
@@ -2978,7 +2978,7 @@
                 </a:path>
               </a:pathLst>
             </a:custGeom>
-            <a:ln w="13550" cap="flat">
+            <a:ln w="17246" cap="flat">
               <a:solidFill>
                 <a:srgbClr val="EBEBEB">
                   <a:alpha val="100000"/>
@@ -3002,15 +3002,15 @@
           </p:nvSpPr>
           <p:spPr>
             <a:xfrm>
-              <a:off x="5533819" y="2073503"/>
-              <a:ext cx="0" cy="3649639"/>
+              <a:off x="5561135" y="2209169"/>
+              <a:ext cx="0" cy="3404141"/>
             </a:xfrm>
             <a:custGeom>
               <a:avLst/>
               <a:pathLst>
-                <a:path w="0" h="3649639">
+                <a:path w="0" h="3404141">
                   <a:moveTo>
-                    <a:pt x="0" y="3649639"/>
+                    <a:pt x="0" y="3404141"/>
                   </a:moveTo>
                   <a:lnTo>
                     <a:pt x="0" y="0"/>
@@ -3021,7 +3021,7 @@
                 </a:path>
               </a:pathLst>
             </a:custGeom>
-            <a:ln w="13550" cap="flat">
+            <a:ln w="17246" cap="flat">
               <a:solidFill>
                 <a:srgbClr val="EBEBEB">
                   <a:alpha val="100000"/>
@@ -3045,15 +3045,15 @@
           </p:nvSpPr>
           <p:spPr>
             <a:xfrm>
-              <a:off x="6898249" y="2073503"/>
-              <a:ext cx="0" cy="3649639"/>
+              <a:off x="6905079" y="2209169"/>
+              <a:ext cx="0" cy="3404141"/>
             </a:xfrm>
             <a:custGeom>
               <a:avLst/>
               <a:pathLst>
-                <a:path w="0" h="3649639">
+                <a:path w="0" h="3404141">
                   <a:moveTo>
-                    <a:pt x="0" y="3649639"/>
+                    <a:pt x="0" y="3404141"/>
                   </a:moveTo>
                   <a:lnTo>
                     <a:pt x="0" y="0"/>
@@ -3064,7 +3064,7 @@
                 </a:path>
               </a:pathLst>
             </a:custGeom>
-            <a:ln w="13550" cap="flat">
+            <a:ln w="17246" cap="flat">
               <a:solidFill>
                 <a:srgbClr val="EBEBEB">
                   <a:alpha val="100000"/>
@@ -3088,15 +3088,15 @@
           </p:nvSpPr>
           <p:spPr>
             <a:xfrm>
-              <a:off x="8262679" y="2073503"/>
-              <a:ext cx="0" cy="3649639"/>
+              <a:off x="8249023" y="2209169"/>
+              <a:ext cx="0" cy="3404141"/>
             </a:xfrm>
             <a:custGeom>
               <a:avLst/>
               <a:pathLst>
-                <a:path w="0" h="3649639">
+                <a:path w="0" h="3404141">
                   <a:moveTo>
-                    <a:pt x="0" y="3649639"/>
+                    <a:pt x="0" y="3404141"/>
                   </a:moveTo>
                   <a:lnTo>
                     <a:pt x="0" y="0"/>
@@ -3107,7 +3107,7 @@
                 </a:path>
               </a:pathLst>
             </a:custGeom>
-            <a:ln w="13550" cap="flat">
+            <a:ln w="17246" cap="flat">
               <a:solidFill>
                 <a:srgbClr val="EBEBEB">
                   <a:alpha val="100000"/>
@@ -3131,591 +3131,591 @@
           </p:nvSpPr>
           <p:spPr>
             <a:xfrm>
-              <a:off x="1172049" y="2073503"/>
-              <a:ext cx="7090630" cy="3276978"/>
+              <a:off x="1264853" y="2209169"/>
+              <a:ext cx="6984170" cy="3056548"/>
             </a:xfrm>
             <a:custGeom>
               <a:avLst/>
               <a:pathLst>
-                <a:path w="7090630" h="3276978">
+                <a:path w="6984170" h="3056548">
                   <a:moveTo>
-                    <a:pt x="0" y="1116584"/>
+                    <a:pt x="0" y="1041475"/>
                   </a:moveTo>
                   <a:lnTo>
-                    <a:pt x="71622" y="1174163"/>
-                  </a:lnTo>
-                  <a:lnTo>
-                    <a:pt x="143245" y="1230341"/>
-                  </a:lnTo>
-                  <a:lnTo>
-                    <a:pt x="214867" y="1285153"/>
-                  </a:lnTo>
-                  <a:lnTo>
-                    <a:pt x="286490" y="1338631"/>
-                  </a:lnTo>
-                  <a:lnTo>
-                    <a:pt x="358112" y="1390809"/>
-                  </a:lnTo>
-                  <a:lnTo>
-                    <a:pt x="429735" y="1441718"/>
-                  </a:lnTo>
-                  <a:lnTo>
-                    <a:pt x="501357" y="1491388"/>
-                  </a:lnTo>
-                  <a:lnTo>
-                    <a:pt x="572980" y="1539850"/>
-                  </a:lnTo>
-                  <a:lnTo>
-                    <a:pt x="644602" y="1587134"/>
-                  </a:lnTo>
-                  <a:lnTo>
-                    <a:pt x="716225" y="1633267"/>
-                  </a:lnTo>
-                  <a:lnTo>
-                    <a:pt x="787847" y="1678278"/>
-                  </a:lnTo>
-                  <a:lnTo>
-                    <a:pt x="859470" y="1722194"/>
-                  </a:lnTo>
-                  <a:lnTo>
-                    <a:pt x="931092" y="1765042"/>
-                  </a:lnTo>
-                  <a:lnTo>
-                    <a:pt x="1002715" y="1806848"/>
-                  </a:lnTo>
-                  <a:lnTo>
-                    <a:pt x="1074337" y="1847637"/>
-                  </a:lnTo>
-                  <a:lnTo>
-                    <a:pt x="1145960" y="1887434"/>
-                  </a:lnTo>
-                  <a:lnTo>
-                    <a:pt x="1217582" y="1926263"/>
-                  </a:lnTo>
-                  <a:lnTo>
-                    <a:pt x="1289205" y="1964147"/>
-                  </a:lnTo>
-                  <a:lnTo>
-                    <a:pt x="1360827" y="2001110"/>
-                  </a:lnTo>
-                  <a:lnTo>
-                    <a:pt x="1432450" y="2037173"/>
-                  </a:lnTo>
-                  <a:lnTo>
-                    <a:pt x="1504073" y="2072360"/>
-                  </a:lnTo>
-                  <a:lnTo>
-                    <a:pt x="1575695" y="2106690"/>
-                  </a:lnTo>
-                  <a:lnTo>
-                    <a:pt x="1647318" y="2140186"/>
-                  </a:lnTo>
-                  <a:lnTo>
-                    <a:pt x="1718940" y="2172867"/>
-                  </a:lnTo>
-                  <a:lnTo>
-                    <a:pt x="1790563" y="2204753"/>
-                  </a:lnTo>
-                  <a:lnTo>
-                    <a:pt x="1862185" y="2235863"/>
-                  </a:lnTo>
-                  <a:lnTo>
-                    <a:pt x="1933808" y="2266216"/>
-                  </a:lnTo>
-                  <a:lnTo>
-                    <a:pt x="2005430" y="2295832"/>
-                  </a:lnTo>
-                  <a:lnTo>
-                    <a:pt x="2077053" y="2324727"/>
-                  </a:lnTo>
-                  <a:lnTo>
-                    <a:pt x="2148675" y="2352919"/>
-                  </a:lnTo>
-                  <a:lnTo>
-                    <a:pt x="2220298" y="2380425"/>
-                  </a:lnTo>
-                  <a:lnTo>
-                    <a:pt x="2291920" y="2407262"/>
-                  </a:lnTo>
-                  <a:lnTo>
-                    <a:pt x="2363543" y="2433446"/>
-                  </a:lnTo>
-                  <a:lnTo>
-                    <a:pt x="2435165" y="2458994"/>
-                  </a:lnTo>
-                  <a:lnTo>
-                    <a:pt x="2506788" y="2483920"/>
-                  </a:lnTo>
-                  <a:lnTo>
-                    <a:pt x="2578410" y="2508240"/>
-                  </a:lnTo>
-                  <a:lnTo>
-                    <a:pt x="2650033" y="2531968"/>
-                  </a:lnTo>
-                  <a:lnTo>
-                    <a:pt x="2721655" y="2555119"/>
-                  </a:lnTo>
-                  <a:lnTo>
-                    <a:pt x="2793278" y="2577707"/>
-                  </a:lnTo>
-                  <a:lnTo>
-                    <a:pt x="2864901" y="2599746"/>
-                  </a:lnTo>
-                  <a:lnTo>
-                    <a:pt x="2936523" y="2621248"/>
-                  </a:lnTo>
-                  <a:lnTo>
-                    <a:pt x="3008146" y="2642228"/>
-                  </a:lnTo>
-                  <a:lnTo>
-                    <a:pt x="3079768" y="2643889"/>
-                  </a:lnTo>
-                  <a:lnTo>
-                    <a:pt x="3151391" y="2618245"/>
-                  </a:lnTo>
-                  <a:lnTo>
-                    <a:pt x="3223013" y="2591819"/>
-                  </a:lnTo>
-                  <a:lnTo>
-                    <a:pt x="3294636" y="2564585"/>
-                  </a:lnTo>
-                  <a:lnTo>
-                    <a:pt x="3366258" y="2536520"/>
-                  </a:lnTo>
-                  <a:lnTo>
-                    <a:pt x="3437881" y="2507598"/>
-                  </a:lnTo>
-                  <a:lnTo>
-                    <a:pt x="3509503" y="2477792"/>
-                  </a:lnTo>
-                  <a:lnTo>
-                    <a:pt x="3581126" y="2447077"/>
-                  </a:lnTo>
-                  <a:lnTo>
-                    <a:pt x="3652748" y="2415424"/>
-                  </a:lnTo>
-                  <a:lnTo>
-                    <a:pt x="3724371" y="2382805"/>
-                  </a:lnTo>
-                  <a:lnTo>
-                    <a:pt x="3795993" y="2349189"/>
-                  </a:lnTo>
-                  <a:lnTo>
-                    <a:pt x="3867616" y="2314547"/>
-                  </a:lnTo>
-                  <a:lnTo>
-                    <a:pt x="3939238" y="2278847"/>
-                  </a:lnTo>
-                  <a:lnTo>
-                    <a:pt x="4010861" y="2242057"/>
-                  </a:lnTo>
-                  <a:lnTo>
-                    <a:pt x="4082483" y="2204144"/>
-                  </a:lnTo>
-                  <a:lnTo>
-                    <a:pt x="4154106" y="2165074"/>
-                  </a:lnTo>
-                  <a:lnTo>
-                    <a:pt x="4225729" y="2124810"/>
-                  </a:lnTo>
-                  <a:lnTo>
-                    <a:pt x="4297351" y="2083317"/>
-                  </a:lnTo>
-                  <a:lnTo>
-                    <a:pt x="4368974" y="2040557"/>
-                  </a:lnTo>
-                  <a:lnTo>
-                    <a:pt x="4440596" y="1996491"/>
-                  </a:lnTo>
-                  <a:lnTo>
-                    <a:pt x="4512219" y="1951080"/>
-                  </a:lnTo>
-                  <a:lnTo>
-                    <a:pt x="4583841" y="1904283"/>
-                  </a:lnTo>
-                  <a:lnTo>
-                    <a:pt x="4655464" y="1856056"/>
-                  </a:lnTo>
-                  <a:lnTo>
-                    <a:pt x="4727086" y="1806357"/>
-                  </a:lnTo>
-                  <a:lnTo>
-                    <a:pt x="4798709" y="1755141"/>
-                  </a:lnTo>
-                  <a:lnTo>
-                    <a:pt x="4870331" y="1702360"/>
-                  </a:lnTo>
-                  <a:lnTo>
-                    <a:pt x="4941954" y="1647969"/>
-                  </a:lnTo>
-                  <a:lnTo>
-                    <a:pt x="5013576" y="1591916"/>
-                  </a:lnTo>
-                  <a:lnTo>
-                    <a:pt x="5085199" y="1534152"/>
-                  </a:lnTo>
-                  <a:lnTo>
-                    <a:pt x="5156821" y="1474624"/>
-                  </a:lnTo>
-                  <a:lnTo>
-                    <a:pt x="5228444" y="1413278"/>
-                  </a:lnTo>
-                  <a:lnTo>
-                    <a:pt x="5300066" y="1350060"/>
-                  </a:lnTo>
-                  <a:lnTo>
-                    <a:pt x="5371689" y="1284911"/>
-                  </a:lnTo>
-                  <a:lnTo>
-                    <a:pt x="5443311" y="1217773"/>
-                  </a:lnTo>
-                  <a:lnTo>
-                    <a:pt x="5514934" y="1148585"/>
-                  </a:lnTo>
-                  <a:lnTo>
-                    <a:pt x="5586557" y="1077284"/>
-                  </a:lnTo>
-                  <a:lnTo>
-                    <a:pt x="5658179" y="1003806"/>
-                  </a:lnTo>
-                  <a:lnTo>
-                    <a:pt x="5729802" y="928085"/>
-                  </a:lnTo>
-                  <a:lnTo>
-                    <a:pt x="5801424" y="850052"/>
-                  </a:lnTo>
-                  <a:lnTo>
-                    <a:pt x="5873047" y="769636"/>
-                  </a:lnTo>
-                  <a:lnTo>
-                    <a:pt x="5944669" y="686765"/>
-                  </a:lnTo>
-                  <a:lnTo>
-                    <a:pt x="6016292" y="601364"/>
-                  </a:lnTo>
-                  <a:lnTo>
-                    <a:pt x="6087914" y="513354"/>
-                  </a:lnTo>
-                  <a:lnTo>
-                    <a:pt x="6159537" y="422658"/>
-                  </a:lnTo>
-                  <a:lnTo>
-                    <a:pt x="6231159" y="329192"/>
-                  </a:lnTo>
-                  <a:lnTo>
-                    <a:pt x="6302782" y="232873"/>
-                  </a:lnTo>
-                  <a:lnTo>
-                    <a:pt x="6374404" y="133612"/>
-                  </a:lnTo>
-                  <a:lnTo>
-                    <a:pt x="6446027" y="31321"/>
-                  </a:lnTo>
-                  <a:lnTo>
-                    <a:pt x="6467308" y="0"/>
-                  </a:lnTo>
-                  <a:lnTo>
-                    <a:pt x="7090630" y="0"/>
-                  </a:lnTo>
-                  <a:lnTo>
-                    <a:pt x="7090630" y="3276978"/>
-                  </a:lnTo>
-                  <a:lnTo>
-                    <a:pt x="7019007" y="3271823"/>
-                  </a:lnTo>
-                  <a:lnTo>
-                    <a:pt x="6947385" y="3266540"/>
-                  </a:lnTo>
-                  <a:lnTo>
-                    <a:pt x="6875762" y="3261125"/>
-                  </a:lnTo>
-                  <a:lnTo>
-                    <a:pt x="6804139" y="3255575"/>
-                  </a:lnTo>
-                  <a:lnTo>
-                    <a:pt x="6732517" y="3249887"/>
-                  </a:lnTo>
-                  <a:lnTo>
-                    <a:pt x="6660894" y="3244056"/>
-                  </a:lnTo>
-                  <a:lnTo>
-                    <a:pt x="6589272" y="3238081"/>
-                  </a:lnTo>
-                  <a:lnTo>
-                    <a:pt x="6517649" y="3231956"/>
-                  </a:lnTo>
-                  <a:lnTo>
-                    <a:pt x="6446027" y="3225679"/>
-                  </a:lnTo>
-                  <a:lnTo>
-                    <a:pt x="6374404" y="3219245"/>
-                  </a:lnTo>
-                  <a:lnTo>
-                    <a:pt x="6302782" y="3212651"/>
-                  </a:lnTo>
-                  <a:lnTo>
-                    <a:pt x="6231159" y="3205893"/>
-                  </a:lnTo>
-                  <a:lnTo>
-                    <a:pt x="6159537" y="3198966"/>
-                  </a:lnTo>
-                  <a:lnTo>
-                    <a:pt x="6087914" y="3191866"/>
-                  </a:lnTo>
-                  <a:lnTo>
-                    <a:pt x="6016292" y="3184589"/>
-                  </a:lnTo>
-                  <a:lnTo>
-                    <a:pt x="5944669" y="3177131"/>
-                  </a:lnTo>
-                  <a:lnTo>
-                    <a:pt x="5873047" y="3169487"/>
-                  </a:lnTo>
-                  <a:lnTo>
-                    <a:pt x="5801424" y="3161652"/>
-                  </a:lnTo>
-                  <a:lnTo>
-                    <a:pt x="5729802" y="3153622"/>
-                  </a:lnTo>
-                  <a:lnTo>
-                    <a:pt x="5658179" y="3145392"/>
-                  </a:lnTo>
-                  <a:lnTo>
-                    <a:pt x="5586557" y="3136957"/>
-                  </a:lnTo>
-                  <a:lnTo>
-                    <a:pt x="5514934" y="3128311"/>
-                  </a:lnTo>
-                  <a:lnTo>
-                    <a:pt x="5443311" y="3119450"/>
-                  </a:lnTo>
-                  <a:lnTo>
-                    <a:pt x="5371689" y="3110368"/>
-                  </a:lnTo>
-                  <a:lnTo>
-                    <a:pt x="5300066" y="3101060"/>
-                  </a:lnTo>
-                  <a:lnTo>
-                    <a:pt x="5228444" y="3091519"/>
-                  </a:lnTo>
-                  <a:lnTo>
-                    <a:pt x="5156821" y="3081741"/>
-                  </a:lnTo>
-                  <a:lnTo>
-                    <a:pt x="5085199" y="3071719"/>
-                  </a:lnTo>
-                  <a:lnTo>
-                    <a:pt x="5013576" y="3061446"/>
-                  </a:lnTo>
-                  <a:lnTo>
-                    <a:pt x="4941954" y="3050918"/>
-                  </a:lnTo>
-                  <a:lnTo>
-                    <a:pt x="4870331" y="3040128"/>
-                  </a:lnTo>
-                  <a:lnTo>
-                    <a:pt x="4798709" y="3029068"/>
-                  </a:lnTo>
-                  <a:lnTo>
-                    <a:pt x="4727086" y="3017733"/>
-                  </a:lnTo>
-                  <a:lnTo>
-                    <a:pt x="4655464" y="3006115"/>
-                  </a:lnTo>
-                  <a:lnTo>
-                    <a:pt x="4583841" y="2994207"/>
-                  </a:lnTo>
-                  <a:lnTo>
-                    <a:pt x="4512219" y="2982003"/>
-                  </a:lnTo>
-                  <a:lnTo>
-                    <a:pt x="4440596" y="2969494"/>
-                  </a:lnTo>
-                  <a:lnTo>
-                    <a:pt x="4368974" y="2956674"/>
-                  </a:lnTo>
-                  <a:lnTo>
-                    <a:pt x="4297351" y="2943534"/>
-                  </a:lnTo>
-                  <a:lnTo>
-                    <a:pt x="4225729" y="2930066"/>
-                  </a:lnTo>
-                  <a:lnTo>
-                    <a:pt x="4154106" y="2916262"/>
-                  </a:lnTo>
-                  <a:lnTo>
-                    <a:pt x="4082483" y="2902115"/>
-                  </a:lnTo>
-                  <a:lnTo>
-                    <a:pt x="4010861" y="2887614"/>
-                  </a:lnTo>
-                  <a:lnTo>
-                    <a:pt x="3939238" y="2872753"/>
-                  </a:lnTo>
-                  <a:lnTo>
-                    <a:pt x="3867616" y="2857520"/>
-                  </a:lnTo>
-                  <a:lnTo>
-                    <a:pt x="3795993" y="2841908"/>
-                  </a:lnTo>
-                  <a:lnTo>
-                    <a:pt x="3724371" y="2825907"/>
-                  </a:lnTo>
-                  <a:lnTo>
-                    <a:pt x="3652748" y="2809507"/>
-                  </a:lnTo>
-                  <a:lnTo>
-                    <a:pt x="3581126" y="2792698"/>
-                  </a:lnTo>
-                  <a:lnTo>
-                    <a:pt x="3509503" y="2775469"/>
-                  </a:lnTo>
-                  <a:lnTo>
-                    <a:pt x="3437881" y="2757812"/>
-                  </a:lnTo>
-                  <a:lnTo>
-                    <a:pt x="3366258" y="2739714"/>
-                  </a:lnTo>
-                  <a:lnTo>
-                    <a:pt x="3294636" y="2721165"/>
-                  </a:lnTo>
-                  <a:lnTo>
-                    <a:pt x="3223013" y="2702153"/>
-                  </a:lnTo>
-                  <a:lnTo>
-                    <a:pt x="3151391" y="2682668"/>
-                  </a:lnTo>
-                  <a:lnTo>
-                    <a:pt x="3079768" y="2662697"/>
-                  </a:lnTo>
-                  <a:lnTo>
-                    <a:pt x="3008146" y="2668773"/>
-                  </a:lnTo>
-                  <a:lnTo>
-                    <a:pt x="2936523" y="2692920"/>
-                  </a:lnTo>
-                  <a:lnTo>
-                    <a:pt x="2864901" y="2716351"/>
-                  </a:lnTo>
-                  <a:lnTo>
-                    <a:pt x="2793278" y="2739088"/>
-                  </a:lnTo>
-                  <a:lnTo>
-                    <a:pt x="2721655" y="2761151"/>
-                  </a:lnTo>
-                  <a:lnTo>
-                    <a:pt x="2650033" y="2782561"/>
-                  </a:lnTo>
-                  <a:lnTo>
-                    <a:pt x="2578410" y="2803336"/>
-                  </a:lnTo>
-                  <a:lnTo>
-                    <a:pt x="2506788" y="2823496"/>
-                  </a:lnTo>
-                  <a:lnTo>
-                    <a:pt x="2435165" y="2843058"/>
-                  </a:lnTo>
-                  <a:lnTo>
-                    <a:pt x="2363543" y="2862041"/>
-                  </a:lnTo>
-                  <a:lnTo>
-                    <a:pt x="2291920" y="2880462"/>
-                  </a:lnTo>
-                  <a:lnTo>
-                    <a:pt x="2220298" y="2898336"/>
-                  </a:lnTo>
-                  <a:lnTo>
-                    <a:pt x="2148675" y="2915681"/>
-                  </a:lnTo>
-                  <a:lnTo>
-                    <a:pt x="2077053" y="2932512"/>
-                  </a:lnTo>
-                  <a:lnTo>
-                    <a:pt x="2005430" y="2948845"/>
-                  </a:lnTo>
-                  <a:lnTo>
-                    <a:pt x="1933808" y="2964693"/>
-                  </a:lnTo>
-                  <a:lnTo>
-                    <a:pt x="1862185" y="2980072"/>
-                  </a:lnTo>
-                  <a:lnTo>
-                    <a:pt x="1790563" y="2994995"/>
-                  </a:lnTo>
-                  <a:lnTo>
-                    <a:pt x="1718940" y="3009477"/>
-                  </a:lnTo>
-                  <a:lnTo>
-                    <a:pt x="1647318" y="3023529"/>
-                  </a:lnTo>
-                  <a:lnTo>
-                    <a:pt x="1575695" y="3037164"/>
-                  </a:lnTo>
-                  <a:lnTo>
-                    <a:pt x="1504073" y="3050396"/>
-                  </a:lnTo>
-                  <a:lnTo>
-                    <a:pt x="1432450" y="3063236"/>
-                  </a:lnTo>
-                  <a:lnTo>
-                    <a:pt x="1360827" y="3075695"/>
-                  </a:lnTo>
-                  <a:lnTo>
-                    <a:pt x="1289205" y="3087785"/>
-                  </a:lnTo>
-                  <a:lnTo>
-                    <a:pt x="1217582" y="3099517"/>
-                  </a:lnTo>
-                  <a:lnTo>
-                    <a:pt x="1145960" y="3110901"/>
-                  </a:lnTo>
-                  <a:lnTo>
-                    <a:pt x="1074337" y="3121948"/>
-                  </a:lnTo>
-                  <a:lnTo>
-                    <a:pt x="1002715" y="3132668"/>
-                  </a:lnTo>
-                  <a:lnTo>
-                    <a:pt x="931092" y="3143070"/>
-                  </a:lnTo>
-                  <a:lnTo>
-                    <a:pt x="859470" y="3153164"/>
-                  </a:lnTo>
-                  <a:lnTo>
-                    <a:pt x="787847" y="3162958"/>
-                  </a:lnTo>
-                  <a:lnTo>
-                    <a:pt x="716225" y="3172463"/>
-                  </a:lnTo>
-                  <a:lnTo>
-                    <a:pt x="644602" y="3181686"/>
-                  </a:lnTo>
-                  <a:lnTo>
-                    <a:pt x="572980" y="3190636"/>
-                  </a:lnTo>
-                  <a:lnTo>
-                    <a:pt x="501357" y="3199320"/>
-                  </a:lnTo>
-                  <a:lnTo>
-                    <a:pt x="429735" y="3207747"/>
-                  </a:lnTo>
-                  <a:lnTo>
-                    <a:pt x="358112" y="3215925"/>
-                  </a:lnTo>
-                  <a:lnTo>
-                    <a:pt x="286490" y="3223860"/>
-                  </a:lnTo>
-                  <a:lnTo>
-                    <a:pt x="214867" y="3231560"/>
-                  </a:lnTo>
-                  <a:lnTo>
-                    <a:pt x="143245" y="3239032"/>
-                  </a:lnTo>
-                  <a:lnTo>
-                    <a:pt x="71622" y="3246283"/>
-                  </a:lnTo>
-                  <a:lnTo>
-                    <a:pt x="0" y="3253319"/>
+                    <a:pt x="70547" y="1095181"/>
+                  </a:lnTo>
+                  <a:lnTo>
+                    <a:pt x="141094" y="1147580"/>
+                  </a:lnTo>
+                  <a:lnTo>
+                    <a:pt x="211641" y="1198705"/>
+                  </a:lnTo>
+                  <a:lnTo>
+                    <a:pt x="282188" y="1248587"/>
+                  </a:lnTo>
+                  <a:lnTo>
+                    <a:pt x="352735" y="1297255"/>
+                  </a:lnTo>
+                  <a:lnTo>
+                    <a:pt x="423283" y="1344739"/>
+                  </a:lnTo>
+                  <a:lnTo>
+                    <a:pt x="493830" y="1391068"/>
+                  </a:lnTo>
+                  <a:lnTo>
+                    <a:pt x="564377" y="1436270"/>
+                  </a:lnTo>
+                  <a:lnTo>
+                    <a:pt x="634924" y="1480373"/>
+                  </a:lnTo>
+                  <a:lnTo>
+                    <a:pt x="705471" y="1523403"/>
+                  </a:lnTo>
+                  <a:lnTo>
+                    <a:pt x="776018" y="1565386"/>
+                  </a:lnTo>
+                  <a:lnTo>
+                    <a:pt x="846566" y="1606349"/>
+                  </a:lnTo>
+                  <a:lnTo>
+                    <a:pt x="917113" y="1646314"/>
+                  </a:lnTo>
+                  <a:lnTo>
+                    <a:pt x="987660" y="1685308"/>
+                  </a:lnTo>
+                  <a:lnTo>
+                    <a:pt x="1058207" y="1723353"/>
+                  </a:lnTo>
+                  <a:lnTo>
+                    <a:pt x="1128754" y="1760473"/>
+                  </a:lnTo>
+                  <a:lnTo>
+                    <a:pt x="1199301" y="1796690"/>
+                  </a:lnTo>
+                  <a:lnTo>
+                    <a:pt x="1269849" y="1832026"/>
+                  </a:lnTo>
+                  <a:lnTo>
+                    <a:pt x="1340396" y="1866502"/>
+                  </a:lnTo>
+                  <a:lnTo>
+                    <a:pt x="1410943" y="1900140"/>
+                  </a:lnTo>
+                  <a:lnTo>
+                    <a:pt x="1481490" y="1932960"/>
+                  </a:lnTo>
+                  <a:lnTo>
+                    <a:pt x="1552037" y="1964981"/>
+                  </a:lnTo>
+                  <a:lnTo>
+                    <a:pt x="1622584" y="1996223"/>
+                  </a:lnTo>
+                  <a:lnTo>
+                    <a:pt x="1693132" y="2026706"/>
+                  </a:lnTo>
+                  <a:lnTo>
+                    <a:pt x="1763679" y="2056447"/>
+                  </a:lnTo>
+                  <a:lnTo>
+                    <a:pt x="1834226" y="2085465"/>
+                  </a:lnTo>
+                  <a:lnTo>
+                    <a:pt x="1904773" y="2113776"/>
+                  </a:lnTo>
+                  <a:lnTo>
+                    <a:pt x="1975320" y="2141399"/>
+                  </a:lnTo>
+                  <a:lnTo>
+                    <a:pt x="2045868" y="2168351"/>
+                  </a:lnTo>
+                  <a:lnTo>
+                    <a:pt x="2116415" y="2194646"/>
+                  </a:lnTo>
+                  <a:lnTo>
+                    <a:pt x="2186962" y="2220302"/>
+                  </a:lnTo>
+                  <a:lnTo>
+                    <a:pt x="2257509" y="2245334"/>
+                  </a:lnTo>
+                  <a:lnTo>
+                    <a:pt x="2328056" y="2269757"/>
+                  </a:lnTo>
+                  <a:lnTo>
+                    <a:pt x="2398603" y="2293586"/>
+                  </a:lnTo>
+                  <a:lnTo>
+                    <a:pt x="2469151" y="2316836"/>
+                  </a:lnTo>
+                  <a:lnTo>
+                    <a:pt x="2539698" y="2339520"/>
+                  </a:lnTo>
+                  <a:lnTo>
+                    <a:pt x="2610245" y="2361652"/>
+                  </a:lnTo>
+                  <a:lnTo>
+                    <a:pt x="2680792" y="2383246"/>
+                  </a:lnTo>
+                  <a:lnTo>
+                    <a:pt x="2751339" y="2404314"/>
+                  </a:lnTo>
+                  <a:lnTo>
+                    <a:pt x="2821886" y="2424870"/>
+                  </a:lnTo>
+                  <a:lnTo>
+                    <a:pt x="2892434" y="2444926"/>
+                  </a:lnTo>
+                  <a:lnTo>
+                    <a:pt x="2962981" y="2464495"/>
+                  </a:lnTo>
+                  <a:lnTo>
+                    <a:pt x="3033528" y="2466044"/>
+                  </a:lnTo>
+                  <a:lnTo>
+                    <a:pt x="3104075" y="2442126"/>
+                  </a:lnTo>
+                  <a:lnTo>
+                    <a:pt x="3174622" y="2417477"/>
+                  </a:lnTo>
+                  <a:lnTo>
+                    <a:pt x="3245169" y="2392075"/>
+                  </a:lnTo>
+                  <a:lnTo>
+                    <a:pt x="3315717" y="2365897"/>
+                  </a:lnTo>
+                  <a:lnTo>
+                    <a:pt x="3386264" y="2338921"/>
+                  </a:lnTo>
+                  <a:lnTo>
+                    <a:pt x="3456811" y="2311120"/>
+                  </a:lnTo>
+                  <a:lnTo>
+                    <a:pt x="3527358" y="2282471"/>
+                  </a:lnTo>
+                  <a:lnTo>
+                    <a:pt x="3597905" y="2252947"/>
+                  </a:lnTo>
+                  <a:lnTo>
+                    <a:pt x="3668452" y="2222522"/>
+                  </a:lnTo>
+                  <a:lnTo>
+                    <a:pt x="3739000" y="2191168"/>
+                  </a:lnTo>
+                  <a:lnTo>
+                    <a:pt x="3809547" y="2158856"/>
+                  </a:lnTo>
+                  <a:lnTo>
+                    <a:pt x="3880094" y="2125558"/>
+                  </a:lnTo>
+                  <a:lnTo>
+                    <a:pt x="3950641" y="2091242"/>
+                  </a:lnTo>
+                  <a:lnTo>
+                    <a:pt x="4021188" y="2055880"/>
+                  </a:lnTo>
+                  <a:lnTo>
+                    <a:pt x="4091736" y="2019437"/>
+                  </a:lnTo>
+                  <a:lnTo>
+                    <a:pt x="4162283" y="1981882"/>
+                  </a:lnTo>
+                  <a:lnTo>
+                    <a:pt x="4232830" y="1943180"/>
+                  </a:lnTo>
+                  <a:lnTo>
+                    <a:pt x="4303377" y="1903296"/>
+                  </a:lnTo>
+                  <a:lnTo>
+                    <a:pt x="4373924" y="1862195"/>
+                  </a:lnTo>
+                  <a:lnTo>
+                    <a:pt x="4444471" y="1819838"/>
+                  </a:lnTo>
+                  <a:lnTo>
+                    <a:pt x="4515019" y="1776189"/>
+                  </a:lnTo>
+                  <a:lnTo>
+                    <a:pt x="4585566" y="1731206"/>
+                  </a:lnTo>
+                  <a:lnTo>
+                    <a:pt x="4656113" y="1684850"/>
+                  </a:lnTo>
+                  <a:lnTo>
+                    <a:pt x="4726660" y="1637079"/>
+                  </a:lnTo>
+                  <a:lnTo>
+                    <a:pt x="4797207" y="1587849"/>
+                  </a:lnTo>
+                  <a:lnTo>
+                    <a:pt x="4867754" y="1537116"/>
+                  </a:lnTo>
+                  <a:lnTo>
+                    <a:pt x="4938302" y="1484833"/>
+                  </a:lnTo>
+                  <a:lnTo>
+                    <a:pt x="5008849" y="1430955"/>
+                  </a:lnTo>
+                  <a:lnTo>
+                    <a:pt x="5079396" y="1375431"/>
+                  </a:lnTo>
+                  <a:lnTo>
+                    <a:pt x="5149943" y="1318212"/>
+                  </a:lnTo>
+                  <a:lnTo>
+                    <a:pt x="5220490" y="1259246"/>
+                  </a:lnTo>
+                  <a:lnTo>
+                    <a:pt x="5291037" y="1198480"/>
+                  </a:lnTo>
+                  <a:lnTo>
+                    <a:pt x="5361585" y="1135858"/>
+                  </a:lnTo>
+                  <a:lnTo>
+                    <a:pt x="5432132" y="1071324"/>
+                  </a:lnTo>
+                  <a:lnTo>
+                    <a:pt x="5502679" y="1004819"/>
+                  </a:lnTo>
+                  <a:lnTo>
+                    <a:pt x="5573226" y="936284"/>
+                  </a:lnTo>
+                  <a:lnTo>
+                    <a:pt x="5643773" y="865656"/>
+                  </a:lnTo>
+                  <a:lnTo>
+                    <a:pt x="5714320" y="792872"/>
+                  </a:lnTo>
+                  <a:lnTo>
+                    <a:pt x="5784868" y="717866"/>
+                  </a:lnTo>
+                  <a:lnTo>
+                    <a:pt x="5855415" y="640569"/>
+                  </a:lnTo>
+                  <a:lnTo>
+                    <a:pt x="5925962" y="560912"/>
+                  </a:lnTo>
+                  <a:lnTo>
+                    <a:pt x="5996509" y="478823"/>
+                  </a:lnTo>
+                  <a:lnTo>
+                    <a:pt x="6067056" y="394227"/>
+                  </a:lnTo>
+                  <a:lnTo>
+                    <a:pt x="6137604" y="307049"/>
+                  </a:lnTo>
+                  <a:lnTo>
+                    <a:pt x="6208151" y="217208"/>
+                  </a:lnTo>
+                  <a:lnTo>
+                    <a:pt x="6278698" y="124625"/>
+                  </a:lnTo>
+                  <a:lnTo>
+                    <a:pt x="6349245" y="29214"/>
+                  </a:lnTo>
+                  <a:lnTo>
+                    <a:pt x="6370207" y="0"/>
+                  </a:lnTo>
+                  <a:lnTo>
+                    <a:pt x="6984170" y="0"/>
+                  </a:lnTo>
+                  <a:lnTo>
+                    <a:pt x="6984170" y="3056548"/>
+                  </a:lnTo>
+                  <a:lnTo>
+                    <a:pt x="6913622" y="3051740"/>
+                  </a:lnTo>
+                  <a:lnTo>
+                    <a:pt x="6843075" y="3046812"/>
+                  </a:lnTo>
+                  <a:lnTo>
+                    <a:pt x="6772528" y="3041761"/>
+                  </a:lnTo>
+                  <a:lnTo>
+                    <a:pt x="6701981" y="3036584"/>
+                  </a:lnTo>
+                  <a:lnTo>
+                    <a:pt x="6631434" y="3031279"/>
+                  </a:lnTo>
+                  <a:lnTo>
+                    <a:pt x="6560887" y="3025841"/>
+                  </a:lnTo>
+                  <a:lnTo>
+                    <a:pt x="6490339" y="3020267"/>
+                  </a:lnTo>
+                  <a:lnTo>
+                    <a:pt x="6419792" y="3014554"/>
+                  </a:lnTo>
+                  <a:lnTo>
+                    <a:pt x="6349245" y="3008699"/>
+                  </a:lnTo>
+                  <a:lnTo>
+                    <a:pt x="6278698" y="3002698"/>
+                  </a:lnTo>
+                  <a:lnTo>
+                    <a:pt x="6208151" y="2996548"/>
+                  </a:lnTo>
+                  <a:lnTo>
+                    <a:pt x="6137604" y="2990244"/>
+                  </a:lnTo>
+                  <a:lnTo>
+                    <a:pt x="6067056" y="2983783"/>
+                  </a:lnTo>
+                  <a:lnTo>
+                    <a:pt x="5996509" y="2977161"/>
+                  </a:lnTo>
+                  <a:lnTo>
+                    <a:pt x="5925962" y="2970374"/>
+                  </a:lnTo>
+                  <a:lnTo>
+                    <a:pt x="5855415" y="2963417"/>
+                  </a:lnTo>
+                  <a:lnTo>
+                    <a:pt x="5784868" y="2956287"/>
+                  </a:lnTo>
+                  <a:lnTo>
+                    <a:pt x="5714320" y="2948980"/>
+                  </a:lnTo>
+                  <a:lnTo>
+                    <a:pt x="5643773" y="2941490"/>
+                  </a:lnTo>
+                  <a:lnTo>
+                    <a:pt x="5573226" y="2933813"/>
+                  </a:lnTo>
+                  <a:lnTo>
+                    <a:pt x="5502679" y="2925945"/>
+                  </a:lnTo>
+                  <a:lnTo>
+                    <a:pt x="5432132" y="2917881"/>
+                  </a:lnTo>
+                  <a:lnTo>
+                    <a:pt x="5361585" y="2909616"/>
+                  </a:lnTo>
+                  <a:lnTo>
+                    <a:pt x="5291037" y="2901145"/>
+                  </a:lnTo>
+                  <a:lnTo>
+                    <a:pt x="5220490" y="2892463"/>
+                  </a:lnTo>
+                  <a:lnTo>
+                    <a:pt x="5149943" y="2883564"/>
+                  </a:lnTo>
+                  <a:lnTo>
+                    <a:pt x="5079396" y="2874443"/>
+                  </a:lnTo>
+                  <a:lnTo>
+                    <a:pt x="5008849" y="2865095"/>
+                  </a:lnTo>
+                  <a:lnTo>
+                    <a:pt x="4938302" y="2855514"/>
+                  </a:lnTo>
+                  <a:lnTo>
+                    <a:pt x="4867754" y="2845694"/>
+                  </a:lnTo>
+                  <a:lnTo>
+                    <a:pt x="4797207" y="2835630"/>
+                  </a:lnTo>
+                  <a:lnTo>
+                    <a:pt x="4726660" y="2825314"/>
+                  </a:lnTo>
+                  <a:lnTo>
+                    <a:pt x="4656113" y="2814741"/>
+                  </a:lnTo>
+                  <a:lnTo>
+                    <a:pt x="4585566" y="2803905"/>
+                  </a:lnTo>
+                  <a:lnTo>
+                    <a:pt x="4515019" y="2792798"/>
+                  </a:lnTo>
+                  <a:lnTo>
+                    <a:pt x="4444471" y="2781415"/>
+                  </a:lnTo>
+                  <a:lnTo>
+                    <a:pt x="4373924" y="2769747"/>
+                  </a:lnTo>
+                  <a:lnTo>
+                    <a:pt x="4303377" y="2757789"/>
+                  </a:lnTo>
+                  <a:lnTo>
+                    <a:pt x="4232830" y="2745533"/>
+                  </a:lnTo>
+                  <a:lnTo>
+                    <a:pt x="4162283" y="2732971"/>
+                  </a:lnTo>
+                  <a:lnTo>
+                    <a:pt x="4091736" y="2720096"/>
+                  </a:lnTo>
+                  <a:lnTo>
+                    <a:pt x="4021188" y="2706900"/>
+                  </a:lnTo>
+                  <a:lnTo>
+                    <a:pt x="3950641" y="2693375"/>
+                  </a:lnTo>
+                  <a:lnTo>
+                    <a:pt x="3880094" y="2679513"/>
+                  </a:lnTo>
+                  <a:lnTo>
+                    <a:pt x="3809547" y="2665305"/>
+                  </a:lnTo>
+                  <a:lnTo>
+                    <a:pt x="3739000" y="2650743"/>
+                  </a:lnTo>
+                  <a:lnTo>
+                    <a:pt x="3668452" y="2635818"/>
+                  </a:lnTo>
+                  <a:lnTo>
+                    <a:pt x="3597905" y="2620521"/>
+                  </a:lnTo>
+                  <a:lnTo>
+                    <a:pt x="3527358" y="2604843"/>
+                  </a:lnTo>
+                  <a:lnTo>
+                    <a:pt x="3456811" y="2588774"/>
+                  </a:lnTo>
+                  <a:lnTo>
+                    <a:pt x="3386264" y="2572304"/>
+                  </a:lnTo>
+                  <a:lnTo>
+                    <a:pt x="3315717" y="2555423"/>
+                  </a:lnTo>
+                  <a:lnTo>
+                    <a:pt x="3245169" y="2538122"/>
+                  </a:lnTo>
+                  <a:lnTo>
+                    <a:pt x="3174622" y="2520389"/>
+                  </a:lnTo>
+                  <a:lnTo>
+                    <a:pt x="3104075" y="2502215"/>
+                  </a:lnTo>
+                  <a:lnTo>
+                    <a:pt x="3033528" y="2483587"/>
+                  </a:lnTo>
+                  <a:lnTo>
+                    <a:pt x="2962981" y="2489255"/>
+                  </a:lnTo>
+                  <a:lnTo>
+                    <a:pt x="2892434" y="2511777"/>
+                  </a:lnTo>
+                  <a:lnTo>
+                    <a:pt x="2821886" y="2533632"/>
+                  </a:lnTo>
+                  <a:lnTo>
+                    <a:pt x="2751339" y="2554840"/>
+                  </a:lnTo>
+                  <a:lnTo>
+                    <a:pt x="2680792" y="2575419"/>
+                  </a:lnTo>
+                  <a:lnTo>
+                    <a:pt x="2610245" y="2595388"/>
+                  </a:lnTo>
+                  <a:lnTo>
+                    <a:pt x="2539698" y="2614766"/>
+                  </a:lnTo>
+                  <a:lnTo>
+                    <a:pt x="2469151" y="2633570"/>
+                  </a:lnTo>
+                  <a:lnTo>
+                    <a:pt x="2398603" y="2651816"/>
+                  </a:lnTo>
+                  <a:lnTo>
+                    <a:pt x="2328056" y="2669522"/>
+                  </a:lnTo>
+                  <a:lnTo>
+                    <a:pt x="2257509" y="2686704"/>
+                  </a:lnTo>
+                  <a:lnTo>
+                    <a:pt x="2186962" y="2703376"/>
+                  </a:lnTo>
+                  <a:lnTo>
+                    <a:pt x="2116415" y="2719554"/>
+                  </a:lnTo>
+                  <a:lnTo>
+                    <a:pt x="2045868" y="2735253"/>
+                  </a:lnTo>
+                  <a:lnTo>
+                    <a:pt x="1975320" y="2750487"/>
+                  </a:lnTo>
+                  <a:lnTo>
+                    <a:pt x="1904773" y="2765269"/>
+                  </a:lnTo>
+                  <a:lnTo>
+                    <a:pt x="1834226" y="2779614"/>
+                  </a:lnTo>
+                  <a:lnTo>
+                    <a:pt x="1763679" y="2793533"/>
+                  </a:lnTo>
+                  <a:lnTo>
+                    <a:pt x="1693132" y="2807040"/>
+                  </a:lnTo>
+                  <a:lnTo>
+                    <a:pt x="1622584" y="2820147"/>
+                  </a:lnTo>
+                  <a:lnTo>
+                    <a:pt x="1552037" y="2832865"/>
+                  </a:lnTo>
+                  <a:lnTo>
+                    <a:pt x="1481490" y="2845207"/>
+                  </a:lnTo>
+                  <a:lnTo>
+                    <a:pt x="1410943" y="2857183"/>
+                  </a:lnTo>
+                  <a:lnTo>
+                    <a:pt x="1340396" y="2868804"/>
+                  </a:lnTo>
+                  <a:lnTo>
+                    <a:pt x="1269849" y="2880081"/>
+                  </a:lnTo>
+                  <a:lnTo>
+                    <a:pt x="1199301" y="2891024"/>
+                  </a:lnTo>
+                  <a:lnTo>
+                    <a:pt x="1128754" y="2901642"/>
+                  </a:lnTo>
+                  <a:lnTo>
+                    <a:pt x="1058207" y="2911946"/>
+                  </a:lnTo>
+                  <a:lnTo>
+                    <a:pt x="987660" y="2921945"/>
+                  </a:lnTo>
+                  <a:lnTo>
+                    <a:pt x="917113" y="2931647"/>
+                  </a:lnTo>
+                  <a:lnTo>
+                    <a:pt x="846566" y="2941062"/>
+                  </a:lnTo>
+                  <a:lnTo>
+                    <a:pt x="776018" y="2950198"/>
+                  </a:lnTo>
+                  <a:lnTo>
+                    <a:pt x="705471" y="2959063"/>
+                  </a:lnTo>
+                  <a:lnTo>
+                    <a:pt x="634924" y="2967666"/>
+                  </a:lnTo>
+                  <a:lnTo>
+                    <a:pt x="564377" y="2976013"/>
+                  </a:lnTo>
+                  <a:lnTo>
+                    <a:pt x="493830" y="2984114"/>
+                  </a:lnTo>
+                  <a:lnTo>
+                    <a:pt x="423283" y="2991974"/>
+                  </a:lnTo>
+                  <a:lnTo>
+                    <a:pt x="352735" y="2999601"/>
+                  </a:lnTo>
+                  <a:lnTo>
+                    <a:pt x="282188" y="3007003"/>
+                  </a:lnTo>
+                  <a:lnTo>
+                    <a:pt x="211641" y="3014185"/>
+                  </a:lnTo>
+                  <a:lnTo>
+                    <a:pt x="141094" y="3021154"/>
+                  </a:lnTo>
+                  <a:lnTo>
+                    <a:pt x="70547" y="3027917"/>
+                  </a:lnTo>
+                  <a:lnTo>
+                    <a:pt x="0" y="3034480"/>
                   </a:lnTo>
                   <a:close/>
                 </a:path>
@@ -3741,288 +3741,288 @@
           </p:nvSpPr>
           <p:spPr>
             <a:xfrm>
-              <a:off x="1172049" y="2073503"/>
-              <a:ext cx="6467308" cy="2643889"/>
+              <a:off x="1264853" y="2209169"/>
+              <a:ext cx="6370207" cy="2466044"/>
             </a:xfrm>
             <a:custGeom>
               <a:avLst/>
               <a:pathLst>
-                <a:path w="6467308" h="2643889">
+                <a:path w="6370207" h="2466044">
                   <a:moveTo>
-                    <a:pt x="0" y="1116584"/>
+                    <a:pt x="0" y="1041475"/>
                   </a:moveTo>
                   <a:lnTo>
-                    <a:pt x="71622" y="1174163"/>
-                  </a:lnTo>
-                  <a:lnTo>
-                    <a:pt x="143245" y="1230341"/>
-                  </a:lnTo>
-                  <a:lnTo>
-                    <a:pt x="214867" y="1285153"/>
-                  </a:lnTo>
-                  <a:lnTo>
-                    <a:pt x="286490" y="1338631"/>
-                  </a:lnTo>
-                  <a:lnTo>
-                    <a:pt x="358112" y="1390809"/>
-                  </a:lnTo>
-                  <a:lnTo>
-                    <a:pt x="429735" y="1441718"/>
-                  </a:lnTo>
-                  <a:lnTo>
-                    <a:pt x="501357" y="1491388"/>
-                  </a:lnTo>
-                  <a:lnTo>
-                    <a:pt x="572980" y="1539850"/>
-                  </a:lnTo>
-                  <a:lnTo>
-                    <a:pt x="644602" y="1587134"/>
-                  </a:lnTo>
-                  <a:lnTo>
-                    <a:pt x="716225" y="1633267"/>
-                  </a:lnTo>
-                  <a:lnTo>
-                    <a:pt x="787847" y="1678278"/>
-                  </a:lnTo>
-                  <a:lnTo>
-                    <a:pt x="859470" y="1722194"/>
-                  </a:lnTo>
-                  <a:lnTo>
-                    <a:pt x="931092" y="1765042"/>
-                  </a:lnTo>
-                  <a:lnTo>
-                    <a:pt x="1002715" y="1806848"/>
-                  </a:lnTo>
-                  <a:lnTo>
-                    <a:pt x="1074337" y="1847637"/>
-                  </a:lnTo>
-                  <a:lnTo>
-                    <a:pt x="1145960" y="1887434"/>
-                  </a:lnTo>
-                  <a:lnTo>
-                    <a:pt x="1217582" y="1926263"/>
-                  </a:lnTo>
-                  <a:lnTo>
-                    <a:pt x="1289205" y="1964147"/>
-                  </a:lnTo>
-                  <a:lnTo>
-                    <a:pt x="1360827" y="2001110"/>
-                  </a:lnTo>
-                  <a:lnTo>
-                    <a:pt x="1432450" y="2037173"/>
-                  </a:lnTo>
-                  <a:lnTo>
-                    <a:pt x="1504073" y="2072360"/>
-                  </a:lnTo>
-                  <a:lnTo>
-                    <a:pt x="1575695" y="2106690"/>
-                  </a:lnTo>
-                  <a:lnTo>
-                    <a:pt x="1647318" y="2140186"/>
-                  </a:lnTo>
-                  <a:lnTo>
-                    <a:pt x="1718940" y="2172867"/>
-                  </a:lnTo>
-                  <a:lnTo>
-                    <a:pt x="1790563" y="2204753"/>
-                  </a:lnTo>
-                  <a:lnTo>
-                    <a:pt x="1862185" y="2235863"/>
-                  </a:lnTo>
-                  <a:lnTo>
-                    <a:pt x="1933808" y="2266216"/>
-                  </a:lnTo>
-                  <a:lnTo>
-                    <a:pt x="2005430" y="2295832"/>
-                  </a:lnTo>
-                  <a:lnTo>
-                    <a:pt x="2077053" y="2324727"/>
-                  </a:lnTo>
-                  <a:lnTo>
-                    <a:pt x="2148675" y="2352919"/>
-                  </a:lnTo>
-                  <a:lnTo>
-                    <a:pt x="2220298" y="2380425"/>
-                  </a:lnTo>
-                  <a:lnTo>
-                    <a:pt x="2291920" y="2407262"/>
-                  </a:lnTo>
-                  <a:lnTo>
-                    <a:pt x="2363543" y="2433446"/>
-                  </a:lnTo>
-                  <a:lnTo>
-                    <a:pt x="2435165" y="2458994"/>
-                  </a:lnTo>
-                  <a:lnTo>
-                    <a:pt x="2506788" y="2483920"/>
-                  </a:lnTo>
-                  <a:lnTo>
-                    <a:pt x="2578410" y="2508240"/>
-                  </a:lnTo>
-                  <a:lnTo>
-                    <a:pt x="2650033" y="2531968"/>
-                  </a:lnTo>
-                  <a:lnTo>
-                    <a:pt x="2721655" y="2555119"/>
-                  </a:lnTo>
-                  <a:lnTo>
-                    <a:pt x="2793278" y="2577707"/>
-                  </a:lnTo>
-                  <a:lnTo>
-                    <a:pt x="2864901" y="2599746"/>
-                  </a:lnTo>
-                  <a:lnTo>
-                    <a:pt x="2936523" y="2621248"/>
-                  </a:lnTo>
-                  <a:lnTo>
-                    <a:pt x="3008146" y="2642228"/>
-                  </a:lnTo>
-                  <a:lnTo>
-                    <a:pt x="3079768" y="2643889"/>
-                  </a:lnTo>
-                  <a:lnTo>
-                    <a:pt x="3151391" y="2618245"/>
-                  </a:lnTo>
-                  <a:lnTo>
-                    <a:pt x="3223013" y="2591819"/>
-                  </a:lnTo>
-                  <a:lnTo>
-                    <a:pt x="3294636" y="2564585"/>
-                  </a:lnTo>
-                  <a:lnTo>
-                    <a:pt x="3366258" y="2536520"/>
-                  </a:lnTo>
-                  <a:lnTo>
-                    <a:pt x="3437881" y="2507598"/>
-                  </a:lnTo>
-                  <a:lnTo>
-                    <a:pt x="3509503" y="2477792"/>
-                  </a:lnTo>
-                  <a:lnTo>
-                    <a:pt x="3581126" y="2447077"/>
-                  </a:lnTo>
-                  <a:lnTo>
-                    <a:pt x="3652748" y="2415424"/>
-                  </a:lnTo>
-                  <a:lnTo>
-                    <a:pt x="3724371" y="2382805"/>
-                  </a:lnTo>
-                  <a:lnTo>
-                    <a:pt x="3795993" y="2349189"/>
-                  </a:lnTo>
-                  <a:lnTo>
-                    <a:pt x="3867616" y="2314547"/>
-                  </a:lnTo>
-                  <a:lnTo>
-                    <a:pt x="3939238" y="2278847"/>
-                  </a:lnTo>
-                  <a:lnTo>
-                    <a:pt x="4010861" y="2242057"/>
-                  </a:lnTo>
-                  <a:lnTo>
-                    <a:pt x="4082483" y="2204144"/>
-                  </a:lnTo>
-                  <a:lnTo>
-                    <a:pt x="4154106" y="2165074"/>
-                  </a:lnTo>
-                  <a:lnTo>
-                    <a:pt x="4225729" y="2124810"/>
-                  </a:lnTo>
-                  <a:lnTo>
-                    <a:pt x="4297351" y="2083317"/>
-                  </a:lnTo>
-                  <a:lnTo>
-                    <a:pt x="4368974" y="2040557"/>
-                  </a:lnTo>
-                  <a:lnTo>
-                    <a:pt x="4440596" y="1996491"/>
-                  </a:lnTo>
-                  <a:lnTo>
-                    <a:pt x="4512219" y="1951080"/>
-                  </a:lnTo>
-                  <a:lnTo>
-                    <a:pt x="4583841" y="1904283"/>
-                  </a:lnTo>
-                  <a:lnTo>
-                    <a:pt x="4655464" y="1856056"/>
-                  </a:lnTo>
-                  <a:lnTo>
-                    <a:pt x="4727086" y="1806357"/>
-                  </a:lnTo>
-                  <a:lnTo>
-                    <a:pt x="4798709" y="1755141"/>
-                  </a:lnTo>
-                  <a:lnTo>
-                    <a:pt x="4870331" y="1702360"/>
-                  </a:lnTo>
-                  <a:lnTo>
-                    <a:pt x="4941954" y="1647969"/>
-                  </a:lnTo>
-                  <a:lnTo>
-                    <a:pt x="5013576" y="1591916"/>
-                  </a:lnTo>
-                  <a:lnTo>
-                    <a:pt x="5085199" y="1534152"/>
-                  </a:lnTo>
-                  <a:lnTo>
-                    <a:pt x="5156821" y="1474624"/>
-                  </a:lnTo>
-                  <a:lnTo>
-                    <a:pt x="5228444" y="1413278"/>
-                  </a:lnTo>
-                  <a:lnTo>
-                    <a:pt x="5300066" y="1350060"/>
-                  </a:lnTo>
-                  <a:lnTo>
-                    <a:pt x="5371689" y="1284911"/>
-                  </a:lnTo>
-                  <a:lnTo>
-                    <a:pt x="5443311" y="1217773"/>
-                  </a:lnTo>
-                  <a:lnTo>
-                    <a:pt x="5514934" y="1148585"/>
-                  </a:lnTo>
-                  <a:lnTo>
-                    <a:pt x="5586557" y="1077284"/>
-                  </a:lnTo>
-                  <a:lnTo>
-                    <a:pt x="5658179" y="1003806"/>
-                  </a:lnTo>
-                  <a:lnTo>
-                    <a:pt x="5729802" y="928085"/>
-                  </a:lnTo>
-                  <a:lnTo>
-                    <a:pt x="5801424" y="850052"/>
-                  </a:lnTo>
-                  <a:lnTo>
-                    <a:pt x="5873047" y="769636"/>
-                  </a:lnTo>
-                  <a:lnTo>
-                    <a:pt x="5944669" y="686765"/>
-                  </a:lnTo>
-                  <a:lnTo>
-                    <a:pt x="6016292" y="601364"/>
-                  </a:lnTo>
-                  <a:lnTo>
-                    <a:pt x="6087914" y="513354"/>
-                  </a:lnTo>
-                  <a:lnTo>
-                    <a:pt x="6159537" y="422658"/>
-                  </a:lnTo>
-                  <a:lnTo>
-                    <a:pt x="6231159" y="329192"/>
-                  </a:lnTo>
-                  <a:lnTo>
-                    <a:pt x="6302782" y="232873"/>
-                  </a:lnTo>
-                  <a:lnTo>
-                    <a:pt x="6374404" y="133612"/>
-                  </a:lnTo>
-                  <a:lnTo>
-                    <a:pt x="6446027" y="31321"/>
-                  </a:lnTo>
-                  <a:lnTo>
-                    <a:pt x="6467308" y="0"/>
+                    <a:pt x="70547" y="1095181"/>
+                  </a:lnTo>
+                  <a:lnTo>
+                    <a:pt x="141094" y="1147580"/>
+                  </a:lnTo>
+                  <a:lnTo>
+                    <a:pt x="211641" y="1198705"/>
+                  </a:lnTo>
+                  <a:lnTo>
+                    <a:pt x="282188" y="1248587"/>
+                  </a:lnTo>
+                  <a:lnTo>
+                    <a:pt x="352735" y="1297255"/>
+                  </a:lnTo>
+                  <a:lnTo>
+                    <a:pt x="423283" y="1344739"/>
+                  </a:lnTo>
+                  <a:lnTo>
+                    <a:pt x="493830" y="1391068"/>
+                  </a:lnTo>
+                  <a:lnTo>
+                    <a:pt x="564377" y="1436270"/>
+                  </a:lnTo>
+                  <a:lnTo>
+                    <a:pt x="634924" y="1480373"/>
+                  </a:lnTo>
+                  <a:lnTo>
+                    <a:pt x="705471" y="1523403"/>
+                  </a:lnTo>
+                  <a:lnTo>
+                    <a:pt x="776018" y="1565386"/>
+                  </a:lnTo>
+                  <a:lnTo>
+                    <a:pt x="846566" y="1606349"/>
+                  </a:lnTo>
+                  <a:lnTo>
+                    <a:pt x="917113" y="1646314"/>
+                  </a:lnTo>
+                  <a:lnTo>
+                    <a:pt x="987660" y="1685308"/>
+                  </a:lnTo>
+                  <a:lnTo>
+                    <a:pt x="1058207" y="1723353"/>
+                  </a:lnTo>
+                  <a:lnTo>
+                    <a:pt x="1128754" y="1760473"/>
+                  </a:lnTo>
+                  <a:lnTo>
+                    <a:pt x="1199301" y="1796690"/>
+                  </a:lnTo>
+                  <a:lnTo>
+                    <a:pt x="1269849" y="1832026"/>
+                  </a:lnTo>
+                  <a:lnTo>
+                    <a:pt x="1340396" y="1866502"/>
+                  </a:lnTo>
+                  <a:lnTo>
+                    <a:pt x="1410943" y="1900140"/>
+                  </a:lnTo>
+                  <a:lnTo>
+                    <a:pt x="1481490" y="1932960"/>
+                  </a:lnTo>
+                  <a:lnTo>
+                    <a:pt x="1552037" y="1964981"/>
+                  </a:lnTo>
+                  <a:lnTo>
+                    <a:pt x="1622584" y="1996223"/>
+                  </a:lnTo>
+                  <a:lnTo>
+                    <a:pt x="1693132" y="2026706"/>
+                  </a:lnTo>
+                  <a:lnTo>
+                    <a:pt x="1763679" y="2056447"/>
+                  </a:lnTo>
+                  <a:lnTo>
+                    <a:pt x="1834226" y="2085465"/>
+                  </a:lnTo>
+                  <a:lnTo>
+                    <a:pt x="1904773" y="2113776"/>
+                  </a:lnTo>
+                  <a:lnTo>
+                    <a:pt x="1975320" y="2141399"/>
+                  </a:lnTo>
+                  <a:lnTo>
+                    <a:pt x="2045868" y="2168351"/>
+                  </a:lnTo>
+                  <a:lnTo>
+                    <a:pt x="2116415" y="2194646"/>
+                  </a:lnTo>
+                  <a:lnTo>
+                    <a:pt x="2186962" y="2220302"/>
+                  </a:lnTo>
+                  <a:lnTo>
+                    <a:pt x="2257509" y="2245334"/>
+                  </a:lnTo>
+                  <a:lnTo>
+                    <a:pt x="2328056" y="2269757"/>
+                  </a:lnTo>
+                  <a:lnTo>
+                    <a:pt x="2398603" y="2293586"/>
+                  </a:lnTo>
+                  <a:lnTo>
+                    <a:pt x="2469151" y="2316836"/>
+                  </a:lnTo>
+                  <a:lnTo>
+                    <a:pt x="2539698" y="2339520"/>
+                  </a:lnTo>
+                  <a:lnTo>
+                    <a:pt x="2610245" y="2361652"/>
+                  </a:lnTo>
+                  <a:lnTo>
+                    <a:pt x="2680792" y="2383246"/>
+                  </a:lnTo>
+                  <a:lnTo>
+                    <a:pt x="2751339" y="2404314"/>
+                  </a:lnTo>
+                  <a:lnTo>
+                    <a:pt x="2821886" y="2424870"/>
+                  </a:lnTo>
+                  <a:lnTo>
+                    <a:pt x="2892434" y="2444926"/>
+                  </a:lnTo>
+                  <a:lnTo>
+                    <a:pt x="2962981" y="2464495"/>
+                  </a:lnTo>
+                  <a:lnTo>
+                    <a:pt x="3033528" y="2466044"/>
+                  </a:lnTo>
+                  <a:lnTo>
+                    <a:pt x="3104075" y="2442126"/>
+                  </a:lnTo>
+                  <a:lnTo>
+                    <a:pt x="3174622" y="2417477"/>
+                  </a:lnTo>
+                  <a:lnTo>
+                    <a:pt x="3245169" y="2392075"/>
+                  </a:lnTo>
+                  <a:lnTo>
+                    <a:pt x="3315717" y="2365897"/>
+                  </a:lnTo>
+                  <a:lnTo>
+                    <a:pt x="3386264" y="2338921"/>
+                  </a:lnTo>
+                  <a:lnTo>
+                    <a:pt x="3456811" y="2311120"/>
+                  </a:lnTo>
+                  <a:lnTo>
+                    <a:pt x="3527358" y="2282471"/>
+                  </a:lnTo>
+                  <a:lnTo>
+                    <a:pt x="3597905" y="2252947"/>
+                  </a:lnTo>
+                  <a:lnTo>
+                    <a:pt x="3668452" y="2222522"/>
+                  </a:lnTo>
+                  <a:lnTo>
+                    <a:pt x="3739000" y="2191168"/>
+                  </a:lnTo>
+                  <a:lnTo>
+                    <a:pt x="3809547" y="2158856"/>
+                  </a:lnTo>
+                  <a:lnTo>
+                    <a:pt x="3880094" y="2125558"/>
+                  </a:lnTo>
+                  <a:lnTo>
+                    <a:pt x="3950641" y="2091242"/>
+                  </a:lnTo>
+                  <a:lnTo>
+                    <a:pt x="4021188" y="2055880"/>
+                  </a:lnTo>
+                  <a:lnTo>
+                    <a:pt x="4091736" y="2019437"/>
+                  </a:lnTo>
+                  <a:lnTo>
+                    <a:pt x="4162283" y="1981882"/>
+                  </a:lnTo>
+                  <a:lnTo>
+                    <a:pt x="4232830" y="1943180"/>
+                  </a:lnTo>
+                  <a:lnTo>
+                    <a:pt x="4303377" y="1903296"/>
+                  </a:lnTo>
+                  <a:lnTo>
+                    <a:pt x="4373924" y="1862195"/>
+                  </a:lnTo>
+                  <a:lnTo>
+                    <a:pt x="4444471" y="1819838"/>
+                  </a:lnTo>
+                  <a:lnTo>
+                    <a:pt x="4515019" y="1776189"/>
+                  </a:lnTo>
+                  <a:lnTo>
+                    <a:pt x="4585566" y="1731206"/>
+                  </a:lnTo>
+                  <a:lnTo>
+                    <a:pt x="4656113" y="1684850"/>
+                  </a:lnTo>
+                  <a:lnTo>
+                    <a:pt x="4726660" y="1637079"/>
+                  </a:lnTo>
+                  <a:lnTo>
+                    <a:pt x="4797207" y="1587849"/>
+                  </a:lnTo>
+                  <a:lnTo>
+                    <a:pt x="4867754" y="1537116"/>
+                  </a:lnTo>
+                  <a:lnTo>
+                    <a:pt x="4938302" y="1484833"/>
+                  </a:lnTo>
+                  <a:lnTo>
+                    <a:pt x="5008849" y="1430955"/>
+                  </a:lnTo>
+                  <a:lnTo>
+                    <a:pt x="5079396" y="1375431"/>
+                  </a:lnTo>
+                  <a:lnTo>
+                    <a:pt x="5149943" y="1318212"/>
+                  </a:lnTo>
+                  <a:lnTo>
+                    <a:pt x="5220490" y="1259246"/>
+                  </a:lnTo>
+                  <a:lnTo>
+                    <a:pt x="5291037" y="1198480"/>
+                  </a:lnTo>
+                  <a:lnTo>
+                    <a:pt x="5361585" y="1135858"/>
+                  </a:lnTo>
+                  <a:lnTo>
+                    <a:pt x="5432132" y="1071324"/>
+                  </a:lnTo>
+                  <a:lnTo>
+                    <a:pt x="5502679" y="1004819"/>
+                  </a:lnTo>
+                  <a:lnTo>
+                    <a:pt x="5573226" y="936284"/>
+                  </a:lnTo>
+                  <a:lnTo>
+                    <a:pt x="5643773" y="865656"/>
+                  </a:lnTo>
+                  <a:lnTo>
+                    <a:pt x="5714320" y="792872"/>
+                  </a:lnTo>
+                  <a:lnTo>
+                    <a:pt x="5784868" y="717866"/>
+                  </a:lnTo>
+                  <a:lnTo>
+                    <a:pt x="5855415" y="640569"/>
+                  </a:lnTo>
+                  <a:lnTo>
+                    <a:pt x="5925962" y="560912"/>
+                  </a:lnTo>
+                  <a:lnTo>
+                    <a:pt x="5996509" y="478823"/>
+                  </a:lnTo>
+                  <a:lnTo>
+                    <a:pt x="6067056" y="394227"/>
+                  </a:lnTo>
+                  <a:lnTo>
+                    <a:pt x="6137604" y="307049"/>
+                  </a:lnTo>
+                  <a:lnTo>
+                    <a:pt x="6208151" y="217208"/>
+                  </a:lnTo>
+                  <a:lnTo>
+                    <a:pt x="6278698" y="124625"/>
+                  </a:lnTo>
+                  <a:lnTo>
+                    <a:pt x="6349245" y="29214"/>
+                  </a:lnTo>
+                  <a:lnTo>
+                    <a:pt x="6370207" y="0"/>
                   </a:lnTo>
                 </a:path>
               </a:pathLst>
@@ -4042,312 +4042,312 @@
           </p:nvSpPr>
           <p:spPr>
             <a:xfrm>
-              <a:off x="1172049" y="4736200"/>
-              <a:ext cx="7090630" cy="614281"/>
+              <a:off x="1264853" y="4692756"/>
+              <a:ext cx="6984170" cy="572961"/>
             </a:xfrm>
             <a:custGeom>
               <a:avLst/>
               <a:pathLst>
-                <a:path w="7090630" h="614281">
+                <a:path w="6984170" h="572961">
                   <a:moveTo>
-                    <a:pt x="7090630" y="614281"/>
+                    <a:pt x="6984170" y="572961"/>
                   </a:moveTo>
                   <a:lnTo>
-                    <a:pt x="7019007" y="609126"/>
-                  </a:lnTo>
-                  <a:lnTo>
-                    <a:pt x="6947385" y="603843"/>
-                  </a:lnTo>
-                  <a:lnTo>
-                    <a:pt x="6875762" y="598428"/>
-                  </a:lnTo>
-                  <a:lnTo>
-                    <a:pt x="6804139" y="592878"/>
-                  </a:lnTo>
-                  <a:lnTo>
-                    <a:pt x="6732517" y="587189"/>
-                  </a:lnTo>
-                  <a:lnTo>
-                    <a:pt x="6660894" y="581359"/>
-                  </a:lnTo>
-                  <a:lnTo>
-                    <a:pt x="6589272" y="575384"/>
-                  </a:lnTo>
-                  <a:lnTo>
-                    <a:pt x="6517649" y="569259"/>
-                  </a:lnTo>
-                  <a:lnTo>
-                    <a:pt x="6446027" y="562982"/>
-                  </a:lnTo>
-                  <a:lnTo>
-                    <a:pt x="6374404" y="556548"/>
-                  </a:lnTo>
-                  <a:lnTo>
-                    <a:pt x="6302782" y="549954"/>
-                  </a:lnTo>
-                  <a:lnTo>
-                    <a:pt x="6231159" y="543195"/>
-                  </a:lnTo>
-                  <a:lnTo>
-                    <a:pt x="6159537" y="536268"/>
-                  </a:lnTo>
-                  <a:lnTo>
-                    <a:pt x="6087914" y="529169"/>
-                  </a:lnTo>
-                  <a:lnTo>
-                    <a:pt x="6016292" y="521892"/>
-                  </a:lnTo>
-                  <a:lnTo>
-                    <a:pt x="5944669" y="514434"/>
-                  </a:lnTo>
-                  <a:lnTo>
-                    <a:pt x="5873047" y="506790"/>
-                  </a:lnTo>
-                  <a:lnTo>
-                    <a:pt x="5801424" y="498955"/>
-                  </a:lnTo>
-                  <a:lnTo>
-                    <a:pt x="5729802" y="490925"/>
-                  </a:lnTo>
-                  <a:lnTo>
-                    <a:pt x="5658179" y="482695"/>
-                  </a:lnTo>
-                  <a:lnTo>
-                    <a:pt x="5586557" y="474260"/>
-                  </a:lnTo>
-                  <a:lnTo>
-                    <a:pt x="5514934" y="465614"/>
-                  </a:lnTo>
-                  <a:lnTo>
-                    <a:pt x="5443311" y="456753"/>
-                  </a:lnTo>
-                  <a:lnTo>
-                    <a:pt x="5371689" y="447671"/>
-                  </a:lnTo>
-                  <a:lnTo>
-                    <a:pt x="5300066" y="438362"/>
-                  </a:lnTo>
-                  <a:lnTo>
-                    <a:pt x="5228444" y="428822"/>
-                  </a:lnTo>
-                  <a:lnTo>
-                    <a:pt x="5156821" y="419044"/>
-                  </a:lnTo>
-                  <a:lnTo>
-                    <a:pt x="5085199" y="409021"/>
-                  </a:lnTo>
-                  <a:lnTo>
-                    <a:pt x="5013576" y="398749"/>
-                  </a:lnTo>
-                  <a:lnTo>
-                    <a:pt x="4941954" y="388221"/>
-                  </a:lnTo>
-                  <a:lnTo>
-                    <a:pt x="4870331" y="377431"/>
-                  </a:lnTo>
-                  <a:lnTo>
-                    <a:pt x="4798709" y="366371"/>
-                  </a:lnTo>
-                  <a:lnTo>
-                    <a:pt x="4727086" y="355036"/>
-                  </a:lnTo>
-                  <a:lnTo>
-                    <a:pt x="4655464" y="343418"/>
-                  </a:lnTo>
-                  <a:lnTo>
-                    <a:pt x="4583841" y="331510"/>
-                  </a:lnTo>
-                  <a:lnTo>
-                    <a:pt x="4512219" y="319306"/>
-                  </a:lnTo>
-                  <a:lnTo>
-                    <a:pt x="4440596" y="306797"/>
-                  </a:lnTo>
-                  <a:lnTo>
-                    <a:pt x="4368974" y="293977"/>
-                  </a:lnTo>
-                  <a:lnTo>
-                    <a:pt x="4297351" y="280836"/>
-                  </a:lnTo>
-                  <a:lnTo>
-                    <a:pt x="4225729" y="267369"/>
-                  </a:lnTo>
-                  <a:lnTo>
-                    <a:pt x="4154106" y="253565"/>
-                  </a:lnTo>
-                  <a:lnTo>
-                    <a:pt x="4082483" y="239418"/>
-                  </a:lnTo>
-                  <a:lnTo>
-                    <a:pt x="4010861" y="224917"/>
-                  </a:lnTo>
-                  <a:lnTo>
-                    <a:pt x="3939238" y="210055"/>
-                  </a:lnTo>
-                  <a:lnTo>
-                    <a:pt x="3867616" y="194823"/>
-                  </a:lnTo>
-                  <a:lnTo>
-                    <a:pt x="3795993" y="179211"/>
-                  </a:lnTo>
-                  <a:lnTo>
-                    <a:pt x="3724371" y="163210"/>
-                  </a:lnTo>
-                  <a:lnTo>
-                    <a:pt x="3652748" y="146809"/>
-                  </a:lnTo>
-                  <a:lnTo>
-                    <a:pt x="3581126" y="130000"/>
-                  </a:lnTo>
-                  <a:lnTo>
-                    <a:pt x="3509503" y="112772"/>
-                  </a:lnTo>
-                  <a:lnTo>
-                    <a:pt x="3437881" y="95115"/>
-                  </a:lnTo>
-                  <a:lnTo>
-                    <a:pt x="3366258" y="77017"/>
-                  </a:lnTo>
-                  <a:lnTo>
-                    <a:pt x="3294636" y="58468"/>
-                  </a:lnTo>
-                  <a:lnTo>
-                    <a:pt x="3223013" y="39456"/>
-                  </a:lnTo>
-                  <a:lnTo>
-                    <a:pt x="3151391" y="19971"/>
-                  </a:lnTo>
-                  <a:lnTo>
-                    <a:pt x="3079768" y="0"/>
-                  </a:lnTo>
-                  <a:lnTo>
-                    <a:pt x="3008146" y="6076"/>
-                  </a:lnTo>
-                  <a:lnTo>
-                    <a:pt x="2936523" y="30223"/>
-                  </a:lnTo>
-                  <a:lnTo>
-                    <a:pt x="2864901" y="53654"/>
-                  </a:lnTo>
-                  <a:lnTo>
-                    <a:pt x="2793278" y="76391"/>
-                  </a:lnTo>
-                  <a:lnTo>
-                    <a:pt x="2721655" y="98454"/>
-                  </a:lnTo>
-                  <a:lnTo>
-                    <a:pt x="2650033" y="119864"/>
-                  </a:lnTo>
-                  <a:lnTo>
-                    <a:pt x="2578410" y="140639"/>
-                  </a:lnTo>
-                  <a:lnTo>
-                    <a:pt x="2506788" y="160799"/>
-                  </a:lnTo>
-                  <a:lnTo>
-                    <a:pt x="2435165" y="180361"/>
-                  </a:lnTo>
-                  <a:lnTo>
-                    <a:pt x="2363543" y="199344"/>
-                  </a:lnTo>
-                  <a:lnTo>
-                    <a:pt x="2291920" y="217764"/>
-                  </a:lnTo>
-                  <a:lnTo>
-                    <a:pt x="2220298" y="235639"/>
-                  </a:lnTo>
-                  <a:lnTo>
-                    <a:pt x="2148675" y="252984"/>
-                  </a:lnTo>
-                  <a:lnTo>
-                    <a:pt x="2077053" y="269815"/>
-                  </a:lnTo>
-                  <a:lnTo>
-                    <a:pt x="2005430" y="286148"/>
-                  </a:lnTo>
-                  <a:lnTo>
-                    <a:pt x="1933808" y="301996"/>
-                  </a:lnTo>
-                  <a:lnTo>
-                    <a:pt x="1862185" y="317375"/>
-                  </a:lnTo>
-                  <a:lnTo>
-                    <a:pt x="1790563" y="332298"/>
-                  </a:lnTo>
-                  <a:lnTo>
-                    <a:pt x="1718940" y="346779"/>
-                  </a:lnTo>
-                  <a:lnTo>
-                    <a:pt x="1647318" y="360831"/>
-                  </a:lnTo>
-                  <a:lnTo>
-                    <a:pt x="1575695" y="374467"/>
-                  </a:lnTo>
-                  <a:lnTo>
-                    <a:pt x="1504073" y="387699"/>
-                  </a:lnTo>
-                  <a:lnTo>
-                    <a:pt x="1432450" y="400538"/>
-                  </a:lnTo>
-                  <a:lnTo>
-                    <a:pt x="1360827" y="412998"/>
-                  </a:lnTo>
-                  <a:lnTo>
-                    <a:pt x="1289205" y="425088"/>
-                  </a:lnTo>
-                  <a:lnTo>
-                    <a:pt x="1217582" y="436820"/>
-                  </a:lnTo>
-                  <a:lnTo>
-                    <a:pt x="1145960" y="448204"/>
-                  </a:lnTo>
-                  <a:lnTo>
-                    <a:pt x="1074337" y="459251"/>
-                  </a:lnTo>
-                  <a:lnTo>
-                    <a:pt x="1002715" y="469971"/>
-                  </a:lnTo>
-                  <a:lnTo>
-                    <a:pt x="931092" y="480373"/>
-                  </a:lnTo>
-                  <a:lnTo>
-                    <a:pt x="859470" y="490466"/>
-                  </a:lnTo>
-                  <a:lnTo>
-                    <a:pt x="787847" y="500261"/>
-                  </a:lnTo>
-                  <a:lnTo>
-                    <a:pt x="716225" y="509766"/>
-                  </a:lnTo>
-                  <a:lnTo>
-                    <a:pt x="644602" y="518989"/>
-                  </a:lnTo>
-                  <a:lnTo>
-                    <a:pt x="572980" y="527938"/>
-                  </a:lnTo>
-                  <a:lnTo>
-                    <a:pt x="501357" y="536623"/>
-                  </a:lnTo>
-                  <a:lnTo>
-                    <a:pt x="429735" y="545050"/>
-                  </a:lnTo>
-                  <a:lnTo>
-                    <a:pt x="358112" y="553228"/>
-                  </a:lnTo>
-                  <a:lnTo>
-                    <a:pt x="286490" y="561163"/>
-                  </a:lnTo>
-                  <a:lnTo>
-                    <a:pt x="214867" y="568863"/>
-                  </a:lnTo>
-                  <a:lnTo>
-                    <a:pt x="143245" y="576335"/>
-                  </a:lnTo>
-                  <a:lnTo>
-                    <a:pt x="71622" y="583586"/>
-                  </a:lnTo>
-                  <a:lnTo>
-                    <a:pt x="0" y="590621"/>
+                    <a:pt x="6913622" y="568152"/>
+                  </a:lnTo>
+                  <a:lnTo>
+                    <a:pt x="6843075" y="563225"/>
+                  </a:lnTo>
+                  <a:lnTo>
+                    <a:pt x="6772528" y="558174"/>
+                  </a:lnTo>
+                  <a:lnTo>
+                    <a:pt x="6701981" y="552997"/>
+                  </a:lnTo>
+                  <a:lnTo>
+                    <a:pt x="6631434" y="547691"/>
+                  </a:lnTo>
+                  <a:lnTo>
+                    <a:pt x="6560887" y="542253"/>
+                  </a:lnTo>
+                  <a:lnTo>
+                    <a:pt x="6490339" y="536680"/>
+                  </a:lnTo>
+                  <a:lnTo>
+                    <a:pt x="6419792" y="530967"/>
+                  </a:lnTo>
+                  <a:lnTo>
+                    <a:pt x="6349245" y="525112"/>
+                  </a:lnTo>
+                  <a:lnTo>
+                    <a:pt x="6278698" y="519111"/>
+                  </a:lnTo>
+                  <a:lnTo>
+                    <a:pt x="6208151" y="512960"/>
+                  </a:lnTo>
+                  <a:lnTo>
+                    <a:pt x="6137604" y="506657"/>
+                  </a:lnTo>
+                  <a:lnTo>
+                    <a:pt x="6067056" y="500196"/>
+                  </a:lnTo>
+                  <a:lnTo>
+                    <a:pt x="5996509" y="493573"/>
+                  </a:lnTo>
+                  <a:lnTo>
+                    <a:pt x="5925962" y="486786"/>
+                  </a:lnTo>
+                  <a:lnTo>
+                    <a:pt x="5855415" y="479830"/>
+                  </a:lnTo>
+                  <a:lnTo>
+                    <a:pt x="5784868" y="472700"/>
+                  </a:lnTo>
+                  <a:lnTo>
+                    <a:pt x="5714320" y="465392"/>
+                  </a:lnTo>
+                  <a:lnTo>
+                    <a:pt x="5643773" y="457902"/>
+                  </a:lnTo>
+                  <a:lnTo>
+                    <a:pt x="5573226" y="450226"/>
+                  </a:lnTo>
+                  <a:lnTo>
+                    <a:pt x="5502679" y="442358"/>
+                  </a:lnTo>
+                  <a:lnTo>
+                    <a:pt x="5432132" y="434294"/>
+                  </a:lnTo>
+                  <a:lnTo>
+                    <a:pt x="5361585" y="426029"/>
+                  </a:lnTo>
+                  <a:lnTo>
+                    <a:pt x="5291037" y="417558"/>
+                  </a:lnTo>
+                  <a:lnTo>
+                    <a:pt x="5220490" y="408875"/>
+                  </a:lnTo>
+                  <a:lnTo>
+                    <a:pt x="5149943" y="399977"/>
+                  </a:lnTo>
+                  <a:lnTo>
+                    <a:pt x="5079396" y="390856"/>
+                  </a:lnTo>
+                  <a:lnTo>
+                    <a:pt x="5008849" y="381508"/>
+                  </a:lnTo>
+                  <a:lnTo>
+                    <a:pt x="4938302" y="371927"/>
+                  </a:lnTo>
+                  <a:lnTo>
+                    <a:pt x="4867754" y="362107"/>
+                  </a:lnTo>
+                  <a:lnTo>
+                    <a:pt x="4797207" y="352042"/>
+                  </a:lnTo>
+                  <a:lnTo>
+                    <a:pt x="4726660" y="341727"/>
+                  </a:lnTo>
+                  <a:lnTo>
+                    <a:pt x="4656113" y="331154"/>
+                  </a:lnTo>
+                  <a:lnTo>
+                    <a:pt x="4585566" y="320317"/>
+                  </a:lnTo>
+                  <a:lnTo>
+                    <a:pt x="4515019" y="309211"/>
+                  </a:lnTo>
+                  <a:lnTo>
+                    <a:pt x="4444471" y="297827"/>
+                  </a:lnTo>
+                  <a:lnTo>
+                    <a:pt x="4373924" y="286160"/>
+                  </a:lnTo>
+                  <a:lnTo>
+                    <a:pt x="4303377" y="274202"/>
+                  </a:lnTo>
+                  <a:lnTo>
+                    <a:pt x="4232830" y="261946"/>
+                  </a:lnTo>
+                  <a:lnTo>
+                    <a:pt x="4162283" y="249384"/>
+                  </a:lnTo>
+                  <a:lnTo>
+                    <a:pt x="4091736" y="236509"/>
+                  </a:lnTo>
+                  <a:lnTo>
+                    <a:pt x="4021188" y="223313"/>
+                  </a:lnTo>
+                  <a:lnTo>
+                    <a:pt x="3950641" y="209788"/>
+                  </a:lnTo>
+                  <a:lnTo>
+                    <a:pt x="3880094" y="195926"/>
+                  </a:lnTo>
+                  <a:lnTo>
+                    <a:pt x="3809547" y="181718"/>
+                  </a:lnTo>
+                  <a:lnTo>
+                    <a:pt x="3739000" y="167156"/>
+                  </a:lnTo>
+                  <a:lnTo>
+                    <a:pt x="3668452" y="152231"/>
+                  </a:lnTo>
+                  <a:lnTo>
+                    <a:pt x="3597905" y="136934"/>
+                  </a:lnTo>
+                  <a:lnTo>
+                    <a:pt x="3527358" y="121256"/>
+                  </a:lnTo>
+                  <a:lnTo>
+                    <a:pt x="3456811" y="105186"/>
+                  </a:lnTo>
+                  <a:lnTo>
+                    <a:pt x="3386264" y="88717"/>
+                  </a:lnTo>
+                  <a:lnTo>
+                    <a:pt x="3315717" y="71836"/>
+                  </a:lnTo>
+                  <a:lnTo>
+                    <a:pt x="3245169" y="54535"/>
+                  </a:lnTo>
+                  <a:lnTo>
+                    <a:pt x="3174622" y="36802"/>
+                  </a:lnTo>
+                  <a:lnTo>
+                    <a:pt x="3104075" y="18627"/>
+                  </a:lnTo>
+                  <a:lnTo>
+                    <a:pt x="3033528" y="0"/>
+                  </a:lnTo>
+                  <a:lnTo>
+                    <a:pt x="2962981" y="5667"/>
+                  </a:lnTo>
+                  <a:lnTo>
+                    <a:pt x="2892434" y="28190"/>
+                  </a:lnTo>
+                  <a:lnTo>
+                    <a:pt x="2821886" y="50045"/>
+                  </a:lnTo>
+                  <a:lnTo>
+                    <a:pt x="2751339" y="71252"/>
+                  </a:lnTo>
+                  <a:lnTo>
+                    <a:pt x="2680792" y="91832"/>
+                  </a:lnTo>
+                  <a:lnTo>
+                    <a:pt x="2610245" y="111801"/>
+                  </a:lnTo>
+                  <a:lnTo>
+                    <a:pt x="2539698" y="131179"/>
+                  </a:lnTo>
+                  <a:lnTo>
+                    <a:pt x="2469151" y="149982"/>
+                  </a:lnTo>
+                  <a:lnTo>
+                    <a:pt x="2398603" y="168229"/>
+                  </a:lnTo>
+                  <a:lnTo>
+                    <a:pt x="2328056" y="185935"/>
+                  </a:lnTo>
+                  <a:lnTo>
+                    <a:pt x="2257509" y="203116"/>
+                  </a:lnTo>
+                  <a:lnTo>
+                    <a:pt x="2186962" y="219788"/>
+                  </a:lnTo>
+                  <a:lnTo>
+                    <a:pt x="2116415" y="235967"/>
+                  </a:lnTo>
+                  <a:lnTo>
+                    <a:pt x="2045868" y="251666"/>
+                  </a:lnTo>
+                  <a:lnTo>
+                    <a:pt x="1975320" y="266899"/>
+                  </a:lnTo>
+                  <a:lnTo>
+                    <a:pt x="1904773" y="281682"/>
+                  </a:lnTo>
+                  <a:lnTo>
+                    <a:pt x="1834226" y="296026"/>
+                  </a:lnTo>
+                  <a:lnTo>
+                    <a:pt x="1763679" y="309946"/>
+                  </a:lnTo>
+                  <a:lnTo>
+                    <a:pt x="1693132" y="323453"/>
+                  </a:lnTo>
+                  <a:lnTo>
+                    <a:pt x="1622584" y="336560"/>
+                  </a:lnTo>
+                  <a:lnTo>
+                    <a:pt x="1552037" y="349278"/>
+                  </a:lnTo>
+                  <a:lnTo>
+                    <a:pt x="1481490" y="361620"/>
+                  </a:lnTo>
+                  <a:lnTo>
+                    <a:pt x="1410943" y="373596"/>
+                  </a:lnTo>
+                  <a:lnTo>
+                    <a:pt x="1340396" y="385217"/>
+                  </a:lnTo>
+                  <a:lnTo>
+                    <a:pt x="1269849" y="396494"/>
+                  </a:lnTo>
+                  <a:lnTo>
+                    <a:pt x="1199301" y="407436"/>
+                  </a:lnTo>
+                  <a:lnTo>
+                    <a:pt x="1128754" y="418055"/>
+                  </a:lnTo>
+                  <a:lnTo>
+                    <a:pt x="1058207" y="428359"/>
+                  </a:lnTo>
+                  <a:lnTo>
+                    <a:pt x="987660" y="438357"/>
+                  </a:lnTo>
+                  <a:lnTo>
+                    <a:pt x="917113" y="448060"/>
+                  </a:lnTo>
+                  <a:lnTo>
+                    <a:pt x="846566" y="457474"/>
+                  </a:lnTo>
+                  <a:lnTo>
+                    <a:pt x="776018" y="466610"/>
+                  </a:lnTo>
+                  <a:lnTo>
+                    <a:pt x="705471" y="475476"/>
+                  </a:lnTo>
+                  <a:lnTo>
+                    <a:pt x="634924" y="484078"/>
+                  </a:lnTo>
+                  <a:lnTo>
+                    <a:pt x="564377" y="492426"/>
+                  </a:lnTo>
+                  <a:lnTo>
+                    <a:pt x="493830" y="500526"/>
+                  </a:lnTo>
+                  <a:lnTo>
+                    <a:pt x="423283" y="508387"/>
+                  </a:lnTo>
+                  <a:lnTo>
+                    <a:pt x="352735" y="516014"/>
+                  </a:lnTo>
+                  <a:lnTo>
+                    <a:pt x="282188" y="523415"/>
+                  </a:lnTo>
+                  <a:lnTo>
+                    <a:pt x="211641" y="530598"/>
+                  </a:lnTo>
+                  <a:lnTo>
+                    <a:pt x="141094" y="537567"/>
+                  </a:lnTo>
+                  <a:lnTo>
+                    <a:pt x="70547" y="544330"/>
+                  </a:lnTo>
+                  <a:lnTo>
+                    <a:pt x="0" y="550892"/>
                   </a:lnTo>
                 </a:path>
               </a:pathLst>
@@ -4367,312 +4367,312 @@
           </p:nvSpPr>
           <p:spPr>
             <a:xfrm>
-              <a:off x="1172049" y="4589900"/>
-              <a:ext cx="7090630" cy="228796"/>
+              <a:off x="1264853" y="4556297"/>
+              <a:ext cx="6984170" cy="213406"/>
             </a:xfrm>
             <a:custGeom>
               <a:avLst/>
               <a:pathLst>
-                <a:path w="7090630" h="228796">
+                <a:path w="6984170" h="213406">
                   <a:moveTo>
-                    <a:pt x="0" y="228796"/>
+                    <a:pt x="0" y="213406"/>
                   </a:moveTo>
                   <a:lnTo>
-                    <a:pt x="71622" y="226780"/>
-                  </a:lnTo>
-                  <a:lnTo>
-                    <a:pt x="143245" y="224759"/>
-                  </a:lnTo>
-                  <a:lnTo>
-                    <a:pt x="214867" y="222732"/>
-                  </a:lnTo>
-                  <a:lnTo>
-                    <a:pt x="286490" y="220699"/>
-                  </a:lnTo>
-                  <a:lnTo>
-                    <a:pt x="358112" y="218661"/>
-                  </a:lnTo>
-                  <a:lnTo>
-                    <a:pt x="429735" y="216617"/>
-                  </a:lnTo>
-                  <a:lnTo>
-                    <a:pt x="501357" y="214568"/>
-                  </a:lnTo>
-                  <a:lnTo>
-                    <a:pt x="572980" y="212513"/>
-                  </a:lnTo>
-                  <a:lnTo>
-                    <a:pt x="644602" y="210453"/>
-                  </a:lnTo>
-                  <a:lnTo>
-                    <a:pt x="716225" y="208387"/>
-                  </a:lnTo>
-                  <a:lnTo>
-                    <a:pt x="787847" y="206315"/>
-                  </a:lnTo>
-                  <a:lnTo>
-                    <a:pt x="859470" y="204238"/>
-                  </a:lnTo>
-                  <a:lnTo>
-                    <a:pt x="931092" y="202155"/>
-                  </a:lnTo>
-                  <a:lnTo>
-                    <a:pt x="1002715" y="200066"/>
-                  </a:lnTo>
-                  <a:lnTo>
-                    <a:pt x="1074337" y="197972"/>
-                  </a:lnTo>
-                  <a:lnTo>
-                    <a:pt x="1145960" y="195872"/>
-                  </a:lnTo>
-                  <a:lnTo>
-                    <a:pt x="1217582" y="193766"/>
-                  </a:lnTo>
-                  <a:lnTo>
-                    <a:pt x="1289205" y="191654"/>
-                  </a:lnTo>
-                  <a:lnTo>
-                    <a:pt x="1360827" y="189537"/>
-                  </a:lnTo>
-                  <a:lnTo>
-                    <a:pt x="1432450" y="187414"/>
-                  </a:lnTo>
-                  <a:lnTo>
-                    <a:pt x="1504073" y="185285"/>
-                  </a:lnTo>
-                  <a:lnTo>
-                    <a:pt x="1575695" y="183150"/>
-                  </a:lnTo>
-                  <a:lnTo>
-                    <a:pt x="1647318" y="181009"/>
-                  </a:lnTo>
-                  <a:lnTo>
-                    <a:pt x="1718940" y="178863"/>
-                  </a:lnTo>
-                  <a:lnTo>
-                    <a:pt x="1790563" y="176711"/>
-                  </a:lnTo>
-                  <a:lnTo>
-                    <a:pt x="1862185" y="174552"/>
-                  </a:lnTo>
-                  <a:lnTo>
-                    <a:pt x="1933808" y="172388"/>
-                  </a:lnTo>
-                  <a:lnTo>
-                    <a:pt x="2005430" y="170218"/>
-                  </a:lnTo>
-                  <a:lnTo>
-                    <a:pt x="2077053" y="168042"/>
-                  </a:lnTo>
-                  <a:lnTo>
-                    <a:pt x="2148675" y="165861"/>
-                  </a:lnTo>
-                  <a:lnTo>
-                    <a:pt x="2220298" y="163673"/>
-                  </a:lnTo>
-                  <a:lnTo>
-                    <a:pt x="2291920" y="161479"/>
-                  </a:lnTo>
-                  <a:lnTo>
-                    <a:pt x="2363543" y="159279"/>
-                  </a:lnTo>
-                  <a:lnTo>
-                    <a:pt x="2435165" y="157074"/>
-                  </a:lnTo>
-                  <a:lnTo>
-                    <a:pt x="2506788" y="154862"/>
-                  </a:lnTo>
-                  <a:lnTo>
-                    <a:pt x="2578410" y="152644"/>
-                  </a:lnTo>
-                  <a:lnTo>
-                    <a:pt x="2650033" y="150420"/>
-                  </a:lnTo>
-                  <a:lnTo>
-                    <a:pt x="2721655" y="148190"/>
-                  </a:lnTo>
-                  <a:lnTo>
-                    <a:pt x="2793278" y="145954"/>
-                  </a:lnTo>
-                  <a:lnTo>
-                    <a:pt x="2864901" y="143712"/>
-                  </a:lnTo>
-                  <a:lnTo>
-                    <a:pt x="2936523" y="141464"/>
-                  </a:lnTo>
-                  <a:lnTo>
-                    <a:pt x="3008146" y="139209"/>
-                  </a:lnTo>
-                  <a:lnTo>
-                    <a:pt x="3079768" y="136949"/>
-                  </a:lnTo>
-                  <a:lnTo>
-                    <a:pt x="3151391" y="134682"/>
-                  </a:lnTo>
-                  <a:lnTo>
-                    <a:pt x="3223013" y="132409"/>
-                  </a:lnTo>
-                  <a:lnTo>
-                    <a:pt x="3294636" y="130130"/>
-                  </a:lnTo>
-                  <a:lnTo>
-                    <a:pt x="3366258" y="127845"/>
-                  </a:lnTo>
-                  <a:lnTo>
-                    <a:pt x="3437881" y="125553"/>
-                  </a:lnTo>
-                  <a:lnTo>
-                    <a:pt x="3509503" y="123256"/>
-                  </a:lnTo>
-                  <a:lnTo>
-                    <a:pt x="3581126" y="120951"/>
-                  </a:lnTo>
-                  <a:lnTo>
-                    <a:pt x="3652748" y="118641"/>
-                  </a:lnTo>
-                  <a:lnTo>
-                    <a:pt x="3724371" y="116324"/>
-                  </a:lnTo>
-                  <a:lnTo>
-                    <a:pt x="3795993" y="114001"/>
-                  </a:lnTo>
-                  <a:lnTo>
-                    <a:pt x="3867616" y="111672"/>
-                  </a:lnTo>
-                  <a:lnTo>
-                    <a:pt x="3939238" y="109336"/>
-                  </a:lnTo>
-                  <a:lnTo>
-                    <a:pt x="4010861" y="106994"/>
-                  </a:lnTo>
-                  <a:lnTo>
-                    <a:pt x="4082483" y="104646"/>
-                  </a:lnTo>
-                  <a:lnTo>
-                    <a:pt x="4154106" y="102291"/>
-                  </a:lnTo>
-                  <a:lnTo>
-                    <a:pt x="4225729" y="99930"/>
-                  </a:lnTo>
-                  <a:lnTo>
-                    <a:pt x="4297351" y="97562"/>
-                  </a:lnTo>
-                  <a:lnTo>
-                    <a:pt x="4368974" y="95188"/>
-                  </a:lnTo>
-                  <a:lnTo>
-                    <a:pt x="4440596" y="92807"/>
-                  </a:lnTo>
-                  <a:lnTo>
-                    <a:pt x="4512219" y="90420"/>
-                  </a:lnTo>
-                  <a:lnTo>
-                    <a:pt x="4583841" y="88026"/>
-                  </a:lnTo>
-                  <a:lnTo>
-                    <a:pt x="4655464" y="85626"/>
-                  </a:lnTo>
-                  <a:lnTo>
-                    <a:pt x="4727086" y="83219"/>
-                  </a:lnTo>
-                  <a:lnTo>
-                    <a:pt x="4798709" y="80806"/>
-                  </a:lnTo>
-                  <a:lnTo>
-                    <a:pt x="4870331" y="78386"/>
-                  </a:lnTo>
-                  <a:lnTo>
-                    <a:pt x="4941954" y="75959"/>
-                  </a:lnTo>
-                  <a:lnTo>
-                    <a:pt x="5013576" y="73526"/>
-                  </a:lnTo>
-                  <a:lnTo>
-                    <a:pt x="5085199" y="71086"/>
-                  </a:lnTo>
-                  <a:lnTo>
-                    <a:pt x="5156821" y="68640"/>
-                  </a:lnTo>
-                  <a:lnTo>
-                    <a:pt x="5228444" y="66186"/>
-                  </a:lnTo>
-                  <a:lnTo>
-                    <a:pt x="5300066" y="63727"/>
-                  </a:lnTo>
-                  <a:lnTo>
-                    <a:pt x="5371689" y="61260"/>
-                  </a:lnTo>
-                  <a:lnTo>
-                    <a:pt x="5443311" y="58787"/>
-                  </a:lnTo>
-                  <a:lnTo>
-                    <a:pt x="5514934" y="56307"/>
-                  </a:lnTo>
-                  <a:lnTo>
-                    <a:pt x="5586557" y="53820"/>
-                  </a:lnTo>
-                  <a:lnTo>
-                    <a:pt x="5658179" y="51326"/>
-                  </a:lnTo>
-                  <a:lnTo>
-                    <a:pt x="5729802" y="48826"/>
-                  </a:lnTo>
-                  <a:lnTo>
-                    <a:pt x="5801424" y="46319"/>
-                  </a:lnTo>
-                  <a:lnTo>
-                    <a:pt x="5873047" y="43804"/>
-                  </a:lnTo>
-                  <a:lnTo>
-                    <a:pt x="5944669" y="41284"/>
-                  </a:lnTo>
-                  <a:lnTo>
-                    <a:pt x="6016292" y="38756"/>
-                  </a:lnTo>
-                  <a:lnTo>
-                    <a:pt x="6087914" y="36221"/>
-                  </a:lnTo>
-                  <a:lnTo>
-                    <a:pt x="6159537" y="33679"/>
-                  </a:lnTo>
-                  <a:lnTo>
-                    <a:pt x="6231159" y="31131"/>
-                  </a:lnTo>
-                  <a:lnTo>
-                    <a:pt x="6302782" y="28575"/>
-                  </a:lnTo>
-                  <a:lnTo>
-                    <a:pt x="6374404" y="26013"/>
-                  </a:lnTo>
-                  <a:lnTo>
-                    <a:pt x="6446027" y="23443"/>
-                  </a:lnTo>
-                  <a:lnTo>
-                    <a:pt x="6517649" y="20867"/>
-                  </a:lnTo>
-                  <a:lnTo>
-                    <a:pt x="6589272" y="18283"/>
-                  </a:lnTo>
-                  <a:lnTo>
-                    <a:pt x="6660894" y="15692"/>
-                  </a:lnTo>
-                  <a:lnTo>
-                    <a:pt x="6732517" y="13095"/>
-                  </a:lnTo>
-                  <a:lnTo>
-                    <a:pt x="6804139" y="10490"/>
-                  </a:lnTo>
-                  <a:lnTo>
-                    <a:pt x="6875762" y="7878"/>
-                  </a:lnTo>
-                  <a:lnTo>
-                    <a:pt x="6947385" y="5259"/>
-                  </a:lnTo>
-                  <a:lnTo>
-                    <a:pt x="7019007" y="2633"/>
-                  </a:lnTo>
-                  <a:lnTo>
-                    <a:pt x="7090630" y="0"/>
+                    <a:pt x="70547" y="211526"/>
+                  </a:lnTo>
+                  <a:lnTo>
+                    <a:pt x="141094" y="209640"/>
+                  </a:lnTo>
+                  <a:lnTo>
+                    <a:pt x="211641" y="207749"/>
+                  </a:lnTo>
+                  <a:lnTo>
+                    <a:pt x="282188" y="205854"/>
+                  </a:lnTo>
+                  <a:lnTo>
+                    <a:pt x="352735" y="203953"/>
+                  </a:lnTo>
+                  <a:lnTo>
+                    <a:pt x="423283" y="202046"/>
+                  </a:lnTo>
+                  <a:lnTo>
+                    <a:pt x="493830" y="200135"/>
+                  </a:lnTo>
+                  <a:lnTo>
+                    <a:pt x="564377" y="198218"/>
+                  </a:lnTo>
+                  <a:lnTo>
+                    <a:pt x="634924" y="196297"/>
+                  </a:lnTo>
+                  <a:lnTo>
+                    <a:pt x="705471" y="194369"/>
+                  </a:lnTo>
+                  <a:lnTo>
+                    <a:pt x="776018" y="192437"/>
+                  </a:lnTo>
+                  <a:lnTo>
+                    <a:pt x="846566" y="190499"/>
+                  </a:lnTo>
+                  <a:lnTo>
+                    <a:pt x="917113" y="188557"/>
+                  </a:lnTo>
+                  <a:lnTo>
+                    <a:pt x="987660" y="186608"/>
+                  </a:lnTo>
+                  <a:lnTo>
+                    <a:pt x="1058207" y="184655"/>
+                  </a:lnTo>
+                  <a:lnTo>
+                    <a:pt x="1128754" y="182696"/>
+                  </a:lnTo>
+                  <a:lnTo>
+                    <a:pt x="1199301" y="180732"/>
+                  </a:lnTo>
+                  <a:lnTo>
+                    <a:pt x="1269849" y="178762"/>
+                  </a:lnTo>
+                  <a:lnTo>
+                    <a:pt x="1340396" y="176787"/>
+                  </a:lnTo>
+                  <a:lnTo>
+                    <a:pt x="1410943" y="174807"/>
+                  </a:lnTo>
+                  <a:lnTo>
+                    <a:pt x="1481490" y="172821"/>
+                  </a:lnTo>
+                  <a:lnTo>
+                    <a:pt x="1552037" y="170830"/>
+                  </a:lnTo>
+                  <a:lnTo>
+                    <a:pt x="1622584" y="168833"/>
+                  </a:lnTo>
+                  <a:lnTo>
+                    <a:pt x="1693132" y="166831"/>
+                  </a:lnTo>
+                  <a:lnTo>
+                    <a:pt x="1763679" y="164824"/>
+                  </a:lnTo>
+                  <a:lnTo>
+                    <a:pt x="1834226" y="162811"/>
+                  </a:lnTo>
+                  <a:lnTo>
+                    <a:pt x="1904773" y="160792"/>
+                  </a:lnTo>
+                  <a:lnTo>
+                    <a:pt x="1975320" y="158768"/>
+                  </a:lnTo>
+                  <a:lnTo>
+                    <a:pt x="2045868" y="156739"/>
+                  </a:lnTo>
+                  <a:lnTo>
+                    <a:pt x="2116415" y="154704"/>
+                  </a:lnTo>
+                  <a:lnTo>
+                    <a:pt x="2186962" y="152663"/>
+                  </a:lnTo>
+                  <a:lnTo>
+                    <a:pt x="2257509" y="150617"/>
+                  </a:lnTo>
+                  <a:lnTo>
+                    <a:pt x="2328056" y="148565"/>
+                  </a:lnTo>
+                  <a:lnTo>
+                    <a:pt x="2398603" y="146508"/>
+                  </a:lnTo>
+                  <a:lnTo>
+                    <a:pt x="2469151" y="144445"/>
+                  </a:lnTo>
+                  <a:lnTo>
+                    <a:pt x="2539698" y="142376"/>
+                  </a:lnTo>
+                  <a:lnTo>
+                    <a:pt x="2610245" y="140302"/>
+                  </a:lnTo>
+                  <a:lnTo>
+                    <a:pt x="2680792" y="138222"/>
+                  </a:lnTo>
+                  <a:lnTo>
+                    <a:pt x="2751339" y="136136"/>
+                  </a:lnTo>
+                  <a:lnTo>
+                    <a:pt x="2821886" y="134045"/>
+                  </a:lnTo>
+                  <a:lnTo>
+                    <a:pt x="2892434" y="131948"/>
+                  </a:lnTo>
+                  <a:lnTo>
+                    <a:pt x="2962981" y="129845"/>
+                  </a:lnTo>
+                  <a:lnTo>
+                    <a:pt x="3033528" y="127737"/>
+                  </a:lnTo>
+                  <a:lnTo>
+                    <a:pt x="3104075" y="125623"/>
+                  </a:lnTo>
+                  <a:lnTo>
+                    <a:pt x="3174622" y="123503"/>
+                  </a:lnTo>
+                  <a:lnTo>
+                    <a:pt x="3245169" y="121377"/>
+                  </a:lnTo>
+                  <a:lnTo>
+                    <a:pt x="3315717" y="119245"/>
+                  </a:lnTo>
+                  <a:lnTo>
+                    <a:pt x="3386264" y="117108"/>
+                  </a:lnTo>
+                  <a:lnTo>
+                    <a:pt x="3456811" y="114965"/>
+                  </a:lnTo>
+                  <a:lnTo>
+                    <a:pt x="3527358" y="112815"/>
+                  </a:lnTo>
+                  <a:lnTo>
+                    <a:pt x="3597905" y="110661"/>
+                  </a:lnTo>
+                  <a:lnTo>
+                    <a:pt x="3668452" y="108500"/>
+                  </a:lnTo>
+                  <a:lnTo>
+                    <a:pt x="3739000" y="106333"/>
+                  </a:lnTo>
+                  <a:lnTo>
+                    <a:pt x="3809547" y="104160"/>
+                  </a:lnTo>
+                  <a:lnTo>
+                    <a:pt x="3880094" y="101982"/>
+                  </a:lnTo>
+                  <a:lnTo>
+                    <a:pt x="3950641" y="99797"/>
+                  </a:lnTo>
+                  <a:lnTo>
+                    <a:pt x="4021188" y="97607"/>
+                  </a:lnTo>
+                  <a:lnTo>
+                    <a:pt x="4091736" y="95410"/>
+                  </a:lnTo>
+                  <a:lnTo>
+                    <a:pt x="4162283" y="93208"/>
+                  </a:lnTo>
+                  <a:lnTo>
+                    <a:pt x="4232830" y="90999"/>
+                  </a:lnTo>
+                  <a:lnTo>
+                    <a:pt x="4303377" y="88785"/>
+                  </a:lnTo>
+                  <a:lnTo>
+                    <a:pt x="4373924" y="86564"/>
+                  </a:lnTo>
+                  <a:lnTo>
+                    <a:pt x="4444471" y="84338"/>
+                  </a:lnTo>
+                  <a:lnTo>
+                    <a:pt x="4515019" y="82105"/>
+                  </a:lnTo>
+                  <a:lnTo>
+                    <a:pt x="4585566" y="79866"/>
+                  </a:lnTo>
+                  <a:lnTo>
+                    <a:pt x="4656113" y="77621"/>
+                  </a:lnTo>
+                  <a:lnTo>
+                    <a:pt x="4726660" y="75370"/>
+                  </a:lnTo>
+                  <a:lnTo>
+                    <a:pt x="4797207" y="73113"/>
+                  </a:lnTo>
+                  <a:lnTo>
+                    <a:pt x="4867754" y="70850"/>
+                  </a:lnTo>
+                  <a:lnTo>
+                    <a:pt x="4938302" y="68580"/>
+                  </a:lnTo>
+                  <a:lnTo>
+                    <a:pt x="5008849" y="66304"/>
+                  </a:lnTo>
+                  <a:lnTo>
+                    <a:pt x="5079396" y="64022"/>
+                  </a:lnTo>
+                  <a:lnTo>
+                    <a:pt x="5149943" y="61734"/>
+                  </a:lnTo>
+                  <a:lnTo>
+                    <a:pt x="5220490" y="59440"/>
+                  </a:lnTo>
+                  <a:lnTo>
+                    <a:pt x="5291037" y="57139"/>
+                  </a:lnTo>
+                  <a:lnTo>
+                    <a:pt x="5361585" y="54832"/>
+                  </a:lnTo>
+                  <a:lnTo>
+                    <a:pt x="5432132" y="52519"/>
+                  </a:lnTo>
+                  <a:lnTo>
+                    <a:pt x="5502679" y="50200"/>
+                  </a:lnTo>
+                  <a:lnTo>
+                    <a:pt x="5573226" y="47874"/>
+                  </a:lnTo>
+                  <a:lnTo>
+                    <a:pt x="5643773" y="45541"/>
+                  </a:lnTo>
+                  <a:lnTo>
+                    <a:pt x="5714320" y="43203"/>
+                  </a:lnTo>
+                  <a:lnTo>
+                    <a:pt x="5784868" y="40858"/>
+                  </a:lnTo>
+                  <a:lnTo>
+                    <a:pt x="5855415" y="38507"/>
+                  </a:lnTo>
+                  <a:lnTo>
+                    <a:pt x="5925962" y="36149"/>
+                  </a:lnTo>
+                  <a:lnTo>
+                    <a:pt x="5996509" y="33784"/>
+                  </a:lnTo>
+                  <a:lnTo>
+                    <a:pt x="6067056" y="31414"/>
+                  </a:lnTo>
+                  <a:lnTo>
+                    <a:pt x="6137604" y="29037"/>
+                  </a:lnTo>
+                  <a:lnTo>
+                    <a:pt x="6208151" y="26653"/>
+                  </a:lnTo>
+                  <a:lnTo>
+                    <a:pt x="6278698" y="24263"/>
+                  </a:lnTo>
+                  <a:lnTo>
+                    <a:pt x="6349245" y="21866"/>
+                  </a:lnTo>
+                  <a:lnTo>
+                    <a:pt x="6419792" y="19463"/>
+                  </a:lnTo>
+                  <a:lnTo>
+                    <a:pt x="6490339" y="17053"/>
+                  </a:lnTo>
+                  <a:lnTo>
+                    <a:pt x="6560887" y="14637"/>
+                  </a:lnTo>
+                  <a:lnTo>
+                    <a:pt x="6631434" y="12214"/>
+                  </a:lnTo>
+                  <a:lnTo>
+                    <a:pt x="6701981" y="9784"/>
+                  </a:lnTo>
+                  <a:lnTo>
+                    <a:pt x="6772528" y="7348"/>
+                  </a:lnTo>
+                  <a:lnTo>
+                    <a:pt x="6843075" y="4905"/>
+                  </a:lnTo>
+                  <a:lnTo>
+                    <a:pt x="6913622" y="2456"/>
+                  </a:lnTo>
+                  <a:lnTo>
+                    <a:pt x="6984170" y="0"/>
                   </a:lnTo>
                 </a:path>
               </a:pathLst>
@@ -4701,21 +4701,21 @@
           </p:nvSpPr>
           <p:spPr>
             <a:xfrm>
-              <a:off x="817517" y="4727786"/>
-              <a:ext cx="7799693" cy="0"/>
+              <a:off x="915645" y="4684908"/>
+              <a:ext cx="7682587" cy="0"/>
             </a:xfrm>
             <a:custGeom>
               <a:avLst/>
               <a:pathLst>
-                <a:path w="7799693" h="0">
+                <a:path w="7682587" h="0">
                   <a:moveTo>
                     <a:pt x="0" y="0"/>
                   </a:moveTo>
                   <a:lnTo>
-                    <a:pt x="7799693" y="0"/>
-                  </a:lnTo>
-                  <a:lnTo>
-                    <a:pt x="7799693" y="0"/>
+                    <a:pt x="7682587" y="0"/>
+                  </a:lnTo>
+                  <a:lnTo>
+                    <a:pt x="7682587" y="0"/>
                   </a:lnTo>
                 </a:path>
               </a:pathLst>
@@ -4744,15 +4744,15 @@
           </p:nvSpPr>
           <p:spPr>
             <a:xfrm>
-              <a:off x="4222163" y="2073503"/>
-              <a:ext cx="0" cy="3649639"/>
+              <a:off x="4269172" y="2209169"/>
+              <a:ext cx="0" cy="3404141"/>
             </a:xfrm>
             <a:custGeom>
               <a:avLst/>
               <a:pathLst>
-                <a:path w="0" h="3649639">
+                <a:path w="0" h="3404141">
                   <a:moveTo>
-                    <a:pt x="0" y="3649639"/>
+                    <a:pt x="0" y="3404141"/>
                   </a:moveTo>
                   <a:lnTo>
                     <a:pt x="0" y="0"/>
@@ -4787,8 +4787,8 @@
           </p:nvSpPr>
           <p:spPr>
             <a:xfrm>
-              <a:off x="692708" y="5517199"/>
-              <a:ext cx="62179" cy="80101"/>
+              <a:off x="756929" y="5407599"/>
+              <a:ext cx="79004" cy="101955"/>
             </a:xfrm>
             <a:prstGeom prst="rect">
               <a:avLst/>
@@ -4801,7 +4801,7 @@
             <a:p>
               <a:pPr algn="l" marL="0" marR="0" indent="0">
                 <a:lnSpc>
-                  <a:spcPts val="880"/>
+                  <a:spcPts val="1120"/>
                 </a:lnSpc>
                 <a:spcBef>
                   <a:spcPts val="0"/>
@@ -4811,7 +4811,7 @@
                 </a:spcAft>
               </a:pPr>
               <a:r>
-                <a:rPr sz="880">
+                <a:rPr sz="1120">
                   <a:solidFill>
                     <a:srgbClr val="4D4D4D">
                       <a:alpha val="100000"/>
@@ -4833,8 +4833,8 @@
           </p:nvSpPr>
           <p:spPr>
             <a:xfrm>
-              <a:off x="692708" y="4687735"/>
-              <a:ext cx="62179" cy="80101"/>
+              <a:off x="756929" y="4633931"/>
+              <a:ext cx="79004" cy="101955"/>
             </a:xfrm>
             <a:prstGeom prst="rect">
               <a:avLst/>
@@ -4847,7 +4847,7 @@
             <a:p>
               <a:pPr algn="l" marL="0" marR="0" indent="0">
                 <a:lnSpc>
-                  <a:spcPts val="880"/>
+                  <a:spcPts val="1120"/>
                 </a:lnSpc>
                 <a:spcBef>
                   <a:spcPts val="0"/>
@@ -4857,7 +4857,7 @@
                 </a:spcAft>
               </a:pPr>
               <a:r>
-                <a:rPr sz="880">
+                <a:rPr sz="1120">
                   <a:solidFill>
                     <a:srgbClr val="4D4D4D">
                       <a:alpha val="100000"/>
@@ -4879,8 +4879,8 @@
           </p:nvSpPr>
           <p:spPr>
             <a:xfrm>
-              <a:off x="692708" y="3858272"/>
-              <a:ext cx="62179" cy="80101"/>
+              <a:off x="756929" y="3860262"/>
+              <a:ext cx="79004" cy="101955"/>
             </a:xfrm>
             <a:prstGeom prst="rect">
               <a:avLst/>
@@ -4893,7 +4893,7 @@
             <a:p>
               <a:pPr algn="l" marL="0" marR="0" indent="0">
                 <a:lnSpc>
-                  <a:spcPts val="880"/>
+                  <a:spcPts val="1120"/>
                 </a:lnSpc>
                 <a:spcBef>
                   <a:spcPts val="0"/>
@@ -4903,7 +4903,7 @@
                 </a:spcAft>
               </a:pPr>
               <a:r>
-                <a:rPr sz="880">
+                <a:rPr sz="1120">
                   <a:solidFill>
                     <a:srgbClr val="4D4D4D">
                       <a:alpha val="100000"/>
@@ -4925,8 +4925,8 @@
           </p:nvSpPr>
           <p:spPr>
             <a:xfrm>
-              <a:off x="692708" y="3028808"/>
-              <a:ext cx="62179" cy="80101"/>
+              <a:off x="756929" y="3086593"/>
+              <a:ext cx="79004" cy="101955"/>
             </a:xfrm>
             <a:prstGeom prst="rect">
               <a:avLst/>
@@ -4939,7 +4939,7 @@
             <a:p>
               <a:pPr algn="l" marL="0" marR="0" indent="0">
                 <a:lnSpc>
-                  <a:spcPts val="880"/>
+                  <a:spcPts val="1120"/>
                 </a:lnSpc>
                 <a:spcBef>
                   <a:spcPts val="0"/>
@@ -4949,7 +4949,7 @@
                 </a:spcAft>
               </a:pPr>
               <a:r>
-                <a:rPr sz="880">
+                <a:rPr sz="1120">
                   <a:solidFill>
                     <a:srgbClr val="4D4D4D">
                       <a:alpha val="100000"/>
@@ -4971,8 +4971,8 @@
           </p:nvSpPr>
           <p:spPr>
             <a:xfrm>
-              <a:off x="692708" y="2199345"/>
-              <a:ext cx="62179" cy="80101"/>
+              <a:off x="756929" y="2312925"/>
+              <a:ext cx="79004" cy="101955"/>
             </a:xfrm>
             <a:prstGeom prst="rect">
               <a:avLst/>
@@ -4985,7 +4985,7 @@
             <a:p>
               <a:pPr algn="l" marL="0" marR="0" indent="0">
                 <a:lnSpc>
-                  <a:spcPts val="880"/>
+                  <a:spcPts val="1120"/>
                 </a:lnSpc>
                 <a:spcBef>
                   <a:spcPts val="0"/>
@@ -4995,7 +4995,7 @@
                 </a:spcAft>
               </a:pPr>
               <a:r>
-                <a:rPr sz="880">
+                <a:rPr sz="1120">
                   <a:solidFill>
                     <a:srgbClr val="4D4D4D">
                       <a:alpha val="100000"/>
@@ -5017,8 +5017,8 @@
           </p:nvSpPr>
           <p:spPr>
             <a:xfrm>
-              <a:off x="1328653" y="5785772"/>
-              <a:ext cx="223753" cy="80101"/>
+              <a:off x="1387159" y="5693022"/>
+              <a:ext cx="284286" cy="101955"/>
             </a:xfrm>
             <a:prstGeom prst="rect">
               <a:avLst/>
@@ -5031,7 +5031,7 @@
             <a:p>
               <a:pPr algn="l" marL="0" marR="0" indent="0">
                 <a:lnSpc>
-                  <a:spcPts val="880"/>
+                  <a:spcPts val="1120"/>
                 </a:lnSpc>
                 <a:spcBef>
                   <a:spcPts val="0"/>
@@ -5041,7 +5041,7 @@
                 </a:spcAft>
               </a:pPr>
               <a:r>
-                <a:rPr sz="880">
+                <a:rPr sz="1120">
                   <a:solidFill>
                     <a:srgbClr val="4D4D4D">
                       <a:alpha val="100000"/>
@@ -5063,8 +5063,8 @@
           </p:nvSpPr>
           <p:spPr>
             <a:xfrm>
-              <a:off x="2724172" y="5785772"/>
-              <a:ext cx="161574" cy="80101"/>
+              <a:off x="2770605" y="5693022"/>
+              <a:ext cx="205282" cy="101955"/>
             </a:xfrm>
             <a:prstGeom prst="rect">
               <a:avLst/>
@@ -5077,7 +5077,7 @@
             <a:p>
               <a:pPr algn="l" marL="0" marR="0" indent="0">
                 <a:lnSpc>
-                  <a:spcPts val="880"/>
+                  <a:spcPts val="1120"/>
                 </a:lnSpc>
                 <a:spcBef>
                   <a:spcPts val="0"/>
@@ -5087,7 +5087,7 @@
                 </a:spcAft>
               </a:pPr>
               <a:r>
-                <a:rPr sz="880">
+                <a:rPr sz="1120">
                   <a:solidFill>
                     <a:srgbClr val="4D4D4D">
                       <a:alpha val="100000"/>
@@ -5109,8 +5109,8 @@
           </p:nvSpPr>
           <p:spPr>
             <a:xfrm>
-              <a:off x="4138300" y="5785772"/>
-              <a:ext cx="62179" cy="80101"/>
+              <a:off x="4177689" y="5693022"/>
+              <a:ext cx="79004" cy="101955"/>
             </a:xfrm>
             <a:prstGeom prst="rect">
               <a:avLst/>
@@ -5123,7 +5123,7 @@
             <a:p>
               <a:pPr algn="l" marL="0" marR="0" indent="0">
                 <a:lnSpc>
-                  <a:spcPts val="880"/>
+                  <a:spcPts val="1120"/>
                 </a:lnSpc>
                 <a:spcBef>
                   <a:spcPts val="0"/>
@@ -5133,7 +5133,7 @@
                 </a:spcAft>
               </a:pPr>
               <a:r>
-                <a:rPr sz="880">
+                <a:rPr sz="1120">
                   <a:solidFill>
                     <a:srgbClr val="4D4D4D">
                       <a:alpha val="100000"/>
@@ -5155,8 +5155,8 @@
           </p:nvSpPr>
           <p:spPr>
             <a:xfrm>
-              <a:off x="5471640" y="5785772"/>
-              <a:ext cx="124358" cy="80101"/>
+              <a:off x="5482131" y="5693022"/>
+              <a:ext cx="158008" cy="101955"/>
             </a:xfrm>
             <a:prstGeom prst="rect">
               <a:avLst/>
@@ -5169,7 +5169,7 @@
             <a:p>
               <a:pPr algn="l" marL="0" marR="0" indent="0">
                 <a:lnSpc>
-                  <a:spcPts val="880"/>
+                  <a:spcPts val="1120"/>
                 </a:lnSpc>
                 <a:spcBef>
                   <a:spcPts val="0"/>
@@ -5179,7 +5179,7 @@
                 </a:spcAft>
               </a:pPr>
               <a:r>
-                <a:rPr sz="880">
+                <a:rPr sz="1120">
                   <a:solidFill>
                     <a:srgbClr val="4D4D4D">
                       <a:alpha val="100000"/>
@@ -5201,8 +5201,8 @@
           </p:nvSpPr>
           <p:spPr>
             <a:xfrm>
-              <a:off x="6804980" y="5785772"/>
-              <a:ext cx="186537" cy="80101"/>
+              <a:off x="6786573" y="5693022"/>
+              <a:ext cx="237012" cy="101955"/>
             </a:xfrm>
             <a:prstGeom prst="rect">
               <a:avLst/>
@@ -5215,7 +5215,7 @@
             <a:p>
               <a:pPr algn="l" marL="0" marR="0" indent="0">
                 <a:lnSpc>
-                  <a:spcPts val="880"/>
+                  <a:spcPts val="1120"/>
                 </a:lnSpc>
                 <a:spcBef>
                   <a:spcPts val="0"/>
@@ -5225,7 +5225,7 @@
                 </a:spcAft>
               </a:pPr>
               <a:r>
-                <a:rPr sz="880">
+                <a:rPr sz="1120">
                   <a:solidFill>
                     <a:srgbClr val="4D4D4D">
                       <a:alpha val="100000"/>
@@ -5247,8 +5247,8 @@
           </p:nvSpPr>
           <p:spPr>
             <a:xfrm>
-              <a:off x="8169410" y="5785772"/>
-              <a:ext cx="186537" cy="80101"/>
+              <a:off x="8130517" y="5693022"/>
+              <a:ext cx="237012" cy="101955"/>
             </a:xfrm>
             <a:prstGeom prst="rect">
               <a:avLst/>
@@ -5261,7 +5261,7 @@
             <a:p>
               <a:pPr algn="l" marL="0" marR="0" indent="0">
                 <a:lnSpc>
-                  <a:spcPts val="880"/>
+                  <a:spcPts val="1120"/>
                 </a:lnSpc>
                 <a:spcBef>
                   <a:spcPts val="0"/>
@@ -5271,7 +5271,7 @@
                 </a:spcAft>
               </a:pPr>
               <a:r>
-                <a:rPr sz="880">
+                <a:rPr sz="1120">
                   <a:solidFill>
                     <a:srgbClr val="4D4D4D">
                       <a:alpha val="100000"/>
@@ -5293,8 +5293,8 @@
           </p:nvSpPr>
           <p:spPr>
             <a:xfrm>
-              <a:off x="3987536" y="5925448"/>
-              <a:ext cx="1459656" cy="100218"/>
+              <a:off x="3828319" y="5870717"/>
+              <a:ext cx="1857237" cy="127558"/>
             </a:xfrm>
             <a:prstGeom prst="rect">
               <a:avLst/>
@@ -5307,7 +5307,7 @@
             <a:p>
               <a:pPr algn="l" marL="0" marR="0" indent="0">
                 <a:lnSpc>
-                  <a:spcPts val="1100"/>
+                  <a:spcPts val="1400"/>
                 </a:lnSpc>
                 <a:spcBef>
                   <a:spcPts val="0"/>
@@ -5317,7 +5317,7 @@
                 </a:spcAft>
               </a:pPr>
               <a:r>
-                <a:rPr sz="1100">
+                <a:rPr sz="1400">
                   <a:solidFill>
                     <a:srgbClr val="000000">
                       <a:alpha val="100000"/>
@@ -5339,8 +5339,8 @@
           </p:nvSpPr>
           <p:spPr>
             <a:xfrm rot="-5400000">
-              <a:off x="68446" y="3848213"/>
-              <a:ext cx="1016904" cy="100218"/>
+              <a:off x="-37527" y="3847460"/>
+              <a:ext cx="1294150" cy="127558"/>
             </a:xfrm>
             <a:prstGeom prst="rect">
               <a:avLst/>
@@ -5353,7 +5353,7 @@
             <a:p>
               <a:pPr algn="l" marL="0" marR="0" indent="0">
                 <a:lnSpc>
-                  <a:spcPts val="1100"/>
+                  <a:spcPts val="1400"/>
                 </a:lnSpc>
                 <a:spcBef>
                   <a:spcPts val="0"/>
@@ -5363,7 +5363,7 @@
                 </a:spcAft>
               </a:pPr>
               <a:r>
-                <a:rPr sz="1100">
+                <a:rPr sz="1400">
                   <a:solidFill>
                     <a:srgbClr val="000000">
                       <a:alpha val="100000"/>
@@ -5385,8 +5385,8 @@
           </p:nvSpPr>
           <p:spPr>
             <a:xfrm>
-              <a:off x="817517" y="1896563"/>
-              <a:ext cx="4433376" cy="82021"/>
+              <a:off x="915645" y="1977589"/>
+              <a:ext cx="5912784" cy="109362"/>
             </a:xfrm>
             <a:prstGeom prst="rect">
               <a:avLst/>
@@ -5399,7 +5399,7 @@
             <a:p>
               <a:pPr algn="l" marL="0" marR="0" indent="0">
                 <a:lnSpc>
-                  <a:spcPts val="900"/>
+                  <a:spcPts val="1200"/>
                 </a:lnSpc>
                 <a:spcBef>
                   <a:spcPts val="0"/>
@@ -5409,7 +5409,7 @@
                 </a:spcAft>
               </a:pPr>
               <a:r>
-                <a:rPr sz="900">
+                <a:rPr sz="1200">
                   <a:solidFill>
                     <a:srgbClr val="404040">
                       <a:alpha val="100000"/>
@@ -5431,8 +5431,8 @@
           </p:nvSpPr>
           <p:spPr>
             <a:xfrm>
-              <a:off x="817517" y="1669789"/>
-              <a:ext cx="2234793" cy="120152"/>
+              <a:off x="915645" y="1688767"/>
+              <a:ext cx="2845064" cy="153070"/>
             </a:xfrm>
             <a:prstGeom prst="rect">
               <a:avLst/>
@@ -5445,7 +5445,7 @@
             <a:p>
               <a:pPr algn="l" marL="0" marR="0" indent="0">
                 <a:lnSpc>
-                  <a:spcPts val="1320"/>
+                  <a:spcPts val="1680"/>
                 </a:lnSpc>
                 <a:spcBef>
                   <a:spcPts val="0"/>
@@ -5455,7 +5455,7 @@
                 </a:spcAft>
               </a:pPr>
               <a:r>
-                <a:rPr sz="1320">
+                <a:rPr sz="1680">
                   <a:solidFill>
                     <a:srgbClr val="000000">
                       <a:alpha val="100000"/>
